--- a/Course01/slides.pptx
+++ b/Course01/slides.pptx
@@ -46,10 +46,6 @@
     <p:sldId id="281" r:id="rId39"/>
     <p:sldId id="282" r:id="rId40"/>
     <p:sldId id="283" r:id="rId41"/>
-    <p:sldId id="284" r:id="rId42"/>
-    <p:sldId id="285" r:id="rId43"/>
-    <p:sldId id="286" r:id="rId44"/>
-    <p:sldId id="287" r:id="rId45"/>
   </p:sldIdLst>
   <p:sldSz cx="9144000" cy="5143500"/>
   <p:notesSz cx="6858000" cy="9144000"/>
@@ -379,7 +375,7 @@
             <a:pPr indent="0" algn="r">
               <a:buNone/>
             </a:pPr>
-            <a:fld id="{AF36A507-28EF-4D0D-B61D-6877B7CA8B5C}" type="slidenum">
+            <a:fld id="{8A35C828-6167-4868-9986-BEF302E40438}" type="slidenum">
               <a:rPr b="0" lang="en-US" sz="1400" spc="-1" strike="noStrike">
                 <a:solidFill>
                   <a:srgbClr val="000000"/>
@@ -422,7 +418,7 @@
       </p:grpSpPr>
       <p:sp>
         <p:nvSpPr>
-          <p:cNvPr id="138" name="PlaceHolder 1"/>
+          <p:cNvPr id="143" name="PlaceHolder 1"/>
           <p:cNvSpPr>
             <a:spLocks noGrp="1"/>
           </p:cNvSpPr>
@@ -445,7 +441,7 @@
       </p:sp>
       <p:sp>
         <p:nvSpPr>
-          <p:cNvPr id="139" name="PlaceHolder 2"/>
+          <p:cNvPr id="144" name="PlaceHolder 2"/>
           <p:cNvSpPr>
             <a:spLocks noGrp="1"/>
           </p:cNvSpPr>
@@ -500,7 +496,7 @@
       </p:sp>
       <p:sp>
         <p:nvSpPr>
-          <p:cNvPr id="140" name="PlaceHolder 3"/>
+          <p:cNvPr id="145" name="PlaceHolder 3"/>
           <p:cNvSpPr>
             <a:spLocks noGrp="1"/>
           </p:cNvSpPr>
@@ -547,7 +543,7 @@
               </a:lnSpc>
               <a:buNone/>
             </a:pPr>
-            <a:fld id="{6D455615-4F60-49EF-A7CA-B4B177099C7E}" type="slidenum">
+            <a:fld id="{9B3FF344-7684-4D48-8166-208FDD59654F}" type="slidenum">
               <a:rPr b="0" lang="en-US" sz="1200" spc="-1" strike="noStrike">
                 <a:solidFill>
                   <a:schemeClr val="dk1"/>
@@ -555,7 +551,7 @@
                 <a:latin typeface="+mn-lt"/>
                 <a:ea typeface="+mn-ea"/>
               </a:rPr>
-              <a:t>&lt;number&gt;</a:t>
+              <a:t>28</a:t>
             </a:fld>
             <a:endParaRPr b="0" lang="en-US" sz="1200" spc="-1" strike="noStrike">
               <a:solidFill>
@@ -571,7 +567,7 @@
 </p:notes>
 </file>
 
-<file path=ppt/notesSlides/notesSlide14.xml><?xml version="1.0" encoding="utf-8"?>
+<file path=ppt/notesSlides/notesSlide15.xml><?xml version="1.0" encoding="utf-8"?>
 <p:notes xmlns:a="http://schemas.openxmlformats.org/drawingml/2006/main" xmlns:p="http://schemas.openxmlformats.org/presentationml/2006/main" xmlns:r="http://schemas.openxmlformats.org/officeDocument/2006/relationships" xmlns:p14="http://schemas.microsoft.com/office/powerpoint/2010/main" xmlns:p15="http://schemas.microsoft.com/office/powerpoint/2012/main" xmlns:mc="http://schemas.openxmlformats.org/markup-compatibility/2006">
   <p:cSld>
     <p:spTree>
@@ -590,7 +586,7 @@
       </p:grpSpPr>
       <p:sp>
         <p:nvSpPr>
-          <p:cNvPr id="141" name="PlaceHolder 1"/>
+          <p:cNvPr id="146" name="PlaceHolder 1"/>
           <p:cNvSpPr>
             <a:spLocks noGrp="1"/>
           </p:cNvSpPr>
@@ -613,7 +609,7 @@
       </p:sp>
       <p:sp>
         <p:nvSpPr>
-          <p:cNvPr id="142" name="PlaceHolder 2"/>
+          <p:cNvPr id="147" name="PlaceHolder 2"/>
           <p:cNvSpPr>
             <a:spLocks noGrp="1"/>
           </p:cNvSpPr>
@@ -668,7 +664,7 @@
       </p:sp>
       <p:sp>
         <p:nvSpPr>
-          <p:cNvPr id="143" name="PlaceHolder 3"/>
+          <p:cNvPr id="148" name="PlaceHolder 3"/>
           <p:cNvSpPr>
             <a:spLocks noGrp="1"/>
           </p:cNvSpPr>
@@ -715,7 +711,7 @@
               </a:lnSpc>
               <a:buNone/>
             </a:pPr>
-            <a:fld id="{8CE982D3-660F-4BC0-B215-5CC7A62F40E0}" type="slidenum">
+            <a:fld id="{E11D8F11-9E2A-4462-9F5B-9150ED1C05D4}" type="slidenum">
               <a:rPr b="0" lang="en-US" sz="1200" spc="-1" strike="noStrike">
                 <a:solidFill>
                   <a:schemeClr val="dk1"/>
@@ -723,7 +719,7 @@
                 <a:latin typeface="+mn-lt"/>
                 <a:ea typeface="+mn-ea"/>
               </a:rPr>
-              <a:t>&lt;number&gt;</a:t>
+              <a:t>28</a:t>
             </a:fld>
             <a:endParaRPr b="0" lang="en-US" sz="1200" spc="-1" strike="noStrike">
               <a:solidFill>
@@ -739,7 +735,7 @@
 </p:notes>
 </file>
 
-<file path=ppt/notesSlides/notesSlide17.xml><?xml version="1.0" encoding="utf-8"?>
+<file path=ppt/notesSlides/notesSlide18.xml><?xml version="1.0" encoding="utf-8"?>
 <p:notes xmlns:a="http://schemas.openxmlformats.org/drawingml/2006/main" xmlns:p="http://schemas.openxmlformats.org/presentationml/2006/main" xmlns:r="http://schemas.openxmlformats.org/officeDocument/2006/relationships" xmlns:p14="http://schemas.microsoft.com/office/powerpoint/2010/main" xmlns:p15="http://schemas.microsoft.com/office/powerpoint/2012/main" xmlns:mc="http://schemas.openxmlformats.org/markup-compatibility/2006">
   <p:cSld>
     <p:spTree>
@@ -758,7 +754,7 @@
       </p:grpSpPr>
       <p:sp>
         <p:nvSpPr>
-          <p:cNvPr id="144" name="PlaceHolder 1"/>
+          <p:cNvPr id="149" name="PlaceHolder 1"/>
           <p:cNvSpPr>
             <a:spLocks noGrp="1"/>
           </p:cNvSpPr>
@@ -781,7 +777,7 @@
       </p:sp>
       <p:sp>
         <p:nvSpPr>
-          <p:cNvPr id="145" name="PlaceHolder 2"/>
+          <p:cNvPr id="150" name="PlaceHolder 2"/>
           <p:cNvSpPr>
             <a:spLocks noGrp="1"/>
           </p:cNvSpPr>
@@ -836,7 +832,7 @@
       </p:sp>
       <p:sp>
         <p:nvSpPr>
-          <p:cNvPr id="146" name="PlaceHolder 3"/>
+          <p:cNvPr id="151" name="PlaceHolder 3"/>
           <p:cNvSpPr>
             <a:spLocks noGrp="1"/>
           </p:cNvSpPr>
@@ -883,7 +879,883 @@
               </a:lnSpc>
               <a:buNone/>
             </a:pPr>
-            <a:fld id="{9BCC3C05-E0A7-4CD5-B5CE-60CF8521FD4E}" type="slidenum">
+            <a:fld id="{82295A0A-C18E-4456-9EDE-FD828C22302F}" type="slidenum">
+              <a:rPr b="0" lang="en-US" sz="1200" spc="-1" strike="noStrike">
+                <a:solidFill>
+                  <a:schemeClr val="dk1"/>
+                </a:solidFill>
+                <a:latin typeface="+mn-lt"/>
+                <a:ea typeface="+mn-ea"/>
+              </a:rPr>
+              <a:t>28</a:t>
+            </a:fld>
+            <a:endParaRPr b="0" lang="en-US" sz="1200" spc="-1" strike="noStrike">
+              <a:solidFill>
+                <a:srgbClr val="000000"/>
+              </a:solidFill>
+              <a:latin typeface="Times New Roman"/>
+            </a:endParaRPr>
+          </a:p>
+        </p:txBody>
+      </p:sp>
+    </p:spTree>
+  </p:cSld>
+</p:notes>
+</file>
+
+<file path=ppt/notesSlides/notesSlide21.xml><?xml version="1.0" encoding="utf-8"?>
+<p:notes xmlns:a="http://schemas.openxmlformats.org/drawingml/2006/main" xmlns:p="http://schemas.openxmlformats.org/presentationml/2006/main" xmlns:r="http://schemas.openxmlformats.org/officeDocument/2006/relationships" xmlns:p14="http://schemas.microsoft.com/office/powerpoint/2010/main" xmlns:p15="http://schemas.microsoft.com/office/powerpoint/2012/main" xmlns:mc="http://schemas.openxmlformats.org/markup-compatibility/2006">
+  <p:cSld>
+    <p:spTree>
+      <p:nvGrpSpPr>
+        <p:cNvPr id="1" name=""/>
+        <p:cNvGrpSpPr/>
+        <p:nvPr/>
+      </p:nvGrpSpPr>
+      <p:grpSpPr>
+        <a:xfrm>
+          <a:off x="0" y="0"/>
+          <a:ext cx="0" cy="0"/>
+          <a:chOff x="0" y="0"/>
+          <a:chExt cx="0" cy="0"/>
+        </a:xfrm>
+      </p:grpSpPr>
+      <p:sp>
+        <p:nvSpPr>
+          <p:cNvPr id="152" name="PlaceHolder 1"/>
+          <p:cNvSpPr>
+            <a:spLocks noGrp="1"/>
+          </p:cNvSpPr>
+          <p:nvPr>
+            <p:ph type="sldImg"/>
+          </p:nvPr>
+        </p:nvSpPr>
+        <p:spPr>
+          <a:xfrm>
+            <a:off x="685800" y="1143000"/>
+            <a:ext cx="5486040" cy="3085920"/>
+          </a:xfrm>
+          <a:prstGeom prst="rect">
+            <a:avLst/>
+          </a:prstGeom>
+          <a:ln w="0">
+            <a:noFill/>
+          </a:ln>
+        </p:spPr>
+      </p:sp>
+      <p:sp>
+        <p:nvSpPr>
+          <p:cNvPr id="153" name="PlaceHolder 2"/>
+          <p:cNvSpPr>
+            <a:spLocks noGrp="1"/>
+          </p:cNvSpPr>
+          <p:nvPr>
+            <p:ph type="body"/>
+          </p:nvPr>
+        </p:nvSpPr>
+        <p:spPr>
+          <a:xfrm>
+            <a:off x="685800" y="4400640"/>
+            <a:ext cx="5486040" cy="3600000"/>
+          </a:xfrm>
+          <a:prstGeom prst="rect">
+            <a:avLst/>
+          </a:prstGeom>
+          <a:noFill/>
+          <a:ln w="0">
+            <a:noFill/>
+          </a:ln>
+        </p:spPr>
+        <p:txBody>
+          <a:bodyPr lIns="91440" rIns="91440" tIns="45720" bIns="45720" anchor="t">
+            <a:noAutofit/>
+          </a:bodyPr>
+          <a:p>
+            <a:pPr indent="0">
+              <a:lnSpc>
+                <a:spcPct val="100000"/>
+              </a:lnSpc>
+              <a:buNone/>
+              <a:tabLst>
+                <a:tab algn="l" pos="0"/>
+              </a:tabLst>
+            </a:pPr>
+            <a:r>
+              <a:rPr b="0" lang="en-US" sz="2000" spc="-1" strike="noStrike">
+                <a:solidFill>
+                  <a:srgbClr val="000000"/>
+                </a:solidFill>
+                <a:latin typeface="Arial"/>
+              </a:rPr>
+              <a:t>The workhorse: gradient boosting still wins here more often than deep learning. The hard part is never the model, it is deciding what one row </a:t>
+            </a:r>
+            <a:r>
+              <a:rPr b="0" i="1" lang="en-US" sz="2000" spc="-1" strike="noStrike">
+                <a:solidFill>
+                  <a:srgbClr val="000000"/>
+                </a:solidFill>
+                <a:latin typeface="Arial"/>
+              </a:rPr>
+              <a:t>is</a:t>
+            </a:r>
+            <a:r>
+              <a:rPr b="0" lang="en-US" sz="2000" spc="-1" strike="noStrike">
+                <a:solidFill>
+                  <a:srgbClr val="000000"/>
+                </a:solidFill>
+                <a:latin typeface="Arial"/>
+              </a:rPr>
+              <a:t>. Left: Cortejoso et al., Clin Interv Aging (CC BY 3.0). Right: US Bureau of Immigration, 1912 (CC0) — the Titanic dataset you have all seen.</a:t>
+            </a:r>
+            <a:endParaRPr b="0" lang="en-US" sz="2000" spc="-1" strike="noStrike">
+              <a:solidFill>
+                <a:srgbClr val="000000"/>
+              </a:solidFill>
+              <a:latin typeface="Arial"/>
+            </a:endParaRPr>
+          </a:p>
+        </p:txBody>
+      </p:sp>
+      <p:sp>
+        <p:nvSpPr>
+          <p:cNvPr id="154" name="PlaceHolder 3"/>
+          <p:cNvSpPr>
+            <a:spLocks noGrp="1"/>
+          </p:cNvSpPr>
+          <p:nvPr>
+            <p:ph type="sldNum" idx="42"/>
+          </p:nvPr>
+        </p:nvSpPr>
+        <p:spPr>
+          <a:xfrm>
+            <a:off x="3884760" y="8685360"/>
+            <a:ext cx="2971440" cy="458280"/>
+          </a:xfrm>
+          <a:prstGeom prst="rect">
+            <a:avLst/>
+          </a:prstGeom>
+          <a:noFill/>
+          <a:ln w="0">
+            <a:noFill/>
+          </a:ln>
+        </p:spPr>
+        <p:txBody>
+          <a:bodyPr lIns="91440" rIns="91440" tIns="45720" bIns="45720" anchor="b">
+            <a:noAutofit/>
+          </a:bodyPr>
+          <a:lstStyle>
+            <a:lvl1pPr indent="0" algn="r" defTabSz="457200">
+              <a:lnSpc>
+                <a:spcPct val="100000"/>
+              </a:lnSpc>
+              <a:buNone/>
+              <a:defRPr b="0" lang="en-US" sz="1200" spc="-1" strike="noStrike">
+                <a:solidFill>
+                  <a:schemeClr val="dk1"/>
+                </a:solidFill>
+                <a:latin typeface="+mn-lt"/>
+                <a:ea typeface="+mn-ea"/>
+              </a:defRPr>
+            </a:lvl1pPr>
+          </a:lstStyle>
+          <a:p>
+            <a:pPr indent="0" algn="r" defTabSz="457200">
+              <a:lnSpc>
+                <a:spcPct val="100000"/>
+              </a:lnSpc>
+              <a:buNone/>
+            </a:pPr>
+            <a:fld id="{C7DC9C0C-F58C-47A9-A9BC-76CDC8DF2912}" type="slidenum">
+              <a:rPr b="0" lang="en-US" sz="1200" spc="-1" strike="noStrike">
+                <a:solidFill>
+                  <a:schemeClr val="dk1"/>
+                </a:solidFill>
+                <a:latin typeface="+mn-lt"/>
+                <a:ea typeface="+mn-ea"/>
+              </a:rPr>
+              <a:t>28</a:t>
+            </a:fld>
+            <a:endParaRPr b="0" lang="en-US" sz="1200" spc="-1" strike="noStrike">
+              <a:solidFill>
+                <a:srgbClr val="000000"/>
+              </a:solidFill>
+              <a:latin typeface="Times New Roman"/>
+            </a:endParaRPr>
+          </a:p>
+        </p:txBody>
+      </p:sp>
+    </p:spTree>
+  </p:cSld>
+</p:notes>
+</file>
+
+<file path=ppt/notesSlides/notesSlide22.xml><?xml version="1.0" encoding="utf-8"?>
+<p:notes xmlns:a="http://schemas.openxmlformats.org/drawingml/2006/main" xmlns:p="http://schemas.openxmlformats.org/presentationml/2006/main" xmlns:r="http://schemas.openxmlformats.org/officeDocument/2006/relationships" xmlns:p14="http://schemas.microsoft.com/office/powerpoint/2010/main" xmlns:p15="http://schemas.microsoft.com/office/powerpoint/2012/main" xmlns:mc="http://schemas.openxmlformats.org/markup-compatibility/2006">
+  <p:cSld>
+    <p:spTree>
+      <p:nvGrpSpPr>
+        <p:cNvPr id="1" name=""/>
+        <p:cNvGrpSpPr/>
+        <p:nvPr/>
+      </p:nvGrpSpPr>
+      <p:grpSpPr>
+        <a:xfrm>
+          <a:off x="0" y="0"/>
+          <a:ext cx="0" cy="0"/>
+          <a:chOff x="0" y="0"/>
+          <a:chExt cx="0" cy="0"/>
+        </a:xfrm>
+      </p:grpSpPr>
+      <p:sp>
+        <p:nvSpPr>
+          <p:cNvPr id="155" name="PlaceHolder 1"/>
+          <p:cNvSpPr>
+            <a:spLocks noGrp="1"/>
+          </p:cNvSpPr>
+          <p:nvPr>
+            <p:ph type="sldImg"/>
+          </p:nvPr>
+        </p:nvSpPr>
+        <p:spPr>
+          <a:xfrm>
+            <a:off x="685800" y="1143000"/>
+            <a:ext cx="5486040" cy="3085920"/>
+          </a:xfrm>
+          <a:prstGeom prst="rect">
+            <a:avLst/>
+          </a:prstGeom>
+          <a:ln w="0">
+            <a:noFill/>
+          </a:ln>
+        </p:spPr>
+      </p:sp>
+      <p:sp>
+        <p:nvSpPr>
+          <p:cNvPr id="156" name="PlaceHolder 2"/>
+          <p:cNvSpPr>
+            <a:spLocks noGrp="1"/>
+          </p:cNvSpPr>
+          <p:nvPr>
+            <p:ph type="body"/>
+          </p:nvPr>
+        </p:nvSpPr>
+        <p:spPr>
+          <a:xfrm>
+            <a:off x="685800" y="4400640"/>
+            <a:ext cx="5486040" cy="3600000"/>
+          </a:xfrm>
+          <a:prstGeom prst="rect">
+            <a:avLst/>
+          </a:prstGeom>
+          <a:noFill/>
+          <a:ln w="0">
+            <a:noFill/>
+          </a:ln>
+        </p:spPr>
+        <p:txBody>
+          <a:bodyPr lIns="91440" rIns="91440" tIns="45720" bIns="45720" anchor="t">
+            <a:noAutofit/>
+          </a:bodyPr>
+          <a:p>
+            <a:pPr indent="0">
+              <a:lnSpc>
+                <a:spcPct val="100000"/>
+              </a:lnSpc>
+              <a:buNone/>
+              <a:tabLst>
+                <a:tab algn="l" pos="0"/>
+              </a:tabLst>
+            </a:pPr>
+            <a:r>
+              <a:rPr b="0" lang="en-US" sz="2000" spc="-1" strike="noStrike">
+                <a:solidFill>
+                  <a:srgbClr val="000000"/>
+                </a:solidFill>
+                <a:latin typeface="Arial"/>
+              </a:rPr>
+              <a:t>Same object: a regularly sampled sequence. Same toolbox: filtering, spectrograms, 1D convolutions, transformers. The ECG is 500 Hz, the audio 44.1 kHz — three orders of magnitude apart, identical methods. Left: Glenlarson (public domain). Right: Em3rgent0rdr (CC BY-SA 4.0).</a:t>
+            </a:r>
+            <a:endParaRPr b="0" lang="en-US" sz="2000" spc="-1" strike="noStrike">
+              <a:solidFill>
+                <a:srgbClr val="000000"/>
+              </a:solidFill>
+              <a:latin typeface="Arial"/>
+            </a:endParaRPr>
+          </a:p>
+        </p:txBody>
+      </p:sp>
+      <p:sp>
+        <p:nvSpPr>
+          <p:cNvPr id="157" name="PlaceHolder 3"/>
+          <p:cNvSpPr>
+            <a:spLocks noGrp="1"/>
+          </p:cNvSpPr>
+          <p:nvPr>
+            <p:ph type="sldNum" idx="43"/>
+          </p:nvPr>
+        </p:nvSpPr>
+        <p:spPr>
+          <a:xfrm>
+            <a:off x="3884760" y="8685360"/>
+            <a:ext cx="2971440" cy="458280"/>
+          </a:xfrm>
+          <a:prstGeom prst="rect">
+            <a:avLst/>
+          </a:prstGeom>
+          <a:noFill/>
+          <a:ln w="0">
+            <a:noFill/>
+          </a:ln>
+        </p:spPr>
+        <p:txBody>
+          <a:bodyPr lIns="91440" rIns="91440" tIns="45720" bIns="45720" anchor="b">
+            <a:noAutofit/>
+          </a:bodyPr>
+          <a:lstStyle>
+            <a:lvl1pPr indent="0" algn="r" defTabSz="457200">
+              <a:lnSpc>
+                <a:spcPct val="100000"/>
+              </a:lnSpc>
+              <a:buNone/>
+              <a:defRPr b="0" lang="en-US" sz="1200" spc="-1" strike="noStrike">
+                <a:solidFill>
+                  <a:schemeClr val="dk1"/>
+                </a:solidFill>
+                <a:latin typeface="+mn-lt"/>
+                <a:ea typeface="+mn-ea"/>
+              </a:defRPr>
+            </a:lvl1pPr>
+          </a:lstStyle>
+          <a:p>
+            <a:pPr indent="0" algn="r" defTabSz="457200">
+              <a:lnSpc>
+                <a:spcPct val="100000"/>
+              </a:lnSpc>
+              <a:buNone/>
+            </a:pPr>
+            <a:fld id="{26902B70-AD95-4B96-A4D2-D5E9802E05FD}" type="slidenum">
+              <a:rPr b="0" lang="en-US" sz="1200" spc="-1" strike="noStrike">
+                <a:solidFill>
+                  <a:schemeClr val="dk1"/>
+                </a:solidFill>
+                <a:latin typeface="+mn-lt"/>
+                <a:ea typeface="+mn-ea"/>
+              </a:rPr>
+              <a:t>&lt;number&gt;</a:t>
+            </a:fld>
+            <a:endParaRPr b="0" lang="en-US" sz="1200" spc="-1" strike="noStrike">
+              <a:solidFill>
+                <a:srgbClr val="000000"/>
+              </a:solidFill>
+              <a:latin typeface="Times New Roman"/>
+            </a:endParaRPr>
+          </a:p>
+        </p:txBody>
+      </p:sp>
+    </p:spTree>
+  </p:cSld>
+</p:notes>
+</file>
+
+<file path=ppt/notesSlides/notesSlide23.xml><?xml version="1.0" encoding="utf-8"?>
+<p:notes xmlns:a="http://schemas.openxmlformats.org/drawingml/2006/main" xmlns:p="http://schemas.openxmlformats.org/presentationml/2006/main" xmlns:r="http://schemas.openxmlformats.org/officeDocument/2006/relationships" xmlns:p14="http://schemas.microsoft.com/office/powerpoint/2010/main" xmlns:p15="http://schemas.microsoft.com/office/powerpoint/2012/main" xmlns:mc="http://schemas.openxmlformats.org/markup-compatibility/2006">
+  <p:cSld>
+    <p:spTree>
+      <p:nvGrpSpPr>
+        <p:cNvPr id="1" name=""/>
+        <p:cNvGrpSpPr/>
+        <p:nvPr/>
+      </p:nvGrpSpPr>
+      <p:grpSpPr>
+        <a:xfrm>
+          <a:off x="0" y="0"/>
+          <a:ext cx="0" cy="0"/>
+          <a:chOff x="0" y="0"/>
+          <a:chExt cx="0" cy="0"/>
+        </a:xfrm>
+      </p:grpSpPr>
+      <p:sp>
+        <p:nvSpPr>
+          <p:cNvPr id="158" name="PlaceHolder 1"/>
+          <p:cNvSpPr>
+            <a:spLocks noGrp="1"/>
+          </p:cNvSpPr>
+          <p:nvPr>
+            <p:ph type="sldImg"/>
+          </p:nvPr>
+        </p:nvSpPr>
+        <p:spPr>
+          <a:xfrm>
+            <a:off x="685800" y="1143000"/>
+            <a:ext cx="5486040" cy="3085920"/>
+          </a:xfrm>
+          <a:prstGeom prst="rect">
+            <a:avLst/>
+          </a:prstGeom>
+          <a:ln w="0">
+            <a:noFill/>
+          </a:ln>
+        </p:spPr>
+      </p:sp>
+      <p:sp>
+        <p:nvSpPr>
+          <p:cNvPr id="159" name="PlaceHolder 2"/>
+          <p:cNvSpPr>
+            <a:spLocks noGrp="1"/>
+          </p:cNvSpPr>
+          <p:nvPr>
+            <p:ph type="body"/>
+          </p:nvPr>
+        </p:nvSpPr>
+        <p:spPr>
+          <a:xfrm>
+            <a:off x="685800" y="4400640"/>
+            <a:ext cx="5486040" cy="3600000"/>
+          </a:xfrm>
+          <a:prstGeom prst="rect">
+            <a:avLst/>
+          </a:prstGeom>
+          <a:noFill/>
+          <a:ln w="0">
+            <a:noFill/>
+          </a:ln>
+        </p:spPr>
+        <p:txBody>
+          <a:bodyPr lIns="91440" rIns="91440" tIns="45720" bIns="45720" anchor="t">
+            <a:noAutofit/>
+          </a:bodyPr>
+          <a:p>
+            <a:pPr indent="0">
+              <a:lnSpc>
+                <a:spcPct val="100000"/>
+              </a:lnSpc>
+              <a:buNone/>
+              <a:tabLst>
+                <a:tab algn="l" pos="0"/>
+              </a:tabLst>
+            </a:pPr>
+            <a:r>
+              <a:rPr b="0" lang="en-US" sz="2000" spc="-1" strike="noStrike">
+                <a:solidFill>
+                  <a:srgbClr val="000000"/>
+                </a:solidFill>
+                <a:latin typeface="Arial"/>
+              </a:rPr>
+              <a:t>Both are arrays of numbers on a grid, and a CNN or a ViT does not know the difference. What differs is the </a:t>
+            </a:r>
+            <a:r>
+              <a:rPr b="0" i="1" lang="en-US" sz="2000" spc="-1" strike="noStrike">
+                <a:solidFill>
+                  <a:srgbClr val="000000"/>
+                </a:solidFill>
+                <a:latin typeface="Arial"/>
+              </a:rPr>
+              <a:t>label</a:t>
+            </a:r>
+            <a:r>
+              <a:rPr b="0" lang="en-US" sz="2000" spc="-1" strike="noStrike">
+                <a:solidFill>
+                  <a:srgbClr val="000000"/>
+                </a:solidFill>
+                <a:latin typeface="Arial"/>
+              </a:rPr>
+              <a:t>: “pneumonia” is one radiologist’s opinion, “wheat” is ground truth you can go and check. Left: Mikael Häggström (CC0). Right: NASA/ASTER, Kansas (public domain).</a:t>
+            </a:r>
+            <a:endParaRPr b="0" lang="en-US" sz="2000" spc="-1" strike="noStrike">
+              <a:solidFill>
+                <a:srgbClr val="000000"/>
+              </a:solidFill>
+              <a:latin typeface="Arial"/>
+            </a:endParaRPr>
+          </a:p>
+        </p:txBody>
+      </p:sp>
+      <p:sp>
+        <p:nvSpPr>
+          <p:cNvPr id="160" name="PlaceHolder 3"/>
+          <p:cNvSpPr>
+            <a:spLocks noGrp="1"/>
+          </p:cNvSpPr>
+          <p:nvPr>
+            <p:ph type="sldNum" idx="44"/>
+          </p:nvPr>
+        </p:nvSpPr>
+        <p:spPr>
+          <a:xfrm>
+            <a:off x="3884760" y="8685360"/>
+            <a:ext cx="2971440" cy="458280"/>
+          </a:xfrm>
+          <a:prstGeom prst="rect">
+            <a:avLst/>
+          </a:prstGeom>
+          <a:noFill/>
+          <a:ln w="0">
+            <a:noFill/>
+          </a:ln>
+        </p:spPr>
+        <p:txBody>
+          <a:bodyPr lIns="91440" rIns="91440" tIns="45720" bIns="45720" anchor="b">
+            <a:noAutofit/>
+          </a:bodyPr>
+          <a:lstStyle>
+            <a:lvl1pPr indent="0" algn="r" defTabSz="457200">
+              <a:lnSpc>
+                <a:spcPct val="100000"/>
+              </a:lnSpc>
+              <a:buNone/>
+              <a:defRPr b="0" lang="en-US" sz="1200" spc="-1" strike="noStrike">
+                <a:solidFill>
+                  <a:schemeClr val="dk1"/>
+                </a:solidFill>
+                <a:latin typeface="+mn-lt"/>
+                <a:ea typeface="+mn-ea"/>
+              </a:defRPr>
+            </a:lvl1pPr>
+          </a:lstStyle>
+          <a:p>
+            <a:pPr indent="0" algn="r" defTabSz="457200">
+              <a:lnSpc>
+                <a:spcPct val="100000"/>
+              </a:lnSpc>
+              <a:buNone/>
+            </a:pPr>
+            <a:fld id="{17019831-1725-4257-BAD6-37B665EAF882}" type="slidenum">
+              <a:rPr b="0" lang="en-US" sz="1200" spc="-1" strike="noStrike">
+                <a:solidFill>
+                  <a:schemeClr val="dk1"/>
+                </a:solidFill>
+                <a:latin typeface="+mn-lt"/>
+                <a:ea typeface="+mn-ea"/>
+              </a:rPr>
+              <a:t>&lt;number&gt;</a:t>
+            </a:fld>
+            <a:endParaRPr b="0" lang="en-US" sz="1200" spc="-1" strike="noStrike">
+              <a:solidFill>
+                <a:srgbClr val="000000"/>
+              </a:solidFill>
+              <a:latin typeface="Times New Roman"/>
+            </a:endParaRPr>
+          </a:p>
+        </p:txBody>
+      </p:sp>
+    </p:spTree>
+  </p:cSld>
+</p:notes>
+</file>
+
+<file path=ppt/notesSlides/notesSlide24.xml><?xml version="1.0" encoding="utf-8"?>
+<p:notes xmlns:a="http://schemas.openxmlformats.org/drawingml/2006/main" xmlns:p="http://schemas.openxmlformats.org/presentationml/2006/main" xmlns:r="http://schemas.openxmlformats.org/officeDocument/2006/relationships" xmlns:p14="http://schemas.microsoft.com/office/powerpoint/2010/main" xmlns:p15="http://schemas.microsoft.com/office/powerpoint/2012/main" xmlns:mc="http://schemas.openxmlformats.org/markup-compatibility/2006">
+  <p:cSld>
+    <p:spTree>
+      <p:nvGrpSpPr>
+        <p:cNvPr id="1" name=""/>
+        <p:cNvGrpSpPr/>
+        <p:nvPr/>
+      </p:nvGrpSpPr>
+      <p:grpSpPr>
+        <a:xfrm>
+          <a:off x="0" y="0"/>
+          <a:ext cx="0" cy="0"/>
+          <a:chOff x="0" y="0"/>
+          <a:chExt cx="0" cy="0"/>
+        </a:xfrm>
+      </p:grpSpPr>
+      <p:sp>
+        <p:nvSpPr>
+          <p:cNvPr id="161" name="PlaceHolder 1"/>
+          <p:cNvSpPr>
+            <a:spLocks noGrp="1"/>
+          </p:cNvSpPr>
+          <p:nvPr>
+            <p:ph type="sldImg"/>
+          </p:nvPr>
+        </p:nvSpPr>
+        <p:spPr>
+          <a:xfrm>
+            <a:off x="685800" y="1143000"/>
+            <a:ext cx="5486040" cy="3085920"/>
+          </a:xfrm>
+          <a:prstGeom prst="rect">
+            <a:avLst/>
+          </a:prstGeom>
+          <a:ln w="0">
+            <a:noFill/>
+          </a:ln>
+        </p:spPr>
+      </p:sp>
+      <p:sp>
+        <p:nvSpPr>
+          <p:cNvPr id="162" name="PlaceHolder 2"/>
+          <p:cNvSpPr>
+            <a:spLocks noGrp="1"/>
+          </p:cNvSpPr>
+          <p:nvPr>
+            <p:ph type="body"/>
+          </p:nvPr>
+        </p:nvSpPr>
+        <p:spPr>
+          <a:xfrm>
+            <a:off x="685800" y="4400640"/>
+            <a:ext cx="5486040" cy="3600000"/>
+          </a:xfrm>
+          <a:prstGeom prst="rect">
+            <a:avLst/>
+          </a:prstGeom>
+          <a:noFill/>
+          <a:ln w="0">
+            <a:noFill/>
+          </a:ln>
+        </p:spPr>
+        <p:txBody>
+          <a:bodyPr lIns="91440" rIns="91440" tIns="45720" bIns="45720" anchor="t">
+            <a:noAutofit/>
+          </a:bodyPr>
+          <a:p>
+            <a:pPr indent="0">
+              <a:lnSpc>
+                <a:spcPct val="100000"/>
+              </a:lnSpc>
+              <a:buNone/>
+              <a:tabLst>
+                <a:tab algn="l" pos="0"/>
+              </a:tabLst>
+            </a:pPr>
+            <a:r>
+              <a:rPr b="0" lang="en-US" sz="2000" spc="-1" strike="noStrike">
+                <a:solidFill>
+                  <a:srgbClr val="000000"/>
+                </a:solidFill>
+                <a:latin typeface="Arial"/>
+              </a:rPr>
+              <a:t>The third dimension costs you: memory grows cubically, labelled data gets scarcer, and pretrained weights are far rarer than in 2D. Note the two are not the same kind of 3D — the CT is a dense voxel grid, the point cloud is sparse and unordered. Left: Mikael Häggström (CC0). Right: Daniel L. Lu, San Francisco (CC BY 4.0).</a:t>
+            </a:r>
+            <a:endParaRPr b="0" lang="en-US" sz="2000" spc="-1" strike="noStrike">
+              <a:solidFill>
+                <a:srgbClr val="000000"/>
+              </a:solidFill>
+              <a:latin typeface="Arial"/>
+            </a:endParaRPr>
+          </a:p>
+        </p:txBody>
+      </p:sp>
+      <p:sp>
+        <p:nvSpPr>
+          <p:cNvPr id="163" name="PlaceHolder 3"/>
+          <p:cNvSpPr>
+            <a:spLocks noGrp="1"/>
+          </p:cNvSpPr>
+          <p:nvPr>
+            <p:ph type="sldNum" idx="45"/>
+          </p:nvPr>
+        </p:nvSpPr>
+        <p:spPr>
+          <a:xfrm>
+            <a:off x="3884760" y="8685360"/>
+            <a:ext cx="2971440" cy="458280"/>
+          </a:xfrm>
+          <a:prstGeom prst="rect">
+            <a:avLst/>
+          </a:prstGeom>
+          <a:noFill/>
+          <a:ln w="0">
+            <a:noFill/>
+          </a:ln>
+        </p:spPr>
+        <p:txBody>
+          <a:bodyPr lIns="91440" rIns="91440" tIns="45720" bIns="45720" anchor="b">
+            <a:noAutofit/>
+          </a:bodyPr>
+          <a:lstStyle>
+            <a:lvl1pPr indent="0" algn="r" defTabSz="457200">
+              <a:lnSpc>
+                <a:spcPct val="100000"/>
+              </a:lnSpc>
+              <a:buNone/>
+              <a:defRPr b="0" lang="en-US" sz="1200" spc="-1" strike="noStrike">
+                <a:solidFill>
+                  <a:schemeClr val="dk1"/>
+                </a:solidFill>
+                <a:latin typeface="+mn-lt"/>
+                <a:ea typeface="+mn-ea"/>
+              </a:defRPr>
+            </a:lvl1pPr>
+          </a:lstStyle>
+          <a:p>
+            <a:pPr indent="0" algn="r" defTabSz="457200">
+              <a:lnSpc>
+                <a:spcPct val="100000"/>
+              </a:lnSpc>
+              <a:buNone/>
+            </a:pPr>
+            <a:fld id="{D02D4A5B-2D90-4F14-88FB-C9838D2182E9}" type="slidenum">
+              <a:rPr b="0" lang="en-US" sz="1200" spc="-1" strike="noStrike">
+                <a:solidFill>
+                  <a:schemeClr val="dk1"/>
+                </a:solidFill>
+                <a:latin typeface="+mn-lt"/>
+                <a:ea typeface="+mn-ea"/>
+              </a:rPr>
+              <a:t>&lt;number&gt;</a:t>
+            </a:fld>
+            <a:endParaRPr b="0" lang="en-US" sz="1200" spc="-1" strike="noStrike">
+              <a:solidFill>
+                <a:srgbClr val="000000"/>
+              </a:solidFill>
+              <a:latin typeface="Times New Roman"/>
+            </a:endParaRPr>
+          </a:p>
+        </p:txBody>
+      </p:sp>
+    </p:spTree>
+  </p:cSld>
+</p:notes>
+</file>
+
+<file path=ppt/notesSlides/notesSlide25.xml><?xml version="1.0" encoding="utf-8"?>
+<p:notes xmlns:a="http://schemas.openxmlformats.org/drawingml/2006/main" xmlns:p="http://schemas.openxmlformats.org/presentationml/2006/main" xmlns:r="http://schemas.openxmlformats.org/officeDocument/2006/relationships" xmlns:p14="http://schemas.microsoft.com/office/powerpoint/2010/main" xmlns:p15="http://schemas.microsoft.com/office/powerpoint/2012/main" xmlns:mc="http://schemas.openxmlformats.org/markup-compatibility/2006">
+  <p:cSld>
+    <p:spTree>
+      <p:nvGrpSpPr>
+        <p:cNvPr id="1" name=""/>
+        <p:cNvGrpSpPr/>
+        <p:nvPr/>
+      </p:nvGrpSpPr>
+      <p:grpSpPr>
+        <a:xfrm>
+          <a:off x="0" y="0"/>
+          <a:ext cx="0" cy="0"/>
+          <a:chOff x="0" y="0"/>
+          <a:chExt cx="0" cy="0"/>
+        </a:xfrm>
+      </p:grpSpPr>
+      <p:sp>
+        <p:nvSpPr>
+          <p:cNvPr id="164" name="PlaceHolder 1"/>
+          <p:cNvSpPr>
+            <a:spLocks noGrp="1"/>
+          </p:cNvSpPr>
+          <p:nvPr>
+            <p:ph type="sldImg"/>
+          </p:nvPr>
+        </p:nvSpPr>
+        <p:spPr>
+          <a:xfrm>
+            <a:off x="685800" y="1143000"/>
+            <a:ext cx="5486040" cy="3085920"/>
+          </a:xfrm>
+          <a:prstGeom prst="rect">
+            <a:avLst/>
+          </a:prstGeom>
+          <a:ln w="0">
+            <a:noFill/>
+          </a:ln>
+        </p:spPr>
+      </p:sp>
+      <p:sp>
+        <p:nvSpPr>
+          <p:cNvPr id="165" name="PlaceHolder 2"/>
+          <p:cNvSpPr>
+            <a:spLocks noGrp="1"/>
+          </p:cNvSpPr>
+          <p:nvPr>
+            <p:ph type="body"/>
+          </p:nvPr>
+        </p:nvSpPr>
+        <p:spPr>
+          <a:xfrm>
+            <a:off x="685800" y="4400640"/>
+            <a:ext cx="5486040" cy="3600000"/>
+          </a:xfrm>
+          <a:prstGeom prst="rect">
+            <a:avLst/>
+          </a:prstGeom>
+          <a:noFill/>
+          <a:ln w="0">
+            <a:noFill/>
+          </a:ln>
+        </p:spPr>
+        <p:txBody>
+          <a:bodyPr lIns="91440" rIns="91440" tIns="45720" bIns="45720" anchor="t">
+            <a:noAutofit/>
+          </a:bodyPr>
+          <a:p>
+            <a:pPr indent="0">
+              <a:lnSpc>
+                <a:spcPct val="100000"/>
+              </a:lnSpc>
+              <a:buNone/>
+              <a:tabLst>
+                <a:tab algn="l" pos="0"/>
+              </a:tabLst>
+            </a:pPr>
+            <a:r>
+              <a:rPr b="0" lang="en-US" sz="2000" spc="-1" strike="noStrike">
+                <a:solidFill>
+                  <a:srgbClr val="000000"/>
+                </a:solidFill>
+                <a:latin typeface="Arial"/>
+              </a:rPr>
+              <a:t>Clinical text is its own dialect: abbreviations, negation (“no evidence of hydrocephalus”), copy-paste, and dictation errors. A model trained on newspapers reads “PT” as a person and not as prothrombin time. Weeks 11–12. Left: Tu et al., MultiMedBench (CC BY 4.0). Right: The Echo, 1920 (public domain).</a:t>
+            </a:r>
+            <a:endParaRPr b="0" lang="en-US" sz="2000" spc="-1" strike="noStrike">
+              <a:solidFill>
+                <a:srgbClr val="000000"/>
+              </a:solidFill>
+              <a:latin typeface="Arial"/>
+            </a:endParaRPr>
+          </a:p>
+        </p:txBody>
+      </p:sp>
+      <p:sp>
+        <p:nvSpPr>
+          <p:cNvPr id="166" name="PlaceHolder 3"/>
+          <p:cNvSpPr>
+            <a:spLocks noGrp="1"/>
+          </p:cNvSpPr>
+          <p:nvPr>
+            <p:ph type="sldNum" idx="46"/>
+          </p:nvPr>
+        </p:nvSpPr>
+        <p:spPr>
+          <a:xfrm>
+            <a:off x="3884760" y="8685360"/>
+            <a:ext cx="2971440" cy="458280"/>
+          </a:xfrm>
+          <a:prstGeom prst="rect">
+            <a:avLst/>
+          </a:prstGeom>
+          <a:noFill/>
+          <a:ln w="0">
+            <a:noFill/>
+          </a:ln>
+        </p:spPr>
+        <p:txBody>
+          <a:bodyPr lIns="91440" rIns="91440" tIns="45720" bIns="45720" anchor="b">
+            <a:noAutofit/>
+          </a:bodyPr>
+          <a:lstStyle>
+            <a:lvl1pPr indent="0" algn="r" defTabSz="457200">
+              <a:lnSpc>
+                <a:spcPct val="100000"/>
+              </a:lnSpc>
+              <a:buNone/>
+              <a:defRPr b="0" lang="en-US" sz="1200" spc="-1" strike="noStrike">
+                <a:solidFill>
+                  <a:schemeClr val="dk1"/>
+                </a:solidFill>
+                <a:latin typeface="+mn-lt"/>
+                <a:ea typeface="+mn-ea"/>
+              </a:defRPr>
+            </a:lvl1pPr>
+          </a:lstStyle>
+          <a:p>
+            <a:pPr indent="0" algn="r" defTabSz="457200">
+              <a:lnSpc>
+                <a:spcPct val="100000"/>
+              </a:lnSpc>
+              <a:buNone/>
+            </a:pPr>
+            <a:fld id="{5B70C025-A014-4042-BC8F-135F0FA82354}" type="slidenum">
               <a:rPr b="0" lang="en-US" sz="1200" spc="-1" strike="noStrike">
                 <a:solidFill>
                   <a:schemeClr val="dk1"/>
@@ -926,7 +1798,7 @@
       </p:grpSpPr>
       <p:sp>
         <p:nvSpPr>
-          <p:cNvPr id="135" name="PlaceHolder 1"/>
+          <p:cNvPr id="140" name="PlaceHolder 1"/>
           <p:cNvSpPr>
             <a:spLocks noGrp="1"/>
           </p:cNvSpPr>
@@ -949,7 +1821,7 @@
       </p:sp>
       <p:sp>
         <p:nvSpPr>
-          <p:cNvPr id="136" name="PlaceHolder 2"/>
+          <p:cNvPr id="141" name="PlaceHolder 2"/>
           <p:cNvSpPr>
             <a:spLocks noGrp="1"/>
           </p:cNvSpPr>
@@ -1004,7 +1876,7 @@
       </p:sp>
       <p:sp>
         <p:nvSpPr>
-          <p:cNvPr id="137" name="PlaceHolder 3"/>
+          <p:cNvPr id="142" name="PlaceHolder 3"/>
           <p:cNvSpPr>
             <a:spLocks noGrp="1"/>
           </p:cNvSpPr>
@@ -1051,7 +1923,7 @@
               </a:lnSpc>
               <a:buNone/>
             </a:pPr>
-            <a:fld id="{3D95342D-C575-44D0-B084-15551827CBA0}" type="slidenum">
+            <a:fld id="{CBF49525-DB27-4D8A-AC1F-B46DC86DEFD1}" type="slidenum">
               <a:rPr b="0" lang="en-US" sz="1200" spc="-1" strike="noStrike">
                 <a:solidFill>
                   <a:schemeClr val="dk1"/>
@@ -1059,7 +1931,7 @@
                 <a:latin typeface="+mn-lt"/>
                 <a:ea typeface="+mn-ea"/>
               </a:rPr>
-              <a:t>&lt;number&gt;</a:t>
+              <a:t>28</a:t>
             </a:fld>
             <a:endParaRPr b="0" lang="en-US" sz="1200" spc="-1" strike="noStrike">
               <a:solidFill>
@@ -1206,7 +2078,7 @@
         <p:txBody>
           <a:bodyPr/>
           <a:p>
-            <a:fld id="{80D36C9C-D9AC-481D-A8CC-BAFF5F7448ED}" type="slidenum">
+            <a:fld id="{182891C5-FFC6-48C8-9731-23749D729112}" type="slidenum">
               <a:t>&lt;#&gt;</a:t>
             </a:fld>
           </a:p>
@@ -1289,7 +2161,7 @@
         <p:txBody>
           <a:bodyPr/>
           <a:p>
-            <a:fld id="{0F968CF7-6DF6-49EE-AE15-790033669108}" type="slidenum">
+            <a:fld id="{A2400209-3C03-4101-9F8F-EB0BDFFE7D26}" type="slidenum">
               <a:t>&lt;#&gt;</a:t>
             </a:fld>
           </a:p>
@@ -1372,7 +2244,7 @@
         <p:txBody>
           <a:bodyPr/>
           <a:p>
-            <a:fld id="{5FBB04A6-C266-4B9C-A39B-F9B35A9FA6AA}" type="slidenum">
+            <a:fld id="{4EFA3ED2-8F22-4BCE-9D2A-7BFAA79739BC}" type="slidenum">
               <a:t>&lt;#&gt;</a:t>
             </a:fld>
           </a:p>
@@ -1455,7 +2327,7 @@
         <p:txBody>
           <a:bodyPr/>
           <a:p>
-            <a:fld id="{D45AB242-D4E4-4E87-BFBB-CCC8F5E0BB72}" type="slidenum">
+            <a:fld id="{629556CC-DCC0-4DEF-90FC-A7780DBF2FB5}" type="slidenum">
               <a:t>&lt;#&gt;</a:t>
             </a:fld>
           </a:p>
@@ -1538,7 +2410,7 @@
         <p:txBody>
           <a:bodyPr/>
           <a:p>
-            <a:fld id="{08881CB6-E32D-4279-9B12-945CC1755650}" type="slidenum">
+            <a:fld id="{16D373E1-788A-41C0-AE94-4C4991446EAD}" type="slidenum">
               <a:t>&lt;#&gt;</a:t>
             </a:fld>
           </a:p>
@@ -1704,7 +2576,7 @@
         <p:txBody>
           <a:bodyPr/>
           <a:p>
-            <a:fld id="{A64ACF1A-B5C4-43CA-8F6D-A5FA22AC3CDE}" type="slidenum">
+            <a:fld id="{4AC46336-0C96-498F-AF01-05276E972CE0}" type="slidenum">
               <a:t>&lt;#&gt;</a:t>
             </a:fld>
           </a:p>
@@ -1787,7 +2659,7 @@
         <p:txBody>
           <a:bodyPr/>
           <a:p>
-            <a:fld id="{614DA31F-808A-4E4C-B195-B4433CD81A82}" type="slidenum">
+            <a:fld id="{BC27C7CB-9350-45BF-8DB9-269464C47148}" type="slidenum">
               <a:t>&lt;#&gt;</a:t>
             </a:fld>
           </a:p>
@@ -1996,7 +2868,7 @@
         <p:txBody>
           <a:bodyPr/>
           <a:p>
-            <a:fld id="{54B441C5-AC3B-4354-83FC-1710239BC236}" type="slidenum">
+            <a:fld id="{5B8B2468-B86F-40F9-8834-C7EDF875BE33}" type="slidenum">
               <a:t>&lt;#&gt;</a:t>
             </a:fld>
           </a:p>
@@ -2079,7 +2951,7 @@
         <p:txBody>
           <a:bodyPr/>
           <a:p>
-            <a:fld id="{6F1C94C2-AB3D-401D-8C53-8EACFD29BE2A}" type="slidenum">
+            <a:fld id="{E538B380-07BD-4B76-9858-A8152A4B03FA}" type="slidenum">
               <a:t>&lt;#&gt;</a:t>
             </a:fld>
           </a:p>
@@ -2202,7 +3074,7 @@
         <p:txBody>
           <a:bodyPr/>
           <a:p>
-            <a:fld id="{FF8F1927-749E-4B7D-81D6-B4BBC77A9978}" type="slidenum">
+            <a:fld id="{3A1BB795-0F11-4EC1-89E4-BFCE42CEE1DA}" type="slidenum">
               <a:t>&lt;#&gt;</a:t>
             </a:fld>
           </a:p>
@@ -2285,7 +3157,7 @@
         <p:txBody>
           <a:bodyPr/>
           <a:p>
-            <a:fld id="{85AB7922-A6D8-49AD-A22B-10FA0A46F378}" type="slidenum">
+            <a:fld id="{CD3C5A8E-7269-4709-9677-2B6BFCA7FE0F}" type="slidenum">
               <a:t>&lt;#&gt;</a:t>
             </a:fld>
           </a:p>
@@ -2382,25 +3254,7 @@
                 </a:solidFill>
                 <a:latin typeface="Calibri"/>
               </a:rPr>
-              <a:t>Click to edit </a:t>
-            </a:r>
-            <a:r>
-              <a:rPr b="0" lang="en-US" sz="3300" spc="-1" strike="noStrike">
-                <a:solidFill>
-                  <a:schemeClr val="dk1"/>
-                </a:solidFill>
-                <a:latin typeface="Calibri"/>
-              </a:rPr>
-              <a:t>Master title </a:t>
-            </a:r>
-            <a:r>
-              <a:rPr b="0" lang="en-US" sz="3300" spc="-1" strike="noStrike">
-                <a:solidFill>
-                  <a:schemeClr val="dk1"/>
-                </a:solidFill>
-                <a:latin typeface="Calibri"/>
-              </a:rPr>
-              <a:t>style</a:t>
+              <a:t>Click to edit Master title style</a:t>
             </a:r>
             <a:endParaRPr b="0" lang="en-US" sz="3300" spc="-1" strike="noStrike">
               <a:solidFill>
@@ -2470,7 +3324,7 @@
                 </a:solidFill>
                 <a:latin typeface="Calibri"/>
               </a:rPr>
-              <a:t>&lt;date/time&gt;</a:t>
+              <a:t> </a:t>
             </a:r>
             <a:endParaRPr b="0" lang="en-US" sz="900" spc="-1" strike="noStrike">
               <a:solidFill>
@@ -2530,7 +3384,7 @@
                 </a:solidFill>
                 <a:latin typeface="Times New Roman"/>
               </a:rPr>
-              <a:t>&lt;footer&gt;</a:t>
+              <a:t> </a:t>
             </a:r>
             <a:endParaRPr b="0" lang="en-US" sz="1400" spc="-1" strike="noStrike">
               <a:solidFill>
@@ -2591,7 +3445,7 @@
               </a:lnSpc>
               <a:buNone/>
             </a:pPr>
-            <a:fld id="{6F309BF0-A860-4C00-80F9-8135B77A54D7}" type="slidenum">
+            <a:fld id="{AA93E0BF-CB50-46BC-845E-6C26F3BE1E29}" type="slidenum">
               <a:rPr b="0" lang="en-US" sz="900" spc="-1" strike="noStrike">
                 <a:solidFill>
                   <a:schemeClr val="dk1">
@@ -2600,7 +3454,7 @@
                 </a:solidFill>
                 <a:latin typeface="Calibri"/>
               </a:rPr>
-              <a:t>&lt;number&gt;</a:t>
+              <a:t>27</a:t>
             </a:fld>
             <a:endParaRPr b="0" lang="en-US" sz="900" spc="-1" strike="noStrike">
               <a:solidFill>
@@ -3338,7 +4192,7 @@
               </a:lnSpc>
               <a:buNone/>
             </a:pPr>
-            <a:fld id="{4792C8DA-0ABE-4CD3-9A5E-12F5C3DBC83C}" type="slidenum">
+            <a:fld id="{9173E0DC-865C-44C5-AFF6-4F82CF074B41}" type="slidenum">
               <a:rPr b="0" lang="en-US" sz="900" spc="-1" strike="noStrike">
                 <a:solidFill>
                   <a:schemeClr val="dk1">
@@ -3906,7 +4760,7 @@
               </a:lnSpc>
               <a:buNone/>
             </a:pPr>
-            <a:fld id="{C85A84D2-E632-4F9E-A5E8-2BE0344FFDA3}" type="slidenum">
+            <a:fld id="{B111A2AF-B435-42BC-A20F-FE838506B3FC}" type="slidenum">
               <a:rPr b="0" lang="en-US" sz="900" spc="-1" strike="noStrike">
                 <a:solidFill>
                   <a:schemeClr val="dk1">
@@ -4000,25 +4854,7 @@
                 </a:solidFill>
                 <a:latin typeface="Calibri"/>
               </a:rPr>
-              <a:t>Click to edit </a:t>
-            </a:r>
-            <a:r>
-              <a:rPr b="0" lang="en-US" sz="3300" spc="-1" strike="noStrike">
-                <a:solidFill>
-                  <a:schemeClr val="dk1"/>
-                </a:solidFill>
-                <a:latin typeface="Calibri"/>
-              </a:rPr>
-              <a:t>Master title </a:t>
-            </a:r>
-            <a:r>
-              <a:rPr b="0" lang="en-US" sz="3300" spc="-1" strike="noStrike">
-                <a:solidFill>
-                  <a:schemeClr val="dk1"/>
-                </a:solidFill>
-                <a:latin typeface="Calibri"/>
-              </a:rPr>
-              <a:t>style</a:t>
+              <a:t>Click to edit Master title style</a:t>
             </a:r>
             <a:endParaRPr b="0" lang="en-US" sz="3300" spc="-1" strike="noStrike">
               <a:solidFill>
@@ -4388,7 +5224,7 @@
               </a:lnSpc>
               <a:buNone/>
             </a:pPr>
-            <a:fld id="{AD10CF41-32D1-4400-BD55-435CE4072DBA}" type="slidenum">
+            <a:fld id="{DFF3993D-C3DA-4955-BFC0-107928E0583F}" type="slidenum">
               <a:rPr b="0" lang="en-US" sz="900" spc="-1" strike="noStrike">
                 <a:solidFill>
                   <a:schemeClr val="dk1">
@@ -4482,169 +5318,7 @@
                 </a:solidFill>
                 <a:latin typeface="Calibri"/>
               </a:rPr>
-              <a:t>Cl</a:t>
-            </a:r>
-            <a:r>
-              <a:rPr b="0" lang="en-US" sz="3300" spc="-1" strike="noStrike">
-                <a:solidFill>
-                  <a:schemeClr val="dk1"/>
-                </a:solidFill>
-                <a:latin typeface="Calibri"/>
-              </a:rPr>
-              <a:t>ic</a:t>
-            </a:r>
-            <a:r>
-              <a:rPr b="0" lang="en-US" sz="3300" spc="-1" strike="noStrike">
-                <a:solidFill>
-                  <a:schemeClr val="dk1"/>
-                </a:solidFill>
-                <a:latin typeface="Calibri"/>
-              </a:rPr>
-              <a:t>k </a:t>
-            </a:r>
-            <a:r>
-              <a:rPr b="0" lang="en-US" sz="3300" spc="-1" strike="noStrike">
-                <a:solidFill>
-                  <a:schemeClr val="dk1"/>
-                </a:solidFill>
-                <a:latin typeface="Calibri"/>
-              </a:rPr>
-              <a:t>t</a:t>
-            </a:r>
-            <a:r>
-              <a:rPr b="0" lang="en-US" sz="3300" spc="-1" strike="noStrike">
-                <a:solidFill>
-                  <a:schemeClr val="dk1"/>
-                </a:solidFill>
-                <a:latin typeface="Calibri"/>
-              </a:rPr>
-              <a:t>o </a:t>
-            </a:r>
-            <a:r>
-              <a:rPr b="0" lang="en-US" sz="3300" spc="-1" strike="noStrike">
-                <a:solidFill>
-                  <a:schemeClr val="dk1"/>
-                </a:solidFill>
-                <a:latin typeface="Calibri"/>
-              </a:rPr>
-              <a:t>e</a:t>
-            </a:r>
-            <a:r>
-              <a:rPr b="0" lang="en-US" sz="3300" spc="-1" strike="noStrike">
-                <a:solidFill>
-                  <a:schemeClr val="dk1"/>
-                </a:solidFill>
-                <a:latin typeface="Calibri"/>
-              </a:rPr>
-              <a:t>di</a:t>
-            </a:r>
-            <a:r>
-              <a:rPr b="0" lang="en-US" sz="3300" spc="-1" strike="noStrike">
-                <a:solidFill>
-                  <a:schemeClr val="dk1"/>
-                </a:solidFill>
-                <a:latin typeface="Calibri"/>
-              </a:rPr>
-              <a:t>t </a:t>
-            </a:r>
-            <a:r>
-              <a:rPr b="0" lang="en-US" sz="3300" spc="-1" strike="noStrike">
-                <a:solidFill>
-                  <a:schemeClr val="dk1"/>
-                </a:solidFill>
-                <a:latin typeface="Calibri"/>
-              </a:rPr>
-              <a:t>M</a:t>
-            </a:r>
-            <a:r>
-              <a:rPr b="0" lang="en-US" sz="3300" spc="-1" strike="noStrike">
-                <a:solidFill>
-                  <a:schemeClr val="dk1"/>
-                </a:solidFill>
-                <a:latin typeface="Calibri"/>
-              </a:rPr>
-              <a:t>a</a:t>
-            </a:r>
-            <a:r>
-              <a:rPr b="0" lang="en-US" sz="3300" spc="-1" strike="noStrike">
-                <a:solidFill>
-                  <a:schemeClr val="dk1"/>
-                </a:solidFill>
-                <a:latin typeface="Calibri"/>
-              </a:rPr>
-              <a:t>st</a:t>
-            </a:r>
-            <a:r>
-              <a:rPr b="0" lang="en-US" sz="3300" spc="-1" strike="noStrike">
-                <a:solidFill>
-                  <a:schemeClr val="dk1"/>
-                </a:solidFill>
-                <a:latin typeface="Calibri"/>
-              </a:rPr>
-              <a:t>e</a:t>
-            </a:r>
-            <a:r>
-              <a:rPr b="0" lang="en-US" sz="3300" spc="-1" strike="noStrike">
-                <a:solidFill>
-                  <a:schemeClr val="dk1"/>
-                </a:solidFill>
-                <a:latin typeface="Calibri"/>
-              </a:rPr>
-              <a:t>r </a:t>
-            </a:r>
-            <a:r>
-              <a:rPr b="0" lang="en-US" sz="3300" spc="-1" strike="noStrike">
-                <a:solidFill>
-                  <a:schemeClr val="dk1"/>
-                </a:solidFill>
-                <a:latin typeface="Calibri"/>
-              </a:rPr>
-              <a:t>ti</a:t>
-            </a:r>
-            <a:r>
-              <a:rPr b="0" lang="en-US" sz="3300" spc="-1" strike="noStrike">
-                <a:solidFill>
-                  <a:schemeClr val="dk1"/>
-                </a:solidFill>
-                <a:latin typeface="Calibri"/>
-              </a:rPr>
-              <a:t>tl</a:t>
-            </a:r>
-            <a:r>
-              <a:rPr b="0" lang="en-US" sz="3300" spc="-1" strike="noStrike">
-                <a:solidFill>
-                  <a:schemeClr val="dk1"/>
-                </a:solidFill>
-                <a:latin typeface="Calibri"/>
-              </a:rPr>
-              <a:t>e </a:t>
-            </a:r>
-            <a:r>
-              <a:rPr b="0" lang="en-US" sz="3300" spc="-1" strike="noStrike">
-                <a:solidFill>
-                  <a:schemeClr val="dk1"/>
-                </a:solidFill>
-                <a:latin typeface="Calibri"/>
-              </a:rPr>
-              <a:t>st</a:t>
-            </a:r>
-            <a:r>
-              <a:rPr b="0" lang="en-US" sz="3300" spc="-1" strike="noStrike">
-                <a:solidFill>
-                  <a:schemeClr val="dk1"/>
-                </a:solidFill>
-                <a:latin typeface="Calibri"/>
-              </a:rPr>
-              <a:t>yl</a:t>
-            </a:r>
-            <a:r>
-              <a:rPr b="0" lang="en-US" sz="3300" spc="-1" strike="noStrike">
-                <a:solidFill>
-                  <a:schemeClr val="dk1"/>
-                </a:solidFill>
-                <a:latin typeface="Calibri"/>
-              </a:rPr>
-              <a:t>e</a:t>
+              <a:t>Click to edit Master title style</a:t>
             </a:r>
             <a:endParaRPr b="0" lang="en-US" sz="3300" spc="-1" strike="noStrike">
               <a:solidFill>
@@ -5014,7 +5688,7 @@
               </a:lnSpc>
               <a:buNone/>
             </a:pPr>
-            <a:fld id="{72B36A44-A643-47B6-A236-E1CADFF4A14E}" type="slidenum">
+            <a:fld id="{52896D93-47E4-4BFE-84DD-1BADB664F538}" type="slidenum">
               <a:rPr b="0" lang="en-US" sz="900" spc="-1" strike="noStrike">
                 <a:solidFill>
                   <a:schemeClr val="dk1">
@@ -5108,25 +5782,7 @@
                 </a:solidFill>
                 <a:latin typeface="Calibri"/>
               </a:rPr>
-              <a:t>Click to edit </a:t>
-            </a:r>
-            <a:r>
-              <a:rPr b="0" lang="en-US" sz="3300" spc="-1" strike="noStrike">
-                <a:solidFill>
-                  <a:schemeClr val="dk1"/>
-                </a:solidFill>
-                <a:latin typeface="Calibri"/>
-              </a:rPr>
-              <a:t>Master title </a:t>
-            </a:r>
-            <a:r>
-              <a:rPr b="0" lang="en-US" sz="3300" spc="-1" strike="noStrike">
-                <a:solidFill>
-                  <a:schemeClr val="dk1"/>
-                </a:solidFill>
-                <a:latin typeface="Calibri"/>
-              </a:rPr>
-              <a:t>style</a:t>
+              <a:t>Click to edit Master title style</a:t>
             </a:r>
             <a:endParaRPr b="0" lang="en-US" sz="3300" spc="-1" strike="noStrike">
               <a:solidFill>
@@ -5496,7 +6152,7 @@
               </a:lnSpc>
               <a:buNone/>
             </a:pPr>
-            <a:fld id="{FA29B0EC-A1F0-4A53-9B92-D066B249600A}" type="slidenum">
+            <a:fld id="{8071CC4C-EDEC-43EF-9FCA-1C9D7DE20D7F}" type="slidenum">
               <a:rPr b="0" lang="en-US" sz="900" spc="-1" strike="noStrike">
                 <a:solidFill>
                   <a:schemeClr val="dk1">
@@ -5590,25 +6246,7 @@
                 </a:solidFill>
                 <a:latin typeface="Calibri"/>
               </a:rPr>
-              <a:t>Click to </a:t>
-            </a:r>
-            <a:r>
-              <a:rPr b="1" lang="en-US" sz="3000" spc="-1" strike="noStrike" cap="all">
-                <a:solidFill>
-                  <a:schemeClr val="dk1"/>
-                </a:solidFill>
-                <a:latin typeface="Calibri"/>
-              </a:rPr>
-              <a:t>edit Master </a:t>
-            </a:r>
-            <a:r>
-              <a:rPr b="1" lang="en-US" sz="3000" spc="-1" strike="noStrike" cap="all">
-                <a:solidFill>
-                  <a:schemeClr val="dk1"/>
-                </a:solidFill>
-                <a:latin typeface="Calibri"/>
-              </a:rPr>
-              <a:t>title style</a:t>
+              <a:t>Click to edit Master title style</a:t>
             </a:r>
             <a:endParaRPr b="0" lang="en-US" sz="3000" spc="-1" strike="noStrike">
               <a:solidFill>
@@ -5859,7 +6497,7 @@
               </a:lnSpc>
               <a:buNone/>
             </a:pPr>
-            <a:fld id="{C1AD9E2E-5BCD-4EA1-A63A-581B591B7C3D}" type="slidenum">
+            <a:fld id="{232DF61D-8499-4EF4-8FD0-9C1C37624E65}" type="slidenum">
               <a:rPr b="0" lang="en-US" sz="900" spc="-1" strike="noStrike">
                 <a:solidFill>
                   <a:schemeClr val="dk1">
@@ -6502,7 +7140,7 @@
               </a:lnSpc>
               <a:buNone/>
             </a:pPr>
-            <a:fld id="{432D10F6-6651-41B6-AD4C-A414A8EBF608}" type="slidenum">
+            <a:fld id="{7B6A3EA8-56BA-4614-83E2-027D96D8471C}" type="slidenum">
               <a:rPr b="0" lang="en-US" sz="900" spc="-1" strike="noStrike">
                 <a:solidFill>
                   <a:schemeClr val="dk1">
@@ -6596,7 +7234,25 @@
                 </a:solidFill>
                 <a:latin typeface="Calibri"/>
               </a:rPr>
-              <a:t>Click to edit Master title style</a:t>
+              <a:t>Click to edit </a:t>
+            </a:r>
+            <a:r>
+              <a:rPr b="0" lang="en-US" sz="3300" spc="-1" strike="noStrike">
+                <a:solidFill>
+                  <a:schemeClr val="dk1"/>
+                </a:solidFill>
+                <a:latin typeface="Calibri"/>
+              </a:rPr>
+              <a:t>Master title </a:t>
+            </a:r>
+            <a:r>
+              <a:rPr b="0" lang="en-US" sz="3300" spc="-1" strike="noStrike">
+                <a:solidFill>
+                  <a:schemeClr val="dk1"/>
+                </a:solidFill>
+                <a:latin typeface="Calibri"/>
+              </a:rPr>
+              <a:t>style</a:t>
             </a:r>
             <a:endParaRPr b="0" lang="en-US" sz="3300" spc="-1" strike="noStrike">
               <a:solidFill>
@@ -7261,7 +7917,7 @@
               </a:lnSpc>
               <a:buNone/>
             </a:pPr>
-            <a:fld id="{634C1272-AAE5-48C9-AA5D-1D6380F4AAC0}" type="slidenum">
+            <a:fld id="{FACB7505-3B8C-4A27-80B0-9CBD3D81E6B4}" type="slidenum">
               <a:rPr b="0" lang="en-US" sz="900" spc="-1" strike="noStrike">
                 <a:solidFill>
                   <a:schemeClr val="dk1">
@@ -7355,7 +8011,25 @@
                 </a:solidFill>
                 <a:latin typeface="Calibri"/>
               </a:rPr>
-              <a:t>Click to edit Master title style</a:t>
+              <a:t>Click to edit </a:t>
+            </a:r>
+            <a:r>
+              <a:rPr b="0" lang="en-US" sz="3300" spc="-1" strike="noStrike">
+                <a:solidFill>
+                  <a:schemeClr val="dk1"/>
+                </a:solidFill>
+                <a:latin typeface="Calibri"/>
+              </a:rPr>
+              <a:t>Master title </a:t>
+            </a:r>
+            <a:r>
+              <a:rPr b="0" lang="en-US" sz="3300" spc="-1" strike="noStrike">
+                <a:solidFill>
+                  <a:schemeClr val="dk1"/>
+                </a:solidFill>
+                <a:latin typeface="Calibri"/>
+              </a:rPr>
+              <a:t>style</a:t>
             </a:r>
             <a:endParaRPr b="0" lang="en-US" sz="3300" spc="-1" strike="noStrike">
               <a:solidFill>
@@ -7546,7 +8220,7 @@
               </a:lnSpc>
               <a:buNone/>
             </a:pPr>
-            <a:fld id="{91CFF0FC-397A-4392-9CB4-F837657001D8}" type="slidenum">
+            <a:fld id="{465F9593-1B96-4D85-B1FD-9A0C076410AF}" type="slidenum">
               <a:rPr b="0" lang="en-US" sz="900" spc="-1" strike="noStrike">
                 <a:solidFill>
                   <a:schemeClr val="dk1">
@@ -7779,7 +8453,7 @@
               </a:lnSpc>
               <a:buNone/>
             </a:pPr>
-            <a:fld id="{C7E25C66-CCE3-4150-A997-A87848E2DA62}" type="slidenum">
+            <a:fld id="{66C23493-323F-4359-9109-07104FE8A042}" type="slidenum">
               <a:rPr b="0" lang="en-US" sz="900" spc="-1" strike="noStrike">
                 <a:solidFill>
                   <a:schemeClr val="dk1">
@@ -8216,7 +8890,7 @@
         <p:spPr>
           <a:xfrm>
             <a:off x="457200" y="1200240"/>
-            <a:ext cx="8229240" cy="1085760"/>
+            <a:ext cx="8229240" cy="3394080"/>
           </a:xfrm>
           <a:prstGeom prst="rect">
             <a:avLst/>
@@ -8244,7 +8918,7 @@
               </a:tabLst>
             </a:pPr>
             <a:r>
-              <a:rPr b="1" lang="en-US" sz="2600" spc="-1" strike="noStrike">
+              <a:rPr b="1" lang="en-US" sz="2000" spc="-1" strike="noStrike">
                 <a:solidFill>
                   <a:schemeClr val="dk1"/>
                 </a:solidFill>
@@ -8253,7 +8927,7 @@
               <a:t>D</a:t>
             </a:r>
             <a:r>
-              <a:rPr b="0" lang="en-US" sz="2600" spc="-1" strike="noStrike">
+              <a:rPr b="0" lang="en-US" sz="2000" spc="-1" strike="noStrike">
                 <a:solidFill>
                   <a:schemeClr val="dk1"/>
                 </a:solidFill>
@@ -8262,7 +8936,7 @@
               <a:t> = {(x⁽ⁱ⁾, y⁽ⁱ⁾)}, i = 1 … n drawn </a:t>
             </a:r>
             <a:r>
-              <a:rPr b="1" lang="en-US" sz="2600" spc="-1" strike="noStrike">
+              <a:rPr b="1" lang="en-US" sz="2000" spc="-1" strike="noStrike">
                 <a:solidFill>
                   <a:schemeClr val="dk1"/>
                 </a:solidFill>
@@ -8271,7 +8945,7 @@
               <a:t>i.i.d.</a:t>
             </a:r>
             <a:r>
-              <a:rPr b="0" lang="en-US" sz="2600" spc="-1" strike="noStrike">
+              <a:rPr b="0" lang="en-US" sz="2000" spc="-1" strike="noStrike">
                 <a:solidFill>
                   <a:schemeClr val="dk1"/>
                 </a:solidFill>
@@ -8279,7 +8953,7 @@
               </a:rPr>
               <a:t> from P(X, Y)</a:t>
             </a:r>
-            <a:endParaRPr b="0" lang="en-US" sz="2600" spc="-1" strike="noStrike">
+            <a:endParaRPr b="0" lang="en-US" sz="2000" spc="-1" strike="noStrike">
               <a:solidFill>
                 <a:schemeClr val="dk1"/>
               </a:solidFill>
@@ -8300,7 +8974,7 @@
               </a:tabLst>
             </a:pPr>
             <a:r>
-              <a:rPr b="0" lang="en-US" sz="2600" spc="-1" strike="noStrike">
+              <a:rPr b="0" lang="en-US" sz="2400" spc="-1" strike="noStrike">
                 <a:solidFill>
                   <a:schemeClr val="dk1"/>
                 </a:solidFill>
@@ -8309,24 +8983,24 @@
               <a:t>Given </a:t>
             </a:r>
             <a:r>
-              <a:rPr b="1" lang="en-US" sz="2600" spc="-1" strike="noStrike">
-                <a:solidFill>
-                  <a:schemeClr val="dk1"/>
-                </a:solidFill>
-                <a:latin typeface="Calibri"/>
-              </a:rPr>
-              <a:t>D, </a:t>
-            </a:r>
-            <a:r>
-              <a:rPr b="0" lang="en-US" sz="2600" spc="-1" strike="noStrike">
-                <a:solidFill>
-                  <a:schemeClr val="dk1"/>
-                </a:solidFill>
-                <a:latin typeface="Calibri"/>
-              </a:rPr>
-              <a:t>generalise to new draws from P.</a:t>
-            </a:r>
-            <a:endParaRPr b="0" lang="en-US" sz="2600" spc="-1" strike="noStrike">
+              <a:rPr b="1" lang="en-US" sz="2400" spc="-1" strike="noStrike">
+                <a:solidFill>
+                  <a:schemeClr val="dk1"/>
+                </a:solidFill>
+                <a:latin typeface="Calibri"/>
+              </a:rPr>
+              <a:t>D</a:t>
+            </a:r>
+            <a:r>
+              <a:rPr b="0" lang="en-US" sz="2400" spc="-1" strike="noStrike">
+                <a:solidFill>
+                  <a:schemeClr val="dk1"/>
+                </a:solidFill>
+                <a:latin typeface="Calibri"/>
+              </a:rPr>
+              <a:t>, generalise to new draws from P.</a:t>
+            </a:r>
+            <a:endParaRPr b="0" lang="en-US" sz="2400" spc="-1" strike="noStrike">
               <a:solidFill>
                 <a:schemeClr val="dk1"/>
               </a:solidFill>
@@ -8334,52 +9008,10 @@
             </a:endParaRPr>
           </a:p>
           <a:p>
-            <a:pPr indent="0" defTabSz="343080">
-              <a:lnSpc>
-                <a:spcPct val="100000"/>
-              </a:lnSpc>
-              <a:spcBef>
-                <a:spcPts val="479"/>
-              </a:spcBef>
-              <a:buNone/>
-              <a:tabLst>
-                <a:tab algn="l" pos="0"/>
-              </a:tabLst>
-            </a:pPr>
-            <a:endParaRPr b="0" lang="en-US" sz="2400" spc="-1" strike="noStrike">
-              <a:solidFill>
-                <a:schemeClr val="dk1"/>
-              </a:solidFill>
-              <a:latin typeface="Calibri"/>
-            </a:endParaRPr>
-          </a:p>
-        </p:txBody>
-      </p:sp>
-      <p:sp>
-        <p:nvSpPr>
-          <p:cNvPr id="93" name="Content Placeholder 1"/>
-          <p:cNvSpPr txBox="1"/>
-          <p:nvPr/>
-        </p:nvSpPr>
-        <p:spPr>
-          <a:xfrm>
-            <a:off x="457560" y="2743200"/>
-            <a:ext cx="8229240" cy="1851120"/>
-          </a:xfrm>
-          <a:prstGeom prst="rect">
-            <a:avLst/>
-          </a:prstGeom>
-          <a:noFill/>
-          <a:ln w="0">
-            <a:noFill/>
-          </a:ln>
-        </p:spPr>
-        <p:txBody>
-          <a:bodyPr anchor="t">
-            <a:normAutofit/>
-          </a:bodyPr>
-          <a:p>
-            <a:pPr marL="432000" indent="-324000" defTabSz="343080">
+            <a:pPr marL="343080" indent="-343080" defTabSz="343080">
+              <a:lnSpc>
+                <a:spcPct val="100000"/>
+              </a:lnSpc>
               <a:spcBef>
                 <a:spcPts val="479"/>
               </a:spcBef>
@@ -8387,7 +9019,7 @@
                 <a:srgbClr val="000000"/>
               </a:buClr>
               <a:buFont typeface="Arial"/>
-              <a:buAutoNum type="arabicPeriod"/>
+              <a:buChar char="•"/>
               <a:tabLst>
                 <a:tab algn="l" pos="0"/>
               </a:tabLst>
@@ -8399,7 +9031,7 @@
                 </a:solidFill>
                 <a:latin typeface="Calibri"/>
               </a:rPr>
-              <a:t>Noise/errors</a:t>
+              <a:t>Noise/errors:</a:t>
             </a:r>
             <a:r>
               <a:rPr b="0" lang="en-US" sz="2400" spc="-1" strike="noStrike">
@@ -8408,7 +9040,7 @@
                 </a:solidFill>
                 <a:latin typeface="Calibri"/>
               </a:rPr>
-              <a:t>: the labels and the features are wrong, sometimes badly</a:t>
+              <a:t> the labels and the features are wrong, sometimes badly</a:t>
             </a:r>
             <a:endParaRPr b="0" lang="en-US" sz="2400" spc="-1" strike="noStrike">
               <a:solidFill>
@@ -8418,7 +9050,10 @@
             </a:endParaRPr>
           </a:p>
           <a:p>
-            <a:pPr marL="432000" indent="-324000" defTabSz="343080">
+            <a:pPr marL="343080" indent="-343080" defTabSz="343080">
+              <a:lnSpc>
+                <a:spcPct val="100000"/>
+              </a:lnSpc>
               <a:spcBef>
                 <a:spcPts val="479"/>
               </a:spcBef>
@@ -8426,7 +9061,7 @@
                 <a:srgbClr val="000000"/>
               </a:buClr>
               <a:buFont typeface="Arial"/>
-              <a:buAutoNum type="arabicPeriod"/>
+              <a:buChar char="•"/>
               <a:tabLst>
                 <a:tab algn="l" pos="0"/>
               </a:tabLst>
@@ -8438,7 +9073,7 @@
                 </a:solidFill>
                 <a:latin typeface="Calibri"/>
               </a:rPr>
-              <a:t>Missingness</a:t>
+              <a:t>Missingness:</a:t>
             </a:r>
             <a:r>
               <a:rPr b="0" lang="en-US" sz="2400" spc="-1" strike="noStrike">
@@ -8447,7 +9082,7 @@
                 </a:solidFill>
                 <a:latin typeface="Calibri"/>
               </a:rPr>
-              <a:t>: the data is (sometimes) absent</a:t>
+              <a:t> the data is (sometimes) absent</a:t>
             </a:r>
             <a:endParaRPr b="0" lang="en-US" sz="2400" spc="-1" strike="noStrike">
               <a:solidFill>
@@ -8457,7 +9092,10 @@
             </a:endParaRPr>
           </a:p>
           <a:p>
-            <a:pPr marL="432000" indent="-324000" defTabSz="343080">
+            <a:pPr marL="343080" indent="-343080" defTabSz="343080">
+              <a:lnSpc>
+                <a:spcPct val="100000"/>
+              </a:lnSpc>
               <a:spcBef>
                 <a:spcPts val="479"/>
               </a:spcBef>
@@ -8465,7 +9103,7 @@
                 <a:srgbClr val="000000"/>
               </a:buClr>
               <a:buFont typeface="Arial"/>
-              <a:buAutoNum type="arabicPeriod"/>
+              <a:buChar char="•"/>
               <a:tabLst>
                 <a:tab algn="l" pos="0"/>
               </a:tabLst>
@@ -8477,7 +9115,7 @@
                 </a:solidFill>
                 <a:latin typeface="Calibri"/>
               </a:rPr>
-              <a:t>Class imbalance</a:t>
+              <a:t>Class imbalance:</a:t>
             </a:r>
             <a:r>
               <a:rPr b="0" lang="en-US" sz="2400" spc="-1" strike="noStrike">
@@ -8486,7 +9124,7 @@
                 </a:solidFill>
                 <a:latin typeface="Calibri"/>
               </a:rPr>
-              <a:t>: the event you care about is rare</a:t>
+              <a:t> the event you care about is rare</a:t>
             </a:r>
             <a:endParaRPr b="0" lang="en-US" sz="2400" spc="-1" strike="noStrike">
               <a:solidFill>
@@ -8529,7 +9167,7 @@
       </p:grpSpPr>
       <p:sp>
         <p:nvSpPr>
-          <p:cNvPr id="94" name="PlaceHolder 1"/>
+          <p:cNvPr id="93" name="PlaceHolder 1"/>
           <p:cNvSpPr>
             <a:spLocks noGrp="1"/>
           </p:cNvSpPr>
@@ -8584,7 +9222,7 @@
       </p:sp>
       <p:sp>
         <p:nvSpPr>
-          <p:cNvPr id="95" name="PlaceHolder 2"/>
+          <p:cNvPr id="94" name="PlaceHolder 2"/>
           <p:cNvSpPr>
             <a:spLocks noGrp="1"/>
           </p:cNvSpPr>
@@ -8595,7 +9233,7 @@
         <p:spPr>
           <a:xfrm>
             <a:off x="457200" y="1200240"/>
-            <a:ext cx="8458200" cy="3828960"/>
+            <a:ext cx="8229240" cy="3394080"/>
           </a:xfrm>
           <a:prstGeom prst="rect">
             <a:avLst/>
@@ -8607,7 +9245,7 @@
         </p:spPr>
         <p:txBody>
           <a:bodyPr lIns="91440" rIns="91440" tIns="45720" bIns="45720" anchor="t">
-            <a:normAutofit fontScale="93713" lnSpcReduction="10000"/>
+            <a:normAutofit fontScale="87465" lnSpcReduction="10000"/>
           </a:bodyPr>
           <a:p>
             <a:pPr indent="0" defTabSz="343080">
@@ -8623,34 +9261,25 @@
               </a:tabLst>
             </a:pPr>
             <a:r>
-              <a:rPr b="0" lang="en-US" sz="2200" spc="-1" strike="noStrike">
-                <a:solidFill>
-                  <a:schemeClr val="dk1"/>
-                </a:solidFill>
-                <a:latin typeface="Calibri"/>
-              </a:rPr>
-              <a:t>Your label is </a:t>
-            </a:r>
-            <a:r>
-              <a:rPr b="1" lang="en-US" sz="2200" spc="-1" strike="noStrike">
-                <a:solidFill>
-                  <a:schemeClr val="dk1"/>
-                </a:solidFill>
-                <a:latin typeface="Calibri"/>
-              </a:rPr>
-              <a:t>not the truth</a:t>
-            </a:r>
-            <a:r>
-              <a:rPr b="0" lang="en-US" sz="2200" spc="-1" strike="noStrike">
-                <a:solidFill>
-                  <a:schemeClr val="dk1"/>
-                </a:solidFill>
-                <a:latin typeface="Calibri"/>
-              </a:rPr>
-              <a:t>: It is a </a:t>
-            </a:r>
-            <a:r>
-              <a:rPr b="1" lang="en-US" sz="2200" spc="-1" strike="noStrike">
+              <a:rPr b="0" lang="en-US" sz="2400" spc="-1" strike="noStrike">
+                <a:solidFill>
+                  <a:schemeClr val="dk1"/>
+                </a:solidFill>
+                <a:latin typeface="Calibri"/>
+              </a:rPr>
+              <a:t>Your label is not the truth: It is </a:t>
+            </a:r>
+            <a:r>
+              <a:rPr b="0" lang="en-US" sz="2400" spc="-1" strike="noStrike">
+                <a:solidFill>
+                  <a:schemeClr val="dk1"/>
+                </a:solidFill>
+                <a:latin typeface="Calibri"/>
+              </a:rPr>
+              <a:t>a </a:t>
+            </a:r>
+            <a:r>
+              <a:rPr b="1" lang="en-US" sz="2400" spc="-1" strike="noStrike">
                 <a:solidFill>
                   <a:schemeClr val="dk1"/>
                 </a:solidFill>
@@ -8659,15 +9288,24 @@
               <a:t>proxy</a:t>
             </a:r>
             <a:r>
-              <a:rPr b="0" lang="en-US" sz="2200" spc="-1" strike="noStrike">
-                <a:solidFill>
-                  <a:schemeClr val="dk1"/>
-                </a:solidFill>
-                <a:latin typeface="Calibri"/>
-              </a:rPr>
-              <a:t> produced by the measurement process.</a:t>
-            </a:r>
-            <a:endParaRPr b="0" lang="en-US" sz="2200" spc="-1" strike="noStrike">
+              <a:rPr b="0" lang="en-US" sz="2400" spc="-1" strike="noStrike">
+                <a:solidFill>
+                  <a:schemeClr val="dk1"/>
+                </a:solidFill>
+                <a:latin typeface="Calibri"/>
+              </a:rPr>
+              <a:t> produced by the </a:t>
+            </a:r>
+            <a:r>
+              <a:rPr b="0" lang="en-US" sz="2400" spc="-1" strike="noStrike">
+                <a:solidFill>
+                  <a:schemeClr val="dk1"/>
+                </a:solidFill>
+                <a:latin typeface="Calibri"/>
+              </a:rPr>
+              <a:t>measurement process.</a:t>
+            </a:r>
+            <a:endParaRPr b="0" lang="en-US" sz="2400" spc="-1" strike="noStrike">
               <a:solidFill>
                 <a:schemeClr val="dk1"/>
               </a:solidFill>
@@ -8688,7 +9326,7 @@
               </a:tabLst>
             </a:pPr>
             <a:r>
-              <a:rPr b="0" lang="en-US" sz="2200" spc="-1" strike="noStrike">
+              <a:rPr b="0" lang="en-US" sz="2400" spc="-1" strike="noStrike">
                 <a:solidFill>
                   <a:schemeClr val="dk1"/>
                 </a:solidFill>
@@ -8696,7 +9334,7 @@
               </a:rPr>
               <a:t>Example:</a:t>
             </a:r>
-            <a:endParaRPr b="0" lang="en-US" sz="2200" spc="-1" strike="noStrike">
+            <a:endParaRPr b="0" lang="en-US" sz="2400" spc="-1" strike="noStrike">
               <a:solidFill>
                 <a:schemeClr val="dk1"/>
               </a:solidFill>
@@ -8721,7 +9359,7 @@
               </a:tabLst>
             </a:pPr>
             <a:r>
-              <a:rPr b="0" lang="en-US" sz="2200" spc="-1" strike="noStrike">
+              <a:rPr b="0" lang="en-US" sz="2400" spc="-1" strike="noStrike">
                 <a:solidFill>
                   <a:schemeClr val="dk1"/>
                 </a:solidFill>
@@ -8730,15 +9368,33 @@
               <a:t>“</a:t>
             </a:r>
             <a:r>
-              <a:rPr b="0" lang="en-US" sz="2200" spc="-1" strike="noStrike">
-                <a:solidFill>
-                  <a:schemeClr val="dk1"/>
-                </a:solidFill>
-                <a:latin typeface="Calibri"/>
-              </a:rPr>
-              <a:t>Pneumonia” on a chest X-ray: one radiologist’s opinion, alone</a:t>
-            </a:r>
-            <a:endParaRPr b="0" lang="en-US" sz="2200" spc="-1" strike="noStrike">
+              <a:rPr b="0" lang="en-US" sz="2400" spc="-1" strike="noStrike">
+                <a:solidFill>
+                  <a:schemeClr val="dk1"/>
+                </a:solidFill>
+                <a:latin typeface="Calibri"/>
+              </a:rPr>
+              <a:t>Pneumonia” on a chest X-</a:t>
+            </a:r>
+            <a:r>
+              <a:rPr b="0" lang="en-US" sz="2400" spc="-1" strike="noStrike">
+                <a:solidFill>
+                  <a:schemeClr val="dk1"/>
+                </a:solidFill>
+                <a:latin typeface="Calibri"/>
+              </a:rPr>
+              <a:t>ray: one radiologist’s </a:t>
+            </a:r>
+            <a:r>
+              <a:rPr b="0" lang="en-US" sz="2400" spc="-1" strike="noStrike">
+                <a:solidFill>
+                  <a:schemeClr val="dk1"/>
+                </a:solidFill>
+                <a:latin typeface="Calibri"/>
+              </a:rPr>
+              <a:t>opinion, alone</a:t>
+            </a:r>
+            <a:endParaRPr b="0" lang="en-US" sz="2400" spc="-1" strike="noStrike">
               <a:solidFill>
                 <a:schemeClr val="dk1"/>
               </a:solidFill>
@@ -8763,15 +9419,33 @@
               </a:tabLst>
             </a:pPr>
             <a:r>
-              <a:rPr b="0" lang="en-US" sz="2200" spc="-1" strike="noStrike">
-                <a:solidFill>
-                  <a:schemeClr val="dk1"/>
-                </a:solidFill>
-                <a:latin typeface="Calibri"/>
-              </a:rPr>
-              <a:t>Inter-rater agreement between radiologists is often 40% to 70%</a:t>
-            </a:r>
-            <a:endParaRPr b="0" lang="en-US" sz="2200" spc="-1" strike="noStrike">
+              <a:rPr b="0" lang="en-US" sz="2400" spc="-1" strike="noStrike">
+                <a:solidFill>
+                  <a:schemeClr val="dk1"/>
+                </a:solidFill>
+                <a:latin typeface="Calibri"/>
+              </a:rPr>
+              <a:t>Inter-rater agreement </a:t>
+            </a:r>
+            <a:r>
+              <a:rPr b="0" lang="en-US" sz="2400" spc="-1" strike="noStrike">
+                <a:solidFill>
+                  <a:schemeClr val="dk1"/>
+                </a:solidFill>
+                <a:latin typeface="Calibri"/>
+              </a:rPr>
+              <a:t>between radiologists is </a:t>
+            </a:r>
+            <a:r>
+              <a:rPr b="0" lang="en-US" sz="2400" spc="-1" strike="noStrike">
+                <a:solidFill>
+                  <a:schemeClr val="dk1"/>
+                </a:solidFill>
+                <a:latin typeface="Calibri"/>
+              </a:rPr>
+              <a:t>often 40% to 70%</a:t>
+            </a:r>
+            <a:endParaRPr b="0" lang="en-US" sz="2400" spc="-1" strike="noStrike">
               <a:solidFill>
                 <a:schemeClr val="dk1"/>
               </a:solidFill>
@@ -8792,7 +9466,7 @@
               </a:tabLst>
             </a:pPr>
             <a:r>
-              <a:rPr b="1" lang="en-US" sz="2200" spc="-1" strike="noStrike">
+              <a:rPr b="1" lang="en-US" sz="2400" spc="-1" strike="noStrike">
                 <a:solidFill>
                   <a:schemeClr val="dk1"/>
                 </a:solidFill>
@@ -8801,16 +9475,25 @@
               <a:t>Practical rule:</a:t>
             </a:r>
             <a:r>
-              <a:rPr b="0" lang="en-US" sz="2200" spc="-1" strike="noStrike">
-                <a:solidFill>
-                  <a:schemeClr val="dk1"/>
-                </a:solidFill>
-                <a:latin typeface="Calibri"/>
-              </a:rPr>
-              <a:t> before modelling, ask </a:t>
-            </a:r>
-            <a:r>
-              <a:rPr b="0" i="1" lang="en-US" sz="2200" spc="-1" strike="noStrike">
+              <a:rPr b="0" lang="en-US" sz="2400" spc="-1" strike="noStrike">
+                <a:solidFill>
+                  <a:schemeClr val="dk1"/>
+                </a:solidFill>
+                <a:latin typeface="Calibri"/>
+              </a:rPr>
+              <a:t> before </a:t>
+            </a:r>
+            <a:r>
+              <a:rPr b="0" lang="en-US" sz="2400" spc="-1" strike="noStrike">
+                <a:solidFill>
+                  <a:schemeClr val="dk1"/>
+                </a:solidFill>
+                <a:latin typeface="Calibri"/>
+              </a:rPr>
+              <a:t>modelling, ask </a:t>
+            </a:r>
+            <a:r>
+              <a:rPr b="0" i="1" lang="en-US" sz="2400" spc="-1" strike="noStrike">
                 <a:solidFill>
                   <a:schemeClr val="dk1"/>
                 </a:solidFill>
@@ -8819,16 +9502,25 @@
               <a:t>who</a:t>
             </a:r>
             <a:r>
-              <a:rPr b="0" lang="en-US" sz="2200" spc="-1" strike="noStrike">
-                <a:solidFill>
-                  <a:schemeClr val="dk1"/>
-                </a:solidFill>
-                <a:latin typeface="Calibri"/>
-              </a:rPr>
-              <a:t> produced this label, </a:t>
-            </a:r>
-            <a:r>
-              <a:rPr b="0" i="1" lang="en-US" sz="2200" spc="-1" strike="noStrike">
+              <a:rPr b="0" lang="en-US" sz="2400" spc="-1" strike="noStrike">
+                <a:solidFill>
+                  <a:schemeClr val="dk1"/>
+                </a:solidFill>
+                <a:latin typeface="Calibri"/>
+              </a:rPr>
+              <a:t> produced </a:t>
+            </a:r>
+            <a:r>
+              <a:rPr b="0" lang="en-US" sz="2400" spc="-1" strike="noStrike">
+                <a:solidFill>
+                  <a:schemeClr val="dk1"/>
+                </a:solidFill>
+                <a:latin typeface="Calibri"/>
+              </a:rPr>
+              <a:t>this label, </a:t>
+            </a:r>
+            <a:r>
+              <a:rPr b="0" i="1" lang="en-US" sz="2400" spc="-1" strike="noStrike">
                 <a:solidFill>
                   <a:schemeClr val="dk1"/>
                 </a:solidFill>
@@ -8837,7 +9529,7 @@
               <a:t>when</a:t>
             </a:r>
             <a:r>
-              <a:rPr b="0" lang="en-US" sz="2200" spc="-1" strike="noStrike">
+              <a:rPr b="0" lang="en-US" sz="2400" spc="-1" strike="noStrike">
                 <a:solidFill>
                   <a:schemeClr val="dk1"/>
                 </a:solidFill>
@@ -8846,7 +9538,7 @@
               <a:t>, and </a:t>
             </a:r>
             <a:r>
-              <a:rPr b="0" i="1" lang="en-US" sz="2200" spc="-1" strike="noStrike">
+              <a:rPr b="0" i="1" lang="en-US" sz="2400" spc="-1" strike="noStrike">
                 <a:solidFill>
                   <a:schemeClr val="dk1"/>
                 </a:solidFill>
@@ -8855,7 +9547,7 @@
               <a:t>why</a:t>
             </a:r>
             <a:r>
-              <a:rPr b="0" lang="en-US" sz="2200" spc="-1" strike="noStrike">
+              <a:rPr b="0" lang="en-US" sz="2400" spc="-1" strike="noStrike">
                 <a:solidFill>
                   <a:schemeClr val="dk1"/>
                 </a:solidFill>
@@ -8863,7 +9555,7 @@
               </a:rPr>
               <a:t>.</a:t>
             </a:r>
-            <a:endParaRPr b="0" lang="en-US" sz="2200" spc="-1" strike="noStrike">
+            <a:endParaRPr b="0" lang="en-US" sz="2400" spc="-1" strike="noStrike">
               <a:solidFill>
                 <a:schemeClr val="dk1"/>
               </a:solidFill>
@@ -8883,7 +9575,34 @@
                 <a:tab algn="l" pos="0"/>
               </a:tabLst>
             </a:pPr>
-            <a:endParaRPr b="0" lang="en-US" sz="2200" spc="-1" strike="noStrike">
+            <a:r>
+              <a:rPr b="0" lang="en-US" sz="2400" spc="-1" strike="noStrike">
+                <a:solidFill>
+                  <a:schemeClr val="dk1"/>
+                </a:solidFill>
+                <a:latin typeface="Calibri"/>
+              </a:rPr>
+              <a:t>Label noise caps your </a:t>
+            </a:r>
+            <a:r>
+              <a:rPr b="0" lang="en-US" sz="2400" spc="-1" strike="noStrike">
+                <a:solidFill>
+                  <a:schemeClr val="dk1"/>
+                </a:solidFill>
+                <a:latin typeface="Calibri"/>
+              </a:rPr>
+              <a:t>achievable performance: you </a:t>
+            </a:r>
+            <a:r>
+              <a:rPr b="0" lang="en-US" sz="2400" spc="-1" strike="noStrike">
+                <a:solidFill>
+                  <a:schemeClr val="dk1"/>
+                </a:solidFill>
+                <a:latin typeface="Calibri"/>
+              </a:rPr>
+              <a:t>cannot beat the annotator.</a:t>
+            </a:r>
+            <a:endParaRPr b="0" lang="en-US" sz="2400" spc="-1" strike="noStrike">
               <a:solidFill>
                 <a:schemeClr val="dk1"/>
               </a:solidFill>
@@ -8899,6 +9618,9 @@
                 <a:spcPts val="479"/>
               </a:spcBef>
               <a:buNone/>
+              <a:tabLst>
+                <a:tab algn="l" pos="0"/>
+              </a:tabLst>
             </a:pPr>
             <a:r>
               <a:rPr b="0" lang="en-US" sz="2400" spc="-1" strike="noStrike">
@@ -8907,16 +9629,16 @@
                 </a:solidFill>
                 <a:latin typeface="Calibri"/>
               </a:rPr>
-              <a:t>Label noise </a:t>
-            </a:r>
-            <a:r>
-              <a:rPr b="1" lang="en-US" sz="2400" spc="-1" strike="noStrike">
-                <a:solidFill>
-                  <a:schemeClr val="dk1"/>
-                </a:solidFill>
-                <a:latin typeface="Calibri"/>
-              </a:rPr>
-              <a:t>caps</a:t>
+              <a:t>Symmetric noise hurts </a:t>
+            </a:r>
+            <a:r>
+              <a:rPr b="0" i="1" lang="en-US" sz="2400" spc="-1" strike="noStrike">
+                <a:solidFill>
+                  <a:schemeClr val="dk1"/>
+                </a:solidFill>
+                <a:latin typeface="Calibri"/>
+              </a:rPr>
+              <a:t>variance</a:t>
             </a:r>
             <a:r>
               <a:rPr b="0" lang="en-US" sz="2400" spc="-1" strike="noStrike">
@@ -8925,16 +9647,7 @@
                 </a:solidFill>
                 <a:latin typeface="Calibri"/>
               </a:rPr>
-              <a:t> your achievable </a:t>
-            </a:r>
-            <a:r>
-              <a:rPr b="1" lang="en-US" sz="2400" spc="-1" strike="noStrike">
-                <a:solidFill>
-                  <a:schemeClr val="dk1"/>
-                </a:solidFill>
-                <a:latin typeface="Calibri"/>
-              </a:rPr>
-              <a:t>performance</a:t>
+              <a:t>; asymmetric noise </a:t>
             </a:r>
             <a:r>
               <a:rPr b="0" lang="en-US" sz="2400" spc="-1" strike="noStrike">
@@ -8943,61 +9656,7 @@
                 </a:solidFill>
                 <a:latin typeface="Calibri"/>
               </a:rPr>
-              <a:t>: you cannot beat the annotator.</a:t>
-            </a:r>
-            <a:endParaRPr b="0" lang="en-US" sz="2400" spc="-1" strike="noStrike">
-              <a:solidFill>
-                <a:schemeClr val="dk1"/>
-              </a:solidFill>
-              <a:latin typeface="Calibri"/>
-            </a:endParaRPr>
-          </a:p>
-          <a:p>
-            <a:pPr indent="0" defTabSz="343080">
-              <a:lnSpc>
-                <a:spcPct val="100000"/>
-              </a:lnSpc>
-              <a:spcBef>
-                <a:spcPts val="479"/>
-              </a:spcBef>
-              <a:buNone/>
-            </a:pPr>
-            <a:r>
-              <a:rPr b="0" lang="en-US" sz="2400" spc="-1" strike="noStrike">
-                <a:solidFill>
-                  <a:schemeClr val="dk1"/>
-                </a:solidFill>
-                <a:latin typeface="Calibri"/>
-                <a:ea typeface="Noto Sans CJK SC"/>
-              </a:rPr>
-              <a:t>Symmetric noise hurts</a:t>
-            </a:r>
-            <a:r>
-              <a:rPr b="0" lang="en-US" sz="2400" spc="-1" strike="noStrike">
-                <a:solidFill>
-                  <a:schemeClr val="dk1"/>
-                </a:solidFill>
-                <a:latin typeface="Calibri"/>
-              </a:rPr>
-              <a:t> </a:t>
-            </a:r>
-            <a:r>
-              <a:rPr b="0" i="1" lang="en-US" sz="2400" spc="-1" strike="noStrike">
-                <a:solidFill>
-                  <a:schemeClr val="dk1"/>
-                </a:solidFill>
-                <a:latin typeface="Calibri"/>
-              </a:rPr>
-              <a:t>variance</a:t>
-            </a:r>
-            <a:r>
-              <a:rPr b="0" lang="en-US" sz="2400" spc="-1" strike="noStrike">
-                <a:solidFill>
-                  <a:schemeClr val="dk1"/>
-                </a:solidFill>
-                <a:latin typeface="Calibri"/>
-              </a:rPr>
-              <a:t>; asymmetric noise creates a </a:t>
+              <a:t>creates a </a:t>
             </a:r>
             <a:r>
               <a:rPr b="0" i="1" lang="en-US" sz="2400" spc="-1" strike="noStrike">
@@ -9058,7 +9717,7 @@
       </p:grpSpPr>
       <p:sp>
         <p:nvSpPr>
-          <p:cNvPr id="96" name="PlaceHolder 1"/>
+          <p:cNvPr id="95" name="PlaceHolder 1"/>
           <p:cNvSpPr>
             <a:spLocks noGrp="1"/>
           </p:cNvSpPr>
@@ -9113,7 +9772,7 @@
       </p:sp>
       <p:sp>
         <p:nvSpPr>
-          <p:cNvPr id="97" name="PlaceHolder 2"/>
+          <p:cNvPr id="96" name="PlaceHolder 2"/>
           <p:cNvSpPr>
             <a:spLocks noGrp="1"/>
           </p:cNvSpPr>
@@ -9355,7 +10014,7 @@
       </p:grpSpPr>
       <p:sp>
         <p:nvSpPr>
-          <p:cNvPr id="98" name="PlaceHolder 1"/>
+          <p:cNvPr id="97" name="PlaceHolder 1"/>
           <p:cNvSpPr>
             <a:spLocks noGrp="1"/>
           </p:cNvSpPr>
@@ -9410,12 +10069,12 @@
       </p:sp>
       <p:graphicFrame>
         <p:nvGraphicFramePr>
-          <p:cNvPr id="99" name="Content Placeholder 5"/>
+          <p:cNvPr id="98" name="Content Placeholder 5"/>
           <p:cNvGraphicFramePr/>
           <p:nvPr/>
         </p:nvGraphicFramePr>
         <p:xfrm>
-          <a:off x="1058040" y="1193760"/>
+          <a:off x="457200" y="1193760"/>
           <a:ext cx="8229240" cy="1411200"/>
         </p:xfrm>
         <a:graphic>
@@ -9423,9 +10082,9 @@
             <a:tbl>
               <a:tblPr/>
               <a:tblGrid>
-                <a:gridCol w="1284120"/>
-                <a:gridCol w="3300120"/>
-                <a:gridCol w="2444040"/>
+                <a:gridCol w="2743200"/>
+                <a:gridCol w="2743200"/>
+                <a:gridCol w="2743200"/>
               </a:tblGrid>
               <a:tr h="0">
                 <a:tc>
@@ -10207,171 +10866,6 @@
           </a:graphicData>
         </a:graphic>
       </p:graphicFrame>
-      <p:sp>
-        <p:nvSpPr>
-          <p:cNvPr id="100" name="Content Placeholder 3"/>
-          <p:cNvSpPr txBox="1"/>
-          <p:nvPr/>
-        </p:nvSpPr>
-        <p:spPr>
-          <a:xfrm>
-            <a:off x="457560" y="2743200"/>
-            <a:ext cx="8229240" cy="2286000"/>
-          </a:xfrm>
-          <a:prstGeom prst="rect">
-            <a:avLst/>
-          </a:prstGeom>
-          <a:noFill/>
-          <a:ln w="0">
-            <a:noFill/>
-          </a:ln>
-        </p:spPr>
-        <p:txBody>
-          <a:bodyPr anchor="t">
-            <a:normAutofit/>
-          </a:bodyPr>
-          <a:p>
-            <a:pPr defTabSz="343080">
-              <a:lnSpc>
-                <a:spcPct val="100000"/>
-              </a:lnSpc>
-              <a:spcBef>
-                <a:spcPts val="479"/>
-              </a:spcBef>
-              <a:tabLst>
-                <a:tab algn="l" pos="0"/>
-              </a:tabLst>
-            </a:pPr>
-            <a:r>
-              <a:rPr b="0" lang="en-US" sz="2400" spc="-1" strike="noStrike">
-                <a:solidFill>
-                  <a:schemeClr val="dk1"/>
-                </a:solidFill>
-                <a:latin typeface="Calibri"/>
-              </a:rPr>
-              <a:t>Missingness is almost never random:</a:t>
-            </a:r>
-            <a:endParaRPr b="0" lang="en-US" sz="2400" spc="-1" strike="noStrike">
-              <a:solidFill>
-                <a:schemeClr val="dk1"/>
-              </a:solidFill>
-              <a:latin typeface="Calibri"/>
-            </a:endParaRPr>
-          </a:p>
-          <a:p>
-            <a:pPr marL="343080" indent="-343080" defTabSz="343080">
-              <a:lnSpc>
-                <a:spcPct val="100000"/>
-              </a:lnSpc>
-              <a:spcBef>
-                <a:spcPts val="479"/>
-              </a:spcBef>
-              <a:buClr>
-                <a:srgbClr val="000000"/>
-              </a:buClr>
-              <a:buFont typeface="Arial"/>
-              <a:buChar char="•"/>
-              <a:tabLst>
-                <a:tab algn="l" pos="0"/>
-              </a:tabLst>
-            </a:pPr>
-            <a:r>
-              <a:rPr b="0" lang="en-US" sz="2400" spc="-1" strike="noStrike">
-                <a:solidFill>
-                  <a:schemeClr val="dk1"/>
-                </a:solidFill>
-                <a:latin typeface="Calibri"/>
-              </a:rPr>
-              <a:t>A test is measured because the clinician suspects a problem</a:t>
-            </a:r>
-            <a:endParaRPr b="0" lang="en-US" sz="2400" spc="-1" strike="noStrike">
-              <a:solidFill>
-                <a:schemeClr val="dk1"/>
-              </a:solidFill>
-              <a:latin typeface="Calibri"/>
-            </a:endParaRPr>
-          </a:p>
-          <a:p>
-            <a:pPr marL="343080" indent="-343080" defTabSz="343080">
-              <a:lnSpc>
-                <a:spcPct val="100000"/>
-              </a:lnSpc>
-              <a:spcBef>
-                <a:spcPts val="479"/>
-              </a:spcBef>
-              <a:buClr>
-                <a:srgbClr val="000000"/>
-              </a:buClr>
-              <a:buFont typeface="Arial"/>
-              <a:buChar char="•"/>
-              <a:tabLst>
-                <a:tab algn="l" pos="0"/>
-              </a:tabLst>
-            </a:pPr>
-            <a:r>
-              <a:rPr b="0" lang="en-US" sz="2400" spc="-1" strike="noStrike">
-                <a:solidFill>
-                  <a:schemeClr val="dk1"/>
-                </a:solidFill>
-                <a:latin typeface="Calibri"/>
-              </a:rPr>
-              <a:t>A patient with no lab results is usually very healthy</a:t>
-            </a:r>
-            <a:endParaRPr b="0" lang="en-US" sz="2400" spc="-1" strike="noStrike">
-              <a:solidFill>
-                <a:schemeClr val="dk1"/>
-              </a:solidFill>
-              <a:latin typeface="Calibri"/>
-            </a:endParaRPr>
-          </a:p>
-          <a:p>
-            <a:pPr defTabSz="343080">
-              <a:lnSpc>
-                <a:spcPct val="100000"/>
-              </a:lnSpc>
-              <a:spcBef>
-                <a:spcPts val="479"/>
-              </a:spcBef>
-              <a:tabLst>
-                <a:tab algn="l" pos="0"/>
-              </a:tabLst>
-            </a:pPr>
-            <a:r>
-              <a:rPr b="0" lang="en-US" sz="2400" spc="-1" strike="noStrike">
-                <a:solidFill>
-                  <a:schemeClr val="dk1"/>
-                </a:solidFill>
-                <a:latin typeface="Calibri"/>
-              </a:rPr>
-              <a:t>The </a:t>
-            </a:r>
-            <a:r>
-              <a:rPr b="0" i="1" lang="en-US" sz="2400" spc="-1" strike="noStrike">
-                <a:solidFill>
-                  <a:schemeClr val="dk1"/>
-                </a:solidFill>
-                <a:latin typeface="Calibri"/>
-              </a:rPr>
-              <a:t>absence</a:t>
-            </a:r>
-            <a:r>
-              <a:rPr b="0" lang="en-US" sz="2400" spc="-1" strike="noStrike">
-                <a:solidFill>
-                  <a:schemeClr val="dk1"/>
-                </a:solidFill>
-                <a:latin typeface="Calibri"/>
-              </a:rPr>
-              <a:t> of a test can predict the outcome better than the test’s value</a:t>
-            </a:r>
-            <a:endParaRPr b="0" lang="en-US" sz="2400" spc="-1" strike="noStrike">
-              <a:solidFill>
-                <a:schemeClr val="dk1"/>
-              </a:solidFill>
-              <a:latin typeface="Calibri"/>
-            </a:endParaRPr>
-          </a:p>
-        </p:txBody>
-      </p:sp>
     </p:spTree>
   </p:cSld>
   <mc:AlternateContent>
@@ -10404,62 +10898,7 @@
       </p:grpSpPr>
       <p:sp>
         <p:nvSpPr>
-          <p:cNvPr id="101" name="PlaceHolder 1"/>
-          <p:cNvSpPr>
-            <a:spLocks noGrp="1"/>
-          </p:cNvSpPr>
-          <p:nvPr>
-            <p:ph type="title"/>
-          </p:nvPr>
-        </p:nvSpPr>
-        <p:spPr>
-          <a:xfrm>
-            <a:off x="457200" y="205920"/>
-            <a:ext cx="8229240" cy="856800"/>
-          </a:xfrm>
-          <a:prstGeom prst="rect">
-            <a:avLst/>
-          </a:prstGeom>
-          <a:noFill/>
-          <a:ln w="0">
-            <a:noFill/>
-          </a:ln>
-        </p:spPr>
-        <p:txBody>
-          <a:bodyPr lIns="91440" rIns="91440" tIns="45720" bIns="45720" anchor="ctr">
-            <a:normAutofit/>
-          </a:bodyPr>
-          <a:p>
-            <a:pPr indent="0" algn="ctr" defTabSz="343080">
-              <a:lnSpc>
-                <a:spcPct val="100000"/>
-              </a:lnSpc>
-              <a:buNone/>
-              <a:tabLst>
-                <a:tab algn="l" pos="0"/>
-              </a:tabLst>
-            </a:pPr>
-            <a:r>
-              <a:rPr b="0" lang="en-US" sz="3300" spc="-1" strike="noStrike">
-                <a:solidFill>
-                  <a:schemeClr val="dk1"/>
-                </a:solidFill>
-                <a:latin typeface="Calibri"/>
-              </a:rPr>
-              <a:t>Class imbalance</a:t>
-            </a:r>
-            <a:endParaRPr b="0" lang="en-US" sz="3300" spc="-1" strike="noStrike">
-              <a:solidFill>
-                <a:schemeClr val="dk1"/>
-              </a:solidFill>
-              <a:latin typeface="Calibri"/>
-            </a:endParaRPr>
-          </a:p>
-        </p:txBody>
-      </p:sp>
-      <p:sp>
-        <p:nvSpPr>
-          <p:cNvPr id="102" name="PlaceHolder 2"/>
+          <p:cNvPr id="99" name="PlaceHolder 1"/>
           <p:cNvSpPr>
             <a:spLocks noGrp="1"/>
           </p:cNvSpPr>
@@ -10485,23 +10924,6 @@
             <a:normAutofit/>
           </a:bodyPr>
           <a:p>
-            <a:pPr indent="0" defTabSz="343080">
-              <a:lnSpc>
-                <a:spcPct val="100000"/>
-              </a:lnSpc>
-              <a:spcBef>
-                <a:spcPts val="479"/>
-              </a:spcBef>
-              <a:buNone/>
-            </a:pPr>
-            <a:endParaRPr b="0" lang="en-US" sz="2400" spc="-1" strike="noStrike">
-              <a:solidFill>
-                <a:schemeClr val="dk1"/>
-              </a:solidFill>
-              <a:latin typeface="Calibri"/>
-            </a:endParaRPr>
-          </a:p>
-          <a:p>
             <a:pPr marL="343080" indent="-343080" defTabSz="343080">
               <a:lnSpc>
                 <a:spcPct val="100000"/>
@@ -10522,51 +10944,8 @@
                 </a:solidFill>
                 <a:latin typeface="Calibri"/>
               </a:rPr>
-              <a:t>Rare disease screening: 1 in 10 000</a:t>
-            </a:r>
-            <a:endParaRPr b="0" lang="en-US" sz="2400" spc="-1" strike="noStrike">
-              <a:solidFill>
-                <a:schemeClr val="dk1"/>
-              </a:solidFill>
-              <a:latin typeface="Calibri"/>
-            </a:endParaRPr>
-          </a:p>
-          <a:p>
-            <a:pPr marL="343080" indent="0" defTabSz="343080">
-              <a:lnSpc>
-                <a:spcPct val="100000"/>
-              </a:lnSpc>
-              <a:spcBef>
-                <a:spcPts val="479"/>
-              </a:spcBef>
-              <a:buNone/>
-            </a:pPr>
-            <a:r>
-              <a:rPr b="0" i="1" lang="en-US" sz="2400" spc="-1" strike="noStrike">
-                <a:solidFill>
-                  <a:schemeClr val="dk1"/>
-                </a:solidFill>
-                <a:latin typeface="Calibri"/>
-              </a:rPr>
-              <a:t>A model that predicts “no” always is 99.99% accurate</a:t>
-            </a:r>
-            <a:endParaRPr b="0" lang="en-US" sz="2400" spc="-1" strike="noStrike">
-              <a:solidFill>
-                <a:schemeClr val="dk1"/>
-              </a:solidFill>
-              <a:latin typeface="Calibri"/>
-            </a:endParaRPr>
-          </a:p>
-          <a:p>
-            <a:pPr indent="0" defTabSz="343080">
-              <a:lnSpc>
-                <a:spcPct val="100000"/>
-              </a:lnSpc>
-              <a:spcBef>
-                <a:spcPts val="479"/>
-              </a:spcBef>
-              <a:buNone/>
-            </a:pPr>
+              <a:t>Missingness is almost never random:</a:t>
+            </a:r>
             <a:endParaRPr b="0" lang="en-US" sz="2400" spc="-1" strike="noStrike">
               <a:solidFill>
                 <a:schemeClr val="dk1"/>
@@ -10595,7 +10974,25 @@
                 </a:solidFill>
                 <a:latin typeface="Calibri"/>
               </a:rPr>
-              <a:t>Blood types are not equally spread on the population</a:t>
+              <a:t>A test is measured </a:t>
+            </a:r>
+            <a:r>
+              <a:rPr b="1" lang="en-US" sz="2400" spc="-1" strike="noStrike">
+                <a:solidFill>
+                  <a:schemeClr val="dk1"/>
+                </a:solidFill>
+                <a:latin typeface="Calibri"/>
+              </a:rPr>
+              <a:t>because</a:t>
+            </a:r>
+            <a:r>
+              <a:rPr b="0" lang="en-US" sz="2400" spc="-1" strike="noStrike">
+                <a:solidFill>
+                  <a:schemeClr val="dk1"/>
+                </a:solidFill>
+                <a:latin typeface="Calibri"/>
+              </a:rPr>
+              <a:t> the clinician suspects a problem</a:t>
             </a:r>
             <a:endParaRPr b="0" lang="en-US" sz="2400" spc="-1" strike="noStrike">
               <a:solidFill>
@@ -10605,23 +11002,27 @@
             </a:endParaRPr>
           </a:p>
           <a:p>
-            <a:pPr marL="343080" indent="0" defTabSz="343080">
+            <a:pPr marL="343080" indent="-343080" defTabSz="343080">
               <a:lnSpc>
                 <a:spcPct val="100000"/>
               </a:lnSpc>
               <a:spcBef>
                 <a:spcPts val="479"/>
               </a:spcBef>
-              <a:buNone/>
-            </a:pPr>
-            <a:r>
-              <a:rPr b="0" i="1" lang="en-US" sz="2400" spc="-1" strike="noStrike">
-                <a:solidFill>
-                  <a:schemeClr val="dk1"/>
-                </a:solidFill>
-                <a:latin typeface="Calibri"/>
-              </a:rPr>
-              <a:t>The imbalance is changing according to the world regions</a:t>
+              <a:buClr>
+                <a:srgbClr val="000000"/>
+              </a:buClr>
+              <a:buFont typeface="Arial"/>
+              <a:buChar char="•"/>
+            </a:pPr>
+            <a:r>
+              <a:rPr b="0" lang="en-US" sz="2400" spc="-1" strike="noStrike">
+                <a:solidFill>
+                  <a:schemeClr val="dk1"/>
+                </a:solidFill>
+                <a:latin typeface="Calibri"/>
+              </a:rPr>
+              <a:t>A patient with no lab results is usually very healthy</a:t>
             </a:r>
             <a:endParaRPr b="0" lang="en-US" sz="2400" spc="-1" strike="noStrike">
               <a:solidFill>
@@ -10631,15 +11032,28 @@
             </a:endParaRPr>
           </a:p>
           <a:p>
-            <a:pPr marL="343080" indent="0" defTabSz="343080">
+            <a:pPr marL="343080" indent="-343080" defTabSz="343080">
               <a:lnSpc>
                 <a:spcPct val="100000"/>
               </a:lnSpc>
               <a:spcBef>
                 <a:spcPts val="479"/>
               </a:spcBef>
-              <a:buNone/>
-            </a:pPr>
+              <a:buClr>
+                <a:srgbClr val="000000"/>
+              </a:buClr>
+              <a:buFont typeface="Arial"/>
+              <a:buChar char="•"/>
+            </a:pPr>
+            <a:r>
+              <a:rPr b="0" lang="en-US" sz="2400" spc="-1" strike="noStrike">
+                <a:solidFill>
+                  <a:schemeClr val="dk1"/>
+                </a:solidFill>
+                <a:latin typeface="Calibri"/>
+              </a:rPr>
+              <a:t>The </a:t>
+            </a:r>
             <a:r>
               <a:rPr b="0" i="1" lang="en-US" sz="2400" spc="-1" strike="noStrike">
                 <a:solidFill>
@@ -10647,7 +11061,16 @@
                 </a:solidFill>
                 <a:latin typeface="Calibri"/>
               </a:rPr>
-              <a:t>=&gt; Can lead to distribution shift</a:t>
+              <a:t>absence</a:t>
+            </a:r>
+            <a:r>
+              <a:rPr b="0" lang="en-US" sz="2400" spc="-1" strike="noStrike">
+                <a:solidFill>
+                  <a:schemeClr val="dk1"/>
+                </a:solidFill>
+                <a:latin typeface="Calibri"/>
+              </a:rPr>
+              <a:t> of a test can predict the outcome better than the test’s value</a:t>
             </a:r>
             <a:endParaRPr b="0" lang="en-US" sz="2400" spc="-1" strike="noStrike">
               <a:solidFill>
@@ -10690,7 +11113,7 @@
       </p:grpSpPr>
       <p:sp>
         <p:nvSpPr>
-          <p:cNvPr id="103" name="PlaceHolder 1"/>
+          <p:cNvPr id="100" name="PlaceHolder 1"/>
           <p:cNvSpPr>
             <a:spLocks noGrp="1"/>
           </p:cNvSpPr>
@@ -10732,7 +11155,7 @@
                 </a:solidFill>
                 <a:latin typeface="Calibri"/>
               </a:rPr>
-              <a:t>Distribution shift</a:t>
+              <a:t>Class imbalance</a:t>
             </a:r>
             <a:endParaRPr b="0" lang="en-US" sz="3300" spc="-1" strike="noStrike">
               <a:solidFill>
@@ -10745,7 +11168,7 @@
       </p:sp>
       <p:sp>
         <p:nvSpPr>
-          <p:cNvPr id="104" name="PlaceHolder 2"/>
+          <p:cNvPr id="101" name="PlaceHolder 2"/>
           <p:cNvSpPr>
             <a:spLocks noGrp="1"/>
           </p:cNvSpPr>
@@ -10771,12 +11194,42 @@
             <a:normAutofit/>
           </a:bodyPr>
           <a:p>
-            <a:pPr indent="0" defTabSz="343080">
+            <a:pPr marL="343080" indent="-343080" defTabSz="343080">
               <a:lnSpc>
                 <a:spcPct val="100000"/>
               </a:lnSpc>
               <a:spcBef>
                 <a:spcPts val="479"/>
+              </a:spcBef>
+              <a:buClr>
+                <a:srgbClr val="000000"/>
+              </a:buClr>
+              <a:buFont typeface="Arial"/>
+              <a:buChar char="•"/>
+            </a:pPr>
+            <a:r>
+              <a:rPr b="0" lang="en-US" sz="2400" spc="-1" strike="noStrike">
+                <a:solidFill>
+                  <a:schemeClr val="dk1"/>
+                </a:solidFill>
+                <a:latin typeface="Calibri"/>
+              </a:rPr>
+              <a:t>Rare disease screening: 1 in 10 000</a:t>
+            </a:r>
+            <a:endParaRPr b="0" lang="en-US" sz="2400" spc="-1" strike="noStrike">
+              <a:solidFill>
+                <a:schemeClr val="dk1"/>
+              </a:solidFill>
+              <a:latin typeface="Calibri"/>
+            </a:endParaRPr>
+          </a:p>
+          <a:p>
+            <a:pPr marL="343080" indent="0" defTabSz="343080">
+              <a:lnSpc>
+                <a:spcPct val="100000"/>
+              </a:lnSpc>
+              <a:spcBef>
+                <a:spcPts val="420"/>
               </a:spcBef>
               <a:buNone/>
               <a:tabLst>
@@ -10784,15 +11237,15 @@
               </a:tabLst>
             </a:pPr>
             <a:r>
-              <a:rPr b="0" lang="en-US" sz="2400" spc="-1" strike="noStrike">
-                <a:solidFill>
-                  <a:schemeClr val="dk1"/>
-                </a:solidFill>
-                <a:latin typeface="Calibri"/>
-              </a:rPr>
-              <a:t>Your model is trained on one slice of the world, then deployed in another:</a:t>
-            </a:r>
-            <a:endParaRPr b="0" lang="en-US" sz="2400" spc="-1" strike="noStrike">
+              <a:rPr b="0" lang="en-US" sz="2100" spc="-1" strike="noStrike">
+                <a:solidFill>
+                  <a:schemeClr val="dk1"/>
+                </a:solidFill>
+                <a:latin typeface="Calibri"/>
+              </a:rPr>
+              <a:t>A model that predicts “no” always is 99.99% accurate</a:t>
+            </a:r>
+            <a:endParaRPr b="0" lang="en-US" sz="2100" spc="-1" strike="noStrike">
               <a:solidFill>
                 <a:schemeClr val="dk1"/>
               </a:solidFill>
@@ -10817,22 +11270,13 @@
               </a:tabLst>
             </a:pPr>
             <a:r>
-              <a:rPr b="1" lang="en-US" sz="2400" spc="-1" strike="noStrike">
-                <a:solidFill>
-                  <a:schemeClr val="dk1"/>
-                </a:solidFill>
-                <a:latin typeface="Calibri"/>
-              </a:rPr>
-              <a:t>Covariate shift: </a:t>
-            </a:r>
-            <a:r>
               <a:rPr b="0" lang="en-US" sz="2400" spc="-1" strike="noStrike">
                 <a:solidFill>
                   <a:schemeClr val="dk1"/>
                 </a:solidFill>
                 <a:latin typeface="Calibri"/>
               </a:rPr>
-              <a:t>P(X) changes: new hospital, new scanner, new population</a:t>
+              <a:t>Blood types are not equally spread on the population</a:t>
             </a:r>
             <a:endParaRPr b="0" lang="en-US" sz="2400" spc="-1" strike="noStrike">
               <a:solidFill>
@@ -10842,41 +11286,28 @@
             </a:endParaRPr>
           </a:p>
           <a:p>
-            <a:pPr marL="343080" indent="-343080" defTabSz="343080">
+            <a:pPr marL="343080" indent="0" defTabSz="343080">
               <a:lnSpc>
                 <a:spcPct val="100000"/>
               </a:lnSpc>
               <a:spcBef>
-                <a:spcPts val="479"/>
+                <a:spcPts val="420"/>
               </a:spcBef>
-              <a:buClr>
-                <a:srgbClr val="000000"/>
-              </a:buClr>
-              <a:buFont typeface="Arial"/>
-              <a:buChar char="•"/>
+              <a:buNone/>
               <a:tabLst>
                 <a:tab algn="l" pos="0"/>
               </a:tabLst>
             </a:pPr>
             <a:r>
-              <a:rPr b="1" lang="en-US" sz="2400" spc="-1" strike="noStrike">
-                <a:solidFill>
-                  <a:schemeClr val="dk1"/>
-                </a:solidFill>
-                <a:latin typeface="Calibri"/>
-              </a:rPr>
-              <a:t>Label shift:</a:t>
-            </a:r>
-            <a:r>
-              <a:rPr b="0" lang="en-US" sz="2400" spc="-1" strike="noStrike">
-                <a:solidFill>
-                  <a:schemeClr val="dk1"/>
-                </a:solidFill>
-                <a:latin typeface="Calibri"/>
-              </a:rPr>
-              <a:t> P(Y) changes: a new variant, a new season</a:t>
-            </a:r>
-            <a:endParaRPr b="0" lang="en-US" sz="2400" spc="-1" strike="noStrike">
+              <a:rPr b="0" lang="en-US" sz="2100" spc="-1" strike="noStrike">
+                <a:solidFill>
+                  <a:schemeClr val="dk1"/>
+                </a:solidFill>
+                <a:latin typeface="Calibri"/>
+              </a:rPr>
+              <a:t>The imbalance is changing according to the world regions</a:t>
+            </a:r>
+            <a:endParaRPr b="0" lang="en-US" sz="2100" spc="-1" strike="noStrike">
               <a:solidFill>
                 <a:schemeClr val="dk1"/>
               </a:solidFill>
@@ -10884,41 +11315,28 @@
             </a:endParaRPr>
           </a:p>
           <a:p>
-            <a:pPr marL="343080" indent="-343080" defTabSz="343080">
+            <a:pPr marL="343080" indent="0" defTabSz="343080">
               <a:lnSpc>
                 <a:spcPct val="100000"/>
               </a:lnSpc>
               <a:spcBef>
-                <a:spcPts val="479"/>
+                <a:spcPts val="420"/>
               </a:spcBef>
-              <a:buClr>
-                <a:srgbClr val="000000"/>
-              </a:buClr>
-              <a:buFont typeface="Arial"/>
-              <a:buChar char="•"/>
+              <a:buNone/>
               <a:tabLst>
                 <a:tab algn="l" pos="0"/>
               </a:tabLst>
             </a:pPr>
             <a:r>
-              <a:rPr b="1" lang="en-US" sz="2400" spc="-1" strike="noStrike">
-                <a:solidFill>
-                  <a:schemeClr val="dk1"/>
-                </a:solidFill>
-                <a:latin typeface="Calibri"/>
-              </a:rPr>
-              <a:t>Concept drift:</a:t>
-            </a:r>
-            <a:r>
-              <a:rPr b="0" lang="en-US" sz="2400" spc="-1" strike="noStrike">
-                <a:solidFill>
-                  <a:schemeClr val="dk1"/>
-                </a:solidFill>
-                <a:latin typeface="Calibri"/>
-              </a:rPr>
-              <a:t> P(Y | X) changes: treatment guidelines are updated</a:t>
-            </a:r>
-            <a:endParaRPr b="0" lang="en-US" sz="2400" spc="-1" strike="noStrike">
+              <a:rPr b="0" lang="en-US" sz="2100" spc="-1" strike="noStrike">
+                <a:solidFill>
+                  <a:schemeClr val="dk1"/>
+                </a:solidFill>
+                <a:latin typeface="Calibri"/>
+              </a:rPr>
+              <a:t>=&gt; Can lead to distribution shift</a:t>
+            </a:r>
+            <a:endParaRPr b="0" lang="en-US" sz="2100" spc="-1" strike="noStrike">
               <a:solidFill>
                 <a:schemeClr val="dk1"/>
               </a:solidFill>
@@ -10959,7 +11377,7 @@
       </p:grpSpPr>
       <p:sp>
         <p:nvSpPr>
-          <p:cNvPr id="105" name="PlaceHolder 1"/>
+          <p:cNvPr id="102" name="PlaceHolder 1"/>
           <p:cNvSpPr>
             <a:spLocks noGrp="1"/>
           </p:cNvSpPr>
@@ -11001,7 +11419,7 @@
                 </a:solidFill>
                 <a:latin typeface="Calibri"/>
               </a:rPr>
-              <a:t>Shortcuts</a:t>
+              <a:t>Distribution shift</a:t>
             </a:r>
             <a:endParaRPr b="0" lang="en-US" sz="3300" spc="-1" strike="noStrike">
               <a:solidFill>
@@ -11014,7 +11432,7 @@
       </p:sp>
       <p:sp>
         <p:nvSpPr>
-          <p:cNvPr id="106" name="PlaceHolder 2"/>
+          <p:cNvPr id="103" name="PlaceHolder 2"/>
           <p:cNvSpPr>
             <a:spLocks noGrp="1"/>
           </p:cNvSpPr>
@@ -11059,28 +11477,8 @@
                 </a:solidFill>
                 <a:latin typeface="Calibri"/>
               </a:rPr>
-              <a:t>Models learn whatever correlates with y in the data.</a:t>
-            </a:r>
-            <a:endParaRPr b="0" lang="en-US" sz="2400" spc="-1" strike="noStrike">
-              <a:solidFill>
-                <a:schemeClr val="dk1"/>
-              </a:solidFill>
-              <a:latin typeface="Calibri"/>
-            </a:endParaRPr>
-          </a:p>
-          <a:p>
-            <a:pPr indent="0" defTabSz="343080">
-              <a:lnSpc>
-                <a:spcPct val="100000"/>
-              </a:lnSpc>
-              <a:spcBef>
-                <a:spcPts val="479"/>
-              </a:spcBef>
-              <a:buNone/>
-              <a:tabLst>
-                <a:tab algn="l" pos="0"/>
-              </a:tabLst>
-            </a:pPr>
+              <a:t>Your model is trained on one slice of the world, then deployed in another:</a:t>
+            </a:r>
             <a:endParaRPr b="0" lang="en-US" sz="2400" spc="-1" strike="noStrike">
               <a:solidFill>
                 <a:schemeClr val="dk1"/>
@@ -11106,13 +11504,22 @@
               </a:tabLst>
             </a:pPr>
             <a:r>
+              <a:rPr b="1" lang="en-US" sz="2400" spc="-1" strike="noStrike">
+                <a:solidFill>
+                  <a:schemeClr val="dk1"/>
+                </a:solidFill>
+                <a:latin typeface="Calibri"/>
+              </a:rPr>
+              <a:t>Covariate shift:</a:t>
+            </a:r>
+            <a:r>
               <a:rPr b="0" lang="en-US" sz="2400" spc="-1" strike="noStrike">
                 <a:solidFill>
                   <a:schemeClr val="dk1"/>
                 </a:solidFill>
                 <a:latin typeface="Calibri"/>
               </a:rPr>
-              <a:t>Pneumonia detectors that learned the portable X-ray marker (sicker patients get bedside imaging)</a:t>
+              <a:t> P(X) changes: new hospital, new scanner, new population</a:t>
             </a:r>
             <a:endParaRPr b="0" lang="en-US" sz="2400" spc="-1" strike="noStrike">
               <a:solidFill>
@@ -11139,13 +11546,22 @@
               </a:tabLst>
             </a:pPr>
             <a:r>
+              <a:rPr b="1" lang="en-US" sz="2400" spc="-1" strike="noStrike">
+                <a:solidFill>
+                  <a:schemeClr val="dk1"/>
+                </a:solidFill>
+                <a:latin typeface="Calibri"/>
+              </a:rPr>
+              <a:t>Label shift:</a:t>
+            </a:r>
+            <a:r>
               <a:rPr b="0" lang="en-US" sz="2400" spc="-1" strike="noStrike">
                 <a:solidFill>
                   <a:schemeClr val="dk1"/>
                 </a:solidFill>
                 <a:latin typeface="Calibri"/>
               </a:rPr>
-              <a:t>Skin lesion classifiers that learned the surgical ruler placed next to malignant lesions</a:t>
+              <a:t> P(Y) changes: a new variant, a new season</a:t>
             </a:r>
             <a:endParaRPr b="0" lang="en-US" sz="2400" spc="-1" strike="noStrike">
               <a:solidFill>
@@ -11172,13 +11588,22 @@
               </a:tabLst>
             </a:pPr>
             <a:r>
+              <a:rPr b="1" lang="en-US" sz="2400" spc="-1" strike="noStrike">
+                <a:solidFill>
+                  <a:schemeClr val="dk1"/>
+                </a:solidFill>
+                <a:latin typeface="Calibri"/>
+              </a:rPr>
+              <a:t>Concept drift:</a:t>
+            </a:r>
+            <a:r>
               <a:rPr b="0" lang="en-US" sz="2400" spc="-1" strike="noStrike">
                 <a:solidFill>
                   <a:schemeClr val="dk1"/>
                 </a:solidFill>
                 <a:latin typeface="Calibri"/>
               </a:rPr>
-              <a:t>Portrait to age models looking at ears</a:t>
+              <a:t> P(Y | X) changes: treatment guidelines are updated</a:t>
             </a:r>
             <a:endParaRPr b="0" lang="en-US" sz="2400" spc="-1" strike="noStrike">
               <a:solidFill>
@@ -11221,7 +11646,7 @@
       </p:grpSpPr>
       <p:sp>
         <p:nvSpPr>
-          <p:cNvPr id="107" name="PlaceHolder 1"/>
+          <p:cNvPr id="104" name="PlaceHolder 1"/>
           <p:cNvSpPr>
             <a:spLocks noGrp="1"/>
           </p:cNvSpPr>
@@ -11263,7 +11688,7 @@
                 </a:solidFill>
                 <a:latin typeface="Calibri"/>
               </a:rPr>
-              <a:t>Leakage</a:t>
+              <a:t>Shortcuts</a:t>
             </a:r>
             <a:endParaRPr b="0" lang="en-US" sz="3300" spc="-1" strike="noStrike">
               <a:solidFill>
@@ -11276,7 +11701,7 @@
       </p:sp>
       <p:sp>
         <p:nvSpPr>
-          <p:cNvPr id="108" name="PlaceHolder 2"/>
+          <p:cNvPr id="105" name="PlaceHolder 2"/>
           <p:cNvSpPr>
             <a:spLocks noGrp="1"/>
           </p:cNvSpPr>
@@ -11321,48 +11746,17 @@
                 </a:solidFill>
                 <a:latin typeface="Calibri"/>
               </a:rPr>
-              <a:t>Information at training time that will not exist at prediction time.</a:t>
-            </a:r>
-            <a:endParaRPr b="0" lang="en-US" sz="2400" spc="-1" strike="noStrike">
-              <a:solidFill>
-                <a:schemeClr val="dk1"/>
-              </a:solidFill>
-              <a:latin typeface="Calibri"/>
-            </a:endParaRPr>
-          </a:p>
-          <a:p>
-            <a:pPr indent="0" defTabSz="343080">
-              <a:lnSpc>
-                <a:spcPct val="100000"/>
-              </a:lnSpc>
-              <a:spcBef>
-                <a:spcPts val="479"/>
-              </a:spcBef>
-              <a:buNone/>
-              <a:tabLst>
-                <a:tab algn="l" pos="0"/>
-              </a:tabLst>
-            </a:pPr>
-            <a:endParaRPr b="0" lang="en-US" sz="2400" spc="-1" strike="noStrike">
-              <a:solidFill>
-                <a:schemeClr val="dk1"/>
-              </a:solidFill>
-              <a:latin typeface="Calibri"/>
-            </a:endParaRPr>
-          </a:p>
-          <a:p>
-            <a:pPr indent="0" defTabSz="343080">
-              <a:lnSpc>
-                <a:spcPct val="100000"/>
-              </a:lnSpc>
-              <a:spcBef>
-                <a:spcPts val="479"/>
-              </a:spcBef>
-              <a:buNone/>
-              <a:tabLst>
-                <a:tab algn="l" pos="0"/>
-              </a:tabLst>
-            </a:pPr>
+              <a:t>Models learn whatever correlates with y in </a:t>
+            </a:r>
+            <a:r>
+              <a:rPr b="0" i="1" lang="en-US" sz="2400" spc="-1" strike="noStrike">
+                <a:solidFill>
+                  <a:schemeClr val="dk1"/>
+                </a:solidFill>
+                <a:latin typeface="Calibri"/>
+              </a:rPr>
+              <a:t>the</a:t>
+            </a:r>
             <a:r>
               <a:rPr b="0" lang="en-US" sz="2400" spc="-1" strike="noStrike">
                 <a:solidFill>
@@ -11370,7 +11764,7 @@
                 </a:solidFill>
                 <a:latin typeface="Calibri"/>
               </a:rPr>
-              <a:t>Typically:</a:t>
+              <a:t> data.</a:t>
             </a:r>
             <a:endParaRPr b="0" lang="en-US" sz="2400" spc="-1" strike="noStrike">
               <a:solidFill>
@@ -11403,7 +11797,25 @@
                 </a:solidFill>
                 <a:latin typeface="Calibri"/>
               </a:rPr>
-              <a:t>The same patient in both train and test (e.g. duplicated)</a:t>
+              <a:t>Pneumonia detectors that learned the </a:t>
+            </a:r>
+            <a:r>
+              <a:rPr b="1" lang="en-US" sz="2400" spc="-1" strike="noStrike">
+                <a:solidFill>
+                  <a:schemeClr val="dk1"/>
+                </a:solidFill>
+                <a:latin typeface="Calibri"/>
+              </a:rPr>
+              <a:t>portable X-ray marker</a:t>
+            </a:r>
+            <a:r>
+              <a:rPr b="0" lang="en-US" sz="2400" spc="-1" strike="noStrike">
+                <a:solidFill>
+                  <a:schemeClr val="dk1"/>
+                </a:solidFill>
+                <a:latin typeface="Calibri"/>
+              </a:rPr>
+              <a:t> (sicker patients get bedside imaging)</a:t>
             </a:r>
             <a:endParaRPr b="0" lang="en-US" sz="2400" spc="-1" strike="noStrike">
               <a:solidFill>
@@ -11436,25 +11848,25 @@
                 </a:solidFill>
                 <a:latin typeface="Calibri"/>
               </a:rPr>
-              <a:t>Feature that is a deterministic function of the outcome (e.g. </a:t>
+              <a:t>Skin lesion classifiers that learned the </a:t>
+            </a:r>
+            <a:r>
+              <a:rPr b="1" lang="en-US" sz="2400" spc="-1" strike="noStrike">
+                <a:solidFill>
+                  <a:schemeClr val="dk1"/>
+                </a:solidFill>
+                <a:latin typeface="Calibri"/>
+              </a:rPr>
+              <a:t>surgical ruler</a:t>
             </a:r>
             <a:r>
               <a:rPr b="0" lang="en-US" sz="2400" spc="-1" strike="noStrike">
                 <a:solidFill>
                   <a:schemeClr val="dk1"/>
                 </a:solidFill>
-                <a:latin typeface="Courier New"/>
-              </a:rPr>
-              <a:t>discharge_location == 'DIED'</a:t>
-            </a:r>
-            <a:r>
-              <a:rPr b="0" lang="en-US" sz="2400" spc="-1" strike="noStrike">
-                <a:solidFill>
-                  <a:schemeClr val="dk1"/>
-                </a:solidFill>
-                <a:latin typeface="Calibri"/>
-              </a:rPr>
-              <a:t>)</a:t>
+                <a:latin typeface="Calibri"/>
+              </a:rPr>
+              <a:t> placed next to malignant lesions</a:t>
             </a:r>
             <a:endParaRPr b="0" lang="en-US" sz="2400" spc="-1" strike="noStrike">
               <a:solidFill>
@@ -11487,28 +11899,35 @@
                 </a:solidFill>
                 <a:latin typeface="Calibri"/>
               </a:rPr>
-              <a:t>Bug in the train/test split</a:t>
-            </a:r>
-            <a:endParaRPr b="0" lang="en-US" sz="2400" spc="-1" strike="noStrike">
-              <a:solidFill>
-                <a:schemeClr val="dk1"/>
-              </a:solidFill>
-              <a:latin typeface="Calibri"/>
-            </a:endParaRPr>
-          </a:p>
-          <a:p>
-            <a:pPr indent="0" defTabSz="343080">
-              <a:lnSpc>
-                <a:spcPct val="100000"/>
-              </a:lnSpc>
-              <a:spcBef>
-                <a:spcPts val="479"/>
-              </a:spcBef>
-              <a:buNone/>
-              <a:tabLst>
-                <a:tab algn="l" pos="0"/>
-              </a:tabLst>
-            </a:pPr>
+              <a:t>Portrait to </a:t>
+            </a:r>
+            <a:r>
+              <a:rPr b="1" lang="en-US" sz="2400" spc="-1" strike="noStrike">
+                <a:solidFill>
+                  <a:schemeClr val="dk1"/>
+                </a:solidFill>
+                <a:latin typeface="Calibri"/>
+              </a:rPr>
+              <a:t>age</a:t>
+            </a:r>
+            <a:r>
+              <a:rPr b="0" lang="en-US" sz="2400" spc="-1" strike="noStrike">
+                <a:solidFill>
+                  <a:schemeClr val="dk1"/>
+                </a:solidFill>
+                <a:latin typeface="Calibri"/>
+              </a:rPr>
+              <a:t> models looking at </a:t>
+            </a:r>
+            <a:r>
+              <a:rPr b="1" lang="en-US" sz="2400" spc="-1" strike="noStrike">
+                <a:solidFill>
+                  <a:schemeClr val="dk1"/>
+                </a:solidFill>
+                <a:latin typeface="Calibri"/>
+              </a:rPr>
+              <a:t>ears size</a:t>
+            </a:r>
             <a:endParaRPr b="0" lang="en-US" sz="2400" spc="-1" strike="noStrike">
               <a:solidFill>
                 <a:schemeClr val="dk1"/>
@@ -11550,7 +11969,7 @@
       </p:grpSpPr>
       <p:sp>
         <p:nvSpPr>
-          <p:cNvPr id="109" name="PlaceHolder 1"/>
+          <p:cNvPr id="106" name="PlaceHolder 1"/>
           <p:cNvSpPr>
             <a:spLocks noGrp="1"/>
           </p:cNvSpPr>
@@ -11592,7 +12011,7 @@
                 </a:solidFill>
                 <a:latin typeface="Calibri"/>
               </a:rPr>
-              <a:t>Sanity checklist for any new dataset</a:t>
+              <a:t>Leakage</a:t>
             </a:r>
             <a:endParaRPr b="0" lang="en-US" sz="3300" spc="-1" strike="noStrike">
               <a:solidFill>
@@ -11605,7 +12024,7 @@
       </p:sp>
       <p:sp>
         <p:nvSpPr>
-          <p:cNvPr id="110" name="PlaceHolder 2"/>
+          <p:cNvPr id="107" name="PlaceHolder 2"/>
           <p:cNvSpPr>
             <a:spLocks noGrp="1"/>
           </p:cNvSpPr>
@@ -11631,6 +12050,64 @@
             <a:normAutofit/>
           </a:bodyPr>
           <a:p>
+            <a:pPr indent="0" defTabSz="343080">
+              <a:lnSpc>
+                <a:spcPct val="100000"/>
+              </a:lnSpc>
+              <a:spcBef>
+                <a:spcPts val="479"/>
+              </a:spcBef>
+              <a:buNone/>
+              <a:tabLst>
+                <a:tab algn="l" pos="0"/>
+              </a:tabLst>
+            </a:pPr>
+            <a:r>
+              <a:rPr b="0" lang="en-US" sz="2400" spc="-1" strike="noStrike">
+                <a:solidFill>
+                  <a:schemeClr val="dk1"/>
+                </a:solidFill>
+                <a:latin typeface="Calibri"/>
+              </a:rPr>
+              <a:t>Information at training time that will not exist at prediction time.</a:t>
+            </a:r>
+            <a:endParaRPr b="0" lang="en-US" sz="2400" spc="-1" strike="noStrike">
+              <a:solidFill>
+                <a:schemeClr val="dk1"/>
+              </a:solidFill>
+              <a:latin typeface="Calibri"/>
+            </a:endParaRPr>
+          </a:p>
+          <a:p>
+            <a:pPr indent="0" defTabSz="343080">
+              <a:lnSpc>
+                <a:spcPct val="100000"/>
+              </a:lnSpc>
+              <a:spcBef>
+                <a:spcPts val="479"/>
+              </a:spcBef>
+              <a:buNone/>
+              <a:tabLst>
+                <a:tab algn="l" pos="0"/>
+              </a:tabLst>
+            </a:pPr>
+            <a:r>
+              <a:rPr b="0" lang="en-US" sz="2400" spc="-1" strike="noStrike">
+                <a:solidFill>
+                  <a:schemeClr val="dk1"/>
+                </a:solidFill>
+                <a:latin typeface="Calibri"/>
+              </a:rPr>
+              <a:t>Typically:</a:t>
+            </a:r>
+            <a:endParaRPr b="0" lang="en-US" sz="2400" spc="-1" strike="noStrike">
+              <a:solidFill>
+                <a:schemeClr val="dk1"/>
+              </a:solidFill>
+              <a:latin typeface="Calibri"/>
+            </a:endParaRPr>
+          </a:p>
+          <a:p>
             <a:pPr marL="343080" indent="-343080" defTabSz="343080">
               <a:lnSpc>
                 <a:spcPct val="100000"/>
@@ -11642,7 +12119,10 @@
                 <a:srgbClr val="000000"/>
               </a:buClr>
               <a:buFont typeface="Arial"/>
-              <a:buAutoNum type="arabicPeriod"/>
+              <a:buChar char="•"/>
+              <a:tabLst>
+                <a:tab algn="l" pos="0"/>
+              </a:tabLst>
             </a:pPr>
             <a:r>
               <a:rPr b="0" lang="en-US" sz="2400" spc="-1" strike="noStrike">
@@ -11651,7 +12131,7 @@
                 </a:solidFill>
                 <a:latin typeface="Calibri"/>
               </a:rPr>
-              <a:t>What is one row?</a:t>
+              <a:t>The same patient in both train and test (e.g. duplicated)</a:t>
             </a:r>
             <a:endParaRPr b="0" lang="en-US" sz="2400" spc="-1" strike="noStrike">
               <a:solidFill>
@@ -11672,7 +12152,10 @@
                 <a:srgbClr val="000000"/>
               </a:buClr>
               <a:buFont typeface="Arial"/>
-              <a:buAutoNum type="arabicPeriod"/>
+              <a:buChar char="•"/>
+              <a:tabLst>
+                <a:tab algn="l" pos="0"/>
+              </a:tabLst>
             </a:pPr>
             <a:r>
               <a:rPr b="0" lang="en-US" sz="2400" spc="-1" strike="noStrike">
@@ -11681,25 +12164,25 @@
                 </a:solidFill>
                 <a:latin typeface="Calibri"/>
               </a:rPr>
-              <a:t>Where does the label come from, and </a:t>
-            </a:r>
-            <a:r>
-              <a:rPr b="0" i="1" lang="en-US" sz="2400" spc="-1" strike="noStrike">
-                <a:solidFill>
-                  <a:schemeClr val="dk1"/>
-                </a:solidFill>
-                <a:latin typeface="Calibri"/>
-              </a:rPr>
-              <a:t>when</a:t>
+              <a:t>Feature that is a deterministic function of the outcome (e.g. </a:t>
             </a:r>
             <a:r>
               <a:rPr b="0" lang="en-US" sz="2400" spc="-1" strike="noStrike">
                 <a:solidFill>
                   <a:schemeClr val="dk1"/>
                 </a:solidFill>
-                <a:latin typeface="Calibri"/>
-              </a:rPr>
-              <a:t> is it known?</a:t>
+                <a:latin typeface="Courier New"/>
+              </a:rPr>
+              <a:t>discharge_location == 'DIED'</a:t>
+            </a:r>
+            <a:r>
+              <a:rPr b="0" lang="en-US" sz="2400" spc="-1" strike="noStrike">
+                <a:solidFill>
+                  <a:schemeClr val="dk1"/>
+                </a:solidFill>
+                <a:latin typeface="Calibri"/>
+              </a:rPr>
+              <a:t>)</a:t>
             </a:r>
             <a:endParaRPr b="0" lang="en-US" sz="2400" spc="-1" strike="noStrike">
               <a:solidFill>
@@ -11720,135 +12203,19 @@
                 <a:srgbClr val="000000"/>
               </a:buClr>
               <a:buFont typeface="Arial"/>
-              <a:buAutoNum type="arabicPeriod"/>
-            </a:pPr>
-            <a:r>
-              <a:rPr b="0" lang="en-US" sz="2400" spc="-1" strike="noStrike">
-                <a:solidFill>
-                  <a:schemeClr val="dk1"/>
-                </a:solidFill>
-                <a:latin typeface="Calibri"/>
-              </a:rPr>
-              <a:t>What is missing, and why?</a:t>
-            </a:r>
-            <a:endParaRPr b="0" lang="en-US" sz="2400" spc="-1" strike="noStrike">
-              <a:solidFill>
-                <a:schemeClr val="dk1"/>
-              </a:solidFill>
-              <a:latin typeface="Calibri"/>
-            </a:endParaRPr>
-          </a:p>
-          <a:p>
-            <a:pPr marL="343080" indent="-343080" defTabSz="343080">
-              <a:lnSpc>
-                <a:spcPct val="100000"/>
-              </a:lnSpc>
-              <a:spcBef>
-                <a:spcPts val="479"/>
-              </a:spcBef>
-              <a:buClr>
-                <a:srgbClr val="000000"/>
-              </a:buClr>
-              <a:buFont typeface="Arial"/>
-              <a:buAutoNum type="arabicPeriod"/>
-            </a:pPr>
-            <a:r>
-              <a:rPr b="0" lang="en-US" sz="2400" spc="-1" strike="noStrike">
-                <a:solidFill>
-                  <a:schemeClr val="dk1"/>
-                </a:solidFill>
-                <a:latin typeface="Calibri"/>
-              </a:rPr>
-              <a:t>What is the base rate?</a:t>
-            </a:r>
-            <a:endParaRPr b="0" lang="en-US" sz="2400" spc="-1" strike="noStrike">
-              <a:solidFill>
-                <a:schemeClr val="dk1"/>
-              </a:solidFill>
-              <a:latin typeface="Calibri"/>
-            </a:endParaRPr>
-          </a:p>
-          <a:p>
-            <a:pPr marL="343080" indent="-343080" defTabSz="343080">
-              <a:lnSpc>
-                <a:spcPct val="100000"/>
-              </a:lnSpc>
-              <a:spcBef>
-                <a:spcPts val="479"/>
-              </a:spcBef>
-              <a:buClr>
-                <a:srgbClr val="000000"/>
-              </a:buClr>
-              <a:buFont typeface="Arial"/>
-              <a:buAutoNum type="arabicPeriod"/>
-            </a:pPr>
-            <a:r>
-              <a:rPr b="0" lang="en-US" sz="2400" spc="-1" strike="noStrike">
-                <a:solidFill>
-                  <a:schemeClr val="dk1"/>
-                </a:solidFill>
-                <a:latin typeface="Calibri"/>
-              </a:rPr>
-              <a:t>How do I split so that leakage is impossible?</a:t>
-            </a:r>
-            <a:endParaRPr b="0" lang="en-US" sz="2400" spc="-1" strike="noStrike">
-              <a:solidFill>
-                <a:schemeClr val="dk1"/>
-              </a:solidFill>
-              <a:latin typeface="Calibri"/>
-            </a:endParaRPr>
-          </a:p>
-          <a:p>
-            <a:pPr marL="343080" indent="-343080" defTabSz="343080">
-              <a:lnSpc>
-                <a:spcPct val="100000"/>
-              </a:lnSpc>
-              <a:spcBef>
-                <a:spcPts val="479"/>
-              </a:spcBef>
-              <a:buClr>
-                <a:srgbClr val="000000"/>
-              </a:buClr>
-              <a:buFont typeface="Arial"/>
-              <a:buAutoNum type="arabicPeriod"/>
-            </a:pPr>
-            <a:r>
-              <a:rPr b="0" lang="en-US" sz="2400" spc="-1" strike="noStrike">
-                <a:solidFill>
-                  <a:schemeClr val="dk1"/>
-                </a:solidFill>
-                <a:latin typeface="Calibri"/>
-              </a:rPr>
-              <a:t>What would a trivial baseline score?</a:t>
-            </a:r>
-            <a:endParaRPr b="0" lang="en-US" sz="2400" spc="-1" strike="noStrike">
-              <a:solidFill>
-                <a:schemeClr val="dk1"/>
-              </a:solidFill>
-              <a:latin typeface="Calibri"/>
-            </a:endParaRPr>
-          </a:p>
-          <a:p>
-            <a:pPr indent="0" defTabSz="343080">
-              <a:lnSpc>
-                <a:spcPct val="100000"/>
-              </a:lnSpc>
-              <a:spcBef>
-                <a:spcPts val="479"/>
-              </a:spcBef>
-              <a:buNone/>
+              <a:buChar char="•"/>
               <a:tabLst>
                 <a:tab algn="l" pos="0"/>
               </a:tabLst>
             </a:pPr>
             <a:r>
-              <a:rPr b="0" i="1" lang="en-US" sz="2400" spc="-1" strike="noStrike">
-                <a:solidFill>
-                  <a:schemeClr val="dk1"/>
-                </a:solidFill>
-                <a:latin typeface="Calibri"/>
-              </a:rPr>
-              <a:t>You will apply this checklist in today’s recitation.</a:t>
+              <a:rPr b="0" lang="en-US" sz="2400" spc="-1" strike="noStrike">
+                <a:solidFill>
+                  <a:schemeClr val="dk1"/>
+                </a:solidFill>
+                <a:latin typeface="Calibri"/>
+              </a:rPr>
+              <a:t>Bug in the train/test split</a:t>
             </a:r>
             <a:endParaRPr b="0" lang="en-US" sz="2400" spc="-1" strike="noStrike">
               <a:solidFill>
@@ -11976,7 +12343,7 @@
       </p:grpSpPr>
       <p:sp>
         <p:nvSpPr>
-          <p:cNvPr id="111" name="PlaceHolder 1"/>
+          <p:cNvPr id="108" name="PlaceHolder 1"/>
           <p:cNvSpPr>
             <a:spLocks noGrp="1"/>
           </p:cNvSpPr>
@@ -12043,7 +12410,7 @@
 </file>
 
 <file path=ppt/slides/slide21.xml><?xml version="1.0" encoding="utf-8"?>
-<p:sld xmlns:a="http://schemas.openxmlformats.org/drawingml/2006/main" xmlns:p="http://schemas.openxmlformats.org/presentationml/2006/main" xmlns:r="http://schemas.openxmlformats.org/officeDocument/2006/relationships" xmlns:p14="http://schemas.microsoft.com/office/powerpoint/2010/main" xmlns:p15="http://schemas.microsoft.com/office/powerpoint/2012/main" xmlns:mc="http://schemas.openxmlformats.org/markup-compatibility/2006" show="0">
+<p:sld xmlns:a="http://schemas.openxmlformats.org/drawingml/2006/main" xmlns:p="http://schemas.openxmlformats.org/presentationml/2006/main" xmlns:r="http://schemas.openxmlformats.org/officeDocument/2006/relationships" xmlns:p14="http://schemas.microsoft.com/office/powerpoint/2010/main" xmlns:p15="http://schemas.microsoft.com/office/powerpoint/2012/main" xmlns:mc="http://schemas.openxmlformats.org/markup-compatibility/2006">
   <p:cSld>
     <p:spTree>
       <p:nvGrpSpPr>
@@ -12061,7 +12428,7 @@
       </p:grpSpPr>
       <p:sp>
         <p:nvSpPr>
-          <p:cNvPr id="112" name="PlaceHolder 1"/>
+          <p:cNvPr id="109" name="PlaceHolder 1"/>
           <p:cNvSpPr>
             <a:spLocks noGrp="1"/>
           </p:cNvSpPr>
@@ -12103,7 +12470,16 @@
                 </a:solidFill>
                 <a:latin typeface="Calibri"/>
               </a:rPr>
-              <a:t>The landscape</a:t>
+              <a:t>Tabular: one row per unit </a:t>
+            </a:r>
+            <a:r>
+              <a:rPr b="0" lang="en-US" sz="3300" spc="-1" strike="noStrike">
+                <a:solidFill>
+                  <a:schemeClr val="dk1"/>
+                </a:solidFill>
+                <a:latin typeface="Courier New"/>
+              </a:rPr>
+              <a:t>n × p</a:t>
             </a:r>
             <a:endParaRPr b="0" lang="en-US" sz="3300" spc="-1" strike="noStrike">
               <a:solidFill>
@@ -12114,1324 +12490,168 @@
           </a:p>
         </p:txBody>
       </p:sp>
-      <p:graphicFrame>
-        <p:nvGraphicFramePr>
-          <p:cNvPr id="113" name="Content Placeholder 5"/>
-          <p:cNvGraphicFramePr/>
+      <p:sp>
+        <p:nvSpPr>
+          <p:cNvPr id="110" name="PlaceHolder 2"/>
+          <p:cNvSpPr>
+            <a:spLocks noGrp="1"/>
+          </p:cNvSpPr>
+          <p:nvPr>
+            <p:ph/>
+          </p:nvPr>
+        </p:nvSpPr>
+        <p:spPr>
+          <a:xfrm>
+            <a:off x="457200" y="1151280"/>
+            <a:ext cx="4039920" cy="479520"/>
+          </a:xfrm>
+          <a:prstGeom prst="rect">
+            <a:avLst/>
+          </a:prstGeom>
+          <a:noFill/>
+          <a:ln w="0">
+            <a:noFill/>
+          </a:ln>
+        </p:spPr>
+        <p:txBody>
+          <a:bodyPr lIns="91440" rIns="91440" tIns="45720" bIns="45720" anchor="b">
+            <a:normAutofit/>
+          </a:bodyPr>
+          <a:p>
+            <a:pPr indent="0" defTabSz="343080">
+              <a:lnSpc>
+                <a:spcPct val="100000"/>
+              </a:lnSpc>
+              <a:spcBef>
+                <a:spcPts val="360"/>
+              </a:spcBef>
+              <a:buNone/>
+              <a:tabLst>
+                <a:tab algn="l" pos="0"/>
+              </a:tabLst>
+            </a:pPr>
+            <a:r>
+              <a:rPr b="1" lang="en-US" sz="1800" spc="-1" strike="noStrike">
+                <a:solidFill>
+                  <a:schemeClr val="dk1"/>
+                </a:solidFill>
+                <a:latin typeface="Calibri"/>
+              </a:rPr>
+              <a:t>Ward interventions</a:t>
+            </a:r>
+            <a:endParaRPr b="0" lang="en-US" sz="1800" spc="-1" strike="noStrike">
+              <a:solidFill>
+                <a:schemeClr val="dk1"/>
+              </a:solidFill>
+              <a:latin typeface="Calibri"/>
+            </a:endParaRPr>
+          </a:p>
+        </p:txBody>
+      </p:sp>
+      <p:pic>
+        <p:nvPicPr>
+          <p:cNvPr id="111" name="Picture 1" descr="img/tabular_medical.jpg"/>
+          <p:cNvPicPr/>
           <p:nvPr/>
-        </p:nvGraphicFramePr>
-        <p:xfrm>
-          <a:off x="571680" y="1193760"/>
-          <a:ext cx="8001000" cy="2921040"/>
-        </p:xfrm>
-        <a:graphic>
-          <a:graphicData uri="http://schemas.openxmlformats.org/drawingml/2006/table">
-            <a:tbl>
-              <a:tblPr/>
-              <a:tblGrid>
-                <a:gridCol w="2372040"/>
-                <a:gridCol w="2545200"/>
-                <a:gridCol w="3083760"/>
-              </a:tblGrid>
-              <a:tr h="417240">
-                <a:tc>
-                  <a:txBody>
-                    <a:bodyPr anchor="t">
-                      <a:noAutofit/>
-                    </a:bodyPr>
-                    <a:p>
-                      <a:pPr defTabSz="343080">
-                        <a:lnSpc>
-                          <a:spcPct val="100000"/>
-                        </a:lnSpc>
-                        <a:tabLst>
-                          <a:tab algn="l" pos="0"/>
-                        </a:tabLst>
-                      </a:pPr>
-                      <a:r>
-                        <a:rPr b="0" lang="en-US" sz="2000" spc="-1" strike="noStrike">
-                          <a:solidFill>
-                            <a:srgbClr val="ffffff"/>
-                          </a:solidFill>
-                          <a:latin typeface="Calibri"/>
-                        </a:rPr>
-                        <a:t>Type</a:t>
-                      </a:r>
-                      <a:endParaRPr b="0" lang="en-US" sz="2000" spc="-1" strike="noStrike">
-                        <a:solidFill>
-                          <a:srgbClr val="ffffff"/>
-                        </a:solidFill>
-                        <a:latin typeface="Arial"/>
-                      </a:endParaRPr>
-                    </a:p>
-                  </a:txBody>
-                  <a:tcPr anchor="t" marL="91440" marR="91440">
-                    <a:lnL w="12240">
-                      <a:solidFill>
-                        <a:srgbClr val="ffffff"/>
-                      </a:solidFill>
-                      <a:prstDash val="solid"/>
-                    </a:lnL>
-                    <a:lnR w="12240">
-                      <a:solidFill>
-                        <a:srgbClr val="ffffff"/>
-                      </a:solidFill>
-                      <a:prstDash val="solid"/>
-                    </a:lnR>
-                    <a:lnT w="12240">
-                      <a:solidFill>
-                        <a:srgbClr val="ffffff"/>
-                      </a:solidFill>
-                      <a:prstDash val="solid"/>
-                    </a:lnT>
-                    <a:lnB w="12240">
-                      <a:solidFill>
-                        <a:srgbClr val="ffffff"/>
-                      </a:solidFill>
-                      <a:prstDash val="solid"/>
-                    </a:lnB>
-                    <a:solidFill>
-                      <a:srgbClr val="4f81bd"/>
-                    </a:solidFill>
-                  </a:tcPr>
-                </a:tc>
-                <a:tc>
-                  <a:txBody>
-                    <a:bodyPr anchor="t">
-                      <a:noAutofit/>
-                    </a:bodyPr>
-                    <a:p>
-                      <a:pPr defTabSz="343080">
-                        <a:lnSpc>
-                          <a:spcPct val="100000"/>
-                        </a:lnSpc>
-                        <a:tabLst>
-                          <a:tab algn="l" pos="0"/>
-                        </a:tabLst>
-                      </a:pPr>
-                      <a:r>
-                        <a:rPr b="0" lang="en-US" sz="2000" spc="-1" strike="noStrike">
-                          <a:solidFill>
-                            <a:srgbClr val="ffffff"/>
-                          </a:solidFill>
-                          <a:latin typeface="Calibri"/>
-                        </a:rPr>
-                        <a:t>Example source</a:t>
-                      </a:r>
-                      <a:endParaRPr b="0" lang="en-US" sz="2000" spc="-1" strike="noStrike">
-                        <a:solidFill>
-                          <a:srgbClr val="ffffff"/>
-                        </a:solidFill>
-                        <a:latin typeface="Arial"/>
-                      </a:endParaRPr>
-                    </a:p>
-                  </a:txBody>
-                  <a:tcPr anchor="t" marL="91440" marR="91440">
-                    <a:lnL w="12240">
-                      <a:solidFill>
-                        <a:srgbClr val="ffffff"/>
-                      </a:solidFill>
-                      <a:prstDash val="solid"/>
-                    </a:lnL>
-                    <a:lnR w="12240">
-                      <a:solidFill>
-                        <a:srgbClr val="ffffff"/>
-                      </a:solidFill>
-                      <a:prstDash val="solid"/>
-                    </a:lnR>
-                    <a:lnT w="12240">
-                      <a:solidFill>
-                        <a:srgbClr val="ffffff"/>
-                      </a:solidFill>
-                      <a:prstDash val="solid"/>
-                    </a:lnT>
-                    <a:lnB w="12240">
-                      <a:solidFill>
-                        <a:srgbClr val="ffffff"/>
-                      </a:solidFill>
-                      <a:prstDash val="solid"/>
-                    </a:lnB>
-                    <a:solidFill>
-                      <a:srgbClr val="4f81bd"/>
-                    </a:solidFill>
-                  </a:tcPr>
-                </a:tc>
-                <a:tc>
-                  <a:txBody>
-                    <a:bodyPr anchor="t">
-                      <a:noAutofit/>
-                    </a:bodyPr>
-                    <a:p>
-                      <a:pPr defTabSz="343080">
-                        <a:lnSpc>
-                          <a:spcPct val="100000"/>
-                        </a:lnSpc>
-                        <a:tabLst>
-                          <a:tab algn="l" pos="0"/>
-                        </a:tabLst>
-                      </a:pPr>
-                      <a:r>
-                        <a:rPr b="0" lang="en-US" sz="2000" spc="-1" strike="noStrike">
-                          <a:solidFill>
-                            <a:srgbClr val="ffffff"/>
-                          </a:solidFill>
-                          <a:latin typeface="Calibri"/>
-                        </a:rPr>
-                        <a:t>Modality</a:t>
-                      </a:r>
-                      <a:endParaRPr b="0" lang="en-US" sz="2000" spc="-1" strike="noStrike">
-                        <a:solidFill>
-                          <a:srgbClr val="ffffff"/>
-                        </a:solidFill>
-                        <a:latin typeface="Arial"/>
-                      </a:endParaRPr>
-                    </a:p>
-                  </a:txBody>
-                  <a:tcPr anchor="t" marL="91440" marR="91440">
-                    <a:lnL w="12240">
-                      <a:solidFill>
-                        <a:srgbClr val="ffffff"/>
-                      </a:solidFill>
-                      <a:prstDash val="solid"/>
-                    </a:lnL>
-                    <a:lnR w="12240">
-                      <a:solidFill>
-                        <a:srgbClr val="ffffff"/>
-                      </a:solidFill>
-                      <a:prstDash val="solid"/>
-                    </a:lnR>
-                    <a:lnT w="12240">
-                      <a:solidFill>
-                        <a:srgbClr val="ffffff"/>
-                      </a:solidFill>
-                      <a:prstDash val="solid"/>
-                    </a:lnT>
-                    <a:lnB w="12240">
-                      <a:solidFill>
-                        <a:srgbClr val="ffffff"/>
-                      </a:solidFill>
-                      <a:prstDash val="solid"/>
-                    </a:lnB>
-                    <a:solidFill>
-                      <a:srgbClr val="4f81bd"/>
-                    </a:solidFill>
-                  </a:tcPr>
-                </a:tc>
-              </a:tr>
-              <a:tr h="417240">
-                <a:tc>
-                  <a:txBody>
-                    <a:bodyPr anchor="t">
-                      <a:noAutofit/>
-                    </a:bodyPr>
-                    <a:p>
-                      <a:pPr defTabSz="343080">
-                        <a:lnSpc>
-                          <a:spcPct val="100000"/>
-                        </a:lnSpc>
-                        <a:tabLst>
-                          <a:tab algn="l" pos="0"/>
-                        </a:tabLst>
-                      </a:pPr>
-                      <a:r>
-                        <a:rPr b="1" lang="en-US" sz="2000" spc="-1" strike="noStrike">
-                          <a:solidFill>
-                            <a:srgbClr val="000000"/>
-                          </a:solidFill>
-                          <a:latin typeface="Calibri"/>
-                        </a:rPr>
-                        <a:t>EHR</a:t>
-                      </a:r>
-                      <a:endParaRPr b="0" lang="en-US" sz="2000" spc="-1" strike="noStrike">
-                        <a:solidFill>
-                          <a:srgbClr val="000000"/>
-                        </a:solidFill>
-                        <a:latin typeface="Arial"/>
-                      </a:endParaRPr>
-                    </a:p>
-                  </a:txBody>
-                  <a:tcPr anchor="t" marL="91440" marR="91440">
-                    <a:lnL w="12240">
-                      <a:solidFill>
-                        <a:srgbClr val="ffffff"/>
-                      </a:solidFill>
-                      <a:prstDash val="solid"/>
-                    </a:lnL>
-                    <a:lnR w="12240">
-                      <a:solidFill>
-                        <a:srgbClr val="ffffff"/>
-                      </a:solidFill>
-                      <a:prstDash val="solid"/>
-                    </a:lnR>
-                    <a:lnT w="12240">
-                      <a:solidFill>
-                        <a:srgbClr val="ffffff"/>
-                      </a:solidFill>
-                      <a:prstDash val="solid"/>
-                    </a:lnT>
-                    <a:lnB w="12240">
-                      <a:solidFill>
-                        <a:srgbClr val="ffffff"/>
-                      </a:solidFill>
-                      <a:prstDash val="solid"/>
-                    </a:lnB>
-                    <a:solidFill>
-                      <a:srgbClr val="d0d8e7"/>
-                    </a:solidFill>
-                  </a:tcPr>
-                </a:tc>
-                <a:tc>
-                  <a:txBody>
-                    <a:bodyPr anchor="t">
-                      <a:noAutofit/>
-                    </a:bodyPr>
-                    <a:p>
-                      <a:pPr defTabSz="343080">
-                        <a:lnSpc>
-                          <a:spcPct val="100000"/>
-                        </a:lnSpc>
-                        <a:tabLst>
-                          <a:tab algn="l" pos="0"/>
-                        </a:tabLst>
-                      </a:pPr>
-                      <a:r>
-                        <a:rPr b="0" lang="en-US" sz="2000" spc="-1" strike="noStrike">
-                          <a:solidFill>
-                            <a:srgbClr val="000000"/>
-                          </a:solidFill>
-                          <a:latin typeface="Calibri"/>
-                        </a:rPr>
-                        <a:t>MIMIC-IV, eICU</a:t>
-                      </a:r>
-                      <a:endParaRPr b="0" lang="en-US" sz="2000" spc="-1" strike="noStrike">
-                        <a:solidFill>
-                          <a:srgbClr val="000000"/>
-                        </a:solidFill>
-                        <a:latin typeface="Arial"/>
-                      </a:endParaRPr>
-                    </a:p>
-                  </a:txBody>
-                  <a:tcPr anchor="t" marL="91440" marR="91440">
-                    <a:lnL w="12240">
-                      <a:solidFill>
-                        <a:srgbClr val="ffffff"/>
-                      </a:solidFill>
-                      <a:prstDash val="solid"/>
-                    </a:lnL>
-                    <a:lnR w="12240">
-                      <a:solidFill>
-                        <a:srgbClr val="ffffff"/>
-                      </a:solidFill>
-                      <a:prstDash val="solid"/>
-                    </a:lnR>
-                    <a:lnT w="12240">
-                      <a:solidFill>
-                        <a:srgbClr val="ffffff"/>
-                      </a:solidFill>
-                      <a:prstDash val="solid"/>
-                    </a:lnT>
-                    <a:lnB w="12240">
-                      <a:solidFill>
-                        <a:srgbClr val="ffffff"/>
-                      </a:solidFill>
-                      <a:prstDash val="solid"/>
-                    </a:lnB>
-                    <a:solidFill>
-                      <a:srgbClr val="d0d8e7"/>
-                    </a:solidFill>
-                  </a:tcPr>
-                </a:tc>
-                <a:tc>
-                  <a:txBody>
-                    <a:bodyPr anchor="t">
-                      <a:noAutofit/>
-                    </a:bodyPr>
-                    <a:p>
-                      <a:pPr defTabSz="343080">
-                        <a:lnSpc>
-                          <a:spcPct val="100000"/>
-                        </a:lnSpc>
-                        <a:tabLst>
-                          <a:tab algn="l" pos="0"/>
-                        </a:tabLst>
-                      </a:pPr>
-                      <a:r>
-                        <a:rPr b="0" lang="en-US" sz="2000" spc="-1" strike="noStrike">
-                          <a:solidFill>
-                            <a:srgbClr val="000000"/>
-                          </a:solidFill>
-                          <a:latin typeface="Calibri"/>
-                        </a:rPr>
-                        <a:t>tabular + time series + text</a:t>
-                      </a:r>
-                      <a:endParaRPr b="0" lang="en-US" sz="2000" spc="-1" strike="noStrike">
-                        <a:solidFill>
-                          <a:srgbClr val="000000"/>
-                        </a:solidFill>
-                        <a:latin typeface="Arial"/>
-                      </a:endParaRPr>
-                    </a:p>
-                  </a:txBody>
-                  <a:tcPr anchor="t" marL="91440" marR="91440">
-                    <a:lnL w="12240">
-                      <a:solidFill>
-                        <a:srgbClr val="ffffff"/>
-                      </a:solidFill>
-                      <a:prstDash val="solid"/>
-                    </a:lnL>
-                    <a:lnR w="12240">
-                      <a:solidFill>
-                        <a:srgbClr val="ffffff"/>
-                      </a:solidFill>
-                      <a:prstDash val="solid"/>
-                    </a:lnR>
-                    <a:lnT w="12240">
-                      <a:solidFill>
-                        <a:srgbClr val="ffffff"/>
-                      </a:solidFill>
-                      <a:prstDash val="solid"/>
-                    </a:lnT>
-                    <a:lnB w="12240">
-                      <a:solidFill>
-                        <a:srgbClr val="ffffff"/>
-                      </a:solidFill>
-                      <a:prstDash val="solid"/>
-                    </a:lnB>
-                    <a:solidFill>
-                      <a:srgbClr val="d0d8e7"/>
-                    </a:solidFill>
-                  </a:tcPr>
-                </a:tc>
-              </a:tr>
-              <a:tr h="417240">
-                <a:tc>
-                  <a:txBody>
-                    <a:bodyPr anchor="t">
-                      <a:noAutofit/>
-                    </a:bodyPr>
-                    <a:p>
-                      <a:pPr defTabSz="343080">
-                        <a:lnSpc>
-                          <a:spcPct val="100000"/>
-                        </a:lnSpc>
-                        <a:tabLst>
-                          <a:tab algn="l" pos="0"/>
-                        </a:tabLst>
-                      </a:pPr>
-                      <a:r>
-                        <a:rPr b="1" lang="en-US" sz="2000" spc="-1" strike="noStrike">
-                          <a:solidFill>
-                            <a:srgbClr val="000000"/>
-                          </a:solidFill>
-                          <a:latin typeface="Calibri"/>
-                        </a:rPr>
-                        <a:t>Claims</a:t>
-                      </a:r>
-                      <a:endParaRPr b="0" lang="en-US" sz="2000" spc="-1" strike="noStrike">
-                        <a:solidFill>
-                          <a:srgbClr val="000000"/>
-                        </a:solidFill>
-                        <a:latin typeface="Arial"/>
-                      </a:endParaRPr>
-                    </a:p>
-                  </a:txBody>
-                  <a:tcPr anchor="t" marL="91440" marR="91440">
-                    <a:lnL w="12240">
-                      <a:solidFill>
-                        <a:srgbClr val="ffffff"/>
-                      </a:solidFill>
-                      <a:prstDash val="solid"/>
-                    </a:lnL>
-                    <a:lnR w="12240">
-                      <a:solidFill>
-                        <a:srgbClr val="ffffff"/>
-                      </a:solidFill>
-                      <a:prstDash val="solid"/>
-                    </a:lnR>
-                    <a:lnT w="12240">
-                      <a:solidFill>
-                        <a:srgbClr val="ffffff"/>
-                      </a:solidFill>
-                      <a:prstDash val="solid"/>
-                    </a:lnT>
-                    <a:lnB w="12240">
-                      <a:solidFill>
-                        <a:srgbClr val="ffffff"/>
-                      </a:solidFill>
-                      <a:prstDash val="solid"/>
-                    </a:lnB>
-                    <a:solidFill>
-                      <a:srgbClr val="e9ecf3"/>
-                    </a:solidFill>
-                  </a:tcPr>
-                </a:tc>
-                <a:tc>
-                  <a:txBody>
-                    <a:bodyPr anchor="t">
-                      <a:noAutofit/>
-                    </a:bodyPr>
-                    <a:p>
-                      <a:pPr defTabSz="343080">
-                        <a:lnSpc>
-                          <a:spcPct val="100000"/>
-                        </a:lnSpc>
-                        <a:tabLst>
-                          <a:tab algn="l" pos="0"/>
-                        </a:tabLst>
-                      </a:pPr>
-                      <a:r>
-                        <a:rPr b="0" lang="en-US" sz="2000" spc="-1" strike="noStrike">
-                          <a:solidFill>
-                            <a:srgbClr val="000000"/>
-                          </a:solidFill>
-                          <a:latin typeface="Calibri"/>
-                        </a:rPr>
-                        <a:t>CMS Medicare, SEER</a:t>
-                      </a:r>
-                      <a:endParaRPr b="0" lang="en-US" sz="2000" spc="-1" strike="noStrike">
-                        <a:solidFill>
-                          <a:srgbClr val="000000"/>
-                        </a:solidFill>
-                        <a:latin typeface="Arial"/>
-                      </a:endParaRPr>
-                    </a:p>
-                  </a:txBody>
-                  <a:tcPr anchor="t" marL="91440" marR="91440">
-                    <a:lnL w="12240">
-                      <a:solidFill>
-                        <a:srgbClr val="ffffff"/>
-                      </a:solidFill>
-                      <a:prstDash val="solid"/>
-                    </a:lnL>
-                    <a:lnR w="12240">
-                      <a:solidFill>
-                        <a:srgbClr val="ffffff"/>
-                      </a:solidFill>
-                      <a:prstDash val="solid"/>
-                    </a:lnR>
-                    <a:lnT w="12240">
-                      <a:solidFill>
-                        <a:srgbClr val="ffffff"/>
-                      </a:solidFill>
-                      <a:prstDash val="solid"/>
-                    </a:lnT>
-                    <a:lnB w="12240">
-                      <a:solidFill>
-                        <a:srgbClr val="ffffff"/>
-                      </a:solidFill>
-                      <a:prstDash val="solid"/>
-                    </a:lnB>
-                    <a:solidFill>
-                      <a:srgbClr val="e9ecf3"/>
-                    </a:solidFill>
-                  </a:tcPr>
-                </a:tc>
-                <a:tc>
-                  <a:txBody>
-                    <a:bodyPr anchor="t">
-                      <a:noAutofit/>
-                    </a:bodyPr>
-                    <a:p>
-                      <a:pPr defTabSz="343080">
-                        <a:lnSpc>
-                          <a:spcPct val="100000"/>
-                        </a:lnSpc>
-                        <a:tabLst>
-                          <a:tab algn="l" pos="0"/>
-                        </a:tabLst>
-                      </a:pPr>
-                      <a:r>
-                        <a:rPr b="0" lang="en-US" sz="2000" spc="-1" strike="noStrike">
-                          <a:solidFill>
-                            <a:srgbClr val="000000"/>
-                          </a:solidFill>
-                          <a:latin typeface="Calibri"/>
-                        </a:rPr>
-                        <a:t>tabular, coded, longitudinal</a:t>
-                      </a:r>
-                      <a:endParaRPr b="0" lang="en-US" sz="2000" spc="-1" strike="noStrike">
-                        <a:solidFill>
-                          <a:srgbClr val="000000"/>
-                        </a:solidFill>
-                        <a:latin typeface="Arial"/>
-                      </a:endParaRPr>
-                    </a:p>
-                  </a:txBody>
-                  <a:tcPr anchor="t" marL="91440" marR="91440">
-                    <a:lnL w="12240">
-                      <a:solidFill>
-                        <a:srgbClr val="ffffff"/>
-                      </a:solidFill>
-                      <a:prstDash val="solid"/>
-                    </a:lnL>
-                    <a:lnR w="12240">
-                      <a:solidFill>
-                        <a:srgbClr val="ffffff"/>
-                      </a:solidFill>
-                      <a:prstDash val="solid"/>
-                    </a:lnR>
-                    <a:lnT w="12240">
-                      <a:solidFill>
-                        <a:srgbClr val="ffffff"/>
-                      </a:solidFill>
-                      <a:prstDash val="solid"/>
-                    </a:lnT>
-                    <a:lnB w="12240">
-                      <a:solidFill>
-                        <a:srgbClr val="ffffff"/>
-                      </a:solidFill>
-                      <a:prstDash val="solid"/>
-                    </a:lnB>
-                    <a:solidFill>
-                      <a:srgbClr val="e9ecf3"/>
-                    </a:solidFill>
-                  </a:tcPr>
-                </a:tc>
-              </a:tr>
-              <a:tr h="417240">
-                <a:tc>
-                  <a:txBody>
-                    <a:bodyPr anchor="t">
-                      <a:noAutofit/>
-                    </a:bodyPr>
-                    <a:p>
-                      <a:pPr defTabSz="343080">
-                        <a:lnSpc>
-                          <a:spcPct val="100000"/>
-                        </a:lnSpc>
-                        <a:tabLst>
-                          <a:tab algn="l" pos="0"/>
-                        </a:tabLst>
-                      </a:pPr>
-                      <a:r>
-                        <a:rPr b="1" lang="en-US" sz="2000" spc="-1" strike="noStrike">
-                          <a:solidFill>
-                            <a:srgbClr val="000000"/>
-                          </a:solidFill>
-                          <a:latin typeface="Calibri"/>
-                        </a:rPr>
-                        <a:t>Imaging</a:t>
-                      </a:r>
-                      <a:endParaRPr b="0" lang="en-US" sz="2000" spc="-1" strike="noStrike">
-                        <a:solidFill>
-                          <a:srgbClr val="000000"/>
-                        </a:solidFill>
-                        <a:latin typeface="Arial"/>
-                      </a:endParaRPr>
-                    </a:p>
-                  </a:txBody>
-                  <a:tcPr anchor="t" marL="91440" marR="91440">
-                    <a:lnL w="12240">
-                      <a:solidFill>
-                        <a:srgbClr val="ffffff"/>
-                      </a:solidFill>
-                      <a:prstDash val="solid"/>
-                    </a:lnL>
-                    <a:lnR w="12240">
-                      <a:solidFill>
-                        <a:srgbClr val="ffffff"/>
-                      </a:solidFill>
-                      <a:prstDash val="solid"/>
-                    </a:lnR>
-                    <a:lnT w="12240">
-                      <a:solidFill>
-                        <a:srgbClr val="ffffff"/>
-                      </a:solidFill>
-                      <a:prstDash val="solid"/>
-                    </a:lnT>
-                    <a:lnB w="12240">
-                      <a:solidFill>
-                        <a:srgbClr val="ffffff"/>
-                      </a:solidFill>
-                      <a:prstDash val="solid"/>
-                    </a:lnB>
-                    <a:solidFill>
-                      <a:srgbClr val="d0d8e7"/>
-                    </a:solidFill>
-                  </a:tcPr>
-                </a:tc>
-                <a:tc>
-                  <a:txBody>
-                    <a:bodyPr anchor="t">
-                      <a:noAutofit/>
-                    </a:bodyPr>
-                    <a:p>
-                      <a:pPr defTabSz="343080">
-                        <a:lnSpc>
-                          <a:spcPct val="100000"/>
-                        </a:lnSpc>
-                        <a:tabLst>
-                          <a:tab algn="l" pos="0"/>
-                        </a:tabLst>
-                      </a:pPr>
-                      <a:r>
-                        <a:rPr b="0" lang="en-US" sz="2000" spc="-1" strike="noStrike">
-                          <a:solidFill>
-                            <a:srgbClr val="000000"/>
-                          </a:solidFill>
-                          <a:latin typeface="Calibri"/>
-                        </a:rPr>
-                        <a:t>NIH Chest X-ray, BraTS</a:t>
-                      </a:r>
-                      <a:endParaRPr b="0" lang="en-US" sz="2000" spc="-1" strike="noStrike">
-                        <a:solidFill>
-                          <a:srgbClr val="000000"/>
-                        </a:solidFill>
-                        <a:latin typeface="Arial"/>
-                      </a:endParaRPr>
-                    </a:p>
-                  </a:txBody>
-                  <a:tcPr anchor="t" marL="91440" marR="91440">
-                    <a:lnL w="12240">
-                      <a:solidFill>
-                        <a:srgbClr val="ffffff"/>
-                      </a:solidFill>
-                      <a:prstDash val="solid"/>
-                    </a:lnL>
-                    <a:lnR w="12240">
-                      <a:solidFill>
-                        <a:srgbClr val="ffffff"/>
-                      </a:solidFill>
-                      <a:prstDash val="solid"/>
-                    </a:lnR>
-                    <a:lnT w="12240">
-                      <a:solidFill>
-                        <a:srgbClr val="ffffff"/>
-                      </a:solidFill>
-                      <a:prstDash val="solid"/>
-                    </a:lnT>
-                    <a:lnB w="12240">
-                      <a:solidFill>
-                        <a:srgbClr val="ffffff"/>
-                      </a:solidFill>
-                      <a:prstDash val="solid"/>
-                    </a:lnB>
-                    <a:solidFill>
-                      <a:srgbClr val="d0d8e7"/>
-                    </a:solidFill>
-                  </a:tcPr>
-                </a:tc>
-                <a:tc>
-                  <a:txBody>
-                    <a:bodyPr anchor="t">
-                      <a:noAutofit/>
-                    </a:bodyPr>
-                    <a:p>
-                      <a:pPr defTabSz="343080">
-                        <a:lnSpc>
-                          <a:spcPct val="100000"/>
-                        </a:lnSpc>
-                        <a:tabLst>
-                          <a:tab algn="l" pos="0"/>
-                        </a:tabLst>
-                      </a:pPr>
-                      <a:r>
-                        <a:rPr b="0" lang="en-US" sz="2000" spc="-1" strike="noStrike">
-                          <a:solidFill>
-                            <a:srgbClr val="000000"/>
-                          </a:solidFill>
-                          <a:latin typeface="Calibri"/>
-                        </a:rPr>
-                        <a:t>2D / 3D arrays</a:t>
-                      </a:r>
-                      <a:endParaRPr b="0" lang="en-US" sz="2000" spc="-1" strike="noStrike">
-                        <a:solidFill>
-                          <a:srgbClr val="000000"/>
-                        </a:solidFill>
-                        <a:latin typeface="Arial"/>
-                      </a:endParaRPr>
-                    </a:p>
-                  </a:txBody>
-                  <a:tcPr anchor="t" marL="91440" marR="91440">
-                    <a:lnL w="12240">
-                      <a:solidFill>
-                        <a:srgbClr val="ffffff"/>
-                      </a:solidFill>
-                      <a:prstDash val="solid"/>
-                    </a:lnL>
-                    <a:lnR w="12240">
-                      <a:solidFill>
-                        <a:srgbClr val="ffffff"/>
-                      </a:solidFill>
-                      <a:prstDash val="solid"/>
-                    </a:lnR>
-                    <a:lnT w="12240">
-                      <a:solidFill>
-                        <a:srgbClr val="ffffff"/>
-                      </a:solidFill>
-                      <a:prstDash val="solid"/>
-                    </a:lnT>
-                    <a:lnB w="12240">
-                      <a:solidFill>
-                        <a:srgbClr val="ffffff"/>
-                      </a:solidFill>
-                      <a:prstDash val="solid"/>
-                    </a:lnB>
-                    <a:solidFill>
-                      <a:srgbClr val="d0d8e7"/>
-                    </a:solidFill>
-                  </a:tcPr>
-                </a:tc>
-              </a:tr>
-              <a:tr h="417240">
-                <a:tc>
-                  <a:txBody>
-                    <a:bodyPr anchor="t">
-                      <a:noAutofit/>
-                    </a:bodyPr>
-                    <a:p>
-                      <a:pPr defTabSz="343080">
-                        <a:lnSpc>
-                          <a:spcPct val="100000"/>
-                        </a:lnSpc>
-                        <a:tabLst>
-                          <a:tab algn="l" pos="0"/>
-                        </a:tabLst>
-                      </a:pPr>
-                      <a:r>
-                        <a:rPr b="1" lang="en-US" sz="2000" spc="-1" strike="noStrike">
-                          <a:solidFill>
-                            <a:srgbClr val="000000"/>
-                          </a:solidFill>
-                          <a:latin typeface="Calibri"/>
-                        </a:rPr>
-                        <a:t>Waveforms</a:t>
-                      </a:r>
-                      <a:endParaRPr b="0" lang="en-US" sz="2000" spc="-1" strike="noStrike">
-                        <a:solidFill>
-                          <a:srgbClr val="000000"/>
-                        </a:solidFill>
-                        <a:latin typeface="Arial"/>
-                      </a:endParaRPr>
-                    </a:p>
-                  </a:txBody>
-                  <a:tcPr anchor="t" marL="91440" marR="91440">
-                    <a:lnL w="12240">
-                      <a:solidFill>
-                        <a:srgbClr val="ffffff"/>
-                      </a:solidFill>
-                      <a:prstDash val="solid"/>
-                    </a:lnL>
-                    <a:lnR w="12240">
-                      <a:solidFill>
-                        <a:srgbClr val="ffffff"/>
-                      </a:solidFill>
-                      <a:prstDash val="solid"/>
-                    </a:lnR>
-                    <a:lnT w="12240">
-                      <a:solidFill>
-                        <a:srgbClr val="ffffff"/>
-                      </a:solidFill>
-                      <a:prstDash val="solid"/>
-                    </a:lnT>
-                    <a:lnB w="12240">
-                      <a:solidFill>
-                        <a:srgbClr val="ffffff"/>
-                      </a:solidFill>
-                      <a:prstDash val="solid"/>
-                    </a:lnB>
-                    <a:solidFill>
-                      <a:srgbClr val="e9ecf3"/>
-                    </a:solidFill>
-                  </a:tcPr>
-                </a:tc>
-                <a:tc>
-                  <a:txBody>
-                    <a:bodyPr anchor="t">
-                      <a:noAutofit/>
-                    </a:bodyPr>
-                    <a:p>
-                      <a:pPr defTabSz="343080">
-                        <a:lnSpc>
-                          <a:spcPct val="100000"/>
-                        </a:lnSpc>
-                        <a:tabLst>
-                          <a:tab algn="l" pos="0"/>
-                        </a:tabLst>
-                      </a:pPr>
-                      <a:r>
-                        <a:rPr b="0" lang="en-US" sz="2000" spc="-1" strike="noStrike">
-                          <a:solidFill>
-                            <a:srgbClr val="000000"/>
-                          </a:solidFill>
-                          <a:latin typeface="Calibri"/>
-                        </a:rPr>
-                        <a:t>PhysioNet ECG, EEG</a:t>
-                      </a:r>
-                      <a:endParaRPr b="0" lang="en-US" sz="2000" spc="-1" strike="noStrike">
-                        <a:solidFill>
-                          <a:srgbClr val="000000"/>
-                        </a:solidFill>
-                        <a:latin typeface="Arial"/>
-                      </a:endParaRPr>
-                    </a:p>
-                  </a:txBody>
-                  <a:tcPr anchor="t" marL="91440" marR="91440">
-                    <a:lnL w="12240">
-                      <a:solidFill>
-                        <a:srgbClr val="ffffff"/>
-                      </a:solidFill>
-                      <a:prstDash val="solid"/>
-                    </a:lnL>
-                    <a:lnR w="12240">
-                      <a:solidFill>
-                        <a:srgbClr val="ffffff"/>
-                      </a:solidFill>
-                      <a:prstDash val="solid"/>
-                    </a:lnR>
-                    <a:lnT w="12240">
-                      <a:solidFill>
-                        <a:srgbClr val="ffffff"/>
-                      </a:solidFill>
-                      <a:prstDash val="solid"/>
-                    </a:lnT>
-                    <a:lnB w="12240">
-                      <a:solidFill>
-                        <a:srgbClr val="ffffff"/>
-                      </a:solidFill>
-                      <a:prstDash val="solid"/>
-                    </a:lnB>
-                    <a:solidFill>
-                      <a:srgbClr val="e9ecf3"/>
-                    </a:solidFill>
-                  </a:tcPr>
-                </a:tc>
-                <a:tc>
-                  <a:txBody>
-                    <a:bodyPr anchor="t">
-                      <a:noAutofit/>
-                    </a:bodyPr>
-                    <a:p>
-                      <a:pPr defTabSz="343080">
-                        <a:lnSpc>
-                          <a:spcPct val="100000"/>
-                        </a:lnSpc>
-                        <a:tabLst>
-                          <a:tab algn="l" pos="0"/>
-                        </a:tabLst>
-                      </a:pPr>
-                      <a:r>
-                        <a:rPr b="0" lang="en-US" sz="2000" spc="-1" strike="noStrike">
-                          <a:solidFill>
-                            <a:srgbClr val="000000"/>
-                          </a:solidFill>
-                          <a:latin typeface="Calibri"/>
-                        </a:rPr>
-                        <a:t>high-frequency signals</a:t>
-                      </a:r>
-                      <a:endParaRPr b="0" lang="en-US" sz="2000" spc="-1" strike="noStrike">
-                        <a:solidFill>
-                          <a:srgbClr val="000000"/>
-                        </a:solidFill>
-                        <a:latin typeface="Arial"/>
-                      </a:endParaRPr>
-                    </a:p>
-                  </a:txBody>
-                  <a:tcPr anchor="t" marL="91440" marR="91440">
-                    <a:lnL w="12240">
-                      <a:solidFill>
-                        <a:srgbClr val="ffffff"/>
-                      </a:solidFill>
-                      <a:prstDash val="solid"/>
-                    </a:lnL>
-                    <a:lnR w="12240">
-                      <a:solidFill>
-                        <a:srgbClr val="ffffff"/>
-                      </a:solidFill>
-                      <a:prstDash val="solid"/>
-                    </a:lnR>
-                    <a:lnT w="12240">
-                      <a:solidFill>
-                        <a:srgbClr val="ffffff"/>
-                      </a:solidFill>
-                      <a:prstDash val="solid"/>
-                    </a:lnT>
-                    <a:lnB w="12240">
-                      <a:solidFill>
-                        <a:srgbClr val="ffffff"/>
-                      </a:solidFill>
-                      <a:prstDash val="solid"/>
-                    </a:lnB>
-                    <a:solidFill>
-                      <a:srgbClr val="e9ecf3"/>
-                    </a:solidFill>
-                  </a:tcPr>
-                </a:tc>
-              </a:tr>
-              <a:tr h="417240">
-                <a:tc>
-                  <a:txBody>
-                    <a:bodyPr anchor="t">
-                      <a:noAutofit/>
-                    </a:bodyPr>
-                    <a:p>
-                      <a:pPr defTabSz="343080">
-                        <a:lnSpc>
-                          <a:spcPct val="100000"/>
-                        </a:lnSpc>
-                        <a:tabLst>
-                          <a:tab algn="l" pos="0"/>
-                        </a:tabLst>
-                      </a:pPr>
-                      <a:r>
-                        <a:rPr b="1" lang="en-US" sz="2000" spc="-1" strike="noStrike">
-                          <a:solidFill>
-                            <a:srgbClr val="000000"/>
-                          </a:solidFill>
-                          <a:latin typeface="Calibri"/>
-                        </a:rPr>
-                        <a:t>Genomics</a:t>
-                      </a:r>
-                      <a:endParaRPr b="0" lang="en-US" sz="2000" spc="-1" strike="noStrike">
-                        <a:solidFill>
-                          <a:srgbClr val="000000"/>
-                        </a:solidFill>
-                        <a:latin typeface="Arial"/>
-                      </a:endParaRPr>
-                    </a:p>
-                  </a:txBody>
-                  <a:tcPr anchor="t" marL="91440" marR="91440">
-                    <a:lnL w="12240">
-                      <a:solidFill>
-                        <a:srgbClr val="ffffff"/>
-                      </a:solidFill>
-                      <a:prstDash val="solid"/>
-                    </a:lnL>
-                    <a:lnR w="12240">
-                      <a:solidFill>
-                        <a:srgbClr val="ffffff"/>
-                      </a:solidFill>
-                      <a:prstDash val="solid"/>
-                    </a:lnR>
-                    <a:lnT w="12240">
-                      <a:solidFill>
-                        <a:srgbClr val="ffffff"/>
-                      </a:solidFill>
-                      <a:prstDash val="solid"/>
-                    </a:lnT>
-                    <a:lnB w="12240">
-                      <a:solidFill>
-                        <a:srgbClr val="ffffff"/>
-                      </a:solidFill>
-                      <a:prstDash val="solid"/>
-                    </a:lnB>
-                    <a:solidFill>
-                      <a:srgbClr val="d0d8e7"/>
-                    </a:solidFill>
-                  </a:tcPr>
-                </a:tc>
-                <a:tc>
-                  <a:txBody>
-                    <a:bodyPr anchor="t">
-                      <a:noAutofit/>
-                    </a:bodyPr>
-                    <a:p>
-                      <a:pPr defTabSz="343080">
-                        <a:lnSpc>
-                          <a:spcPct val="100000"/>
-                        </a:lnSpc>
-                        <a:tabLst>
-                          <a:tab algn="l" pos="0"/>
-                        </a:tabLst>
-                      </a:pPr>
-                      <a:r>
-                        <a:rPr b="0" lang="en-US" sz="2000" spc="-1" strike="noStrike">
-                          <a:solidFill>
-                            <a:srgbClr val="000000"/>
-                          </a:solidFill>
-                          <a:latin typeface="Calibri"/>
-                        </a:rPr>
-                        <a:t>TCGA, UK Biobank</a:t>
-                      </a:r>
-                      <a:endParaRPr b="0" lang="en-US" sz="2000" spc="-1" strike="noStrike">
-                        <a:solidFill>
-                          <a:srgbClr val="000000"/>
-                        </a:solidFill>
-                        <a:latin typeface="Arial"/>
-                      </a:endParaRPr>
-                    </a:p>
-                  </a:txBody>
-                  <a:tcPr anchor="t" marL="91440" marR="91440">
-                    <a:lnL w="12240">
-                      <a:solidFill>
-                        <a:srgbClr val="ffffff"/>
-                      </a:solidFill>
-                      <a:prstDash val="solid"/>
-                    </a:lnL>
-                    <a:lnR w="12240">
-                      <a:solidFill>
-                        <a:srgbClr val="ffffff"/>
-                      </a:solidFill>
-                      <a:prstDash val="solid"/>
-                    </a:lnR>
-                    <a:lnT w="12240">
-                      <a:solidFill>
-                        <a:srgbClr val="ffffff"/>
-                      </a:solidFill>
-                      <a:prstDash val="solid"/>
-                    </a:lnT>
-                    <a:lnB w="12240">
-                      <a:solidFill>
-                        <a:srgbClr val="ffffff"/>
-                      </a:solidFill>
-                      <a:prstDash val="solid"/>
-                    </a:lnB>
-                    <a:solidFill>
-                      <a:srgbClr val="d0d8e7"/>
-                    </a:solidFill>
-                  </a:tcPr>
-                </a:tc>
-                <a:tc>
-                  <a:txBody>
-                    <a:bodyPr anchor="t">
-                      <a:noAutofit/>
-                    </a:bodyPr>
-                    <a:p>
-                      <a:pPr defTabSz="343080">
-                        <a:lnSpc>
-                          <a:spcPct val="100000"/>
-                        </a:lnSpc>
-                        <a:tabLst>
-                          <a:tab algn="l" pos="0"/>
-                        </a:tabLst>
-                      </a:pPr>
-                      <a:r>
-                        <a:rPr b="0" lang="en-US" sz="2000" spc="-1" strike="noStrike">
-                          <a:solidFill>
-                            <a:srgbClr val="000000"/>
-                          </a:solidFill>
-                          <a:latin typeface="Calibri"/>
-                        </a:rPr>
-                        <a:t>very wide, very few rows</a:t>
-                      </a:r>
-                      <a:endParaRPr b="0" lang="en-US" sz="2000" spc="-1" strike="noStrike">
-                        <a:solidFill>
-                          <a:srgbClr val="000000"/>
-                        </a:solidFill>
-                        <a:latin typeface="Arial"/>
-                      </a:endParaRPr>
-                    </a:p>
-                  </a:txBody>
-                  <a:tcPr anchor="t" marL="91440" marR="91440">
-                    <a:lnL w="12240">
-                      <a:solidFill>
-                        <a:srgbClr val="ffffff"/>
-                      </a:solidFill>
-                      <a:prstDash val="solid"/>
-                    </a:lnL>
-                    <a:lnR w="12240">
-                      <a:solidFill>
-                        <a:srgbClr val="ffffff"/>
-                      </a:solidFill>
-                      <a:prstDash val="solid"/>
-                    </a:lnR>
-                    <a:lnT w="12240">
-                      <a:solidFill>
-                        <a:srgbClr val="ffffff"/>
-                      </a:solidFill>
-                      <a:prstDash val="solid"/>
-                    </a:lnT>
-                    <a:lnB w="12240">
-                      <a:solidFill>
-                        <a:srgbClr val="ffffff"/>
-                      </a:solidFill>
-                      <a:prstDash val="solid"/>
-                    </a:lnB>
-                    <a:solidFill>
-                      <a:srgbClr val="d0d8e7"/>
-                    </a:solidFill>
-                  </a:tcPr>
-                </a:tc>
-              </a:tr>
-              <a:tr h="417600">
-                <a:tc>
-                  <a:txBody>
-                    <a:bodyPr anchor="t">
-                      <a:noAutofit/>
-                    </a:bodyPr>
-                    <a:p>
-                      <a:pPr defTabSz="343080">
-                        <a:lnSpc>
-                          <a:spcPct val="100000"/>
-                        </a:lnSpc>
-                        <a:tabLst>
-                          <a:tab algn="l" pos="0"/>
-                        </a:tabLst>
-                      </a:pPr>
-                      <a:r>
-                        <a:rPr b="1" lang="en-US" sz="2000" spc="-1" strike="noStrike">
-                          <a:solidFill>
-                            <a:srgbClr val="000000"/>
-                          </a:solidFill>
-                          <a:latin typeface="Calibri"/>
-                        </a:rPr>
-                        <a:t>Registries / surveys</a:t>
-                      </a:r>
-                      <a:endParaRPr b="0" lang="en-US" sz="2000" spc="-1" strike="noStrike">
-                        <a:solidFill>
-                          <a:srgbClr val="000000"/>
-                        </a:solidFill>
-                        <a:latin typeface="Arial"/>
-                      </a:endParaRPr>
-                    </a:p>
-                  </a:txBody>
-                  <a:tcPr anchor="t" marL="91440" marR="91440">
-                    <a:lnL w="12240">
-                      <a:solidFill>
-                        <a:srgbClr val="ffffff"/>
-                      </a:solidFill>
-                      <a:prstDash val="solid"/>
-                    </a:lnL>
-                    <a:lnR w="12240">
-                      <a:solidFill>
-                        <a:srgbClr val="ffffff"/>
-                      </a:solidFill>
-                      <a:prstDash val="solid"/>
-                    </a:lnR>
-                    <a:lnT w="12240">
-                      <a:solidFill>
-                        <a:srgbClr val="ffffff"/>
-                      </a:solidFill>
-                      <a:prstDash val="solid"/>
-                    </a:lnT>
-                    <a:lnB w="12240">
-                      <a:solidFill>
-                        <a:srgbClr val="ffffff"/>
-                      </a:solidFill>
-                      <a:prstDash val="solid"/>
-                    </a:lnB>
-                    <a:solidFill>
-                      <a:srgbClr val="e9ecf3"/>
-                    </a:solidFill>
-                  </a:tcPr>
-                </a:tc>
-                <a:tc>
-                  <a:txBody>
-                    <a:bodyPr anchor="t">
-                      <a:noAutofit/>
-                    </a:bodyPr>
-                    <a:p>
-                      <a:pPr defTabSz="343080">
-                        <a:lnSpc>
-                          <a:spcPct val="100000"/>
-                        </a:lnSpc>
-                        <a:tabLst>
-                          <a:tab algn="l" pos="0"/>
-                        </a:tabLst>
-                      </a:pPr>
-                      <a:r>
-                        <a:rPr b="0" lang="en-US" sz="2000" spc="-1" strike="noStrike">
-                          <a:solidFill>
-                            <a:srgbClr val="000000"/>
-                          </a:solidFill>
-                          <a:latin typeface="Calibri"/>
-                        </a:rPr>
-                        <a:t>NHANES, CDC</a:t>
-                      </a:r>
-                      <a:endParaRPr b="0" lang="en-US" sz="2000" spc="-1" strike="noStrike">
-                        <a:solidFill>
-                          <a:srgbClr val="000000"/>
-                        </a:solidFill>
-                        <a:latin typeface="Arial"/>
-                      </a:endParaRPr>
-                    </a:p>
-                  </a:txBody>
-                  <a:tcPr anchor="t" marL="91440" marR="91440">
-                    <a:lnL w="12240">
-                      <a:solidFill>
-                        <a:srgbClr val="ffffff"/>
-                      </a:solidFill>
-                      <a:prstDash val="solid"/>
-                    </a:lnL>
-                    <a:lnR w="12240">
-                      <a:solidFill>
-                        <a:srgbClr val="ffffff"/>
-                      </a:solidFill>
-                      <a:prstDash val="solid"/>
-                    </a:lnR>
-                    <a:lnT w="12240">
-                      <a:solidFill>
-                        <a:srgbClr val="ffffff"/>
-                      </a:solidFill>
-                      <a:prstDash val="solid"/>
-                    </a:lnT>
-                    <a:lnB w="12240">
-                      <a:solidFill>
-                        <a:srgbClr val="ffffff"/>
-                      </a:solidFill>
-                      <a:prstDash val="solid"/>
-                    </a:lnB>
-                    <a:solidFill>
-                      <a:srgbClr val="e9ecf3"/>
-                    </a:solidFill>
-                  </a:tcPr>
-                </a:tc>
-                <a:tc>
-                  <a:txBody>
-                    <a:bodyPr anchor="t">
-                      <a:noAutofit/>
-                    </a:bodyPr>
-                    <a:p>
-                      <a:pPr defTabSz="343080">
-                        <a:lnSpc>
-                          <a:spcPct val="100000"/>
-                        </a:lnSpc>
-                        <a:tabLst>
-                          <a:tab algn="l" pos="0"/>
-                        </a:tabLst>
-                      </a:pPr>
-                      <a:r>
-                        <a:rPr b="0" lang="en-US" sz="2000" spc="-1" strike="noStrike">
-                          <a:solidFill>
-                            <a:srgbClr val="000000"/>
-                          </a:solidFill>
-                          <a:latin typeface="Calibri"/>
-                        </a:rPr>
-                        <a:t>curated, population-level</a:t>
-                      </a:r>
-                      <a:endParaRPr b="0" lang="en-US" sz="2000" spc="-1" strike="noStrike">
-                        <a:solidFill>
-                          <a:srgbClr val="000000"/>
-                        </a:solidFill>
-                        <a:latin typeface="Arial"/>
-                      </a:endParaRPr>
-                    </a:p>
-                  </a:txBody>
-                  <a:tcPr anchor="t" marL="91440" marR="91440">
-                    <a:lnL w="12240">
-                      <a:solidFill>
-                        <a:srgbClr val="ffffff"/>
-                      </a:solidFill>
-                      <a:prstDash val="solid"/>
-                    </a:lnL>
-                    <a:lnR w="12240">
-                      <a:solidFill>
-                        <a:srgbClr val="ffffff"/>
-                      </a:solidFill>
-                      <a:prstDash val="solid"/>
-                    </a:lnR>
-                    <a:lnT w="12240">
-                      <a:solidFill>
-                        <a:srgbClr val="ffffff"/>
-                      </a:solidFill>
-                      <a:prstDash val="solid"/>
-                    </a:lnT>
-                    <a:lnB w="12240">
-                      <a:solidFill>
-                        <a:srgbClr val="ffffff"/>
-                      </a:solidFill>
-                      <a:prstDash val="solid"/>
-                    </a:lnB>
-                    <a:solidFill>
-                      <a:srgbClr val="e9ecf3"/>
-                    </a:solidFill>
-                  </a:tcPr>
-                </a:tc>
-              </a:tr>
-            </a:tbl>
-          </a:graphicData>
-        </a:graphic>
-      </p:graphicFrame>
+        </p:nvPicPr>
+        <p:blipFill>
+          <a:blip r:embed="rId1"/>
+          <a:stretch/>
+        </p:blipFill>
+        <p:spPr>
+          <a:xfrm>
+            <a:off x="457200" y="2336760"/>
+            <a:ext cx="4038120" cy="1549080"/>
+          </a:xfrm>
+          <a:prstGeom prst="rect">
+            <a:avLst/>
+          </a:prstGeom>
+          <a:ln w="9525">
+            <a:noFill/>
+          </a:ln>
+        </p:spPr>
+      </p:pic>
+      <p:sp>
+        <p:nvSpPr>
+          <p:cNvPr id="112" name="PlaceHolder 3"/>
+          <p:cNvSpPr>
+            <a:spLocks noGrp="1"/>
+          </p:cNvSpPr>
+          <p:nvPr>
+            <p:ph/>
+          </p:nvPr>
+        </p:nvSpPr>
+        <p:spPr>
+          <a:xfrm>
+            <a:off x="4645080" y="1151280"/>
+            <a:ext cx="4041360" cy="479520"/>
+          </a:xfrm>
+          <a:prstGeom prst="rect">
+            <a:avLst/>
+          </a:prstGeom>
+          <a:noFill/>
+          <a:ln w="0">
+            <a:noFill/>
+          </a:ln>
+        </p:spPr>
+        <p:txBody>
+          <a:bodyPr lIns="91440" rIns="91440" tIns="45720" bIns="45720" anchor="b">
+            <a:normAutofit/>
+          </a:bodyPr>
+          <a:p>
+            <a:pPr indent="0" defTabSz="343080">
+              <a:lnSpc>
+                <a:spcPct val="100000"/>
+              </a:lnSpc>
+              <a:spcBef>
+                <a:spcPts val="360"/>
+              </a:spcBef>
+              <a:buNone/>
+              <a:tabLst>
+                <a:tab algn="l" pos="0"/>
+              </a:tabLst>
+            </a:pPr>
+            <a:r>
+              <a:rPr b="1" lang="en-US" sz="1800" spc="-1" strike="noStrike">
+                <a:solidFill>
+                  <a:schemeClr val="dk1"/>
+                </a:solidFill>
+                <a:latin typeface="Calibri"/>
+              </a:rPr>
+              <a:t>A ship’s passenger manifest</a:t>
+            </a:r>
+            <a:endParaRPr b="0" lang="en-US" sz="1800" spc="-1" strike="noStrike">
+              <a:solidFill>
+                <a:schemeClr val="dk1"/>
+              </a:solidFill>
+              <a:latin typeface="Calibri"/>
+            </a:endParaRPr>
+          </a:p>
+        </p:txBody>
+      </p:sp>
+      <p:pic>
+        <p:nvPicPr>
+          <p:cNvPr id="113" name="Picture 1" descr="img/tabular_other.jpg"/>
+          <p:cNvPicPr/>
+          <p:nvPr/>
+        </p:nvPicPr>
+        <p:blipFill>
+          <a:blip r:embed="rId2"/>
+          <a:stretch/>
+        </p:blipFill>
+        <p:spPr>
+          <a:xfrm>
+            <a:off x="5219640" y="1625760"/>
+            <a:ext cx="2857320" cy="2958840"/>
+          </a:xfrm>
+          <a:prstGeom prst="rect">
+            <a:avLst/>
+          </a:prstGeom>
+          <a:ln w="9525">
+            <a:noFill/>
+          </a:ln>
+        </p:spPr>
+      </p:pic>
     </p:spTree>
   </p:cSld>
   <mc:AlternateContent>
@@ -13446,7 +12666,7 @@
 </file>
 
 <file path=ppt/slides/slide22.xml><?xml version="1.0" encoding="utf-8"?>
-<p:sld xmlns:a="http://schemas.openxmlformats.org/drawingml/2006/main" xmlns:p="http://schemas.openxmlformats.org/presentationml/2006/main" xmlns:r="http://schemas.openxmlformats.org/officeDocument/2006/relationships" xmlns:p14="http://schemas.microsoft.com/office/powerpoint/2010/main" xmlns:p15="http://schemas.microsoft.com/office/powerpoint/2012/main" xmlns:mc="http://schemas.openxmlformats.org/markup-compatibility/2006" show="0">
+<p:sld xmlns:a="http://schemas.openxmlformats.org/drawingml/2006/main" xmlns:p="http://schemas.openxmlformats.org/presentationml/2006/main" xmlns:r="http://schemas.openxmlformats.org/officeDocument/2006/relationships" xmlns:p14="http://schemas.microsoft.com/office/powerpoint/2010/main" xmlns:p15="http://schemas.microsoft.com/office/powerpoint/2012/main" xmlns:mc="http://schemas.openxmlformats.org/markup-compatibility/2006">
   <p:cSld>
     <p:spTree>
       <p:nvGrpSpPr>
@@ -13506,7 +12726,16 @@
                 </a:solidFill>
                 <a:latin typeface="Calibri"/>
               </a:rPr>
-              <a:t>EHR: electronic health records</a:t>
+              <a:t>1D signals: a value over time </a:t>
+            </a:r>
+            <a:r>
+              <a:rPr b="0" lang="en-US" sz="3300" spc="-1" strike="noStrike">
+                <a:solidFill>
+                  <a:schemeClr val="dk1"/>
+                </a:solidFill>
+                <a:latin typeface="Courier New"/>
+              </a:rPr>
+              <a:t>n × T</a:t>
             </a:r>
             <a:endParaRPr b="0" lang="en-US" sz="3300" spc="-1" strike="noStrike">
               <a:solidFill>
@@ -13529,8 +12758,8 @@
         </p:nvSpPr>
         <p:spPr>
           <a:xfrm>
-            <a:off x="457200" y="1200240"/>
-            <a:ext cx="8229240" cy="3394080"/>
+            <a:off x="457200" y="1151280"/>
+            <a:ext cx="4039920" cy="479520"/>
           </a:xfrm>
           <a:prstGeom prst="rect">
             <a:avLst/>
@@ -13541,7 +12770,7 @@
           </a:ln>
         </p:spPr>
         <p:txBody>
-          <a:bodyPr lIns="91440" rIns="91440" tIns="45720" bIns="45720" anchor="t">
+          <a:bodyPr lIns="91440" rIns="91440" tIns="45720" bIns="45720" anchor="b">
             <a:normAutofit/>
           </a:bodyPr>
           <a:p>
@@ -13550,7 +12779,7 @@
                 <a:spcPct val="100000"/>
               </a:lnSpc>
               <a:spcBef>
-                <a:spcPts val="479"/>
+                <a:spcPts val="360"/>
               </a:spcBef>
               <a:buNone/>
               <a:tabLst>
@@ -13558,160 +12787,80 @@
               </a:tabLst>
             </a:pPr>
             <a:r>
-              <a:rPr b="0" lang="en-US" sz="2400" spc="-1" strike="noStrike">
-                <a:solidFill>
-                  <a:schemeClr val="dk1"/>
-                </a:solidFill>
-                <a:latin typeface="Calibri"/>
-              </a:rPr>
-              <a:t>Demographics, admissions, transfers</a:t>
-            </a:r>
-            <a:endParaRPr b="0" lang="en-US" sz="2400" spc="-1" strike="noStrike">
+              <a:rPr b="1" lang="en-US" sz="1800" spc="-1" strike="noStrike">
+                <a:solidFill>
+                  <a:schemeClr val="dk1"/>
+                </a:solidFill>
+                <a:latin typeface="Calibri"/>
+              </a:rPr>
+              <a:t>A 12-lead ECG</a:t>
+            </a:r>
+            <a:endParaRPr b="0" lang="en-US" sz="1800" spc="-1" strike="noStrike">
               <a:solidFill>
                 <a:schemeClr val="dk1"/>
               </a:solidFill>
               <a:latin typeface="Calibri"/>
             </a:endParaRPr>
           </a:p>
-          <a:p>
-            <a:pPr marL="343080" indent="-343080" defTabSz="343080">
+        </p:txBody>
+      </p:sp>
+      <p:pic>
+        <p:nvPicPr>
+          <p:cNvPr id="116" name="Picture 1" descr="img/signal_medical.jpg"/>
+          <p:cNvPicPr/>
+          <p:nvPr/>
+        </p:nvPicPr>
+        <p:blipFill>
+          <a:blip r:embed="rId1"/>
+          <a:stretch/>
+        </p:blipFill>
+        <p:spPr>
+          <a:xfrm>
+            <a:off x="457200" y="2286000"/>
+            <a:ext cx="4038120" cy="1638000"/>
+          </a:xfrm>
+          <a:prstGeom prst="rect">
+            <a:avLst/>
+          </a:prstGeom>
+          <a:ln w="9525">
+            <a:noFill/>
+          </a:ln>
+        </p:spPr>
+      </p:pic>
+      <p:sp>
+        <p:nvSpPr>
+          <p:cNvPr id="117" name="PlaceHolder 3"/>
+          <p:cNvSpPr>
+            <a:spLocks noGrp="1"/>
+          </p:cNvSpPr>
+          <p:nvPr>
+            <p:ph/>
+          </p:nvPr>
+        </p:nvSpPr>
+        <p:spPr>
+          <a:xfrm>
+            <a:off x="4645080" y="1151280"/>
+            <a:ext cx="4041360" cy="479520"/>
+          </a:xfrm>
+          <a:prstGeom prst="rect">
+            <a:avLst/>
+          </a:prstGeom>
+          <a:noFill/>
+          <a:ln w="0">
+            <a:noFill/>
+          </a:ln>
+        </p:spPr>
+        <p:txBody>
+          <a:bodyPr lIns="91440" rIns="91440" tIns="45720" bIns="45720" anchor="b">
+            <a:normAutofit/>
+          </a:bodyPr>
+          <a:p>
+            <a:pPr indent="0" defTabSz="343080">
               <a:lnSpc>
                 <a:spcPct val="100000"/>
               </a:lnSpc>
               <a:spcBef>
-                <a:spcPts val="479"/>
-              </a:spcBef>
-              <a:buClr>
-                <a:srgbClr val="000000"/>
-              </a:buClr>
-              <a:buFont typeface="Arial"/>
-              <a:buChar char="•"/>
-              <a:tabLst>
-                <a:tab algn="l" pos="0"/>
-              </a:tabLst>
-            </a:pPr>
-            <a:r>
-              <a:rPr b="0" lang="en-US" sz="2400" spc="-1" strike="noStrike">
-                <a:solidFill>
-                  <a:schemeClr val="dk1"/>
-                </a:solidFill>
-                <a:latin typeface="Calibri"/>
-              </a:rPr>
-              <a:t>Labs, vitals (irregularly sampled time series)</a:t>
-            </a:r>
-            <a:endParaRPr b="0" lang="en-US" sz="2400" spc="-1" strike="noStrike">
-              <a:solidFill>
-                <a:schemeClr val="dk1"/>
-              </a:solidFill>
-              <a:latin typeface="Calibri"/>
-            </a:endParaRPr>
-          </a:p>
-          <a:p>
-            <a:pPr marL="343080" indent="-343080" defTabSz="343080">
-              <a:lnSpc>
-                <a:spcPct val="100000"/>
-              </a:lnSpc>
-              <a:spcBef>
-                <a:spcPts val="479"/>
-              </a:spcBef>
-              <a:buClr>
-                <a:srgbClr val="000000"/>
-              </a:buClr>
-              <a:buFont typeface="Arial"/>
-              <a:buChar char="•"/>
-              <a:tabLst>
-                <a:tab algn="l" pos="0"/>
-              </a:tabLst>
-            </a:pPr>
-            <a:r>
-              <a:rPr b="0" lang="en-US" sz="2400" spc="-1" strike="noStrike">
-                <a:solidFill>
-                  <a:schemeClr val="dk1"/>
-                </a:solidFill>
-                <a:latin typeface="Calibri"/>
-              </a:rPr>
-              <a:t>Medications, orders, procedures</a:t>
-            </a:r>
-            <a:endParaRPr b="0" lang="en-US" sz="2400" spc="-1" strike="noStrike">
-              <a:solidFill>
-                <a:schemeClr val="dk1"/>
-              </a:solidFill>
-              <a:latin typeface="Calibri"/>
-            </a:endParaRPr>
-          </a:p>
-          <a:p>
-            <a:pPr marL="343080" indent="-343080" defTabSz="343080">
-              <a:lnSpc>
-                <a:spcPct val="100000"/>
-              </a:lnSpc>
-              <a:spcBef>
-                <a:spcPts val="479"/>
-              </a:spcBef>
-              <a:buClr>
-                <a:srgbClr val="000000"/>
-              </a:buClr>
-              <a:buFont typeface="Arial"/>
-              <a:buChar char="•"/>
-              <a:tabLst>
-                <a:tab algn="l" pos="0"/>
-              </a:tabLst>
-            </a:pPr>
-            <a:r>
-              <a:rPr b="0" lang="en-US" sz="2400" spc="-1" strike="noStrike">
-                <a:solidFill>
-                  <a:schemeClr val="dk1"/>
-                </a:solidFill>
-                <a:latin typeface="Calibri"/>
-              </a:rPr>
-              <a:t>Free-text notes</a:t>
-            </a:r>
-            <a:endParaRPr b="0" lang="en-US" sz="2400" spc="-1" strike="noStrike">
-              <a:solidFill>
-                <a:schemeClr val="dk1"/>
-              </a:solidFill>
-              <a:latin typeface="Calibri"/>
-            </a:endParaRPr>
-          </a:p>
-          <a:p>
-            <a:pPr marL="343080" indent="-343080" defTabSz="343080">
-              <a:lnSpc>
-                <a:spcPct val="100000"/>
-              </a:lnSpc>
-              <a:spcBef>
-                <a:spcPts val="479"/>
-              </a:spcBef>
-              <a:buClr>
-                <a:srgbClr val="000000"/>
-              </a:buClr>
-              <a:buFont typeface="Arial"/>
-              <a:buChar char="•"/>
-              <a:tabLst>
-                <a:tab algn="l" pos="0"/>
-              </a:tabLst>
-            </a:pPr>
-            <a:r>
-              <a:rPr b="0" lang="en-US" sz="2400" spc="-1" strike="noStrike">
-                <a:solidFill>
-                  <a:schemeClr val="dk1"/>
-                </a:solidFill>
-                <a:latin typeface="Calibri"/>
-              </a:rPr>
-              <a:t>ICU monitoring at minute resolution</a:t>
-            </a:r>
-            <a:endParaRPr b="0" lang="en-US" sz="2400" spc="-1" strike="noStrike">
-              <a:solidFill>
-                <a:schemeClr val="dk1"/>
-              </a:solidFill>
-              <a:latin typeface="Calibri"/>
-            </a:endParaRPr>
-          </a:p>
-          <a:p>
-            <a:pPr indent="0" defTabSz="343080">
-              <a:lnSpc>
-                <a:spcPct val="100000"/>
-              </a:lnSpc>
-              <a:spcBef>
-                <a:spcPts val="479"/>
+                <a:spcPts val="360"/>
               </a:spcBef>
               <a:buNone/>
               <a:tabLst>
@@ -13719,62 +12868,15 @@
               </a:tabLst>
             </a:pPr>
             <a:r>
-              <a:rPr b="1" lang="en-US" sz="2400" spc="-1" strike="noStrike">
-                <a:solidFill>
-                  <a:schemeClr val="dk1"/>
-                </a:solidFill>
-                <a:latin typeface="Calibri"/>
-              </a:rPr>
-              <a:t>Strength:</a:t>
-            </a:r>
-            <a:r>
-              <a:rPr b="0" lang="en-US" sz="2400" spc="-1" strike="noStrike">
-                <a:solidFill>
-                  <a:schemeClr val="dk1"/>
-                </a:solidFill>
-                <a:latin typeface="Calibri"/>
-              </a:rPr>
-              <a:t> rich and longitudinal.</a:t>
-            </a:r>
-            <a:endParaRPr b="0" lang="en-US" sz="2400" spc="-1" strike="noStrike">
-              <a:solidFill>
-                <a:schemeClr val="dk1"/>
-              </a:solidFill>
-              <a:latin typeface="Calibri"/>
-            </a:endParaRPr>
-          </a:p>
-          <a:p>
-            <a:pPr indent="0" defTabSz="343080">
-              <a:lnSpc>
-                <a:spcPct val="100000"/>
-              </a:lnSpc>
-              <a:spcBef>
-                <a:spcPts val="479"/>
-              </a:spcBef>
-              <a:buNone/>
-              <a:tabLst>
-                <a:tab algn="l" pos="0"/>
-              </a:tabLst>
-            </a:pPr>
-            <a:r>
-              <a:rPr b="1" lang="en-US" sz="2400" spc="-1" strike="noStrike">
-                <a:solidFill>
-                  <a:schemeClr val="dk1"/>
-                </a:solidFill>
-                <a:latin typeface="Calibri"/>
-              </a:rPr>
-              <a:t>Weakness:</a:t>
-            </a:r>
-            <a:r>
-              <a:rPr b="0" lang="en-US" sz="2400" spc="-1" strike="noStrike">
-                <a:solidFill>
-                  <a:schemeClr val="dk1"/>
-                </a:solidFill>
-                <a:latin typeface="Calibri"/>
-              </a:rPr>
-              <a:t> biased by care processes.</a:t>
-            </a:r>
-            <a:endParaRPr b="0" lang="en-US" sz="2400" spc="-1" strike="noStrike">
+              <a:rPr b="1" lang="en-US" sz="1800" spc="-1" strike="noStrike">
+                <a:solidFill>
+                  <a:schemeClr val="dk1"/>
+                </a:solidFill>
+                <a:latin typeface="Calibri"/>
+              </a:rPr>
+              <a:t>An audio waveform</a:t>
+            </a:r>
+            <a:endParaRPr b="0" lang="en-US" sz="1800" spc="-1" strike="noStrike">
               <a:solidFill>
                 <a:schemeClr val="dk1"/>
               </a:solidFill>
@@ -13783,6 +12885,29 @@
           </a:p>
         </p:txBody>
       </p:sp>
+      <p:pic>
+        <p:nvPicPr>
+          <p:cNvPr id="118" name="Picture 1" descr="img/signal_other.jpg"/>
+          <p:cNvPicPr/>
+          <p:nvPr/>
+        </p:nvPicPr>
+        <p:blipFill>
+          <a:blip r:embed="rId2"/>
+          <a:stretch/>
+        </p:blipFill>
+        <p:spPr>
+          <a:xfrm>
+            <a:off x="4635360" y="2158920"/>
+            <a:ext cx="4038120" cy="1904760"/>
+          </a:xfrm>
+          <a:prstGeom prst="rect">
+            <a:avLst/>
+          </a:prstGeom>
+          <a:ln w="9525">
+            <a:noFill/>
+          </a:ln>
+        </p:spPr>
+      </p:pic>
     </p:spTree>
   </p:cSld>
   <mc:AlternateContent>
@@ -13797,7 +12922,7 @@
 </file>
 
 <file path=ppt/slides/slide23.xml><?xml version="1.0" encoding="utf-8"?>
-<p:sld xmlns:a="http://schemas.openxmlformats.org/drawingml/2006/main" xmlns:p="http://schemas.openxmlformats.org/presentationml/2006/main" xmlns:r="http://schemas.openxmlformats.org/officeDocument/2006/relationships" xmlns:p14="http://schemas.microsoft.com/office/powerpoint/2010/main" xmlns:p15="http://schemas.microsoft.com/office/powerpoint/2012/main" xmlns:mc="http://schemas.openxmlformats.org/markup-compatibility/2006" show="0">
+<p:sld xmlns:a="http://schemas.openxmlformats.org/drawingml/2006/main" xmlns:p="http://schemas.openxmlformats.org/presentationml/2006/main" xmlns:r="http://schemas.openxmlformats.org/officeDocument/2006/relationships" xmlns:p14="http://schemas.microsoft.com/office/powerpoint/2010/main" xmlns:p15="http://schemas.microsoft.com/office/powerpoint/2012/main" xmlns:mc="http://schemas.openxmlformats.org/markup-compatibility/2006">
   <p:cSld>
     <p:spTree>
       <p:nvGrpSpPr>
@@ -13815,7 +12940,7 @@
       </p:grpSpPr>
       <p:sp>
         <p:nvSpPr>
-          <p:cNvPr id="116" name="PlaceHolder 1"/>
+          <p:cNvPr id="119" name="PlaceHolder 1"/>
           <p:cNvSpPr>
             <a:spLocks noGrp="1"/>
           </p:cNvSpPr>
@@ -13857,7 +12982,16 @@
                 </a:solidFill>
                 <a:latin typeface="Calibri"/>
               </a:rPr>
-              <a:t>Claims data</a:t>
+              <a:t>2D images: a grid of pixels </a:t>
+            </a:r>
+            <a:r>
+              <a:rPr b="0" lang="en-US" sz="3300" spc="-1" strike="noStrike">
+                <a:solidFill>
+                  <a:schemeClr val="dk1"/>
+                </a:solidFill>
+                <a:latin typeface="Courier New"/>
+              </a:rPr>
+              <a:t>H × W × C</a:t>
             </a:r>
             <a:endParaRPr b="0" lang="en-US" sz="3300" spc="-1" strike="noStrike">
               <a:solidFill>
@@ -13870,7 +13004,7 @@
       </p:sp>
       <p:sp>
         <p:nvSpPr>
-          <p:cNvPr id="117" name="PlaceHolder 2"/>
+          <p:cNvPr id="120" name="PlaceHolder 2"/>
           <p:cNvSpPr>
             <a:spLocks noGrp="1"/>
           </p:cNvSpPr>
@@ -13880,8 +13014,8 @@
         </p:nvSpPr>
         <p:spPr>
           <a:xfrm>
-            <a:off x="457200" y="1200240"/>
-            <a:ext cx="8229240" cy="3394080"/>
+            <a:off x="457200" y="1151280"/>
+            <a:ext cx="4039920" cy="479520"/>
           </a:xfrm>
           <a:prstGeom prst="rect">
             <a:avLst/>
@@ -13892,8 +13026,8 @@
           </a:ln>
         </p:spPr>
         <p:txBody>
-          <a:bodyPr lIns="91440" rIns="91440" tIns="45720" bIns="45720" anchor="t">
-            <a:normAutofit fontScale="87465" lnSpcReduction="10000"/>
+          <a:bodyPr lIns="91440" rIns="91440" tIns="45720" bIns="45720" anchor="b">
+            <a:normAutofit/>
           </a:bodyPr>
           <a:p>
             <a:pPr indent="0" defTabSz="343080">
@@ -13901,7 +13035,7 @@
                 <a:spcPct val="100000"/>
               </a:lnSpc>
               <a:spcBef>
-                <a:spcPts val="479"/>
+                <a:spcPts val="360"/>
               </a:spcBef>
               <a:buNone/>
               <a:tabLst>
@@ -13909,220 +13043,80 @@
               </a:tabLst>
             </a:pPr>
             <a:r>
-              <a:rPr b="0" lang="en-US" sz="2400" spc="-1" strike="noStrike">
-                <a:solidFill>
-                  <a:schemeClr val="dk1"/>
-                </a:solidFill>
-                <a:latin typeface="Calibri"/>
-              </a:rPr>
-              <a:t>Generated for </a:t>
-            </a:r>
-            <a:r>
-              <a:rPr b="1" lang="en-US" sz="2400" spc="-1" strike="noStrike">
-                <a:solidFill>
-                  <a:schemeClr val="dk1"/>
-                </a:solidFill>
-                <a:latin typeface="Calibri"/>
-              </a:rPr>
-              <a:t>billing</a:t>
-            </a:r>
-            <a:r>
-              <a:rPr b="0" lang="en-US" sz="2400" spc="-1" strike="noStrike">
-                <a:solidFill>
-                  <a:schemeClr val="dk1"/>
-                </a:solidFill>
-                <a:latin typeface="Calibri"/>
-              </a:rPr>
-              <a:t>.</a:t>
-            </a:r>
-            <a:endParaRPr b="0" lang="en-US" sz="2400" spc="-1" strike="noStrike">
+              <a:rPr b="1" lang="en-US" sz="1800" spc="-1" strike="noStrike">
+                <a:solidFill>
+                  <a:schemeClr val="dk1"/>
+                </a:solidFill>
+                <a:latin typeface="Calibri"/>
+              </a:rPr>
+              <a:t>A chest radiograph</a:t>
+            </a:r>
+            <a:endParaRPr b="0" lang="en-US" sz="1800" spc="-1" strike="noStrike">
               <a:solidFill>
                 <a:schemeClr val="dk1"/>
               </a:solidFill>
               <a:latin typeface="Calibri"/>
             </a:endParaRPr>
           </a:p>
-          <a:p>
-            <a:pPr marL="343080" indent="-343080" defTabSz="343080">
+        </p:txBody>
+      </p:sp>
+      <p:pic>
+        <p:nvPicPr>
+          <p:cNvPr id="121" name="Picture 1" descr="img/image2d_medical.jpg"/>
+          <p:cNvPicPr/>
+          <p:nvPr/>
+        </p:nvPicPr>
+        <p:blipFill>
+          <a:blip r:embed="rId1"/>
+          <a:stretch/>
+        </p:blipFill>
+        <p:spPr>
+          <a:xfrm>
+            <a:off x="1181160" y="1625760"/>
+            <a:ext cx="2590560" cy="2958840"/>
+          </a:xfrm>
+          <a:prstGeom prst="rect">
+            <a:avLst/>
+          </a:prstGeom>
+          <a:ln w="9525">
+            <a:noFill/>
+          </a:ln>
+        </p:spPr>
+      </p:pic>
+      <p:sp>
+        <p:nvSpPr>
+          <p:cNvPr id="122" name="PlaceHolder 3"/>
+          <p:cNvSpPr>
+            <a:spLocks noGrp="1"/>
+          </p:cNvSpPr>
+          <p:nvPr>
+            <p:ph/>
+          </p:nvPr>
+        </p:nvSpPr>
+        <p:spPr>
+          <a:xfrm>
+            <a:off x="4645080" y="1151280"/>
+            <a:ext cx="4041360" cy="479520"/>
+          </a:xfrm>
+          <a:prstGeom prst="rect">
+            <a:avLst/>
+          </a:prstGeom>
+          <a:noFill/>
+          <a:ln w="0">
+            <a:noFill/>
+          </a:ln>
+        </p:spPr>
+        <p:txBody>
+          <a:bodyPr lIns="91440" rIns="91440" tIns="45720" bIns="45720" anchor="b">
+            <a:normAutofit/>
+          </a:bodyPr>
+          <a:p>
+            <a:pPr indent="0" defTabSz="343080">
               <a:lnSpc>
                 <a:spcPct val="100000"/>
               </a:lnSpc>
               <a:spcBef>
-                <a:spcPts val="479"/>
-              </a:spcBef>
-              <a:buClr>
-                <a:srgbClr val="000000"/>
-              </a:buClr>
-              <a:buFont typeface="Arial"/>
-              <a:buChar char="•"/>
-              <a:tabLst>
-                <a:tab algn="l" pos="0"/>
-              </a:tabLst>
-            </a:pPr>
-            <a:r>
-              <a:rPr b="0" lang="en-US" sz="2400" spc="-1" strike="noStrike">
-                <a:solidFill>
-                  <a:schemeClr val="dk1"/>
-                </a:solidFill>
-                <a:latin typeface="Calibri"/>
-              </a:rPr>
-              <a:t>Complete coverage across providers (you see the whole patient journey)</a:t>
-            </a:r>
-            <a:endParaRPr b="0" lang="en-US" sz="2400" spc="-1" strike="noStrike">
-              <a:solidFill>
-                <a:schemeClr val="dk1"/>
-              </a:solidFill>
-              <a:latin typeface="Calibri"/>
-            </a:endParaRPr>
-          </a:p>
-          <a:p>
-            <a:pPr marL="343080" indent="-343080" defTabSz="343080">
-              <a:lnSpc>
-                <a:spcPct val="100000"/>
-              </a:lnSpc>
-              <a:spcBef>
-                <a:spcPts val="479"/>
-              </a:spcBef>
-              <a:buClr>
-                <a:srgbClr val="000000"/>
-              </a:buClr>
-              <a:buFont typeface="Arial"/>
-              <a:buChar char="•"/>
-              <a:tabLst>
-                <a:tab algn="l" pos="0"/>
-              </a:tabLst>
-            </a:pPr>
-            <a:r>
-              <a:rPr b="0" lang="en-US" sz="2400" spc="-1" strike="noStrike">
-                <a:solidFill>
-                  <a:schemeClr val="dk1"/>
-                </a:solidFill>
-                <a:latin typeface="Calibri"/>
-              </a:rPr>
-              <a:t>Coded: ICD, CPT, HCPCS, NDC</a:t>
-            </a:r>
-            <a:endParaRPr b="0" lang="en-US" sz="2400" spc="-1" strike="noStrike">
-              <a:solidFill>
-                <a:schemeClr val="dk1"/>
-              </a:solidFill>
-              <a:latin typeface="Calibri"/>
-            </a:endParaRPr>
-          </a:p>
-          <a:p>
-            <a:pPr marL="343080" indent="-343080" defTabSz="343080">
-              <a:lnSpc>
-                <a:spcPct val="100000"/>
-              </a:lnSpc>
-              <a:spcBef>
-                <a:spcPts val="479"/>
-              </a:spcBef>
-              <a:buClr>
-                <a:srgbClr val="000000"/>
-              </a:buClr>
-              <a:buFont typeface="Arial"/>
-              <a:buChar char="•"/>
-              <a:tabLst>
-                <a:tab algn="l" pos="0"/>
-              </a:tabLst>
-            </a:pPr>
-            <a:r>
-              <a:rPr b="0" lang="en-US" sz="2400" spc="-1" strike="noStrike">
-                <a:solidFill>
-                  <a:schemeClr val="dk1"/>
-                </a:solidFill>
-                <a:latin typeface="Calibri"/>
-              </a:rPr>
-              <a:t>No clinical values — no labs, no vitals, no notes</a:t>
-            </a:r>
-            <a:endParaRPr b="0" lang="en-US" sz="2400" spc="-1" strike="noStrike">
-              <a:solidFill>
-                <a:schemeClr val="dk1"/>
-              </a:solidFill>
-              <a:latin typeface="Calibri"/>
-            </a:endParaRPr>
-          </a:p>
-          <a:p>
-            <a:pPr marL="343080" indent="-343080" defTabSz="343080">
-              <a:lnSpc>
-                <a:spcPct val="100000"/>
-              </a:lnSpc>
-              <a:spcBef>
-                <a:spcPts val="479"/>
-              </a:spcBef>
-              <a:buClr>
-                <a:srgbClr val="000000"/>
-              </a:buClr>
-              <a:buFont typeface="Arial"/>
-              <a:buChar char="•"/>
-              <a:tabLst>
-                <a:tab algn="l" pos="0"/>
-              </a:tabLst>
-            </a:pPr>
-            <a:r>
-              <a:rPr b="1" lang="en-US" sz="2400" spc="-1" strike="noStrike">
-                <a:solidFill>
-                  <a:schemeClr val="dk1"/>
-                </a:solidFill>
-                <a:latin typeface="Calibri"/>
-              </a:rPr>
-              <a:t>Upcoding</a:t>
-            </a:r>
-            <a:r>
-              <a:rPr b="0" lang="en-US" sz="2400" spc="-1" strike="noStrike">
-                <a:solidFill>
-                  <a:schemeClr val="dk1"/>
-                </a:solidFill>
-                <a:latin typeface="Calibri"/>
-              </a:rPr>
-              <a:t>: codes are chosen to maximise reimbursement, not to describe reality</a:t>
-            </a:r>
-            <a:endParaRPr b="0" lang="en-US" sz="2400" spc="-1" strike="noStrike">
-              <a:solidFill>
-                <a:schemeClr val="dk1"/>
-              </a:solidFill>
-              <a:latin typeface="Calibri"/>
-            </a:endParaRPr>
-          </a:p>
-          <a:p>
-            <a:pPr marL="343080" indent="-343080" defTabSz="343080">
-              <a:lnSpc>
-                <a:spcPct val="100000"/>
-              </a:lnSpc>
-              <a:spcBef>
-                <a:spcPts val="479"/>
-              </a:spcBef>
-              <a:buClr>
-                <a:srgbClr val="000000"/>
-              </a:buClr>
-              <a:buFont typeface="Arial"/>
-              <a:buChar char="•"/>
-              <a:tabLst>
-                <a:tab algn="l" pos="0"/>
-              </a:tabLst>
-            </a:pPr>
-            <a:r>
-              <a:rPr b="0" lang="en-US" sz="2400" spc="-1" strike="noStrike">
-                <a:solidFill>
-                  <a:schemeClr val="dk1"/>
-                </a:solidFill>
-                <a:latin typeface="Calibri"/>
-              </a:rPr>
-              <a:t>Lag of months</a:t>
-            </a:r>
-            <a:endParaRPr b="0" lang="en-US" sz="2400" spc="-1" strike="noStrike">
-              <a:solidFill>
-                <a:schemeClr val="dk1"/>
-              </a:solidFill>
-              <a:latin typeface="Calibri"/>
-            </a:endParaRPr>
-          </a:p>
-          <a:p>
-            <a:pPr indent="0" defTabSz="343080">
-              <a:lnSpc>
-                <a:spcPct val="100000"/>
-              </a:lnSpc>
-              <a:spcBef>
-                <a:spcPts val="479"/>
+                <a:spcPts val="360"/>
               </a:spcBef>
               <a:buNone/>
               <a:tabLst>
@@ -14130,15 +13124,15 @@
               </a:tabLst>
             </a:pPr>
             <a:r>
-              <a:rPr b="0" lang="en-US" sz="2400" spc="-1" strike="noStrike">
-                <a:solidFill>
-                  <a:schemeClr val="dk1"/>
-                </a:solidFill>
-                <a:latin typeface="Calibri"/>
-              </a:rPr>
-              <a:t>Good for: cohort size, health economics, causal studies. Bad for: physiology.</a:t>
-            </a:r>
-            <a:endParaRPr b="0" lang="en-US" sz="2400" spc="-1" strike="noStrike">
+              <a:rPr b="1" lang="en-US" sz="1800" spc="-1" strike="noStrike">
+                <a:solidFill>
+                  <a:schemeClr val="dk1"/>
+                </a:solidFill>
+                <a:latin typeface="Calibri"/>
+              </a:rPr>
+              <a:t>A satellite view of farmland</a:t>
+            </a:r>
+            <a:endParaRPr b="0" lang="en-US" sz="1800" spc="-1" strike="noStrike">
               <a:solidFill>
                 <a:schemeClr val="dk1"/>
               </a:solidFill>
@@ -14147,6 +13141,29 @@
           </a:p>
         </p:txBody>
       </p:sp>
+      <p:pic>
+        <p:nvPicPr>
+          <p:cNvPr id="123" name="Picture 1" descr="img/image2d_other.jpg"/>
+          <p:cNvPicPr/>
+          <p:nvPr/>
+        </p:nvPicPr>
+        <p:blipFill>
+          <a:blip r:embed="rId2"/>
+          <a:stretch/>
+        </p:blipFill>
+        <p:spPr>
+          <a:xfrm>
+            <a:off x="5105520" y="1625760"/>
+            <a:ext cx="3085920" cy="2958840"/>
+          </a:xfrm>
+          <a:prstGeom prst="rect">
+            <a:avLst/>
+          </a:prstGeom>
+          <a:ln w="9525">
+            <a:noFill/>
+          </a:ln>
+        </p:spPr>
+      </p:pic>
     </p:spTree>
   </p:cSld>
   <mc:AlternateContent>
@@ -14161,775 +13178,7 @@
 </file>
 
 <file path=ppt/slides/slide24.xml><?xml version="1.0" encoding="utf-8"?>
-<p:sld xmlns:a="http://schemas.openxmlformats.org/drawingml/2006/main" xmlns:p="http://schemas.openxmlformats.org/presentationml/2006/main" xmlns:r="http://schemas.openxmlformats.org/officeDocument/2006/relationships" xmlns:p14="http://schemas.microsoft.com/office/powerpoint/2010/main" xmlns:p15="http://schemas.microsoft.com/office/powerpoint/2012/main" xmlns:mc="http://schemas.openxmlformats.org/markup-compatibility/2006" show="0">
-  <p:cSld>
-    <p:spTree>
-      <p:nvGrpSpPr>
-        <p:cNvPr id="1" name=""/>
-        <p:cNvGrpSpPr/>
-        <p:nvPr/>
-      </p:nvGrpSpPr>
-      <p:grpSpPr>
-        <a:xfrm>
-          <a:off x="0" y="0"/>
-          <a:ext cx="0" cy="0"/>
-          <a:chOff x="0" y="0"/>
-          <a:chExt cx="0" cy="0"/>
-        </a:xfrm>
-      </p:grpSpPr>
-      <p:sp>
-        <p:nvSpPr>
-          <p:cNvPr id="118" name="PlaceHolder 1"/>
-          <p:cNvSpPr>
-            <a:spLocks noGrp="1"/>
-          </p:cNvSpPr>
-          <p:nvPr>
-            <p:ph type="title"/>
-          </p:nvPr>
-        </p:nvSpPr>
-        <p:spPr>
-          <a:xfrm>
-            <a:off x="457200" y="205920"/>
-            <a:ext cx="8229240" cy="856800"/>
-          </a:xfrm>
-          <a:prstGeom prst="rect">
-            <a:avLst/>
-          </a:prstGeom>
-          <a:noFill/>
-          <a:ln w="0">
-            <a:noFill/>
-          </a:ln>
-        </p:spPr>
-        <p:txBody>
-          <a:bodyPr lIns="91440" rIns="91440" tIns="45720" bIns="45720" anchor="ctr">
-            <a:normAutofit/>
-          </a:bodyPr>
-          <a:p>
-            <a:pPr indent="0" algn="ctr" defTabSz="343080">
-              <a:lnSpc>
-                <a:spcPct val="100000"/>
-              </a:lnSpc>
-              <a:buNone/>
-              <a:tabLst>
-                <a:tab algn="l" pos="0"/>
-              </a:tabLst>
-            </a:pPr>
-            <a:r>
-              <a:rPr b="0" lang="en-US" sz="3300" spc="-1" strike="noStrike">
-                <a:solidFill>
-                  <a:schemeClr val="dk1"/>
-                </a:solidFill>
-                <a:latin typeface="Calibri"/>
-              </a:rPr>
-              <a:t>Medical imaging</a:t>
-            </a:r>
-            <a:endParaRPr b="0" lang="en-US" sz="3300" spc="-1" strike="noStrike">
-              <a:solidFill>
-                <a:schemeClr val="dk1"/>
-              </a:solidFill>
-              <a:latin typeface="Calibri"/>
-            </a:endParaRPr>
-          </a:p>
-        </p:txBody>
-      </p:sp>
-      <p:sp>
-        <p:nvSpPr>
-          <p:cNvPr id="119" name="PlaceHolder 2"/>
-          <p:cNvSpPr>
-            <a:spLocks noGrp="1"/>
-          </p:cNvSpPr>
-          <p:nvPr>
-            <p:ph/>
-          </p:nvPr>
-        </p:nvSpPr>
-        <p:spPr>
-          <a:xfrm>
-            <a:off x="457200" y="1200240"/>
-            <a:ext cx="8229240" cy="3394080"/>
-          </a:xfrm>
-          <a:prstGeom prst="rect">
-            <a:avLst/>
-          </a:prstGeom>
-          <a:noFill/>
-          <a:ln w="0">
-            <a:noFill/>
-          </a:ln>
-        </p:spPr>
-        <p:txBody>
-          <a:bodyPr lIns="91440" rIns="91440" tIns="45720" bIns="45720" anchor="t">
-            <a:normAutofit/>
-          </a:bodyPr>
-          <a:p>
-            <a:pPr marL="343080" indent="-343080" defTabSz="343080">
-              <a:lnSpc>
-                <a:spcPct val="100000"/>
-              </a:lnSpc>
-              <a:spcBef>
-                <a:spcPts val="479"/>
-              </a:spcBef>
-              <a:buClr>
-                <a:srgbClr val="000000"/>
-              </a:buClr>
-              <a:buFont typeface="Arial"/>
-              <a:buChar char="•"/>
-            </a:pPr>
-            <a:r>
-              <a:rPr b="1" lang="en-US" sz="2400" spc="-1" strike="noStrike">
-                <a:solidFill>
-                  <a:schemeClr val="dk1"/>
-                </a:solidFill>
-                <a:latin typeface="Calibri"/>
-              </a:rPr>
-              <a:t>2D:</a:t>
-            </a:r>
-            <a:r>
-              <a:rPr b="0" lang="en-US" sz="2400" spc="-1" strike="noStrike">
-                <a:solidFill>
-                  <a:schemeClr val="dk1"/>
-                </a:solidFill>
-                <a:latin typeface="Calibri"/>
-              </a:rPr>
-              <a:t> X-ray, fundus photography, dermoscopy, histopathology slides (gigapixel!)</a:t>
-            </a:r>
-            <a:endParaRPr b="0" lang="en-US" sz="2400" spc="-1" strike="noStrike">
-              <a:solidFill>
-                <a:schemeClr val="dk1"/>
-              </a:solidFill>
-              <a:latin typeface="Calibri"/>
-            </a:endParaRPr>
-          </a:p>
-          <a:p>
-            <a:pPr marL="343080" indent="-343080" defTabSz="343080">
-              <a:lnSpc>
-                <a:spcPct val="100000"/>
-              </a:lnSpc>
-              <a:spcBef>
-                <a:spcPts val="479"/>
-              </a:spcBef>
-              <a:buClr>
-                <a:srgbClr val="000000"/>
-              </a:buClr>
-              <a:buFont typeface="Arial"/>
-              <a:buChar char="•"/>
-            </a:pPr>
-            <a:r>
-              <a:rPr b="1" lang="en-US" sz="2400" spc="-1" strike="noStrike">
-                <a:solidFill>
-                  <a:schemeClr val="dk1"/>
-                </a:solidFill>
-                <a:latin typeface="Calibri"/>
-              </a:rPr>
-              <a:t>3D:</a:t>
-            </a:r>
-            <a:r>
-              <a:rPr b="0" lang="en-US" sz="2400" spc="-1" strike="noStrike">
-                <a:solidFill>
-                  <a:schemeClr val="dk1"/>
-                </a:solidFill>
-                <a:latin typeface="Calibri"/>
-              </a:rPr>
-              <a:t> CT, MRI — volumes, not pictures</a:t>
-            </a:r>
-            <a:endParaRPr b="0" lang="en-US" sz="2400" spc="-1" strike="noStrike">
-              <a:solidFill>
-                <a:schemeClr val="dk1"/>
-              </a:solidFill>
-              <a:latin typeface="Calibri"/>
-            </a:endParaRPr>
-          </a:p>
-          <a:p>
-            <a:pPr marL="343080" indent="-343080" defTabSz="343080">
-              <a:lnSpc>
-                <a:spcPct val="100000"/>
-              </a:lnSpc>
-              <a:spcBef>
-                <a:spcPts val="479"/>
-              </a:spcBef>
-              <a:buClr>
-                <a:srgbClr val="000000"/>
-              </a:buClr>
-              <a:buFont typeface="Arial"/>
-              <a:buChar char="•"/>
-            </a:pPr>
-            <a:r>
-              <a:rPr b="0" lang="en-US" sz="2400" spc="-1" strike="noStrike">
-                <a:solidFill>
-                  <a:schemeClr val="dk1"/>
-                </a:solidFill>
-                <a:latin typeface="Calibri"/>
-              </a:rPr>
-              <a:t>Stored as </a:t>
-            </a:r>
-            <a:r>
-              <a:rPr b="1" lang="en-US" sz="2400" spc="-1" strike="noStrike">
-                <a:solidFill>
-                  <a:schemeClr val="dk1"/>
-                </a:solidFill>
-                <a:latin typeface="Calibri"/>
-              </a:rPr>
-              <a:t>DICOM</a:t>
-            </a:r>
-            <a:r>
-              <a:rPr b="0" lang="en-US" sz="2400" spc="-1" strike="noStrike">
-                <a:solidFill>
-                  <a:schemeClr val="dk1"/>
-                </a:solidFill>
-                <a:latin typeface="Calibri"/>
-              </a:rPr>
-              <a:t> (pixels + a huge metadata header)</a:t>
-            </a:r>
-            <a:endParaRPr b="0" lang="en-US" sz="2400" spc="-1" strike="noStrike">
-              <a:solidFill>
-                <a:schemeClr val="dk1"/>
-              </a:solidFill>
-              <a:latin typeface="Calibri"/>
-            </a:endParaRPr>
-          </a:p>
-          <a:p>
-            <a:pPr marL="343080" indent="-343080" defTabSz="343080">
-              <a:lnSpc>
-                <a:spcPct val="100000"/>
-              </a:lnSpc>
-              <a:spcBef>
-                <a:spcPts val="479"/>
-              </a:spcBef>
-              <a:buClr>
-                <a:srgbClr val="000000"/>
-              </a:buClr>
-              <a:buFont typeface="Arial"/>
-              <a:buChar char="•"/>
-            </a:pPr>
-            <a:r>
-              <a:rPr b="0" lang="en-US" sz="2400" spc="-1" strike="noStrike">
-                <a:solidFill>
-                  <a:schemeClr val="dk1"/>
-                </a:solidFill>
-                <a:latin typeface="Calibri"/>
-              </a:rPr>
-              <a:t>Labels are scarce and expensive; segmentation masks even more so</a:t>
-            </a:r>
-            <a:endParaRPr b="0" lang="en-US" sz="2400" spc="-1" strike="noStrike">
-              <a:solidFill>
-                <a:schemeClr val="dk1"/>
-              </a:solidFill>
-              <a:latin typeface="Calibri"/>
-            </a:endParaRPr>
-          </a:p>
-          <a:p>
-            <a:pPr marL="343080" indent="-343080" defTabSz="343080">
-              <a:lnSpc>
-                <a:spcPct val="100000"/>
-              </a:lnSpc>
-              <a:spcBef>
-                <a:spcPts val="479"/>
-              </a:spcBef>
-              <a:buClr>
-                <a:srgbClr val="000000"/>
-              </a:buClr>
-              <a:buFont typeface="Arial"/>
-              <a:buChar char="•"/>
-            </a:pPr>
-            <a:r>
-              <a:rPr b="0" lang="en-US" sz="2400" spc="-1" strike="noStrike">
-                <a:solidFill>
-                  <a:schemeClr val="dk1"/>
-                </a:solidFill>
-                <a:latin typeface="Calibri"/>
-              </a:rPr>
-              <a:t>Weeks 7–10</a:t>
-            </a:r>
-            <a:endParaRPr b="0" lang="en-US" sz="2400" spc="-1" strike="noStrike">
-              <a:solidFill>
-                <a:schemeClr val="dk1"/>
-              </a:solidFill>
-              <a:latin typeface="Calibri"/>
-            </a:endParaRPr>
-          </a:p>
-        </p:txBody>
-      </p:sp>
-    </p:spTree>
-  </p:cSld>
-  <mc:AlternateContent>
-    <mc:Choice Requires="p14">
-      <p:transition spd="slow" p14:dur="2000"/>
-    </mc:Choice>
-    <mc:Fallback>
-      <p:transition spd="slow"/>
-    </mc:Fallback>
-  </mc:AlternateContent>
-</p:sld>
-</file>
-
-<file path=ppt/slides/slide25.xml><?xml version="1.0" encoding="utf-8"?>
-<p:sld xmlns:a="http://schemas.openxmlformats.org/drawingml/2006/main" xmlns:p="http://schemas.openxmlformats.org/presentationml/2006/main" xmlns:r="http://schemas.openxmlformats.org/officeDocument/2006/relationships" xmlns:p14="http://schemas.microsoft.com/office/powerpoint/2010/main" xmlns:p15="http://schemas.microsoft.com/office/powerpoint/2012/main" xmlns:mc="http://schemas.openxmlformats.org/markup-compatibility/2006" show="0">
-  <p:cSld>
-    <p:spTree>
-      <p:nvGrpSpPr>
-        <p:cNvPr id="1" name=""/>
-        <p:cNvGrpSpPr/>
-        <p:nvPr/>
-      </p:nvGrpSpPr>
-      <p:grpSpPr>
-        <a:xfrm>
-          <a:off x="0" y="0"/>
-          <a:ext cx="0" cy="0"/>
-          <a:chOff x="0" y="0"/>
-          <a:chExt cx="0" cy="0"/>
-        </a:xfrm>
-      </p:grpSpPr>
-      <p:sp>
-        <p:nvSpPr>
-          <p:cNvPr id="120" name="PlaceHolder 1"/>
-          <p:cNvSpPr>
-            <a:spLocks noGrp="1"/>
-          </p:cNvSpPr>
-          <p:nvPr>
-            <p:ph type="title"/>
-          </p:nvPr>
-        </p:nvSpPr>
-        <p:spPr>
-          <a:xfrm>
-            <a:off x="457200" y="205920"/>
-            <a:ext cx="8229240" cy="856800"/>
-          </a:xfrm>
-          <a:prstGeom prst="rect">
-            <a:avLst/>
-          </a:prstGeom>
-          <a:noFill/>
-          <a:ln w="0">
-            <a:noFill/>
-          </a:ln>
-        </p:spPr>
-        <p:txBody>
-          <a:bodyPr lIns="91440" rIns="91440" tIns="45720" bIns="45720" anchor="ctr">
-            <a:normAutofit/>
-          </a:bodyPr>
-          <a:p>
-            <a:pPr indent="0" algn="ctr" defTabSz="343080">
-              <a:lnSpc>
-                <a:spcPct val="100000"/>
-              </a:lnSpc>
-              <a:buNone/>
-              <a:tabLst>
-                <a:tab algn="l" pos="0"/>
-              </a:tabLst>
-            </a:pPr>
-            <a:r>
-              <a:rPr b="0" lang="en-US" sz="3300" spc="-1" strike="noStrike">
-                <a:solidFill>
-                  <a:schemeClr val="dk1"/>
-                </a:solidFill>
-                <a:latin typeface="Calibri"/>
-              </a:rPr>
-              <a:t>Waveforms and signals</a:t>
-            </a:r>
-            <a:endParaRPr b="0" lang="en-US" sz="3300" spc="-1" strike="noStrike">
-              <a:solidFill>
-                <a:schemeClr val="dk1"/>
-              </a:solidFill>
-              <a:latin typeface="Calibri"/>
-            </a:endParaRPr>
-          </a:p>
-        </p:txBody>
-      </p:sp>
-      <p:sp>
-        <p:nvSpPr>
-          <p:cNvPr id="121" name="PlaceHolder 2"/>
-          <p:cNvSpPr>
-            <a:spLocks noGrp="1"/>
-          </p:cNvSpPr>
-          <p:nvPr>
-            <p:ph/>
-          </p:nvPr>
-        </p:nvSpPr>
-        <p:spPr>
-          <a:xfrm>
-            <a:off x="457200" y="1200240"/>
-            <a:ext cx="8229240" cy="3394080"/>
-          </a:xfrm>
-          <a:prstGeom prst="rect">
-            <a:avLst/>
-          </a:prstGeom>
-          <a:noFill/>
-          <a:ln w="0">
-            <a:noFill/>
-          </a:ln>
-        </p:spPr>
-        <p:txBody>
-          <a:bodyPr lIns="91440" rIns="91440" tIns="45720" bIns="45720" anchor="t">
-            <a:normAutofit/>
-          </a:bodyPr>
-          <a:p>
-            <a:pPr marL="343080" indent="-343080" defTabSz="343080">
-              <a:lnSpc>
-                <a:spcPct val="100000"/>
-              </a:lnSpc>
-              <a:spcBef>
-                <a:spcPts val="479"/>
-              </a:spcBef>
-              <a:buClr>
-                <a:srgbClr val="000000"/>
-              </a:buClr>
-              <a:buFont typeface="Arial"/>
-              <a:buChar char="•"/>
-            </a:pPr>
-            <a:r>
-              <a:rPr b="0" lang="en-US" sz="2400" spc="-1" strike="noStrike">
-                <a:solidFill>
-                  <a:schemeClr val="dk1"/>
-                </a:solidFill>
-                <a:latin typeface="Calibri"/>
-              </a:rPr>
-              <a:t>ECG (250–500 Hz), EEG, arterial blood pressure, PPG</a:t>
-            </a:r>
-            <a:endParaRPr b="0" lang="en-US" sz="2400" spc="-1" strike="noStrike">
-              <a:solidFill>
-                <a:schemeClr val="dk1"/>
-              </a:solidFill>
-              <a:latin typeface="Calibri"/>
-            </a:endParaRPr>
-          </a:p>
-          <a:p>
-            <a:pPr marL="343080" indent="-343080" defTabSz="343080">
-              <a:lnSpc>
-                <a:spcPct val="100000"/>
-              </a:lnSpc>
-              <a:spcBef>
-                <a:spcPts val="479"/>
-              </a:spcBef>
-              <a:buClr>
-                <a:srgbClr val="000000"/>
-              </a:buClr>
-              <a:buFont typeface="Arial"/>
-              <a:buChar char="•"/>
-            </a:pPr>
-            <a:r>
-              <a:rPr b="0" lang="en-US" sz="2400" spc="-1" strike="noStrike">
-                <a:solidFill>
-                  <a:schemeClr val="dk1"/>
-                </a:solidFill>
-                <a:latin typeface="Calibri"/>
-              </a:rPr>
-              <a:t>Enormous volume, tiny labelled fraction</a:t>
-            </a:r>
-            <a:endParaRPr b="0" lang="en-US" sz="2400" spc="-1" strike="noStrike">
-              <a:solidFill>
-                <a:schemeClr val="dk1"/>
-              </a:solidFill>
-              <a:latin typeface="Calibri"/>
-            </a:endParaRPr>
-          </a:p>
-          <a:p>
-            <a:pPr marL="343080" indent="-343080" defTabSz="343080">
-              <a:lnSpc>
-                <a:spcPct val="100000"/>
-              </a:lnSpc>
-              <a:spcBef>
-                <a:spcPts val="479"/>
-              </a:spcBef>
-              <a:buClr>
-                <a:srgbClr val="000000"/>
-              </a:buClr>
-              <a:buFont typeface="Arial"/>
-              <a:buChar char="•"/>
-            </a:pPr>
-            <a:r>
-              <a:rPr b="0" lang="en-US" sz="2400" spc="-1" strike="noStrike">
-                <a:solidFill>
-                  <a:schemeClr val="dk1"/>
-                </a:solidFill>
-                <a:latin typeface="Calibri"/>
-              </a:rPr>
-              <a:t>Artefact-dominated: movement, disconnection, electrical noise</a:t>
-            </a:r>
-            <a:endParaRPr b="0" lang="en-US" sz="2400" spc="-1" strike="noStrike">
-              <a:solidFill>
-                <a:schemeClr val="dk1"/>
-              </a:solidFill>
-              <a:latin typeface="Calibri"/>
-            </a:endParaRPr>
-          </a:p>
-          <a:p>
-            <a:pPr marL="343080" indent="-343080" defTabSz="343080">
-              <a:lnSpc>
-                <a:spcPct val="100000"/>
-              </a:lnSpc>
-              <a:spcBef>
-                <a:spcPts val="479"/>
-              </a:spcBef>
-              <a:buClr>
-                <a:srgbClr val="000000"/>
-              </a:buClr>
-              <a:buFont typeface="Arial"/>
-              <a:buChar char="•"/>
-            </a:pPr>
-            <a:r>
-              <a:rPr b="0" lang="en-US" sz="2400" spc="-1" strike="noStrike">
-                <a:solidFill>
-                  <a:schemeClr val="dk1"/>
-                </a:solidFill>
-                <a:latin typeface="Calibri"/>
-              </a:rPr>
-              <a:t>Weeks 5–6</a:t>
-            </a:r>
-            <a:endParaRPr b="0" lang="en-US" sz="2400" spc="-1" strike="noStrike">
-              <a:solidFill>
-                <a:schemeClr val="dk1"/>
-              </a:solidFill>
-              <a:latin typeface="Calibri"/>
-            </a:endParaRPr>
-          </a:p>
-        </p:txBody>
-      </p:sp>
-    </p:spTree>
-  </p:cSld>
-  <mc:AlternateContent>
-    <mc:Choice Requires="p14">
-      <p:transition spd="slow" p14:dur="2000"/>
-    </mc:Choice>
-    <mc:Fallback>
-      <p:transition spd="slow"/>
-    </mc:Fallback>
-  </mc:AlternateContent>
-</p:sld>
-</file>
-
-<file path=ppt/slides/slide26.xml><?xml version="1.0" encoding="utf-8"?>
-<p:sld xmlns:a="http://schemas.openxmlformats.org/drawingml/2006/main" xmlns:p="http://schemas.openxmlformats.org/presentationml/2006/main" xmlns:r="http://schemas.openxmlformats.org/officeDocument/2006/relationships" xmlns:p14="http://schemas.microsoft.com/office/powerpoint/2010/main" xmlns:p15="http://schemas.microsoft.com/office/powerpoint/2012/main" xmlns:mc="http://schemas.openxmlformats.org/markup-compatibility/2006" show="0">
-  <p:cSld>
-    <p:spTree>
-      <p:nvGrpSpPr>
-        <p:cNvPr id="1" name=""/>
-        <p:cNvGrpSpPr/>
-        <p:nvPr/>
-      </p:nvGrpSpPr>
-      <p:grpSpPr>
-        <a:xfrm>
-          <a:off x="0" y="0"/>
-          <a:ext cx="0" cy="0"/>
-          <a:chOff x="0" y="0"/>
-          <a:chExt cx="0" cy="0"/>
-        </a:xfrm>
-      </p:grpSpPr>
-      <p:sp>
-        <p:nvSpPr>
-          <p:cNvPr id="122" name="PlaceHolder 1"/>
-          <p:cNvSpPr>
-            <a:spLocks noGrp="1"/>
-          </p:cNvSpPr>
-          <p:nvPr>
-            <p:ph type="title"/>
-          </p:nvPr>
-        </p:nvSpPr>
-        <p:spPr>
-          <a:xfrm>
-            <a:off x="457200" y="205920"/>
-            <a:ext cx="8229240" cy="856800"/>
-          </a:xfrm>
-          <a:prstGeom prst="rect">
-            <a:avLst/>
-          </a:prstGeom>
-          <a:noFill/>
-          <a:ln w="0">
-            <a:noFill/>
-          </a:ln>
-        </p:spPr>
-        <p:txBody>
-          <a:bodyPr lIns="91440" rIns="91440" tIns="45720" bIns="45720" anchor="ctr">
-            <a:normAutofit/>
-          </a:bodyPr>
-          <a:p>
-            <a:pPr indent="0" algn="ctr" defTabSz="343080">
-              <a:lnSpc>
-                <a:spcPct val="100000"/>
-              </a:lnSpc>
-              <a:buNone/>
-              <a:tabLst>
-                <a:tab algn="l" pos="0"/>
-              </a:tabLst>
-            </a:pPr>
-            <a:r>
-              <a:rPr b="0" lang="en-US" sz="3300" spc="-1" strike="noStrike">
-                <a:solidFill>
-                  <a:schemeClr val="dk1"/>
-                </a:solidFill>
-                <a:latin typeface="Calibri"/>
-              </a:rPr>
-              <a:t>Genomics &amp; omics</a:t>
-            </a:r>
-            <a:endParaRPr b="0" lang="en-US" sz="3300" spc="-1" strike="noStrike">
-              <a:solidFill>
-                <a:schemeClr val="dk1"/>
-              </a:solidFill>
-              <a:latin typeface="Calibri"/>
-            </a:endParaRPr>
-          </a:p>
-        </p:txBody>
-      </p:sp>
-      <p:sp>
-        <p:nvSpPr>
-          <p:cNvPr id="123" name="PlaceHolder 2"/>
-          <p:cNvSpPr>
-            <a:spLocks noGrp="1"/>
-          </p:cNvSpPr>
-          <p:nvPr>
-            <p:ph/>
-          </p:nvPr>
-        </p:nvSpPr>
-        <p:spPr>
-          <a:xfrm>
-            <a:off x="457200" y="1200240"/>
-            <a:ext cx="8229240" cy="3394080"/>
-          </a:xfrm>
-          <a:prstGeom prst="rect">
-            <a:avLst/>
-          </a:prstGeom>
-          <a:noFill/>
-          <a:ln w="0">
-            <a:noFill/>
-          </a:ln>
-        </p:spPr>
-        <p:txBody>
-          <a:bodyPr lIns="91440" rIns="91440" tIns="45720" bIns="45720" anchor="t">
-            <a:normAutofit/>
-          </a:bodyPr>
-          <a:p>
-            <a:pPr marL="343080" indent="-343080" defTabSz="343080">
-              <a:lnSpc>
-                <a:spcPct val="100000"/>
-              </a:lnSpc>
-              <a:spcBef>
-                <a:spcPts val="479"/>
-              </a:spcBef>
-              <a:buClr>
-                <a:srgbClr val="000000"/>
-              </a:buClr>
-              <a:buFont typeface="Arial"/>
-              <a:buChar char="•"/>
-            </a:pPr>
-            <a:r>
-              <a:rPr b="0" lang="en-US" sz="2400" spc="-1" strike="noStrike">
-                <a:solidFill>
-                  <a:schemeClr val="dk1"/>
-                </a:solidFill>
-                <a:latin typeface="Calibri"/>
-              </a:rPr>
-              <a:t>p ≫ n: 20 000 genes, 300 patients</a:t>
-            </a:r>
-            <a:endParaRPr b="0" lang="en-US" sz="2400" spc="-1" strike="noStrike">
-              <a:solidFill>
-                <a:schemeClr val="dk1"/>
-              </a:solidFill>
-              <a:latin typeface="Calibri"/>
-            </a:endParaRPr>
-          </a:p>
-          <a:p>
-            <a:pPr marL="343080" indent="-343080" defTabSz="343080">
-              <a:lnSpc>
-                <a:spcPct val="100000"/>
-              </a:lnSpc>
-              <a:spcBef>
-                <a:spcPts val="479"/>
-              </a:spcBef>
-              <a:buClr>
-                <a:srgbClr val="000000"/>
-              </a:buClr>
-              <a:buFont typeface="Arial"/>
-              <a:buChar char="•"/>
-            </a:pPr>
-            <a:r>
-              <a:rPr b="0" lang="en-US" sz="2400" spc="-1" strike="noStrike">
-                <a:solidFill>
-                  <a:schemeClr val="dk1"/>
-                </a:solidFill>
-                <a:latin typeface="Calibri"/>
-              </a:rPr>
-              <a:t>Batch effects dominate biological signal if you are careless</a:t>
-            </a:r>
-            <a:endParaRPr b="0" lang="en-US" sz="2400" spc="-1" strike="noStrike">
-              <a:solidFill>
-                <a:schemeClr val="dk1"/>
-              </a:solidFill>
-              <a:latin typeface="Calibri"/>
-            </a:endParaRPr>
-          </a:p>
-          <a:p>
-            <a:pPr marL="343080" indent="-343080" defTabSz="343080">
-              <a:lnSpc>
-                <a:spcPct val="100000"/>
-              </a:lnSpc>
-              <a:spcBef>
-                <a:spcPts val="479"/>
-              </a:spcBef>
-              <a:buClr>
-                <a:srgbClr val="000000"/>
-              </a:buClr>
-              <a:buFont typeface="Arial"/>
-              <a:buChar char="•"/>
-            </a:pPr>
-            <a:r>
-              <a:rPr b="0" lang="en-US" sz="2400" spc="-1" strike="noStrike">
-                <a:solidFill>
-                  <a:schemeClr val="dk1"/>
-                </a:solidFill>
-                <a:latin typeface="Calibri"/>
-              </a:rPr>
-              <a:t>Multiple testing everywhere</a:t>
-            </a:r>
-            <a:endParaRPr b="0" lang="en-US" sz="2400" spc="-1" strike="noStrike">
-              <a:solidFill>
-                <a:schemeClr val="dk1"/>
-              </a:solidFill>
-              <a:latin typeface="Calibri"/>
-            </a:endParaRPr>
-          </a:p>
-          <a:p>
-            <a:pPr marL="343080" indent="-343080" defTabSz="343080">
-              <a:lnSpc>
-                <a:spcPct val="100000"/>
-              </a:lnSpc>
-              <a:spcBef>
-                <a:spcPts val="479"/>
-              </a:spcBef>
-              <a:buClr>
-                <a:srgbClr val="000000"/>
-              </a:buClr>
-              <a:buFont typeface="Arial"/>
-              <a:buChar char="•"/>
-            </a:pPr>
-            <a:r>
-              <a:rPr b="0" lang="en-US" sz="2400" spc="-1" strike="noStrike">
-                <a:solidFill>
-                  <a:schemeClr val="dk1"/>
-                </a:solidFill>
-                <a:latin typeface="Calibri"/>
-              </a:rPr>
-              <a:t>Week 12 (survival on TCGA)</a:t>
-            </a:r>
-            <a:endParaRPr b="0" lang="en-US" sz="2400" spc="-1" strike="noStrike">
-              <a:solidFill>
-                <a:schemeClr val="dk1"/>
-              </a:solidFill>
-              <a:latin typeface="Calibri"/>
-            </a:endParaRPr>
-          </a:p>
-        </p:txBody>
-      </p:sp>
-    </p:spTree>
-  </p:cSld>
-  <mc:AlternateContent>
-    <mc:Choice Requires="p14">
-      <p:transition spd="slow" p14:dur="2000"/>
-    </mc:Choice>
-    <mc:Fallback>
-      <p:transition spd="slow"/>
-    </mc:Fallback>
-  </mc:AlternateContent>
-</p:sld>
-</file>
-
-<file path=ppt/slides/slide27.xml><?xml version="1.0" encoding="utf-8"?>
-<p:sld xmlns:a="http://schemas.openxmlformats.org/drawingml/2006/main" xmlns:p="http://schemas.openxmlformats.org/presentationml/2006/main" xmlns:r="http://schemas.openxmlformats.org/officeDocument/2006/relationships" xmlns:p14="http://schemas.microsoft.com/office/powerpoint/2010/main" xmlns:p15="http://schemas.microsoft.com/office/powerpoint/2012/main" xmlns:mc="http://schemas.openxmlformats.org/markup-compatibility/2006" show="0">
+<p:sld xmlns:a="http://schemas.openxmlformats.org/drawingml/2006/main" xmlns:p="http://schemas.openxmlformats.org/presentationml/2006/main" xmlns:r="http://schemas.openxmlformats.org/officeDocument/2006/relationships" xmlns:p14="http://schemas.microsoft.com/office/powerpoint/2010/main" xmlns:p15="http://schemas.microsoft.com/office/powerpoint/2012/main" xmlns:mc="http://schemas.openxmlformats.org/markup-compatibility/2006">
   <p:cSld>
     <p:spTree>
       <p:nvGrpSpPr>
@@ -14989,7 +13238,16 @@
                 </a:solidFill>
                 <a:latin typeface="Calibri"/>
               </a:rPr>
-              <a:t>Multi-modality is the real world</a:t>
+              <a:t>3D volumes: a stack of slices, </a:t>
+            </a:r>
+            <a:r>
+              <a:rPr b="0" lang="en-US" sz="3300" spc="-1" strike="noStrike">
+                <a:solidFill>
+                  <a:schemeClr val="dk1"/>
+                </a:solidFill>
+                <a:latin typeface="Courier New"/>
+              </a:rPr>
+              <a:t>D × H × W</a:t>
             </a:r>
             <a:endParaRPr b="0" lang="en-US" sz="3300" spc="-1" strike="noStrike">
               <a:solidFill>
@@ -15003,6 +13261,628 @@
       <p:sp>
         <p:nvSpPr>
           <p:cNvPr id="125" name="PlaceHolder 2"/>
+          <p:cNvSpPr>
+            <a:spLocks noGrp="1"/>
+          </p:cNvSpPr>
+          <p:nvPr>
+            <p:ph/>
+          </p:nvPr>
+        </p:nvSpPr>
+        <p:spPr>
+          <a:xfrm>
+            <a:off x="457200" y="1151280"/>
+            <a:ext cx="4039920" cy="479520"/>
+          </a:xfrm>
+          <a:prstGeom prst="rect">
+            <a:avLst/>
+          </a:prstGeom>
+          <a:noFill/>
+          <a:ln w="0">
+            <a:noFill/>
+          </a:ln>
+        </p:spPr>
+        <p:txBody>
+          <a:bodyPr lIns="91440" rIns="91440" tIns="45720" bIns="45720" anchor="b">
+            <a:normAutofit/>
+          </a:bodyPr>
+          <a:p>
+            <a:pPr indent="0" defTabSz="343080">
+              <a:lnSpc>
+                <a:spcPct val="100000"/>
+              </a:lnSpc>
+              <a:spcBef>
+                <a:spcPts val="360"/>
+              </a:spcBef>
+              <a:buNone/>
+              <a:tabLst>
+                <a:tab algn="l" pos="0"/>
+              </a:tabLst>
+            </a:pPr>
+            <a:r>
+              <a:rPr b="1" lang="en-US" sz="1800" spc="-1" strike="noStrike">
+                <a:solidFill>
+                  <a:schemeClr val="dk1"/>
+                </a:solidFill>
+                <a:latin typeface="Calibri"/>
+              </a:rPr>
+              <a:t>A CT</a:t>
+            </a:r>
+            <a:endParaRPr b="0" lang="en-US" sz="1800" spc="-1" strike="noStrike">
+              <a:solidFill>
+                <a:schemeClr val="dk1"/>
+              </a:solidFill>
+              <a:latin typeface="Calibri"/>
+            </a:endParaRPr>
+          </a:p>
+        </p:txBody>
+      </p:sp>
+      <p:pic>
+        <p:nvPicPr>
+          <p:cNvPr id="126" name="Picture 1" descr="img/volume3d_medical.jpg"/>
+          <p:cNvPicPr/>
+          <p:nvPr/>
+        </p:nvPicPr>
+        <p:blipFill>
+          <a:blip r:embed="rId1"/>
+          <a:stretch/>
+        </p:blipFill>
+        <p:spPr>
+          <a:xfrm>
+            <a:off x="1295280" y="1625760"/>
+            <a:ext cx="2349000" cy="2958840"/>
+          </a:xfrm>
+          <a:prstGeom prst="rect">
+            <a:avLst/>
+          </a:prstGeom>
+          <a:ln w="9525">
+            <a:noFill/>
+          </a:ln>
+        </p:spPr>
+      </p:pic>
+      <p:sp>
+        <p:nvSpPr>
+          <p:cNvPr id="127" name="PlaceHolder 3"/>
+          <p:cNvSpPr>
+            <a:spLocks noGrp="1"/>
+          </p:cNvSpPr>
+          <p:nvPr>
+            <p:ph/>
+          </p:nvPr>
+        </p:nvSpPr>
+        <p:spPr>
+          <a:xfrm>
+            <a:off x="4645080" y="1151280"/>
+            <a:ext cx="4041360" cy="479520"/>
+          </a:xfrm>
+          <a:prstGeom prst="rect">
+            <a:avLst/>
+          </a:prstGeom>
+          <a:noFill/>
+          <a:ln w="0">
+            <a:noFill/>
+          </a:ln>
+        </p:spPr>
+        <p:txBody>
+          <a:bodyPr lIns="91440" rIns="91440" tIns="45720" bIns="45720" anchor="b">
+            <a:normAutofit/>
+          </a:bodyPr>
+          <a:p>
+            <a:pPr indent="0" defTabSz="343080">
+              <a:lnSpc>
+                <a:spcPct val="100000"/>
+              </a:lnSpc>
+              <a:spcBef>
+                <a:spcPts val="360"/>
+              </a:spcBef>
+              <a:buNone/>
+              <a:tabLst>
+                <a:tab algn="l" pos="0"/>
+              </a:tabLst>
+            </a:pPr>
+            <a:r>
+              <a:rPr b="1" lang="en-US" sz="1800" spc="-1" strike="noStrike">
+                <a:solidFill>
+                  <a:schemeClr val="dk1"/>
+                </a:solidFill>
+                <a:latin typeface="Calibri"/>
+              </a:rPr>
+              <a:t>A LiDAR point cloud</a:t>
+            </a:r>
+            <a:endParaRPr b="0" lang="en-US" sz="1800" spc="-1" strike="noStrike">
+              <a:solidFill>
+                <a:schemeClr val="dk1"/>
+              </a:solidFill>
+              <a:latin typeface="Calibri"/>
+            </a:endParaRPr>
+          </a:p>
+        </p:txBody>
+      </p:sp>
+      <p:pic>
+        <p:nvPicPr>
+          <p:cNvPr id="128" name="Picture 1" descr="img/volume3d_other.jpg"/>
+          <p:cNvPicPr/>
+          <p:nvPr/>
+        </p:nvPicPr>
+        <p:blipFill>
+          <a:blip r:embed="rId2"/>
+          <a:stretch/>
+        </p:blipFill>
+        <p:spPr>
+          <a:xfrm>
+            <a:off x="4635360" y="1968480"/>
+            <a:ext cx="4038120" cy="2273040"/>
+          </a:xfrm>
+          <a:prstGeom prst="rect">
+            <a:avLst/>
+          </a:prstGeom>
+          <a:ln w="9525">
+            <a:noFill/>
+          </a:ln>
+        </p:spPr>
+      </p:pic>
+      <p:sp>
+        <p:nvSpPr>
+          <p:cNvPr id="129" name=""/>
+          <p:cNvSpPr txBox="1"/>
+          <p:nvPr/>
+        </p:nvSpPr>
+        <p:spPr>
+          <a:xfrm>
+            <a:off x="1265400" y="4609440"/>
+            <a:ext cx="2392200" cy="419760"/>
+          </a:xfrm>
+          <a:prstGeom prst="rect">
+            <a:avLst/>
+          </a:prstGeom>
+          <a:noFill/>
+          <a:ln w="0">
+            <a:noFill/>
+          </a:ln>
+        </p:spPr>
+        <p:txBody>
+          <a:bodyPr lIns="90000" rIns="90000" tIns="45000" bIns="45000" anchor="t">
+            <a:noAutofit/>
+          </a:bodyPr>
+          <a:p>
+            <a:pPr algn="ctr"/>
+            <a:r>
+              <a:rPr b="0" i="1" lang="en-US" sz="1800" spc="-1" strike="noStrike">
+                <a:solidFill>
+                  <a:schemeClr val="dk1"/>
+                </a:solidFill>
+                <a:latin typeface="Calibri"/>
+              </a:rPr>
+              <a:t>(three planes view)</a:t>
+            </a:r>
+            <a:endParaRPr b="0" i="1" lang="en-US" sz="1800" spc="-1" strike="noStrike">
+              <a:solidFill>
+                <a:srgbClr val="000000"/>
+              </a:solidFill>
+              <a:latin typeface="Arial"/>
+            </a:endParaRPr>
+          </a:p>
+        </p:txBody>
+      </p:sp>
+    </p:spTree>
+  </p:cSld>
+  <mc:AlternateContent>
+    <mc:Choice Requires="p14">
+      <p:transition spd="slow" p14:dur="2000"/>
+    </mc:Choice>
+    <mc:Fallback>
+      <p:transition spd="slow"/>
+    </mc:Fallback>
+  </mc:AlternateContent>
+</p:sld>
+</file>
+
+<file path=ppt/slides/slide25.xml><?xml version="1.0" encoding="utf-8"?>
+<p:sld xmlns:a="http://schemas.openxmlformats.org/drawingml/2006/main" xmlns:p="http://schemas.openxmlformats.org/presentationml/2006/main" xmlns:r="http://schemas.openxmlformats.org/officeDocument/2006/relationships" xmlns:p14="http://schemas.microsoft.com/office/powerpoint/2010/main" xmlns:p15="http://schemas.microsoft.com/office/powerpoint/2012/main" xmlns:mc="http://schemas.openxmlformats.org/markup-compatibility/2006">
+  <p:cSld>
+    <p:spTree>
+      <p:nvGrpSpPr>
+        <p:cNvPr id="1" name=""/>
+        <p:cNvGrpSpPr/>
+        <p:nvPr/>
+      </p:nvGrpSpPr>
+      <p:grpSpPr>
+        <a:xfrm>
+          <a:off x="0" y="0"/>
+          <a:ext cx="0" cy="0"/>
+          <a:chOff x="0" y="0"/>
+          <a:chExt cx="0" cy="0"/>
+        </a:xfrm>
+      </p:grpSpPr>
+      <p:sp>
+        <p:nvSpPr>
+          <p:cNvPr id="130" name="PlaceHolder 1"/>
+          <p:cNvSpPr>
+            <a:spLocks noGrp="1"/>
+          </p:cNvSpPr>
+          <p:nvPr>
+            <p:ph type="title"/>
+          </p:nvPr>
+        </p:nvSpPr>
+        <p:spPr>
+          <a:xfrm>
+            <a:off x="457200" y="205920"/>
+            <a:ext cx="8229240" cy="856800"/>
+          </a:xfrm>
+          <a:prstGeom prst="rect">
+            <a:avLst/>
+          </a:prstGeom>
+          <a:noFill/>
+          <a:ln w="0">
+            <a:noFill/>
+          </a:ln>
+        </p:spPr>
+        <p:txBody>
+          <a:bodyPr lIns="91440" rIns="91440" tIns="45720" bIns="45720" anchor="ctr">
+            <a:normAutofit/>
+          </a:bodyPr>
+          <a:p>
+            <a:pPr indent="0" algn="ctr" defTabSz="343080">
+              <a:lnSpc>
+                <a:spcPct val="100000"/>
+              </a:lnSpc>
+              <a:buNone/>
+              <a:tabLst>
+                <a:tab algn="l" pos="0"/>
+              </a:tabLst>
+            </a:pPr>
+            <a:r>
+              <a:rPr b="0" lang="en-US" sz="3300" spc="-1" strike="noStrike">
+                <a:solidFill>
+                  <a:schemeClr val="dk1"/>
+                </a:solidFill>
+                <a:latin typeface="Calibri"/>
+              </a:rPr>
+              <a:t>Text: a sequence of tokens</a:t>
+            </a:r>
+            <a:endParaRPr b="0" lang="en-US" sz="3300" spc="-1" strike="noStrike">
+              <a:solidFill>
+                <a:schemeClr val="dk1"/>
+              </a:solidFill>
+              <a:latin typeface="Calibri"/>
+            </a:endParaRPr>
+          </a:p>
+        </p:txBody>
+      </p:sp>
+      <p:sp>
+        <p:nvSpPr>
+          <p:cNvPr id="131" name="PlaceHolder 2"/>
+          <p:cNvSpPr>
+            <a:spLocks noGrp="1"/>
+          </p:cNvSpPr>
+          <p:nvPr>
+            <p:ph/>
+          </p:nvPr>
+        </p:nvSpPr>
+        <p:spPr>
+          <a:xfrm>
+            <a:off x="457200" y="1151280"/>
+            <a:ext cx="4039920" cy="479520"/>
+          </a:xfrm>
+          <a:prstGeom prst="rect">
+            <a:avLst/>
+          </a:prstGeom>
+          <a:noFill/>
+          <a:ln w="0">
+            <a:noFill/>
+          </a:ln>
+        </p:spPr>
+        <p:txBody>
+          <a:bodyPr lIns="91440" rIns="91440" tIns="45720" bIns="45720" anchor="b">
+            <a:normAutofit/>
+          </a:bodyPr>
+          <a:p>
+            <a:pPr indent="0" defTabSz="343080">
+              <a:lnSpc>
+                <a:spcPct val="100000"/>
+              </a:lnSpc>
+              <a:spcBef>
+                <a:spcPts val="360"/>
+              </a:spcBef>
+              <a:buNone/>
+              <a:tabLst>
+                <a:tab algn="l" pos="0"/>
+              </a:tabLst>
+            </a:pPr>
+            <a:r>
+              <a:rPr b="1" lang="en-US" sz="1800" spc="-1" strike="noStrike">
+                <a:solidFill>
+                  <a:schemeClr val="dk1"/>
+                </a:solidFill>
+                <a:latin typeface="Calibri"/>
+              </a:rPr>
+              <a:t>A radiology report</a:t>
+            </a:r>
+            <a:endParaRPr b="0" lang="en-US" sz="1800" spc="-1" strike="noStrike">
+              <a:solidFill>
+                <a:schemeClr val="dk1"/>
+              </a:solidFill>
+              <a:latin typeface="Calibri"/>
+            </a:endParaRPr>
+          </a:p>
+        </p:txBody>
+      </p:sp>
+      <p:pic>
+        <p:nvPicPr>
+          <p:cNvPr id="132" name="Picture 1" descr="img/text_medical.jpg"/>
+          <p:cNvPicPr/>
+          <p:nvPr/>
+        </p:nvPicPr>
+        <p:blipFill>
+          <a:blip r:embed="rId1"/>
+          <a:stretch/>
+        </p:blipFill>
+        <p:spPr>
+          <a:xfrm>
+            <a:off x="457200" y="2565360"/>
+            <a:ext cx="4038120" cy="1079280"/>
+          </a:xfrm>
+          <a:prstGeom prst="rect">
+            <a:avLst/>
+          </a:prstGeom>
+          <a:ln w="9525">
+            <a:noFill/>
+          </a:ln>
+        </p:spPr>
+      </p:pic>
+      <p:sp>
+        <p:nvSpPr>
+          <p:cNvPr id="133" name="PlaceHolder 3"/>
+          <p:cNvSpPr>
+            <a:spLocks noGrp="1"/>
+          </p:cNvSpPr>
+          <p:nvPr>
+            <p:ph/>
+          </p:nvPr>
+        </p:nvSpPr>
+        <p:spPr>
+          <a:xfrm>
+            <a:off x="4645080" y="1151280"/>
+            <a:ext cx="4041360" cy="479520"/>
+          </a:xfrm>
+          <a:prstGeom prst="rect">
+            <a:avLst/>
+          </a:prstGeom>
+          <a:noFill/>
+          <a:ln w="0">
+            <a:noFill/>
+          </a:ln>
+        </p:spPr>
+        <p:txBody>
+          <a:bodyPr lIns="91440" rIns="91440" tIns="45720" bIns="45720" anchor="b">
+            <a:normAutofit/>
+          </a:bodyPr>
+          <a:p>
+            <a:pPr indent="0" defTabSz="343080">
+              <a:lnSpc>
+                <a:spcPct val="100000"/>
+              </a:lnSpc>
+              <a:spcBef>
+                <a:spcPts val="360"/>
+              </a:spcBef>
+              <a:buNone/>
+              <a:tabLst>
+                <a:tab algn="l" pos="0"/>
+              </a:tabLst>
+            </a:pPr>
+            <a:r>
+              <a:rPr b="1" lang="en-US" sz="1800" spc="-1" strike="noStrike">
+                <a:solidFill>
+                  <a:schemeClr val="dk1"/>
+                </a:solidFill>
+                <a:latin typeface="Calibri"/>
+              </a:rPr>
+              <a:t>A newspaper page</a:t>
+            </a:r>
+            <a:endParaRPr b="0" lang="en-US" sz="1800" spc="-1" strike="noStrike">
+              <a:solidFill>
+                <a:schemeClr val="dk1"/>
+              </a:solidFill>
+              <a:latin typeface="Calibri"/>
+            </a:endParaRPr>
+          </a:p>
+        </p:txBody>
+      </p:sp>
+      <p:pic>
+        <p:nvPicPr>
+          <p:cNvPr id="134" name="Picture 1" descr="img/text_other.jpg"/>
+          <p:cNvPicPr/>
+          <p:nvPr/>
+        </p:nvPicPr>
+        <p:blipFill>
+          <a:blip r:embed="rId2"/>
+          <a:stretch/>
+        </p:blipFill>
+        <p:spPr>
+          <a:xfrm>
+            <a:off x="5372280" y="1625760"/>
+            <a:ext cx="2565000" cy="2958840"/>
+          </a:xfrm>
+          <a:prstGeom prst="rect">
+            <a:avLst/>
+          </a:prstGeom>
+          <a:ln w="9525">
+            <a:noFill/>
+          </a:ln>
+        </p:spPr>
+      </p:pic>
+    </p:spTree>
+  </p:cSld>
+  <mc:AlternateContent>
+    <mc:Choice Requires="p14">
+      <p:transition spd="slow" p14:dur="2000"/>
+    </mc:Choice>
+    <mc:Fallback>
+      <p:transition spd="slow"/>
+    </mc:Fallback>
+  </mc:AlternateContent>
+</p:sld>
+</file>
+
+<file path=ppt/slides/slide26.xml><?xml version="1.0" encoding="utf-8"?>
+<p:sld xmlns:a="http://schemas.openxmlformats.org/drawingml/2006/main" xmlns:p="http://schemas.openxmlformats.org/presentationml/2006/main" xmlns:r="http://schemas.openxmlformats.org/officeDocument/2006/relationships" xmlns:p14="http://schemas.microsoft.com/office/powerpoint/2010/main" xmlns:p15="http://schemas.microsoft.com/office/powerpoint/2012/main" xmlns:mc="http://schemas.openxmlformats.org/markup-compatibility/2006">
+  <p:cSld>
+    <p:spTree>
+      <p:nvGrpSpPr>
+        <p:cNvPr id="1" name=""/>
+        <p:cNvGrpSpPr/>
+        <p:nvPr/>
+      </p:nvGrpSpPr>
+      <p:grpSpPr>
+        <a:xfrm>
+          <a:off x="0" y="0"/>
+          <a:ext cx="0" cy="0"/>
+          <a:chOff x="0" y="0"/>
+          <a:chExt cx="0" cy="0"/>
+        </a:xfrm>
+      </p:grpSpPr>
+      <p:sp>
+        <p:nvSpPr>
+          <p:cNvPr id="135" name="PlaceHolder 1"/>
+          <p:cNvSpPr>
+            <a:spLocks noGrp="1"/>
+          </p:cNvSpPr>
+          <p:nvPr>
+            <p:ph type="title"/>
+          </p:nvPr>
+        </p:nvSpPr>
+        <p:spPr>
+          <a:xfrm>
+            <a:off x="722160" y="3305160"/>
+            <a:ext cx="7772040" cy="1021320"/>
+          </a:xfrm>
+          <a:prstGeom prst="rect">
+            <a:avLst/>
+          </a:prstGeom>
+          <a:noFill/>
+          <a:ln w="0">
+            <a:noFill/>
+          </a:ln>
+        </p:spPr>
+        <p:txBody>
+          <a:bodyPr lIns="91440" rIns="91440" tIns="45720" bIns="45720" anchor="t">
+            <a:normAutofit/>
+          </a:bodyPr>
+          <a:p>
+            <a:pPr indent="0" defTabSz="343080">
+              <a:lnSpc>
+                <a:spcPct val="100000"/>
+              </a:lnSpc>
+              <a:buNone/>
+              <a:tabLst>
+                <a:tab algn="l" pos="0"/>
+              </a:tabLst>
+            </a:pPr>
+            <a:r>
+              <a:rPr b="1" lang="en-US" sz="3000" spc="-1" strike="noStrike" cap="all">
+                <a:solidFill>
+                  <a:schemeClr val="dk1"/>
+                </a:solidFill>
+                <a:latin typeface="Calibri"/>
+              </a:rPr>
+              <a:t>4. Wrapping up</a:t>
+            </a:r>
+            <a:endParaRPr b="0" lang="en-US" sz="3000" spc="-1" strike="noStrike">
+              <a:solidFill>
+                <a:schemeClr val="dk1"/>
+              </a:solidFill>
+              <a:latin typeface="Calibri"/>
+            </a:endParaRPr>
+          </a:p>
+        </p:txBody>
+      </p:sp>
+    </p:spTree>
+  </p:cSld>
+  <mc:AlternateContent>
+    <mc:Choice Requires="p14">
+      <p:transition spd="slow" p14:dur="2000"/>
+    </mc:Choice>
+    <mc:Fallback>
+      <p:transition spd="slow"/>
+    </mc:Fallback>
+  </mc:AlternateContent>
+</p:sld>
+</file>
+
+<file path=ppt/slides/slide27.xml><?xml version="1.0" encoding="utf-8"?>
+<p:sld xmlns:a="http://schemas.openxmlformats.org/drawingml/2006/main" xmlns:p="http://schemas.openxmlformats.org/presentationml/2006/main" xmlns:r="http://schemas.openxmlformats.org/officeDocument/2006/relationships" xmlns:p14="http://schemas.microsoft.com/office/powerpoint/2010/main" xmlns:p15="http://schemas.microsoft.com/office/powerpoint/2012/main" xmlns:mc="http://schemas.openxmlformats.org/markup-compatibility/2006">
+  <p:cSld>
+    <p:spTree>
+      <p:nvGrpSpPr>
+        <p:cNvPr id="1" name=""/>
+        <p:cNvGrpSpPr/>
+        <p:nvPr/>
+      </p:nvGrpSpPr>
+      <p:grpSpPr>
+        <a:xfrm>
+          <a:off x="0" y="0"/>
+          <a:ext cx="0" cy="0"/>
+          <a:chOff x="0" y="0"/>
+          <a:chExt cx="0" cy="0"/>
+        </a:xfrm>
+      </p:grpSpPr>
+      <p:sp>
+        <p:nvSpPr>
+          <p:cNvPr id="136" name="PlaceHolder 1"/>
+          <p:cNvSpPr>
+            <a:spLocks noGrp="1"/>
+          </p:cNvSpPr>
+          <p:nvPr>
+            <p:ph type="title"/>
+          </p:nvPr>
+        </p:nvSpPr>
+        <p:spPr>
+          <a:xfrm>
+            <a:off x="457200" y="205920"/>
+            <a:ext cx="8229240" cy="856800"/>
+          </a:xfrm>
+          <a:prstGeom prst="rect">
+            <a:avLst/>
+          </a:prstGeom>
+          <a:noFill/>
+          <a:ln w="0">
+            <a:noFill/>
+          </a:ln>
+        </p:spPr>
+        <p:txBody>
+          <a:bodyPr lIns="91440" rIns="91440" tIns="45720" bIns="45720" anchor="ctr">
+            <a:normAutofit/>
+          </a:bodyPr>
+          <a:p>
+            <a:pPr indent="0" algn="ctr" defTabSz="343080">
+              <a:lnSpc>
+                <a:spcPct val="100000"/>
+              </a:lnSpc>
+              <a:buNone/>
+              <a:tabLst>
+                <a:tab algn="l" pos="0"/>
+              </a:tabLst>
+            </a:pPr>
+            <a:r>
+              <a:rPr b="0" lang="en-US" sz="3300" spc="-1" strike="noStrike">
+                <a:solidFill>
+                  <a:schemeClr val="dk1"/>
+                </a:solidFill>
+                <a:latin typeface="Calibri"/>
+              </a:rPr>
+              <a:t>Recitation today</a:t>
+            </a:r>
+            <a:endParaRPr b="0" lang="en-US" sz="3300" spc="-1" strike="noStrike">
+              <a:solidFill>
+                <a:schemeClr val="dk1"/>
+              </a:solidFill>
+              <a:latin typeface="Calibri"/>
+            </a:endParaRPr>
+          </a:p>
+        </p:txBody>
+      </p:sp>
+      <p:sp>
+        <p:nvSpPr>
+          <p:cNvPr id="137" name="PlaceHolder 2"/>
           <p:cNvSpPr>
             <a:spLocks noGrp="1"/>
           </p:cNvSpPr>
@@ -15041,31 +13921,13 @@
               </a:tabLst>
             </a:pPr>
             <a:r>
-              <a:rPr b="0" lang="en-US" sz="2400" spc="-1" strike="noStrike">
-                <a:solidFill>
-                  <a:schemeClr val="dk1"/>
-                </a:solidFill>
-                <a:latin typeface="Calibri"/>
-              </a:rPr>
-              <a:t>A single patient generates </a:t>
-            </a:r>
-            <a:r>
-              <a:rPr b="0" i="1" lang="en-US" sz="2400" spc="-1" strike="noStrike">
-                <a:solidFill>
-                  <a:schemeClr val="dk1"/>
-                </a:solidFill>
-                <a:latin typeface="Calibri"/>
-              </a:rPr>
-              <a:t>all</a:t>
-            </a:r>
-            <a:r>
-              <a:rPr b="0" lang="en-US" sz="2400" spc="-1" strike="noStrike">
-                <a:solidFill>
-                  <a:schemeClr val="dk1"/>
-                </a:solidFill>
-                <a:latin typeface="Calibri"/>
-              </a:rPr>
-              <a:t> of these simultaneously.</a:t>
+              <a:rPr b="1" lang="en-US" sz="2400" spc="-1" strike="noStrike">
+                <a:solidFill>
+                  <a:schemeClr val="dk1"/>
+                </a:solidFill>
+                <a:latin typeface="Calibri"/>
+              </a:rPr>
+              <a:t>MIMIC-IV structure and data exploration</a:t>
             </a:r>
             <a:endParaRPr b="0" lang="en-US" sz="2400" spc="-1" strike="noStrike">
               <a:solidFill>
@@ -15098,16 +13960,7 @@
                 </a:solidFill>
                 <a:latin typeface="Calibri"/>
               </a:rPr>
-              <a:t>MIMIC-IV (tabular + notes) ↔ MIMIC-CXR (images) — linked by </a:t>
-            </a:r>
-            <a:r>
-              <a:rPr b="0" lang="en-US" sz="2400" spc="-1" strike="noStrike">
-                <a:solidFill>
-                  <a:schemeClr val="dk1"/>
-                </a:solidFill>
-                <a:latin typeface="Courier New"/>
-              </a:rPr>
-              <a:t>subject_id</a:t>
+              <a:t>Download the open-access MIMIC-IV Clinical Database Demo (100 patients)</a:t>
             </a:r>
             <a:endParaRPr b="0" lang="en-US" sz="2400" spc="-1" strike="noStrike">
               <a:solidFill>
@@ -15140,7 +13993,43 @@
                 </a:solidFill>
                 <a:latin typeface="Calibri"/>
               </a:rPr>
-              <a:t>Fusion strategies: early / late / joint embedding</a:t>
+              <a:t>Map the </a:t>
+            </a:r>
+            <a:r>
+              <a:rPr b="0" lang="en-US" sz="2400" spc="-1" strike="noStrike">
+                <a:solidFill>
+                  <a:schemeClr val="dk1"/>
+                </a:solidFill>
+                <a:latin typeface="Courier New"/>
+              </a:rPr>
+              <a:t>hosp</a:t>
+            </a:r>
+            <a:r>
+              <a:rPr b="0" lang="en-US" sz="2400" spc="-1" strike="noStrike">
+                <a:solidFill>
+                  <a:schemeClr val="dk1"/>
+                </a:solidFill>
+                <a:latin typeface="Calibri"/>
+              </a:rPr>
+              <a:t> and </a:t>
+            </a:r>
+            <a:r>
+              <a:rPr b="0" lang="en-US" sz="2400" spc="-1" strike="noStrike">
+                <a:solidFill>
+                  <a:schemeClr val="dk1"/>
+                </a:solidFill>
+                <a:latin typeface="Courier New"/>
+              </a:rPr>
+              <a:t>icu</a:t>
+            </a:r>
+            <a:r>
+              <a:rPr b="0" lang="en-US" sz="2400" spc="-1" strike="noStrike">
+                <a:solidFill>
+                  <a:schemeClr val="dk1"/>
+                </a:solidFill>
+                <a:latin typeface="Calibri"/>
+              </a:rPr>
+              <a:t> schemas: what joins to what, on which key</a:t>
             </a:r>
             <a:endParaRPr b="0" lang="en-US" sz="2400" spc="-1" strike="noStrike">
               <a:solidFill>
@@ -15173,7 +14062,82 @@
                 </a:solidFill>
                 <a:latin typeface="Calibri"/>
               </a:rPr>
-              <a:t>Week 8: CLIP-style image–text pairing in radiology</a:t>
+              <a:t>Quantify missingness, imbalance, and irregular sampling</a:t>
+            </a:r>
+            <a:endParaRPr b="0" lang="en-US" sz="2400" spc="-1" strike="noStrike">
+              <a:solidFill>
+                <a:schemeClr val="dk1"/>
+              </a:solidFill>
+              <a:latin typeface="Calibri"/>
+            </a:endParaRPr>
+          </a:p>
+          <a:p>
+            <a:pPr marL="343080" indent="-343080" defTabSz="343080">
+              <a:lnSpc>
+                <a:spcPct val="100000"/>
+              </a:lnSpc>
+              <a:spcBef>
+                <a:spcPts val="479"/>
+              </a:spcBef>
+              <a:buClr>
+                <a:srgbClr val="000000"/>
+              </a:buClr>
+              <a:buFont typeface="Arial"/>
+              <a:buChar char="•"/>
+              <a:tabLst>
+                <a:tab algn="l" pos="0"/>
+              </a:tabLst>
+            </a:pPr>
+            <a:r>
+              <a:rPr b="0" lang="en-US" sz="2400" spc="-1" strike="noStrike">
+                <a:solidFill>
+                  <a:schemeClr val="dk1"/>
+                </a:solidFill>
+                <a:latin typeface="Calibri"/>
+              </a:rPr>
+              <a:t>Find at least one leakage trap and one ICD-version trap</a:t>
+            </a:r>
+            <a:endParaRPr b="0" lang="en-US" sz="2400" spc="-1" strike="noStrike">
+              <a:solidFill>
+                <a:schemeClr val="dk1"/>
+              </a:solidFill>
+              <a:latin typeface="Calibri"/>
+            </a:endParaRPr>
+          </a:p>
+          <a:p>
+            <a:pPr marL="343080" indent="-343080" defTabSz="343080">
+              <a:lnSpc>
+                <a:spcPct val="100000"/>
+              </a:lnSpc>
+              <a:spcBef>
+                <a:spcPts val="479"/>
+              </a:spcBef>
+              <a:buClr>
+                <a:srgbClr val="000000"/>
+              </a:buClr>
+              <a:buFont typeface="Arial"/>
+              <a:buChar char="•"/>
+              <a:tabLst>
+                <a:tab algn="l" pos="0"/>
+              </a:tabLst>
+            </a:pPr>
+            <a:r>
+              <a:rPr b="0" lang="en-US" sz="2400" spc="-1" strike="noStrike">
+                <a:solidFill>
+                  <a:schemeClr val="dk1"/>
+                </a:solidFill>
+                <a:latin typeface="Calibri"/>
+              </a:rPr>
+              <a:t>Notebook: </a:t>
+            </a:r>
+            <a:r>
+              <a:rPr b="0" lang="en-US" sz="2400" spc="-1" strike="noStrike">
+                <a:solidFill>
+                  <a:schemeClr val="dk1"/>
+                </a:solidFill>
+                <a:latin typeface="Courier New"/>
+              </a:rPr>
+              <a:t>Course01/notebook.ipynb</a:t>
             </a:r>
             <a:endParaRPr b="0" lang="en-US" sz="2400" spc="-1" strike="noStrike">
               <a:solidFill>
@@ -15216,92 +14180,7 @@
       </p:grpSpPr>
       <p:sp>
         <p:nvSpPr>
-          <p:cNvPr id="126" name="PlaceHolder 1"/>
-          <p:cNvSpPr>
-            <a:spLocks noGrp="1"/>
-          </p:cNvSpPr>
-          <p:nvPr>
-            <p:ph type="title"/>
-          </p:nvPr>
-        </p:nvSpPr>
-        <p:spPr>
-          <a:xfrm>
-            <a:off x="722160" y="3305160"/>
-            <a:ext cx="7772040" cy="1021320"/>
-          </a:xfrm>
-          <a:prstGeom prst="rect">
-            <a:avLst/>
-          </a:prstGeom>
-          <a:noFill/>
-          <a:ln w="0">
-            <a:noFill/>
-          </a:ln>
-        </p:spPr>
-        <p:txBody>
-          <a:bodyPr lIns="91440" rIns="91440" tIns="45720" bIns="45720" anchor="t">
-            <a:normAutofit/>
-          </a:bodyPr>
-          <a:p>
-            <a:pPr indent="0" defTabSz="343080">
-              <a:lnSpc>
-                <a:spcPct val="100000"/>
-              </a:lnSpc>
-              <a:buNone/>
-              <a:tabLst>
-                <a:tab algn="l" pos="0"/>
-              </a:tabLst>
-            </a:pPr>
-            <a:r>
-              <a:rPr b="1" lang="en-US" sz="3000" spc="-1" strike="noStrike" cap="all">
-                <a:solidFill>
-                  <a:schemeClr val="dk1"/>
-                </a:solidFill>
-                <a:latin typeface="Calibri"/>
-              </a:rPr>
-              <a:t>4. Wrapping up</a:t>
-            </a:r>
-            <a:endParaRPr b="0" lang="en-US" sz="3000" spc="-1" strike="noStrike">
-              <a:solidFill>
-                <a:schemeClr val="dk1"/>
-              </a:solidFill>
-              <a:latin typeface="Calibri"/>
-            </a:endParaRPr>
-          </a:p>
-        </p:txBody>
-      </p:sp>
-    </p:spTree>
-  </p:cSld>
-  <mc:AlternateContent>
-    <mc:Choice Requires="p14">
-      <p:transition spd="slow" p14:dur="2000"/>
-    </mc:Choice>
-    <mc:Fallback>
-      <p:transition spd="slow"/>
-    </mc:Fallback>
-  </mc:AlternateContent>
-</p:sld>
-</file>
-
-<file path=ppt/slides/slide29.xml><?xml version="1.0" encoding="utf-8"?>
-<p:sld xmlns:a="http://schemas.openxmlformats.org/drawingml/2006/main" xmlns:p="http://schemas.openxmlformats.org/presentationml/2006/main" xmlns:r="http://schemas.openxmlformats.org/officeDocument/2006/relationships" xmlns:p14="http://schemas.microsoft.com/office/powerpoint/2010/main" xmlns:p15="http://schemas.microsoft.com/office/powerpoint/2012/main" xmlns:mc="http://schemas.openxmlformats.org/markup-compatibility/2006">
-  <p:cSld>
-    <p:spTree>
-      <p:nvGrpSpPr>
-        <p:cNvPr id="1" name=""/>
-        <p:cNvGrpSpPr/>
-        <p:nvPr/>
-      </p:nvGrpSpPr>
-      <p:grpSpPr>
-        <a:xfrm>
-          <a:off x="0" y="0"/>
-          <a:ext cx="0" cy="0"/>
-          <a:chOff x="0" y="0"/>
-          <a:chExt cx="0" cy="0"/>
-        </a:xfrm>
-      </p:grpSpPr>
-      <p:sp>
-        <p:nvSpPr>
-          <p:cNvPr id="127" name="PlaceHolder 1"/>
+          <p:cNvPr id="138" name="PlaceHolder 1"/>
           <p:cNvSpPr>
             <a:spLocks noGrp="1"/>
           </p:cNvSpPr>
@@ -15343,7 +14222,7 @@
                 </a:solidFill>
                 <a:latin typeface="Calibri"/>
               </a:rPr>
-              <a:t>Key takeaways</a:t>
+              <a:t>For next week</a:t>
             </a:r>
             <a:endParaRPr b="0" lang="en-US" sz="3300" spc="-1" strike="noStrike">
               <a:solidFill>
@@ -15356,7 +14235,7 @@
       </p:sp>
       <p:sp>
         <p:nvSpPr>
-          <p:cNvPr id="128" name="PlaceHolder 2"/>
+          <p:cNvPr id="139" name="PlaceHolder 2"/>
           <p:cNvSpPr>
             <a:spLocks noGrp="1"/>
           </p:cNvSpPr>
@@ -15379,7 +14258,7 @@
         </p:spPr>
         <p:txBody>
           <a:bodyPr lIns="91440" rIns="91440" tIns="45720" bIns="45720" anchor="t">
-            <a:normAutofit fontScale="93713"/>
+            <a:normAutofit/>
           </a:bodyPr>
           <a:p>
             <a:pPr marL="343080" indent="-343080" defTabSz="343080">
@@ -15393,8 +14272,17 @@
                 <a:srgbClr val="000000"/>
               </a:buClr>
               <a:buFont typeface="Arial"/>
-              <a:buAutoNum type="arabicPeriod"/>
-            </a:pPr>
+              <a:buChar char="•"/>
+            </a:pPr>
+            <a:r>
+              <a:rPr b="1" lang="en-US" sz="2400" spc="-1" strike="noStrike">
+                <a:solidFill>
+                  <a:schemeClr val="dk1"/>
+                </a:solidFill>
+                <a:latin typeface="Calibri"/>
+              </a:rPr>
+              <a:t>TO DO:</a:t>
+            </a:r>
             <a:r>
               <a:rPr b="0" lang="en-US" sz="2400" spc="-1" strike="noStrike">
                 <a:solidFill>
@@ -15402,7 +14290,7 @@
                 </a:solidFill>
                 <a:latin typeface="Calibri"/>
               </a:rPr>
-              <a:t>Real data violates every assumption of the textbook setup</a:t>
+              <a:t> finish the recitation notebook, including the open questions at the end</a:t>
             </a:r>
             <a:endParaRPr b="0" lang="en-US" sz="2400" spc="-1" strike="noStrike">
               <a:solidFill>
@@ -15423,7 +14311,7 @@
                 <a:srgbClr val="000000"/>
               </a:buClr>
               <a:buFont typeface="Arial"/>
-              <a:buAutoNum type="arabicPeriod"/>
+              <a:buChar char="•"/>
             </a:pPr>
             <a:r>
               <a:rPr b="1" lang="en-US" sz="2400" spc="-1" strike="noStrike">
@@ -15432,7 +14320,7 @@
                 </a:solidFill>
                 <a:latin typeface="Calibri"/>
               </a:rPr>
-              <a:t>Noise, missingness, imbalance, shift</a:t>
+              <a:t>Next lecture:</a:t>
             </a:r>
             <a:r>
               <a:rPr b="0" lang="en-US" sz="2400" spc="-1" strike="noStrike">
@@ -15441,145 +14329,7 @@
                 </a:solidFill>
                 <a:latin typeface="Calibri"/>
               </a:rPr>
-              <a:t> — name them explicitly for every project</a:t>
-            </a:r>
-            <a:endParaRPr b="0" lang="en-US" sz="2400" spc="-1" strike="noStrike">
-              <a:solidFill>
-                <a:schemeClr val="dk1"/>
-              </a:solidFill>
-              <a:latin typeface="Calibri"/>
-            </a:endParaRPr>
-          </a:p>
-          <a:p>
-            <a:pPr marL="343080" indent="-343080" defTabSz="343080">
-              <a:lnSpc>
-                <a:spcPct val="100000"/>
-              </a:lnSpc>
-              <a:spcBef>
-                <a:spcPts val="479"/>
-              </a:spcBef>
-              <a:buClr>
-                <a:srgbClr val="000000"/>
-              </a:buClr>
-              <a:buFont typeface="Arial"/>
-              <a:buAutoNum type="arabicPeriod"/>
-            </a:pPr>
-            <a:r>
-              <a:rPr b="0" lang="en-US" sz="2400" spc="-1" strike="noStrike">
-                <a:solidFill>
-                  <a:schemeClr val="dk1"/>
-                </a:solidFill>
-                <a:latin typeface="Calibri"/>
-              </a:rPr>
-              <a:t>In healthcare you observe </a:t>
-            </a:r>
-            <a:r>
-              <a:rPr b="1" lang="en-US" sz="2400" spc="-1" strike="noStrike">
-                <a:solidFill>
-                  <a:schemeClr val="dk1"/>
-                </a:solidFill>
-                <a:latin typeface="Calibri"/>
-              </a:rPr>
-              <a:t>care processes</a:t>
-            </a:r>
-            <a:r>
-              <a:rPr b="0" lang="en-US" sz="2400" spc="-1" strike="noStrike">
-                <a:solidFill>
-                  <a:schemeClr val="dk1"/>
-                </a:solidFill>
-                <a:latin typeface="Calibri"/>
-              </a:rPr>
-              <a:t>, not biology</a:t>
-            </a:r>
-            <a:endParaRPr b="0" lang="en-US" sz="2400" spc="-1" strike="noStrike">
-              <a:solidFill>
-                <a:schemeClr val="dk1"/>
-              </a:solidFill>
-              <a:latin typeface="Calibri"/>
-            </a:endParaRPr>
-          </a:p>
-          <a:p>
-            <a:pPr marL="343080" indent="-343080" defTabSz="343080">
-              <a:lnSpc>
-                <a:spcPct val="100000"/>
-              </a:lnSpc>
-              <a:spcBef>
-                <a:spcPts val="479"/>
-              </a:spcBef>
-              <a:buClr>
-                <a:srgbClr val="000000"/>
-              </a:buClr>
-              <a:buFont typeface="Arial"/>
-              <a:buAutoNum type="arabicPeriod"/>
-            </a:pPr>
-            <a:r>
-              <a:rPr b="0" lang="en-US" sz="2400" spc="-1" strike="noStrike">
-                <a:solidFill>
-                  <a:schemeClr val="dk1"/>
-                </a:solidFill>
-                <a:latin typeface="Calibri"/>
-              </a:rPr>
-              <a:t>Missingness carries information — and leakage</a:t>
-            </a:r>
-            <a:endParaRPr b="0" lang="en-US" sz="2400" spc="-1" strike="noStrike">
-              <a:solidFill>
-                <a:schemeClr val="dk1"/>
-              </a:solidFill>
-              <a:latin typeface="Calibri"/>
-            </a:endParaRPr>
-          </a:p>
-          <a:p>
-            <a:pPr marL="343080" indent="-343080" defTabSz="343080">
-              <a:lnSpc>
-                <a:spcPct val="100000"/>
-              </a:lnSpc>
-              <a:spcBef>
-                <a:spcPts val="479"/>
-              </a:spcBef>
-              <a:buClr>
-                <a:srgbClr val="000000"/>
-              </a:buClr>
-              <a:buFont typeface="Arial"/>
-              <a:buAutoNum type="arabicPeriod"/>
-            </a:pPr>
-            <a:r>
-              <a:rPr b="0" lang="en-US" sz="2400" spc="-1" strike="noStrike">
-                <a:solidFill>
-                  <a:schemeClr val="dk1"/>
-                </a:solidFill>
-                <a:latin typeface="Calibri"/>
-              </a:rPr>
-              <a:t>Standards (FHIR, OMOP) and vocabularies (ICD, LOINC, SNOMED) are what make data joinable</a:t>
-            </a:r>
-            <a:endParaRPr b="0" lang="en-US" sz="2400" spc="-1" strike="noStrike">
-              <a:solidFill>
-                <a:schemeClr val="dk1"/>
-              </a:solidFill>
-              <a:latin typeface="Calibri"/>
-            </a:endParaRPr>
-          </a:p>
-          <a:p>
-            <a:pPr marL="343080" indent="-343080" defTabSz="343080">
-              <a:lnSpc>
-                <a:spcPct val="100000"/>
-              </a:lnSpc>
-              <a:spcBef>
-                <a:spcPts val="479"/>
-              </a:spcBef>
-              <a:buClr>
-                <a:srgbClr val="000000"/>
-              </a:buClr>
-              <a:buFont typeface="Arial"/>
-              <a:buAutoNum type="arabicPeriod"/>
-            </a:pPr>
-            <a:r>
-              <a:rPr b="0" lang="en-US" sz="2400" spc="-1" strike="noStrike">
-                <a:solidFill>
-                  <a:schemeClr val="dk1"/>
-                </a:solidFill>
-                <a:latin typeface="Calibri"/>
-              </a:rPr>
-              <a:t>Always ask: what does one row mean, and when is the label known?</a:t>
+              <a:t> advanced feature engineering, and missing-ness done properly</a:t>
             </a:r>
             <a:endParaRPr b="0" lang="en-US" sz="2400" spc="-1" strike="noStrike">
               <a:solidFill>
@@ -15915,828 +14665,6 @@
 </p:sld>
 </file>
 
-<file path=ppt/slides/slide30.xml><?xml version="1.0" encoding="utf-8"?>
-<p:sld xmlns:a="http://schemas.openxmlformats.org/drawingml/2006/main" xmlns:p="http://schemas.openxmlformats.org/presentationml/2006/main" xmlns:r="http://schemas.openxmlformats.org/officeDocument/2006/relationships" xmlns:p14="http://schemas.microsoft.com/office/powerpoint/2010/main" xmlns:p15="http://schemas.microsoft.com/office/powerpoint/2012/main" xmlns:mc="http://schemas.openxmlformats.org/markup-compatibility/2006">
-  <p:cSld>
-    <p:spTree>
-      <p:nvGrpSpPr>
-        <p:cNvPr id="1" name=""/>
-        <p:cNvGrpSpPr/>
-        <p:nvPr/>
-      </p:nvGrpSpPr>
-      <p:grpSpPr>
-        <a:xfrm>
-          <a:off x="0" y="0"/>
-          <a:ext cx="0" cy="0"/>
-          <a:chOff x="0" y="0"/>
-          <a:chExt cx="0" cy="0"/>
-        </a:xfrm>
-      </p:grpSpPr>
-      <p:sp>
-        <p:nvSpPr>
-          <p:cNvPr id="129" name="PlaceHolder 1"/>
-          <p:cNvSpPr>
-            <a:spLocks noGrp="1"/>
-          </p:cNvSpPr>
-          <p:nvPr>
-            <p:ph type="title"/>
-          </p:nvPr>
-        </p:nvSpPr>
-        <p:spPr>
-          <a:xfrm>
-            <a:off x="457200" y="205920"/>
-            <a:ext cx="8229240" cy="856800"/>
-          </a:xfrm>
-          <a:prstGeom prst="rect">
-            <a:avLst/>
-          </a:prstGeom>
-          <a:noFill/>
-          <a:ln w="0">
-            <a:noFill/>
-          </a:ln>
-        </p:spPr>
-        <p:txBody>
-          <a:bodyPr lIns="91440" rIns="91440" tIns="45720" bIns="45720" anchor="ctr">
-            <a:normAutofit/>
-          </a:bodyPr>
-          <a:p>
-            <a:pPr indent="0" algn="ctr" defTabSz="343080">
-              <a:lnSpc>
-                <a:spcPct val="100000"/>
-              </a:lnSpc>
-              <a:buNone/>
-              <a:tabLst>
-                <a:tab algn="l" pos="0"/>
-              </a:tabLst>
-            </a:pPr>
-            <a:r>
-              <a:rPr b="0" lang="en-US" sz="3300" spc="-1" strike="noStrike">
-                <a:solidFill>
-                  <a:schemeClr val="dk1"/>
-                </a:solidFill>
-                <a:latin typeface="Calibri"/>
-              </a:rPr>
-              <a:t>Recitation today (1.5h)</a:t>
-            </a:r>
-            <a:endParaRPr b="0" lang="en-US" sz="3300" spc="-1" strike="noStrike">
-              <a:solidFill>
-                <a:schemeClr val="dk1"/>
-              </a:solidFill>
-              <a:latin typeface="Calibri"/>
-            </a:endParaRPr>
-          </a:p>
-        </p:txBody>
-      </p:sp>
-      <p:sp>
-        <p:nvSpPr>
-          <p:cNvPr id="130" name="PlaceHolder 2"/>
-          <p:cNvSpPr>
-            <a:spLocks noGrp="1"/>
-          </p:cNvSpPr>
-          <p:nvPr>
-            <p:ph/>
-          </p:nvPr>
-        </p:nvSpPr>
-        <p:spPr>
-          <a:xfrm>
-            <a:off x="457200" y="1200240"/>
-            <a:ext cx="8229240" cy="3394080"/>
-          </a:xfrm>
-          <a:prstGeom prst="rect">
-            <a:avLst/>
-          </a:prstGeom>
-          <a:noFill/>
-          <a:ln w="0">
-            <a:noFill/>
-          </a:ln>
-        </p:spPr>
-        <p:txBody>
-          <a:bodyPr lIns="91440" rIns="91440" tIns="45720" bIns="45720" anchor="t">
-            <a:normAutofit/>
-          </a:bodyPr>
-          <a:p>
-            <a:pPr indent="0" defTabSz="343080">
-              <a:lnSpc>
-                <a:spcPct val="100000"/>
-              </a:lnSpc>
-              <a:spcBef>
-                <a:spcPts val="479"/>
-              </a:spcBef>
-              <a:buNone/>
-              <a:tabLst>
-                <a:tab algn="l" pos="0"/>
-              </a:tabLst>
-            </a:pPr>
-            <a:r>
-              <a:rPr b="1" lang="en-US" sz="2400" spc="-1" strike="noStrike">
-                <a:solidFill>
-                  <a:schemeClr val="dk1"/>
-                </a:solidFill>
-                <a:latin typeface="Calibri"/>
-              </a:rPr>
-              <a:t>MIMIC-IV structure and data exploration</a:t>
-            </a:r>
-            <a:endParaRPr b="0" lang="en-US" sz="2400" spc="-1" strike="noStrike">
-              <a:solidFill>
-                <a:schemeClr val="dk1"/>
-              </a:solidFill>
-              <a:latin typeface="Calibri"/>
-            </a:endParaRPr>
-          </a:p>
-          <a:p>
-            <a:pPr marL="343080" indent="-343080" defTabSz="343080">
-              <a:lnSpc>
-                <a:spcPct val="100000"/>
-              </a:lnSpc>
-              <a:spcBef>
-                <a:spcPts val="479"/>
-              </a:spcBef>
-              <a:buClr>
-                <a:srgbClr val="000000"/>
-              </a:buClr>
-              <a:buFont typeface="Arial"/>
-              <a:buChar char="•"/>
-              <a:tabLst>
-                <a:tab algn="l" pos="0"/>
-              </a:tabLst>
-            </a:pPr>
-            <a:r>
-              <a:rPr b="0" lang="en-US" sz="2400" spc="-1" strike="noStrike">
-                <a:solidFill>
-                  <a:schemeClr val="dk1"/>
-                </a:solidFill>
-                <a:latin typeface="Calibri"/>
-              </a:rPr>
-              <a:t>Download the open-access MIMIC-IV Clinical Database Demo (100 patients)</a:t>
-            </a:r>
-            <a:endParaRPr b="0" lang="en-US" sz="2400" spc="-1" strike="noStrike">
-              <a:solidFill>
-                <a:schemeClr val="dk1"/>
-              </a:solidFill>
-              <a:latin typeface="Calibri"/>
-            </a:endParaRPr>
-          </a:p>
-          <a:p>
-            <a:pPr marL="343080" indent="-343080" defTabSz="343080">
-              <a:lnSpc>
-                <a:spcPct val="100000"/>
-              </a:lnSpc>
-              <a:spcBef>
-                <a:spcPts val="479"/>
-              </a:spcBef>
-              <a:buClr>
-                <a:srgbClr val="000000"/>
-              </a:buClr>
-              <a:buFont typeface="Arial"/>
-              <a:buChar char="•"/>
-              <a:tabLst>
-                <a:tab algn="l" pos="0"/>
-              </a:tabLst>
-            </a:pPr>
-            <a:r>
-              <a:rPr b="0" lang="en-US" sz="2400" spc="-1" strike="noStrike">
-                <a:solidFill>
-                  <a:schemeClr val="dk1"/>
-                </a:solidFill>
-                <a:latin typeface="Calibri"/>
-              </a:rPr>
-              <a:t>Map the </a:t>
-            </a:r>
-            <a:r>
-              <a:rPr b="0" lang="en-US" sz="2400" spc="-1" strike="noStrike">
-                <a:solidFill>
-                  <a:schemeClr val="dk1"/>
-                </a:solidFill>
-                <a:latin typeface="Courier New"/>
-              </a:rPr>
-              <a:t>hosp</a:t>
-            </a:r>
-            <a:r>
-              <a:rPr b="0" lang="en-US" sz="2400" spc="-1" strike="noStrike">
-                <a:solidFill>
-                  <a:schemeClr val="dk1"/>
-                </a:solidFill>
-                <a:latin typeface="Calibri"/>
-              </a:rPr>
-              <a:t> and </a:t>
-            </a:r>
-            <a:r>
-              <a:rPr b="0" lang="en-US" sz="2400" spc="-1" strike="noStrike">
-                <a:solidFill>
-                  <a:schemeClr val="dk1"/>
-                </a:solidFill>
-                <a:latin typeface="Courier New"/>
-              </a:rPr>
-              <a:t>icu</a:t>
-            </a:r>
-            <a:r>
-              <a:rPr b="0" lang="en-US" sz="2400" spc="-1" strike="noStrike">
-                <a:solidFill>
-                  <a:schemeClr val="dk1"/>
-                </a:solidFill>
-                <a:latin typeface="Calibri"/>
-              </a:rPr>
-              <a:t> schemas: what joins to what, on which key</a:t>
-            </a:r>
-            <a:endParaRPr b="0" lang="en-US" sz="2400" spc="-1" strike="noStrike">
-              <a:solidFill>
-                <a:schemeClr val="dk1"/>
-              </a:solidFill>
-              <a:latin typeface="Calibri"/>
-            </a:endParaRPr>
-          </a:p>
-          <a:p>
-            <a:pPr marL="343080" indent="-343080" defTabSz="343080">
-              <a:lnSpc>
-                <a:spcPct val="100000"/>
-              </a:lnSpc>
-              <a:spcBef>
-                <a:spcPts val="479"/>
-              </a:spcBef>
-              <a:buClr>
-                <a:srgbClr val="000000"/>
-              </a:buClr>
-              <a:buFont typeface="Arial"/>
-              <a:buChar char="•"/>
-              <a:tabLst>
-                <a:tab algn="l" pos="0"/>
-              </a:tabLst>
-            </a:pPr>
-            <a:r>
-              <a:rPr b="0" lang="en-US" sz="2400" spc="-1" strike="noStrike">
-                <a:solidFill>
-                  <a:schemeClr val="dk1"/>
-                </a:solidFill>
-                <a:latin typeface="Calibri"/>
-              </a:rPr>
-              <a:t>Quantify missingness, imbalance, and irregular sampling</a:t>
-            </a:r>
-            <a:endParaRPr b="0" lang="en-US" sz="2400" spc="-1" strike="noStrike">
-              <a:solidFill>
-                <a:schemeClr val="dk1"/>
-              </a:solidFill>
-              <a:latin typeface="Calibri"/>
-            </a:endParaRPr>
-          </a:p>
-          <a:p>
-            <a:pPr marL="343080" indent="-343080" defTabSz="343080">
-              <a:lnSpc>
-                <a:spcPct val="100000"/>
-              </a:lnSpc>
-              <a:spcBef>
-                <a:spcPts val="479"/>
-              </a:spcBef>
-              <a:buClr>
-                <a:srgbClr val="000000"/>
-              </a:buClr>
-              <a:buFont typeface="Arial"/>
-              <a:buChar char="•"/>
-              <a:tabLst>
-                <a:tab algn="l" pos="0"/>
-              </a:tabLst>
-            </a:pPr>
-            <a:r>
-              <a:rPr b="0" lang="en-US" sz="2400" spc="-1" strike="noStrike">
-                <a:solidFill>
-                  <a:schemeClr val="dk1"/>
-                </a:solidFill>
-                <a:latin typeface="Calibri"/>
-              </a:rPr>
-              <a:t>Find at least one leakage trap and one ICD-version trap</a:t>
-            </a:r>
-            <a:endParaRPr b="0" lang="en-US" sz="2400" spc="-1" strike="noStrike">
-              <a:solidFill>
-                <a:schemeClr val="dk1"/>
-              </a:solidFill>
-              <a:latin typeface="Calibri"/>
-            </a:endParaRPr>
-          </a:p>
-          <a:p>
-            <a:pPr marL="343080" indent="-343080" defTabSz="343080">
-              <a:lnSpc>
-                <a:spcPct val="100000"/>
-              </a:lnSpc>
-              <a:spcBef>
-                <a:spcPts val="479"/>
-              </a:spcBef>
-              <a:buClr>
-                <a:srgbClr val="000000"/>
-              </a:buClr>
-              <a:buFont typeface="Arial"/>
-              <a:buChar char="•"/>
-              <a:tabLst>
-                <a:tab algn="l" pos="0"/>
-              </a:tabLst>
-            </a:pPr>
-            <a:r>
-              <a:rPr b="0" lang="en-US" sz="2400" spc="-1" strike="noStrike">
-                <a:solidFill>
-                  <a:schemeClr val="dk1"/>
-                </a:solidFill>
-                <a:latin typeface="Calibri"/>
-              </a:rPr>
-              <a:t>Notebook: </a:t>
-            </a:r>
-            <a:r>
-              <a:rPr b="0" lang="en-US" sz="2400" spc="-1" strike="noStrike">
-                <a:solidFill>
-                  <a:schemeClr val="dk1"/>
-                </a:solidFill>
-                <a:latin typeface="Courier New"/>
-              </a:rPr>
-              <a:t>Course01/notebook.ipynb</a:t>
-            </a:r>
-            <a:endParaRPr b="0" lang="en-US" sz="2400" spc="-1" strike="noStrike">
-              <a:solidFill>
-                <a:schemeClr val="dk1"/>
-              </a:solidFill>
-              <a:latin typeface="Calibri"/>
-            </a:endParaRPr>
-          </a:p>
-        </p:txBody>
-      </p:sp>
-    </p:spTree>
-  </p:cSld>
-  <mc:AlternateContent>
-    <mc:Choice Requires="p14">
-      <p:transition spd="slow" p14:dur="2000"/>
-    </mc:Choice>
-    <mc:Fallback>
-      <p:transition spd="slow"/>
-    </mc:Fallback>
-  </mc:AlternateContent>
-</p:sld>
-</file>
-
-<file path=ppt/slides/slide31.xml><?xml version="1.0" encoding="utf-8"?>
-<p:sld xmlns:a="http://schemas.openxmlformats.org/drawingml/2006/main" xmlns:p="http://schemas.openxmlformats.org/presentationml/2006/main" xmlns:r="http://schemas.openxmlformats.org/officeDocument/2006/relationships" xmlns:p14="http://schemas.microsoft.com/office/powerpoint/2010/main" xmlns:p15="http://schemas.microsoft.com/office/powerpoint/2012/main" xmlns:mc="http://schemas.openxmlformats.org/markup-compatibility/2006">
-  <p:cSld>
-    <p:spTree>
-      <p:nvGrpSpPr>
-        <p:cNvPr id="1" name=""/>
-        <p:cNvGrpSpPr/>
-        <p:nvPr/>
-      </p:nvGrpSpPr>
-      <p:grpSpPr>
-        <a:xfrm>
-          <a:off x="0" y="0"/>
-          <a:ext cx="0" cy="0"/>
-          <a:chOff x="0" y="0"/>
-          <a:chExt cx="0" cy="0"/>
-        </a:xfrm>
-      </p:grpSpPr>
-      <p:sp>
-        <p:nvSpPr>
-          <p:cNvPr id="131" name="PlaceHolder 1"/>
-          <p:cNvSpPr>
-            <a:spLocks noGrp="1"/>
-          </p:cNvSpPr>
-          <p:nvPr>
-            <p:ph type="title"/>
-          </p:nvPr>
-        </p:nvSpPr>
-        <p:spPr>
-          <a:xfrm>
-            <a:off x="457200" y="205920"/>
-            <a:ext cx="8229240" cy="856800"/>
-          </a:xfrm>
-          <a:prstGeom prst="rect">
-            <a:avLst/>
-          </a:prstGeom>
-          <a:noFill/>
-          <a:ln w="0">
-            <a:noFill/>
-          </a:ln>
-        </p:spPr>
-        <p:txBody>
-          <a:bodyPr lIns="91440" rIns="91440" tIns="45720" bIns="45720" anchor="ctr">
-            <a:normAutofit/>
-          </a:bodyPr>
-          <a:p>
-            <a:pPr indent="0" algn="ctr" defTabSz="343080">
-              <a:lnSpc>
-                <a:spcPct val="100000"/>
-              </a:lnSpc>
-              <a:buNone/>
-              <a:tabLst>
-                <a:tab algn="l" pos="0"/>
-              </a:tabLst>
-            </a:pPr>
-            <a:r>
-              <a:rPr b="0" lang="en-US" sz="3300" spc="-1" strike="noStrike">
-                <a:solidFill>
-                  <a:schemeClr val="dk1"/>
-                </a:solidFill>
-                <a:latin typeface="Calibri"/>
-              </a:rPr>
-              <a:t>For next week</a:t>
-            </a:r>
-            <a:endParaRPr b="0" lang="en-US" sz="3300" spc="-1" strike="noStrike">
-              <a:solidFill>
-                <a:schemeClr val="dk1"/>
-              </a:solidFill>
-              <a:latin typeface="Calibri"/>
-            </a:endParaRPr>
-          </a:p>
-        </p:txBody>
-      </p:sp>
-      <p:sp>
-        <p:nvSpPr>
-          <p:cNvPr id="132" name="PlaceHolder 2"/>
-          <p:cNvSpPr>
-            <a:spLocks noGrp="1"/>
-          </p:cNvSpPr>
-          <p:nvPr>
-            <p:ph/>
-          </p:nvPr>
-        </p:nvSpPr>
-        <p:spPr>
-          <a:xfrm>
-            <a:off x="457200" y="1200240"/>
-            <a:ext cx="8229240" cy="3394080"/>
-          </a:xfrm>
-          <a:prstGeom prst="rect">
-            <a:avLst/>
-          </a:prstGeom>
-          <a:noFill/>
-          <a:ln w="0">
-            <a:noFill/>
-          </a:ln>
-        </p:spPr>
-        <p:txBody>
-          <a:bodyPr lIns="91440" rIns="91440" tIns="45720" bIns="45720" anchor="t">
-            <a:normAutofit/>
-          </a:bodyPr>
-          <a:p>
-            <a:pPr marL="343080" indent="-343080" defTabSz="343080">
-              <a:lnSpc>
-                <a:spcPct val="100000"/>
-              </a:lnSpc>
-              <a:spcBef>
-                <a:spcPts val="479"/>
-              </a:spcBef>
-              <a:buClr>
-                <a:srgbClr val="000000"/>
-              </a:buClr>
-              <a:buFont typeface="Arial"/>
-              <a:buChar char="•"/>
-            </a:pPr>
-            <a:r>
-              <a:rPr b="1" lang="en-US" sz="2400" spc="-1" strike="noStrike">
-                <a:solidFill>
-                  <a:schemeClr val="dk1"/>
-                </a:solidFill>
-                <a:latin typeface="Calibri"/>
-              </a:rPr>
-              <a:t>Read:</a:t>
-            </a:r>
-            <a:r>
-              <a:rPr b="0" lang="en-US" sz="2400" spc="-1" strike="noStrike">
-                <a:solidFill>
-                  <a:schemeClr val="dk1"/>
-                </a:solidFill>
-                <a:latin typeface="Calibri"/>
-              </a:rPr>
-              <a:t> Johnson et al., </a:t>
-            </a:r>
-            <a:r>
-              <a:rPr b="0" i="1" lang="en-US" sz="2400" spc="-1" strike="noStrike">
-                <a:solidFill>
-                  <a:schemeClr val="dk1"/>
-                </a:solidFill>
-                <a:latin typeface="Calibri"/>
-              </a:rPr>
-              <a:t>MIMIC-IV, a freely accessible electronic health record dataset</a:t>
-            </a:r>
-            <a:r>
-              <a:rPr b="0" lang="en-US" sz="2400" spc="-1" strike="noStrike">
-                <a:solidFill>
-                  <a:schemeClr val="dk1"/>
-                </a:solidFill>
-                <a:latin typeface="Calibri"/>
-              </a:rPr>
-              <a:t> (Scientific Data, 2023)</a:t>
-            </a:r>
-            <a:endParaRPr b="0" lang="en-US" sz="2400" spc="-1" strike="noStrike">
-              <a:solidFill>
-                <a:schemeClr val="dk1"/>
-              </a:solidFill>
-              <a:latin typeface="Calibri"/>
-            </a:endParaRPr>
-          </a:p>
-          <a:p>
-            <a:pPr marL="343080" indent="-343080" defTabSz="343080">
-              <a:lnSpc>
-                <a:spcPct val="100000"/>
-              </a:lnSpc>
-              <a:spcBef>
-                <a:spcPts val="479"/>
-              </a:spcBef>
-              <a:buClr>
-                <a:srgbClr val="000000"/>
-              </a:buClr>
-              <a:buFont typeface="Arial"/>
-              <a:buChar char="•"/>
-            </a:pPr>
-            <a:r>
-              <a:rPr b="1" lang="en-US" sz="2400" spc="-1" strike="noStrike">
-                <a:solidFill>
-                  <a:schemeClr val="dk1"/>
-                </a:solidFill>
-                <a:latin typeface="Calibri"/>
-              </a:rPr>
-              <a:t>Skim:</a:t>
-            </a:r>
-            <a:r>
-              <a:rPr b="0" lang="en-US" sz="2400" spc="-1" strike="noStrike">
-                <a:solidFill>
-                  <a:schemeClr val="dk1"/>
-                </a:solidFill>
-                <a:latin typeface="Calibri"/>
-              </a:rPr>
-              <a:t> Rubin (1976) on missing data mechanisms — we build on it directly</a:t>
-            </a:r>
-            <a:endParaRPr b="0" lang="en-US" sz="2400" spc="-1" strike="noStrike">
-              <a:solidFill>
-                <a:schemeClr val="dk1"/>
-              </a:solidFill>
-              <a:latin typeface="Calibri"/>
-            </a:endParaRPr>
-          </a:p>
-          <a:p>
-            <a:pPr marL="343080" indent="-343080" defTabSz="343080">
-              <a:lnSpc>
-                <a:spcPct val="100000"/>
-              </a:lnSpc>
-              <a:spcBef>
-                <a:spcPts val="479"/>
-              </a:spcBef>
-              <a:buClr>
-                <a:srgbClr val="000000"/>
-              </a:buClr>
-              <a:buFont typeface="Arial"/>
-              <a:buChar char="•"/>
-            </a:pPr>
-            <a:r>
-              <a:rPr b="1" lang="en-US" sz="2400" spc="-1" strike="noStrike">
-                <a:solidFill>
-                  <a:schemeClr val="dk1"/>
-                </a:solidFill>
-                <a:latin typeface="Calibri"/>
-              </a:rPr>
-              <a:t>Do:</a:t>
-            </a:r>
-            <a:r>
-              <a:rPr b="0" lang="en-US" sz="2400" spc="-1" strike="noStrike">
-                <a:solidFill>
-                  <a:schemeClr val="dk1"/>
-                </a:solidFill>
-                <a:latin typeface="Calibri"/>
-              </a:rPr>
-              <a:t> finish the recitation notebook, including the open questions at the end</a:t>
-            </a:r>
-            <a:endParaRPr b="0" lang="en-US" sz="2400" spc="-1" strike="noStrike">
-              <a:solidFill>
-                <a:schemeClr val="dk1"/>
-              </a:solidFill>
-              <a:latin typeface="Calibri"/>
-            </a:endParaRPr>
-          </a:p>
-          <a:p>
-            <a:pPr marL="343080" indent="-343080" defTabSz="343080">
-              <a:lnSpc>
-                <a:spcPct val="100000"/>
-              </a:lnSpc>
-              <a:spcBef>
-                <a:spcPts val="479"/>
-              </a:spcBef>
-              <a:buClr>
-                <a:srgbClr val="000000"/>
-              </a:buClr>
-              <a:buFont typeface="Arial"/>
-              <a:buChar char="•"/>
-            </a:pPr>
-            <a:r>
-              <a:rPr b="1" lang="en-US" sz="2400" spc="-1" strike="noStrike">
-                <a:solidFill>
-                  <a:schemeClr val="dk1"/>
-                </a:solidFill>
-                <a:latin typeface="Calibri"/>
-              </a:rPr>
-              <a:t>Next lecture:</a:t>
-            </a:r>
-            <a:r>
-              <a:rPr b="0" lang="en-US" sz="2400" spc="-1" strike="noStrike">
-                <a:solidFill>
-                  <a:schemeClr val="dk1"/>
-                </a:solidFill>
-                <a:latin typeface="Calibri"/>
-              </a:rPr>
-              <a:t> advanced feature engineering, and missingness done properly</a:t>
-            </a:r>
-            <a:endParaRPr b="0" lang="en-US" sz="2400" spc="-1" strike="noStrike">
-              <a:solidFill>
-                <a:schemeClr val="dk1"/>
-              </a:solidFill>
-              <a:latin typeface="Calibri"/>
-            </a:endParaRPr>
-          </a:p>
-        </p:txBody>
-      </p:sp>
-    </p:spTree>
-  </p:cSld>
-  <mc:AlternateContent>
-    <mc:Choice Requires="p14">
-      <p:transition spd="slow" p14:dur="2000"/>
-    </mc:Choice>
-    <mc:Fallback>
-      <p:transition spd="slow"/>
-    </mc:Fallback>
-  </mc:AlternateContent>
-</p:sld>
-</file>
-
-<file path=ppt/slides/slide32.xml><?xml version="1.0" encoding="utf-8"?>
-<p:sld xmlns:a="http://schemas.openxmlformats.org/drawingml/2006/main" xmlns:p="http://schemas.openxmlformats.org/presentationml/2006/main" xmlns:r="http://schemas.openxmlformats.org/officeDocument/2006/relationships" xmlns:p14="http://schemas.microsoft.com/office/powerpoint/2010/main" xmlns:p15="http://schemas.microsoft.com/office/powerpoint/2012/main" xmlns:mc="http://schemas.openxmlformats.org/markup-compatibility/2006">
-  <p:cSld>
-    <p:spTree>
-      <p:nvGrpSpPr>
-        <p:cNvPr id="1" name=""/>
-        <p:cNvGrpSpPr/>
-        <p:nvPr/>
-      </p:nvGrpSpPr>
-      <p:grpSpPr>
-        <a:xfrm>
-          <a:off x="0" y="0"/>
-          <a:ext cx="0" cy="0"/>
-          <a:chOff x="0" y="0"/>
-          <a:chExt cx="0" cy="0"/>
-        </a:xfrm>
-      </p:grpSpPr>
-      <p:sp>
-        <p:nvSpPr>
-          <p:cNvPr id="133" name="PlaceHolder 1"/>
-          <p:cNvSpPr>
-            <a:spLocks noGrp="1"/>
-          </p:cNvSpPr>
-          <p:nvPr>
-            <p:ph type="title"/>
-          </p:nvPr>
-        </p:nvSpPr>
-        <p:spPr>
-          <a:xfrm>
-            <a:off x="457200" y="205920"/>
-            <a:ext cx="8229240" cy="856800"/>
-          </a:xfrm>
-          <a:prstGeom prst="rect">
-            <a:avLst/>
-          </a:prstGeom>
-          <a:noFill/>
-          <a:ln w="0">
-            <a:noFill/>
-          </a:ln>
-        </p:spPr>
-        <p:txBody>
-          <a:bodyPr lIns="91440" rIns="91440" tIns="45720" bIns="45720" anchor="ctr">
-            <a:normAutofit/>
-          </a:bodyPr>
-          <a:p>
-            <a:pPr indent="0" algn="ctr" defTabSz="343080">
-              <a:lnSpc>
-                <a:spcPct val="100000"/>
-              </a:lnSpc>
-              <a:buNone/>
-              <a:tabLst>
-                <a:tab algn="l" pos="0"/>
-              </a:tabLst>
-            </a:pPr>
-            <a:r>
-              <a:rPr b="0" lang="en-US" sz="3300" spc="-1" strike="noStrike">
-                <a:solidFill>
-                  <a:schemeClr val="dk1"/>
-                </a:solidFill>
-                <a:latin typeface="Calibri"/>
-              </a:rPr>
-              <a:t>Questions?</a:t>
-            </a:r>
-            <a:endParaRPr b="0" lang="en-US" sz="3300" spc="-1" strike="noStrike">
-              <a:solidFill>
-                <a:schemeClr val="dk1"/>
-              </a:solidFill>
-              <a:latin typeface="Calibri"/>
-            </a:endParaRPr>
-          </a:p>
-        </p:txBody>
-      </p:sp>
-      <p:sp>
-        <p:nvSpPr>
-          <p:cNvPr id="134" name="PlaceHolder 2"/>
-          <p:cNvSpPr>
-            <a:spLocks noGrp="1"/>
-          </p:cNvSpPr>
-          <p:nvPr>
-            <p:ph/>
-          </p:nvPr>
-        </p:nvSpPr>
-        <p:spPr>
-          <a:xfrm>
-            <a:off x="457200" y="1200240"/>
-            <a:ext cx="8229240" cy="3394080"/>
-          </a:xfrm>
-          <a:prstGeom prst="rect">
-            <a:avLst/>
-          </a:prstGeom>
-          <a:noFill/>
-          <a:ln w="0">
-            <a:noFill/>
-          </a:ln>
-        </p:spPr>
-        <p:txBody>
-          <a:bodyPr lIns="91440" rIns="91440" tIns="45720" bIns="45720" anchor="t">
-            <a:normAutofit/>
-          </a:bodyPr>
-          <a:p>
-            <a:pPr indent="0" defTabSz="343080">
-              <a:lnSpc>
-                <a:spcPct val="100000"/>
-              </a:lnSpc>
-              <a:spcBef>
-                <a:spcPts val="479"/>
-              </a:spcBef>
-              <a:buNone/>
-              <a:tabLst>
-                <a:tab algn="l" pos="0"/>
-              </a:tabLst>
-            </a:pPr>
-            <a:r>
-              <a:rPr b="0" lang="en-US" sz="2400" spc="-1" strike="noStrike">
-                <a:solidFill>
-                  <a:schemeClr val="dk1"/>
-                </a:solidFill>
-                <a:latin typeface="Calibri"/>
-              </a:rPr>
-              <a:t>Office hours: by appointment</a:t>
-            </a:r>
-            <a:endParaRPr b="0" lang="en-US" sz="2400" spc="-1" strike="noStrike">
-              <a:solidFill>
-                <a:schemeClr val="dk1"/>
-              </a:solidFill>
-              <a:latin typeface="Calibri"/>
-            </a:endParaRPr>
-          </a:p>
-          <a:p>
-            <a:pPr indent="0" defTabSz="343080">
-              <a:lnSpc>
-                <a:spcPct val="100000"/>
-              </a:lnSpc>
-              <a:spcBef>
-                <a:spcPts val="479"/>
-              </a:spcBef>
-              <a:buNone/>
-              <a:tabLst>
-                <a:tab algn="l" pos="0"/>
-              </a:tabLst>
-            </a:pPr>
-            <a:r>
-              <a:rPr b="0" lang="en-US" sz="2400" spc="-1" strike="noStrike">
-                <a:solidFill>
-                  <a:schemeClr val="dk1"/>
-                </a:solidFill>
-                <a:latin typeface="Courier New"/>
-              </a:rPr>
-              <a:t>Course01/</a:t>
-            </a:r>
-            <a:r>
-              <a:rPr b="0" lang="en-US" sz="2400" spc="-1" strike="noStrike">
-                <a:solidFill>
-                  <a:schemeClr val="dk1"/>
-                </a:solidFill>
-                <a:latin typeface="Calibri"/>
-              </a:rPr>
-              <a:t> on the course repository</a:t>
-            </a:r>
-            <a:endParaRPr b="0" lang="en-US" sz="2400" spc="-1" strike="noStrike">
-              <a:solidFill>
-                <a:schemeClr val="dk1"/>
-              </a:solidFill>
-              <a:latin typeface="Calibri"/>
-            </a:endParaRPr>
-          </a:p>
-        </p:txBody>
-      </p:sp>
-    </p:spTree>
-  </p:cSld>
-  <mc:AlternateContent>
-    <mc:Choice Requires="p14">
-      <p:transition spd="slow" p14:dur="2000"/>
-    </mc:Choice>
-    <mc:Fallback>
-      <p:transition spd="slow"/>
-    </mc:Fallback>
-  </mc:AlternateContent>
-</p:sld>
-</file>
-
 <file path=ppt/slides/slide4.xml><?xml version="1.0" encoding="utf-8"?>
 <p:sld xmlns:a="http://schemas.openxmlformats.org/drawingml/2006/main" xmlns:p="http://schemas.openxmlformats.org/presentationml/2006/main" xmlns:r="http://schemas.openxmlformats.org/officeDocument/2006/relationships" xmlns:p14="http://schemas.microsoft.com/office/powerpoint/2010/main" xmlns:p15="http://schemas.microsoft.com/office/powerpoint/2012/main" xmlns:mc="http://schemas.openxmlformats.org/markup-compatibility/2006">
   <p:cSld>
@@ -16834,7 +14762,7 @@
         </p:spPr>
         <p:txBody>
           <a:bodyPr lIns="91440" rIns="91440" tIns="45720" bIns="45720" anchor="t">
-            <a:normAutofit fontScale="98294" lnSpcReduction="10000"/>
+            <a:normAutofit/>
           </a:bodyPr>
           <a:p>
             <a:pPr marL="1270080" indent="0" defTabSz="343080">
@@ -16913,7 +14841,7 @@
                 <a:spcPct val="100000"/>
               </a:lnSpc>
               <a:spcBef>
-                <a:spcPts val="479"/>
+                <a:spcPts val="420"/>
               </a:spcBef>
               <a:buNone/>
               <a:tabLst>
@@ -16921,7 +14849,7 @@
               </a:tabLst>
             </a:pPr>
             <a:r>
-              <a:rPr b="0" lang="en-US" sz="2400" spc="-1" strike="noStrike">
+              <a:rPr b="0" lang="en-US" sz="2100" spc="-1" strike="noStrike">
                 <a:solidFill>
                   <a:schemeClr val="dk1"/>
                 </a:solidFill>
@@ -16929,7 +14857,7 @@
               </a:rPr>
               <a:t>it transfers to finance, industry, climate, anything</a:t>
             </a:r>
-            <a:endParaRPr b="0" lang="en-US" sz="2400" spc="-1" strike="noStrike">
+            <a:endParaRPr b="0" lang="en-US" sz="2100" spc="-1" strike="noStrike">
               <a:solidFill>
                 <a:schemeClr val="dk1"/>
               </a:solidFill>
@@ -16984,7 +14912,7 @@
                 <a:spcPct val="100000"/>
               </a:lnSpc>
               <a:spcBef>
-                <a:spcPts val="479"/>
+                <a:spcPts val="420"/>
               </a:spcBef>
               <a:buNone/>
               <a:tabLst>
@@ -16992,7 +14920,7 @@
               </a:tabLst>
             </a:pPr>
             <a:r>
-              <a:rPr b="0" lang="en-US" sz="2400" spc="-1" strike="noStrike">
+              <a:rPr b="0" lang="en-US" sz="2100" spc="-1" strike="noStrike">
                 <a:solidFill>
                   <a:schemeClr val="dk1"/>
                 </a:solidFill>
@@ -17000,7 +14928,7 @@
               </a:rPr>
               <a:t>because that is my expertise</a:t>
             </a:r>
-            <a:endParaRPr b="0" lang="en-US" sz="2400" spc="-1" strike="noStrike">
+            <a:endParaRPr b="0" lang="en-US" sz="2100" spc="-1" strike="noStrike">
               <a:solidFill>
                 <a:schemeClr val="dk1"/>
               </a:solidFill>
@@ -17055,7 +14983,7 @@
                 <a:spcPct val="100000"/>
               </a:lnSpc>
               <a:spcBef>
-                <a:spcPts val="479"/>
+                <a:spcPts val="420"/>
               </a:spcBef>
               <a:buNone/>
               <a:tabLst>
@@ -17063,7 +14991,7 @@
               </a:tabLst>
             </a:pPr>
             <a:r>
-              <a:rPr b="0" i="1" lang="en-US" sz="2400" spc="-1" strike="noStrike">
+              <a:rPr b="0" lang="en-US" sz="2100" spc="-1" strike="noStrike">
                 <a:solidFill>
                   <a:schemeClr val="dk1"/>
                 </a:solidFill>
@@ -17071,7 +14999,7 @@
               </a:rPr>
               <a:t>(for legal issues)</a:t>
             </a:r>
-            <a:endParaRPr b="0" lang="en-US" sz="2400" spc="-1" strike="noStrike">
+            <a:endParaRPr b="0" lang="en-US" sz="2100" spc="-1" strike="noStrike">
               <a:solidFill>
                 <a:schemeClr val="dk1"/>
               </a:solidFill>
@@ -17315,12 +15243,15 @@
                 <a:spcPct val="100000"/>
               </a:lnSpc>
               <a:spcBef>
-                <a:spcPts val="479"/>
+                <a:spcPts val="420"/>
               </a:spcBef>
               <a:buNone/>
-            </a:pPr>
-            <a:r>
-              <a:rPr b="0" lang="en-US" sz="2400" spc="-1" strike="noStrike">
+              <a:tabLst>
+                <a:tab algn="l" pos="0"/>
+              </a:tabLst>
+            </a:pPr>
+            <a:r>
+              <a:rPr b="0" lang="en-US" sz="2100" spc="-1" strike="noStrike">
                 <a:solidFill>
                   <a:schemeClr val="dk1"/>
                 </a:solidFill>
@@ -17328,7 +15259,7 @@
               </a:rPr>
               <a:t>we will use deep learning if and only if it is appropriate</a:t>
             </a:r>
-            <a:endParaRPr b="0" lang="en-US" sz="2400" spc="-1" strike="noStrike">
+            <a:endParaRPr b="0" lang="en-US" sz="2100" spc="-1" strike="noStrike">
               <a:solidFill>
                 <a:schemeClr val="dk1"/>
               </a:solidFill>
@@ -17429,16 +15360,16 @@
           <p:nvPr/>
         </p:nvGraphicFramePr>
         <p:xfrm>
-          <a:off x="1808640" y="1193760"/>
-          <a:ext cx="8229240" cy="1803600"/>
+          <a:off x="457200" y="1193760"/>
+          <a:ext cx="8229240" cy="1202400"/>
         </p:xfrm>
         <a:graphic>
           <a:graphicData uri="http://schemas.openxmlformats.org/drawingml/2006/table">
             <a:tbl>
               <a:tblPr/>
               <a:tblGrid>
-                <a:gridCol w="1593000"/>
-                <a:gridCol w="3934080"/>
+                <a:gridCol w="4114800"/>
+                <a:gridCol w="4114800"/>
               </a:tblGrid>
               <a:tr h="0">
                 <a:tc>
@@ -18032,8 +15963,8 @@
           <p:nvPr/>
         </p:nvGraphicFramePr>
         <p:xfrm>
-          <a:off x="457200" y="1265760"/>
-          <a:ext cx="8229240" cy="1503000"/>
+          <a:off x="457200" y="1193760"/>
+          <a:ext cx="8229240" cy="1803600"/>
         </p:xfrm>
         <a:graphic>
           <a:graphicData uri="http://schemas.openxmlformats.org/drawingml/2006/table">
@@ -18473,7 +16404,7 @@
                       <a:prstDash val="solid"/>
                     </a:lnB>
                     <a:solidFill>
-                      <a:srgbClr val="e9ecf3"/>
+                      <a:srgbClr val="d0d8e7"/>
                     </a:solidFill>
                   </a:tcPr>
                 </a:tc>
@@ -18534,7 +16465,7 @@
                       <a:prstDash val="solid"/>
                     </a:lnB>
                     <a:solidFill>
-                      <a:srgbClr val="e9ecf3"/>
+                      <a:srgbClr val="d0d8e7"/>
                     </a:solidFill>
                   </a:tcPr>
                 </a:tc>
@@ -18628,7 +16559,7 @@
                         <a:solidFill>
                           <a:srgbClr val="000000"/>
                         </a:solidFill>
-                        <a:latin typeface="Times New Roman"/>
+                        <a:latin typeface="Arial"/>
                       </a:endParaRPr>
                     </a:p>
                   </a:txBody>
@@ -18721,7 +16652,7 @@
                       <a:prstDash val="solid"/>
                     </a:lnB>
                     <a:solidFill>
-                      <a:srgbClr val="e9ecf3"/>
+                      <a:srgbClr val="d0d8e7"/>
                     </a:solidFill>
                   </a:tcPr>
                 </a:tc>
@@ -18752,7 +16683,7 @@
                         <a:solidFill>
                           <a:srgbClr val="000000"/>
                         </a:solidFill>
-                        <a:latin typeface="Times New Roman"/>
+                        <a:latin typeface="Arial"/>
                       </a:endParaRPr>
                     </a:p>
                   </a:txBody>
@@ -18782,7 +16713,7 @@
                       <a:prstDash val="solid"/>
                     </a:lnB>
                     <a:solidFill>
-                      <a:srgbClr val="e9ecf3"/>
+                      <a:srgbClr val="d0d8e7"/>
                     </a:solidFill>
                   </a:tcPr>
                 </a:tc>
@@ -18915,7 +16846,7 @@
                 <a:srgbClr val="000000"/>
               </a:buClr>
               <a:buFont typeface="Arial"/>
-              <a:buAutoNum type="arabicPeriod"/>
+              <a:buChar char="•"/>
             </a:pPr>
             <a:r>
               <a:rPr b="1" lang="en-US" sz="2400" spc="-1" strike="noStrike">
@@ -18933,7 +16864,7 @@
                 </a:solidFill>
                 <a:latin typeface="Calibri"/>
               </a:rPr>
-              <a:t> Foundations (data, features, missingness...)</a:t>
+              <a:t> Foundations (data, features, missingness…)</a:t>
             </a:r>
             <a:endParaRPr b="0" lang="en-US" sz="2400" spc="-1" strike="noStrike">
               <a:solidFill>
@@ -18954,7 +16885,7 @@
                 <a:srgbClr val="000000"/>
               </a:buClr>
               <a:buFont typeface="Arial"/>
-              <a:buAutoNum type="arabicPeriod"/>
+              <a:buChar char="•"/>
             </a:pPr>
             <a:r>
               <a:rPr b="1" lang="en-US" sz="2400" spc="-1" strike="noStrike">
@@ -18993,7 +16924,7 @@
                 <a:srgbClr val="000000"/>
               </a:buClr>
               <a:buFont typeface="Arial"/>
-              <a:buAutoNum type="arabicPeriod"/>
+              <a:buChar char="•"/>
             </a:pPr>
             <a:r>
               <a:rPr b="1" lang="en-US" sz="2400" spc="-1" strike="noStrike">
@@ -19032,7 +16963,7 @@
                 <a:srgbClr val="000000"/>
               </a:buClr>
               <a:buFont typeface="Arial"/>
-              <a:buAutoNum type="arabicPeriod"/>
+              <a:buChar char="•"/>
             </a:pPr>
             <a:r>
               <a:rPr b="1" lang="en-US" sz="2400" spc="-1" strike="noStrike">
@@ -19041,7 +16972,7 @@
                 </a:solidFill>
                 <a:latin typeface="Calibri"/>
               </a:rPr>
-              <a:t>Weeks 11–12: </a:t>
+              <a:t>Weeks 11–12:</a:t>
             </a:r>
             <a:r>
               <a:rPr b="0" lang="en-US" sz="2400" spc="-1" strike="noStrike">
@@ -19050,7 +16981,7 @@
                 </a:solidFill>
                 <a:latin typeface="Calibri"/>
               </a:rPr>
-              <a:t>Text (NLP/LLMs)</a:t>
+              <a:t> Text (NLP/LLMs)</a:t>
             </a:r>
             <a:endParaRPr b="0" lang="en-US" sz="2400" spc="-1" strike="noStrike">
               <a:solidFill>
@@ -19071,7 +17002,7 @@
                 <a:srgbClr val="000000"/>
               </a:buClr>
               <a:buFont typeface="Arial"/>
-              <a:buAutoNum type="arabicPeriod"/>
+              <a:buChar char="•"/>
             </a:pPr>
             <a:r>
               <a:rPr b="1" lang="en-US" sz="2400" spc="-1" strike="noStrike">
@@ -19080,7 +17011,7 @@
                 </a:solidFill>
                 <a:latin typeface="Calibri"/>
               </a:rPr>
-              <a:t>Weeks 13–14: </a:t>
+              <a:t>Weeks 13–14:</a:t>
             </a:r>
             <a:r>
               <a:rPr b="0" lang="en-US" sz="2400" spc="-1" strike="noStrike">
@@ -19089,7 +17020,7 @@
                 </a:solidFill>
                 <a:latin typeface="Calibri"/>
               </a:rPr>
-              <a:t>Causality, bias, privacy, deployment</a:t>
+              <a:t> Causality, bias, privacy, deployment</a:t>
             </a:r>
             <a:endParaRPr b="0" lang="en-US" sz="2400" spc="-1" strike="noStrike">
               <a:solidFill>
@@ -19512,14 +17443,20 @@
             </a:endParaRPr>
           </a:p>
           <a:p>
-            <a:pPr lvl="1" marL="864000" indent="0" defTabSz="343080">
+            <a:pPr marL="343080" indent="0" defTabSz="343080">
+              <a:lnSpc>
+                <a:spcPct val="100000"/>
+              </a:lnSpc>
               <a:spcBef>
-                <a:spcPts val="1134"/>
+                <a:spcPts val="420"/>
               </a:spcBef>
               <a:buNone/>
-            </a:pPr>
-            <a:r>
-              <a:rPr b="0" lang="en-US" sz="2400" spc="-1" strike="noStrike">
+              <a:tabLst>
+                <a:tab algn="l" pos="0"/>
+              </a:tabLst>
+            </a:pPr>
+            <a:r>
+              <a:rPr b="0" lang="en-US" sz="2100" spc="-1" strike="noStrike">
                 <a:solidFill>
                   <a:schemeClr val="dk1"/>
                 </a:solidFill>
@@ -19527,7 +17464,7 @@
               </a:rPr>
               <a:t>if more compute is needed, we will make arrangements</a:t>
             </a:r>
-            <a:endParaRPr b="0" lang="en-US" sz="2400" spc="-1" strike="noStrike">
+            <a:endParaRPr b="0" lang="en-US" sz="2100" spc="-1" strike="noStrike">
               <a:solidFill>
                 <a:schemeClr val="dk1"/>
               </a:solidFill>

--- a/Course01/slides.pptx
+++ b/Course01/slides.pptx
@@ -46,6 +46,12 @@
     <p:sldId id="281" r:id="rId39"/>
     <p:sldId id="282" r:id="rId40"/>
     <p:sldId id="283" r:id="rId41"/>
+    <p:sldId id="284" r:id="rId42"/>
+    <p:sldId id="285" r:id="rId43"/>
+    <p:sldId id="286" r:id="rId44"/>
+    <p:sldId id="287" r:id="rId45"/>
+    <p:sldId id="288" r:id="rId46"/>
+    <p:sldId id="289" r:id="rId47"/>
   </p:sldIdLst>
   <p:sldSz cx="9144000" cy="5143500"/>
   <p:notesSz cx="6858000" cy="9144000"/>
@@ -375,7 +381,7 @@
             <a:pPr indent="0" algn="r">
               <a:buNone/>
             </a:pPr>
-            <a:fld id="{8A35C828-6167-4868-9986-BEF302E40438}" type="slidenum">
+            <a:fld id="{F74A49DA-35DC-4282-8328-B3074E6B270F}" type="slidenum">
               <a:rPr b="0" lang="en-US" sz="1400" spc="-1" strike="noStrike">
                 <a:solidFill>
                   <a:srgbClr val="000000"/>
@@ -418,7 +424,7 @@
       </p:grpSpPr>
       <p:sp>
         <p:nvSpPr>
-          <p:cNvPr id="143" name="PlaceHolder 1"/>
+          <p:cNvPr id="157" name="PlaceHolder 1"/>
           <p:cNvSpPr>
             <a:spLocks noGrp="1"/>
           </p:cNvSpPr>
@@ -441,7 +447,7 @@
       </p:sp>
       <p:sp>
         <p:nvSpPr>
-          <p:cNvPr id="144" name="PlaceHolder 2"/>
+          <p:cNvPr id="158" name="PlaceHolder 2"/>
           <p:cNvSpPr>
             <a:spLocks noGrp="1"/>
           </p:cNvSpPr>
@@ -496,7 +502,7 @@
       </p:sp>
       <p:sp>
         <p:nvSpPr>
-          <p:cNvPr id="145" name="PlaceHolder 3"/>
+          <p:cNvPr id="159" name="PlaceHolder 3"/>
           <p:cNvSpPr>
             <a:spLocks noGrp="1"/>
           </p:cNvSpPr>
@@ -543,7 +549,7 @@
               </a:lnSpc>
               <a:buNone/>
             </a:pPr>
-            <a:fld id="{9B3FF344-7684-4D48-8166-208FDD59654F}" type="slidenum">
+            <a:fld id="{7AA99C6B-C61E-4A02-A779-62D568956CB8}" type="slidenum">
               <a:rPr b="0" lang="en-US" sz="1200" spc="-1" strike="noStrike">
                 <a:solidFill>
                   <a:schemeClr val="dk1"/>
@@ -551,7 +557,175 @@
                 <a:latin typeface="+mn-lt"/>
                 <a:ea typeface="+mn-ea"/>
               </a:rPr>
-              <a:t>28</a:t>
+              <a:t>34</a:t>
+            </a:fld>
+            <a:endParaRPr b="0" lang="en-US" sz="1200" spc="-1" strike="noStrike">
+              <a:solidFill>
+                <a:srgbClr val="000000"/>
+              </a:solidFill>
+              <a:latin typeface="Times New Roman"/>
+            </a:endParaRPr>
+          </a:p>
+        </p:txBody>
+      </p:sp>
+    </p:spTree>
+  </p:cSld>
+</p:notes>
+</file>
+
+<file path=ppt/notesSlides/notesSlide13.xml><?xml version="1.0" encoding="utf-8"?>
+<p:notes xmlns:a="http://schemas.openxmlformats.org/drawingml/2006/main" xmlns:p="http://schemas.openxmlformats.org/presentationml/2006/main" xmlns:r="http://schemas.openxmlformats.org/officeDocument/2006/relationships" xmlns:p14="http://schemas.microsoft.com/office/powerpoint/2010/main" xmlns:p15="http://schemas.microsoft.com/office/powerpoint/2012/main" xmlns:mc="http://schemas.openxmlformats.org/markup-compatibility/2006">
+  <p:cSld>
+    <p:spTree>
+      <p:nvGrpSpPr>
+        <p:cNvPr id="1" name=""/>
+        <p:cNvGrpSpPr/>
+        <p:nvPr/>
+      </p:nvGrpSpPr>
+      <p:grpSpPr>
+        <a:xfrm>
+          <a:off x="0" y="0"/>
+          <a:ext cx="0" cy="0"/>
+          <a:chOff x="0" y="0"/>
+          <a:chExt cx="0" cy="0"/>
+        </a:xfrm>
+      </p:grpSpPr>
+      <p:sp>
+        <p:nvSpPr>
+          <p:cNvPr id="160" name="PlaceHolder 1"/>
+          <p:cNvSpPr>
+            <a:spLocks noGrp="1"/>
+          </p:cNvSpPr>
+          <p:nvPr>
+            <p:ph type="sldImg"/>
+          </p:nvPr>
+        </p:nvSpPr>
+        <p:spPr>
+          <a:xfrm>
+            <a:off x="685800" y="1143000"/>
+            <a:ext cx="5486040" cy="3085920"/>
+          </a:xfrm>
+          <a:prstGeom prst="rect">
+            <a:avLst/>
+          </a:prstGeom>
+          <a:ln w="0">
+            <a:noFill/>
+          </a:ln>
+        </p:spPr>
+      </p:sp>
+      <p:sp>
+        <p:nvSpPr>
+          <p:cNvPr id="161" name="PlaceHolder 2"/>
+          <p:cNvSpPr>
+            <a:spLocks noGrp="1"/>
+          </p:cNvSpPr>
+          <p:nvPr>
+            <p:ph type="body"/>
+          </p:nvPr>
+        </p:nvSpPr>
+        <p:spPr>
+          <a:xfrm>
+            <a:off x="685800" y="4400640"/>
+            <a:ext cx="5486040" cy="3600000"/>
+          </a:xfrm>
+          <a:prstGeom prst="rect">
+            <a:avLst/>
+          </a:prstGeom>
+          <a:noFill/>
+          <a:ln w="0">
+            <a:noFill/>
+          </a:ln>
+        </p:spPr>
+        <p:txBody>
+          <a:bodyPr lIns="91440" rIns="91440" tIns="45720" bIns="45720" anchor="t">
+            <a:noAutofit/>
+          </a:bodyPr>
+          <a:p>
+            <a:pPr indent="0">
+              <a:lnSpc>
+                <a:spcPct val="100000"/>
+              </a:lnSpc>
+              <a:buNone/>
+              <a:tabLst>
+                <a:tab algn="l" pos="0"/>
+              </a:tabLst>
+            </a:pPr>
+            <a:r>
+              <a:rPr b="0" lang="en-US" sz="2000" spc="-1" strike="noStrike">
+                <a:solidFill>
+                  <a:srgbClr val="000000"/>
+                </a:solidFill>
+                <a:latin typeface="Arial"/>
+              </a:rPr>
+              <a:t>Left: the labels you wish you had. Right: the same 600 points, but the annotator is cautious and calls 35% of the negatives positive. The grey line is the truth, the amber line is what least squares gives you. Ask the room: which way did it move, and why is that worse than random flipping?</a:t>
+            </a:r>
+            <a:endParaRPr b="0" lang="en-US" sz="2000" spc="-1" strike="noStrike">
+              <a:solidFill>
+                <a:srgbClr val="000000"/>
+              </a:solidFill>
+              <a:latin typeface="Arial"/>
+            </a:endParaRPr>
+          </a:p>
+        </p:txBody>
+      </p:sp>
+      <p:sp>
+        <p:nvSpPr>
+          <p:cNvPr id="162" name="PlaceHolder 3"/>
+          <p:cNvSpPr>
+            <a:spLocks noGrp="1"/>
+          </p:cNvSpPr>
+          <p:nvPr>
+            <p:ph type="sldNum" idx="40"/>
+          </p:nvPr>
+        </p:nvSpPr>
+        <p:spPr>
+          <a:xfrm>
+            <a:off x="3884760" y="8685360"/>
+            <a:ext cx="2971440" cy="458280"/>
+          </a:xfrm>
+          <a:prstGeom prst="rect">
+            <a:avLst/>
+          </a:prstGeom>
+          <a:noFill/>
+          <a:ln w="0">
+            <a:noFill/>
+          </a:ln>
+        </p:spPr>
+        <p:txBody>
+          <a:bodyPr lIns="91440" rIns="91440" tIns="45720" bIns="45720" anchor="b">
+            <a:noAutofit/>
+          </a:bodyPr>
+          <a:lstStyle>
+            <a:lvl1pPr indent="0" algn="r" defTabSz="457200">
+              <a:lnSpc>
+                <a:spcPct val="100000"/>
+              </a:lnSpc>
+              <a:buNone/>
+              <a:defRPr b="0" lang="en-US" sz="1200" spc="-1" strike="noStrike">
+                <a:solidFill>
+                  <a:schemeClr val="dk1"/>
+                </a:solidFill>
+                <a:latin typeface="+mn-lt"/>
+                <a:ea typeface="+mn-ea"/>
+              </a:defRPr>
+            </a:lvl1pPr>
+          </a:lstStyle>
+          <a:p>
+            <a:pPr indent="0" algn="r" defTabSz="457200">
+              <a:lnSpc>
+                <a:spcPct val="100000"/>
+              </a:lnSpc>
+              <a:buNone/>
+            </a:pPr>
+            <a:fld id="{5D934AF9-420D-408E-B89B-8B23F267DCFC}" type="slidenum">
+              <a:rPr b="0" lang="en-US" sz="1200" spc="-1" strike="noStrike">
+                <a:solidFill>
+                  <a:schemeClr val="dk1"/>
+                </a:solidFill>
+                <a:latin typeface="+mn-lt"/>
+                <a:ea typeface="+mn-ea"/>
+              </a:rPr>
+              <a:t>34</a:t>
             </a:fld>
             <a:endParaRPr b="0" lang="en-US" sz="1200" spc="-1" strike="noStrike">
               <a:solidFill>
@@ -586,7 +760,7 @@
       </p:grpSpPr>
       <p:sp>
         <p:nvSpPr>
-          <p:cNvPr id="146" name="PlaceHolder 1"/>
+          <p:cNvPr id="163" name="PlaceHolder 1"/>
           <p:cNvSpPr>
             <a:spLocks noGrp="1"/>
           </p:cNvSpPr>
@@ -609,7 +783,7 @@
       </p:sp>
       <p:sp>
         <p:nvSpPr>
-          <p:cNvPr id="147" name="PlaceHolder 2"/>
+          <p:cNvPr id="164" name="PlaceHolder 2"/>
           <p:cNvSpPr>
             <a:spLocks noGrp="1"/>
           </p:cNvSpPr>
@@ -651,7 +825,16 @@
                 </a:solidFill>
                 <a:latin typeface="Arial"/>
               </a:rPr>
-              <a:t>We return to this in depth in Week 2 — imputation strategies and multiple imputation.</a:t>
+              <a:t>Run these three before anything else. </a:t>
+            </a:r>
+            <a:r>
+              <a:rPr b="0" lang="en-US" sz="2000" spc="-1" strike="noStrike">
+                <a:solidFill>
+                  <a:srgbClr val="000000"/>
+                </a:solidFill>
+                <a:latin typeface="Courier New"/>
+              </a:rPr>
+              <a:t>min/max catch impossible values, a histogram catches mixed units far faster than reading a data dictionary, and grouping by unit catches the column that was silently concatenated from two sites.</a:t>
             </a:r>
             <a:endParaRPr b="0" lang="en-US" sz="2000" spc="-1" strike="noStrike">
               <a:solidFill>
@@ -664,175 +847,7 @@
       </p:sp>
       <p:sp>
         <p:nvSpPr>
-          <p:cNvPr id="148" name="PlaceHolder 3"/>
-          <p:cNvSpPr>
-            <a:spLocks noGrp="1"/>
-          </p:cNvSpPr>
-          <p:nvPr>
-            <p:ph type="sldNum" idx="40"/>
-          </p:nvPr>
-        </p:nvSpPr>
-        <p:spPr>
-          <a:xfrm>
-            <a:off x="3884760" y="8685360"/>
-            <a:ext cx="2971440" cy="458280"/>
-          </a:xfrm>
-          <a:prstGeom prst="rect">
-            <a:avLst/>
-          </a:prstGeom>
-          <a:noFill/>
-          <a:ln w="0">
-            <a:noFill/>
-          </a:ln>
-        </p:spPr>
-        <p:txBody>
-          <a:bodyPr lIns="91440" rIns="91440" tIns="45720" bIns="45720" anchor="b">
-            <a:noAutofit/>
-          </a:bodyPr>
-          <a:lstStyle>
-            <a:lvl1pPr indent="0" algn="r" defTabSz="457200">
-              <a:lnSpc>
-                <a:spcPct val="100000"/>
-              </a:lnSpc>
-              <a:buNone/>
-              <a:defRPr b="0" lang="en-US" sz="1200" spc="-1" strike="noStrike">
-                <a:solidFill>
-                  <a:schemeClr val="dk1"/>
-                </a:solidFill>
-                <a:latin typeface="+mn-lt"/>
-                <a:ea typeface="+mn-ea"/>
-              </a:defRPr>
-            </a:lvl1pPr>
-          </a:lstStyle>
-          <a:p>
-            <a:pPr indent="0" algn="r" defTabSz="457200">
-              <a:lnSpc>
-                <a:spcPct val="100000"/>
-              </a:lnSpc>
-              <a:buNone/>
-            </a:pPr>
-            <a:fld id="{E11D8F11-9E2A-4462-9F5B-9150ED1C05D4}" type="slidenum">
-              <a:rPr b="0" lang="en-US" sz="1200" spc="-1" strike="noStrike">
-                <a:solidFill>
-                  <a:schemeClr val="dk1"/>
-                </a:solidFill>
-                <a:latin typeface="+mn-lt"/>
-                <a:ea typeface="+mn-ea"/>
-              </a:rPr>
-              <a:t>28</a:t>
-            </a:fld>
-            <a:endParaRPr b="0" lang="en-US" sz="1200" spc="-1" strike="noStrike">
-              <a:solidFill>
-                <a:srgbClr val="000000"/>
-              </a:solidFill>
-              <a:latin typeface="Times New Roman"/>
-            </a:endParaRPr>
-          </a:p>
-        </p:txBody>
-      </p:sp>
-    </p:spTree>
-  </p:cSld>
-</p:notes>
-</file>
-
-<file path=ppt/notesSlides/notesSlide18.xml><?xml version="1.0" encoding="utf-8"?>
-<p:notes xmlns:a="http://schemas.openxmlformats.org/drawingml/2006/main" xmlns:p="http://schemas.openxmlformats.org/presentationml/2006/main" xmlns:r="http://schemas.openxmlformats.org/officeDocument/2006/relationships" xmlns:p14="http://schemas.microsoft.com/office/powerpoint/2010/main" xmlns:p15="http://schemas.microsoft.com/office/powerpoint/2012/main" xmlns:mc="http://schemas.openxmlformats.org/markup-compatibility/2006">
-  <p:cSld>
-    <p:spTree>
-      <p:nvGrpSpPr>
-        <p:cNvPr id="1" name=""/>
-        <p:cNvGrpSpPr/>
-        <p:nvPr/>
-      </p:nvGrpSpPr>
-      <p:grpSpPr>
-        <a:xfrm>
-          <a:off x="0" y="0"/>
-          <a:ext cx="0" cy="0"/>
-          <a:chOff x="0" y="0"/>
-          <a:chExt cx="0" cy="0"/>
-        </a:xfrm>
-      </p:grpSpPr>
-      <p:sp>
-        <p:nvSpPr>
-          <p:cNvPr id="149" name="PlaceHolder 1"/>
-          <p:cNvSpPr>
-            <a:spLocks noGrp="1"/>
-          </p:cNvSpPr>
-          <p:nvPr>
-            <p:ph type="sldImg"/>
-          </p:nvPr>
-        </p:nvSpPr>
-        <p:spPr>
-          <a:xfrm>
-            <a:off x="685800" y="1143000"/>
-            <a:ext cx="5486040" cy="3085920"/>
-          </a:xfrm>
-          <a:prstGeom prst="rect">
-            <a:avLst/>
-          </a:prstGeom>
-          <a:ln w="0">
-            <a:noFill/>
-          </a:ln>
-        </p:spPr>
-      </p:sp>
-      <p:sp>
-        <p:nvSpPr>
-          <p:cNvPr id="150" name="PlaceHolder 2"/>
-          <p:cNvSpPr>
-            <a:spLocks noGrp="1"/>
-          </p:cNvSpPr>
-          <p:nvPr>
-            <p:ph type="body"/>
-          </p:nvPr>
-        </p:nvSpPr>
-        <p:spPr>
-          <a:xfrm>
-            <a:off x="685800" y="4400640"/>
-            <a:ext cx="5486040" cy="3600000"/>
-          </a:xfrm>
-          <a:prstGeom prst="rect">
-            <a:avLst/>
-          </a:prstGeom>
-          <a:noFill/>
-          <a:ln w="0">
-            <a:noFill/>
-          </a:ln>
-        </p:spPr>
-        <p:txBody>
-          <a:bodyPr lIns="91440" rIns="91440" tIns="45720" bIns="45720" anchor="t">
-            <a:noAutofit/>
-          </a:bodyPr>
-          <a:p>
-            <a:pPr indent="0">
-              <a:lnSpc>
-                <a:spcPct val="100000"/>
-              </a:lnSpc>
-              <a:buNone/>
-              <a:tabLst>
-                <a:tab algn="l" pos="0"/>
-              </a:tabLst>
-            </a:pPr>
-            <a:r>
-              <a:rPr b="0" lang="en-US" sz="2000" spc="-1" strike="noStrike">
-                <a:solidFill>
-                  <a:srgbClr val="000000"/>
-                </a:solidFill>
-                <a:latin typeface="Arial"/>
-              </a:rPr>
-              <a:t>Zech et al. 2018 (cross-site CNN generalisation); Esteva/ISIC ruler artefact. These come back in Week 7.</a:t>
-            </a:r>
-            <a:endParaRPr b="0" lang="en-US" sz="2000" spc="-1" strike="noStrike">
-              <a:solidFill>
-                <a:srgbClr val="000000"/>
-              </a:solidFill>
-              <a:latin typeface="Arial"/>
-            </a:endParaRPr>
-          </a:p>
-        </p:txBody>
-      </p:sp>
-      <p:sp>
-        <p:nvSpPr>
-          <p:cNvPr id="151" name="PlaceHolder 3"/>
+          <p:cNvPr id="165" name="PlaceHolder 3"/>
           <p:cNvSpPr>
             <a:spLocks noGrp="1"/>
           </p:cNvSpPr>
@@ -879,7 +894,7 @@
               </a:lnSpc>
               <a:buNone/>
             </a:pPr>
-            <a:fld id="{82295A0A-C18E-4456-9EDE-FD828C22302F}" type="slidenum">
+            <a:fld id="{BF206639-2277-4BD9-A7BC-ED65282256E0}" type="slidenum">
               <a:rPr b="0" lang="en-US" sz="1200" spc="-1" strike="noStrike">
                 <a:solidFill>
                   <a:schemeClr val="dk1"/>
@@ -887,7 +902,352 @@
                 <a:latin typeface="+mn-lt"/>
                 <a:ea typeface="+mn-ea"/>
               </a:rPr>
-              <a:t>28</a:t>
+              <a:t>34</a:t>
+            </a:fld>
+            <a:endParaRPr b="0" lang="en-US" sz="1200" spc="-1" strike="noStrike">
+              <a:solidFill>
+                <a:srgbClr val="000000"/>
+              </a:solidFill>
+              <a:latin typeface="Times New Roman"/>
+            </a:endParaRPr>
+          </a:p>
+        </p:txBody>
+      </p:sp>
+    </p:spTree>
+  </p:cSld>
+</p:notes>
+</file>
+
+<file path=ppt/notesSlides/notesSlide17.xml><?xml version="1.0" encoding="utf-8"?>
+<p:notes xmlns:a="http://schemas.openxmlformats.org/drawingml/2006/main" xmlns:p="http://schemas.openxmlformats.org/presentationml/2006/main" xmlns:r="http://schemas.openxmlformats.org/officeDocument/2006/relationships" xmlns:p14="http://schemas.microsoft.com/office/powerpoint/2010/main" xmlns:p15="http://schemas.microsoft.com/office/powerpoint/2012/main" xmlns:mc="http://schemas.openxmlformats.org/markup-compatibility/2006">
+  <p:cSld>
+    <p:spTree>
+      <p:nvGrpSpPr>
+        <p:cNvPr id="1" name=""/>
+        <p:cNvGrpSpPr/>
+        <p:nvPr/>
+      </p:nvGrpSpPr>
+      <p:grpSpPr>
+        <a:xfrm>
+          <a:off x="0" y="0"/>
+          <a:ext cx="0" cy="0"/>
+          <a:chOff x="0" y="0"/>
+          <a:chExt cx="0" cy="0"/>
+        </a:xfrm>
+      </p:grpSpPr>
+      <p:sp>
+        <p:nvSpPr>
+          <p:cNvPr id="166" name="PlaceHolder 1"/>
+          <p:cNvSpPr>
+            <a:spLocks noGrp="1"/>
+          </p:cNvSpPr>
+          <p:nvPr>
+            <p:ph type="sldImg"/>
+          </p:nvPr>
+        </p:nvSpPr>
+        <p:spPr>
+          <a:xfrm>
+            <a:off x="685800" y="1143000"/>
+            <a:ext cx="5486040" cy="3085920"/>
+          </a:xfrm>
+          <a:prstGeom prst="rect">
+            <a:avLst/>
+          </a:prstGeom>
+          <a:ln w="0">
+            <a:noFill/>
+          </a:ln>
+        </p:spPr>
+      </p:sp>
+      <p:sp>
+        <p:nvSpPr>
+          <p:cNvPr id="167" name="PlaceHolder 2"/>
+          <p:cNvSpPr>
+            <a:spLocks noGrp="1"/>
+          </p:cNvSpPr>
+          <p:nvPr>
+            <p:ph type="body"/>
+          </p:nvPr>
+        </p:nvSpPr>
+        <p:spPr>
+          <a:xfrm>
+            <a:off x="685800" y="4400640"/>
+            <a:ext cx="5486040" cy="3600000"/>
+          </a:xfrm>
+          <a:prstGeom prst="rect">
+            <a:avLst/>
+          </a:prstGeom>
+          <a:noFill/>
+          <a:ln w="0">
+            <a:noFill/>
+          </a:ln>
+        </p:spPr>
+        <p:txBody>
+          <a:bodyPr lIns="91440" rIns="91440" tIns="45720" bIns="45720" anchor="t">
+            <a:noAutofit/>
+          </a:bodyPr>
+          <a:p>
+            <a:pPr indent="0">
+              <a:lnSpc>
+                <a:spcPct val="100000"/>
+              </a:lnSpc>
+              <a:buNone/>
+              <a:tabLst>
+                <a:tab algn="l" pos="0"/>
+              </a:tabLst>
+            </a:pPr>
+            <a:r>
+              <a:rPr b="0" lang="en-US" sz="2000" spc="-1" strike="noStrike">
+                <a:solidFill>
+                  <a:srgbClr val="000000"/>
+                </a:solidFill>
+                <a:latin typeface="Arial"/>
+              </a:rPr>
+              <a:t>Left, patients sorted by how unwell they are: routine observations are almost always there, the specialised ones only for the sick. Right: the patients who had a lactate drawn died five times more often — and that is before anyone looked at the number. Impute it away and you delete the strongest signal in the table.</a:t>
+            </a:r>
+            <a:endParaRPr b="0" lang="en-US" sz="2000" spc="-1" strike="noStrike">
+              <a:solidFill>
+                <a:srgbClr val="000000"/>
+              </a:solidFill>
+              <a:latin typeface="Arial"/>
+            </a:endParaRPr>
+          </a:p>
+        </p:txBody>
+      </p:sp>
+      <p:sp>
+        <p:nvSpPr>
+          <p:cNvPr id="168" name="PlaceHolder 3"/>
+          <p:cNvSpPr>
+            <a:spLocks noGrp="1"/>
+          </p:cNvSpPr>
+          <p:nvPr>
+            <p:ph type="sldNum" idx="42"/>
+          </p:nvPr>
+        </p:nvSpPr>
+        <p:spPr>
+          <a:xfrm>
+            <a:off x="3884760" y="8685360"/>
+            <a:ext cx="2971440" cy="458280"/>
+          </a:xfrm>
+          <a:prstGeom prst="rect">
+            <a:avLst/>
+          </a:prstGeom>
+          <a:noFill/>
+          <a:ln w="0">
+            <a:noFill/>
+          </a:ln>
+        </p:spPr>
+        <p:txBody>
+          <a:bodyPr lIns="91440" rIns="91440" tIns="45720" bIns="45720" anchor="b">
+            <a:noAutofit/>
+          </a:bodyPr>
+          <a:lstStyle>
+            <a:lvl1pPr indent="0" algn="r" defTabSz="457200">
+              <a:lnSpc>
+                <a:spcPct val="100000"/>
+              </a:lnSpc>
+              <a:buNone/>
+              <a:defRPr b="0" lang="en-US" sz="1200" spc="-1" strike="noStrike">
+                <a:solidFill>
+                  <a:schemeClr val="dk1"/>
+                </a:solidFill>
+                <a:latin typeface="+mn-lt"/>
+                <a:ea typeface="+mn-ea"/>
+              </a:defRPr>
+            </a:lvl1pPr>
+          </a:lstStyle>
+          <a:p>
+            <a:pPr indent="0" algn="r" defTabSz="457200">
+              <a:lnSpc>
+                <a:spcPct val="100000"/>
+              </a:lnSpc>
+              <a:buNone/>
+            </a:pPr>
+            <a:fld id="{5A557CCC-327C-4349-AD1B-AD3D33661006}" type="slidenum">
+              <a:rPr b="0" lang="en-US" sz="1200" spc="-1" strike="noStrike">
+                <a:solidFill>
+                  <a:schemeClr val="dk1"/>
+                </a:solidFill>
+                <a:latin typeface="+mn-lt"/>
+                <a:ea typeface="+mn-ea"/>
+              </a:rPr>
+              <a:t>34</a:t>
+            </a:fld>
+            <a:endParaRPr b="0" lang="en-US" sz="1200" spc="-1" strike="noStrike">
+              <a:solidFill>
+                <a:srgbClr val="000000"/>
+              </a:solidFill>
+              <a:latin typeface="Times New Roman"/>
+            </a:endParaRPr>
+          </a:p>
+        </p:txBody>
+      </p:sp>
+    </p:spTree>
+  </p:cSld>
+</p:notes>
+</file>
+
+<file path=ppt/notesSlides/notesSlide19.xml><?xml version="1.0" encoding="utf-8"?>
+<p:notes xmlns:a="http://schemas.openxmlformats.org/drawingml/2006/main" xmlns:p="http://schemas.openxmlformats.org/presentationml/2006/main" xmlns:r="http://schemas.openxmlformats.org/officeDocument/2006/relationships" xmlns:p14="http://schemas.microsoft.com/office/powerpoint/2010/main" xmlns:p15="http://schemas.microsoft.com/office/powerpoint/2012/main" xmlns:mc="http://schemas.openxmlformats.org/markup-compatibility/2006">
+  <p:cSld>
+    <p:spTree>
+      <p:nvGrpSpPr>
+        <p:cNvPr id="1" name=""/>
+        <p:cNvGrpSpPr/>
+        <p:nvPr/>
+      </p:nvGrpSpPr>
+      <p:grpSpPr>
+        <a:xfrm>
+          <a:off x="0" y="0"/>
+          <a:ext cx="0" cy="0"/>
+          <a:chOff x="0" y="0"/>
+          <a:chExt cx="0" cy="0"/>
+        </a:xfrm>
+      </p:grpSpPr>
+      <p:sp>
+        <p:nvSpPr>
+          <p:cNvPr id="169" name="PlaceHolder 1"/>
+          <p:cNvSpPr>
+            <a:spLocks noGrp="1"/>
+          </p:cNvSpPr>
+          <p:nvPr>
+            <p:ph type="sldImg"/>
+          </p:nvPr>
+        </p:nvSpPr>
+        <p:spPr>
+          <a:xfrm>
+            <a:off x="685800" y="1143000"/>
+            <a:ext cx="5486040" cy="3085920"/>
+          </a:xfrm>
+          <a:prstGeom prst="rect">
+            <a:avLst/>
+          </a:prstGeom>
+          <a:ln w="0">
+            <a:noFill/>
+          </a:ln>
+        </p:spPr>
+      </p:sp>
+      <p:sp>
+        <p:nvSpPr>
+          <p:cNvPr id="170" name="PlaceHolder 2"/>
+          <p:cNvSpPr>
+            <a:spLocks noGrp="1"/>
+          </p:cNvSpPr>
+          <p:nvPr>
+            <p:ph type="body"/>
+          </p:nvPr>
+        </p:nvSpPr>
+        <p:spPr>
+          <a:xfrm>
+            <a:off x="685800" y="4400640"/>
+            <a:ext cx="5486040" cy="3600000"/>
+          </a:xfrm>
+          <a:prstGeom prst="rect">
+            <a:avLst/>
+          </a:prstGeom>
+          <a:noFill/>
+          <a:ln w="0">
+            <a:noFill/>
+          </a:ln>
+        </p:spPr>
+        <p:txBody>
+          <a:bodyPr lIns="91440" rIns="91440" tIns="45720" bIns="45720" anchor="t">
+            <a:noAutofit/>
+          </a:bodyPr>
+          <a:p>
+            <a:pPr indent="0">
+              <a:lnSpc>
+                <a:spcPct val="100000"/>
+              </a:lnSpc>
+              <a:buNone/>
+              <a:tabLst>
+                <a:tab algn="l" pos="0"/>
+              </a:tabLst>
+            </a:pPr>
+            <a:r>
+              <a:rPr b="0" lang="en-US" sz="2000" spc="-1" strike="noStrike">
+                <a:solidFill>
+                  <a:srgbClr val="000000"/>
+                </a:solidFill>
+                <a:latin typeface="Arial"/>
+              </a:rPr>
+              <a:t>This model has no parameters — it is </a:t>
+            </a:r>
+            <a:r>
+              <a:rPr b="0" lang="en-US" sz="2000" spc="-1" strike="noStrike">
+                <a:solidFill>
+                  <a:srgbClr val="000000"/>
+                </a:solidFill>
+                <a:latin typeface="Courier New"/>
+              </a:rPr>
+              <a:t>return 0. It beats most first attempts on accuracy and it would kill everyone it was meant to save. Every metric we use from Week 3 onwards exists to make this model score zero.</a:t>
+            </a:r>
+            <a:endParaRPr b="0" lang="en-US" sz="2000" spc="-1" strike="noStrike">
+              <a:solidFill>
+                <a:srgbClr val="000000"/>
+              </a:solidFill>
+              <a:latin typeface="Arial"/>
+            </a:endParaRPr>
+          </a:p>
+        </p:txBody>
+      </p:sp>
+      <p:sp>
+        <p:nvSpPr>
+          <p:cNvPr id="171" name="PlaceHolder 3"/>
+          <p:cNvSpPr>
+            <a:spLocks noGrp="1"/>
+          </p:cNvSpPr>
+          <p:nvPr>
+            <p:ph type="sldNum" idx="43"/>
+          </p:nvPr>
+        </p:nvSpPr>
+        <p:spPr>
+          <a:xfrm>
+            <a:off x="3884760" y="8685360"/>
+            <a:ext cx="2971440" cy="458280"/>
+          </a:xfrm>
+          <a:prstGeom prst="rect">
+            <a:avLst/>
+          </a:prstGeom>
+          <a:noFill/>
+          <a:ln w="0">
+            <a:noFill/>
+          </a:ln>
+        </p:spPr>
+        <p:txBody>
+          <a:bodyPr lIns="91440" rIns="91440" tIns="45720" bIns="45720" anchor="b">
+            <a:noAutofit/>
+          </a:bodyPr>
+          <a:lstStyle>
+            <a:lvl1pPr indent="0" algn="r" defTabSz="457200">
+              <a:lnSpc>
+                <a:spcPct val="100000"/>
+              </a:lnSpc>
+              <a:buNone/>
+              <a:defRPr b="0" lang="en-US" sz="1200" spc="-1" strike="noStrike">
+                <a:solidFill>
+                  <a:schemeClr val="dk1"/>
+                </a:solidFill>
+                <a:latin typeface="+mn-lt"/>
+                <a:ea typeface="+mn-ea"/>
+              </a:defRPr>
+            </a:lvl1pPr>
+          </a:lstStyle>
+          <a:p>
+            <a:pPr indent="0" algn="r" defTabSz="457200">
+              <a:lnSpc>
+                <a:spcPct val="100000"/>
+              </a:lnSpc>
+              <a:buNone/>
+            </a:pPr>
+            <a:fld id="{9F997011-8DF7-4462-A336-A116BCD98115}" type="slidenum">
+              <a:rPr b="0" lang="en-US" sz="1200" spc="-1" strike="noStrike">
+                <a:solidFill>
+                  <a:schemeClr val="dk1"/>
+                </a:solidFill>
+                <a:latin typeface="+mn-lt"/>
+                <a:ea typeface="+mn-ea"/>
+              </a:rPr>
+              <a:t>34</a:t>
             </a:fld>
             <a:endParaRPr b="0" lang="en-US" sz="1200" spc="-1" strike="noStrike">
               <a:solidFill>
@@ -922,7 +1282,7 @@
       </p:grpSpPr>
       <p:sp>
         <p:nvSpPr>
-          <p:cNvPr id="152" name="PlaceHolder 1"/>
+          <p:cNvPr id="172" name="PlaceHolder 1"/>
           <p:cNvSpPr>
             <a:spLocks noGrp="1"/>
           </p:cNvSpPr>
@@ -945,7 +1305,7 @@
       </p:sp>
       <p:sp>
         <p:nvSpPr>
-          <p:cNvPr id="153" name="PlaceHolder 2"/>
+          <p:cNvPr id="173" name="PlaceHolder 2"/>
           <p:cNvSpPr>
             <a:spLocks noGrp="1"/>
           </p:cNvSpPr>
@@ -987,25 +1347,7 @@
                 </a:solidFill>
                 <a:latin typeface="Arial"/>
               </a:rPr>
-              <a:t>The workhorse: gradient boosting still wins here more often than deep learning. The hard part is never the model, it is deciding what one row </a:t>
-            </a:r>
-            <a:r>
-              <a:rPr b="0" i="1" lang="en-US" sz="2000" spc="-1" strike="noStrike">
-                <a:solidFill>
-                  <a:srgbClr val="000000"/>
-                </a:solidFill>
-                <a:latin typeface="Arial"/>
-              </a:rPr>
-              <a:t>is</a:t>
-            </a:r>
-            <a:r>
-              <a:rPr b="0" lang="en-US" sz="2000" spc="-1" strike="noStrike">
-                <a:solidFill>
-                  <a:srgbClr val="000000"/>
-                </a:solidFill>
-                <a:latin typeface="Arial"/>
-              </a:rPr>
-              <a:t>. Left: Cortejoso et al., Clin Interv Aging (CC BY 3.0). Right: US Bureau of Immigration, 1912 (CC0) — the Titanic dataset you have all seen.</a:t>
+              <a:t>Nothing was retrained, no code changed. The deployment hospital simply admits older patients, and the case mix kept drifting. Without a monitoring dashboard you find out from a complaint, not from a metric. Week 14.</a:t>
             </a:r>
             <a:endParaRPr b="0" lang="en-US" sz="2000" spc="-1" strike="noStrike">
               <a:solidFill>
@@ -1018,12 +1360,12 @@
       </p:sp>
       <p:sp>
         <p:nvSpPr>
-          <p:cNvPr id="154" name="PlaceHolder 3"/>
+          <p:cNvPr id="174" name="PlaceHolder 3"/>
           <p:cNvSpPr>
             <a:spLocks noGrp="1"/>
           </p:cNvSpPr>
           <p:nvPr>
-            <p:ph type="sldNum" idx="42"/>
+            <p:ph type="sldNum" idx="44"/>
           </p:nvPr>
         </p:nvSpPr>
         <p:spPr>
@@ -1065,7 +1407,7 @@
               </a:lnSpc>
               <a:buNone/>
             </a:pPr>
-            <a:fld id="{C7DC9C0C-F58C-47A9-A9BC-76CDC8DF2912}" type="slidenum">
+            <a:fld id="{EF7A0CC5-75B9-4372-BD8C-C733E1960F0C}" type="slidenum">
               <a:rPr b="0" lang="en-US" sz="1200" spc="-1" strike="noStrike">
                 <a:solidFill>
                   <a:schemeClr val="dk1"/>
@@ -1073,7 +1415,7 @@
                 <a:latin typeface="+mn-lt"/>
                 <a:ea typeface="+mn-ea"/>
               </a:rPr>
-              <a:t>28</a:t>
+              <a:t>34</a:t>
             </a:fld>
             <a:endParaRPr b="0" lang="en-US" sz="1200" spc="-1" strike="noStrike">
               <a:solidFill>
@@ -1108,7 +1450,7 @@
       </p:grpSpPr>
       <p:sp>
         <p:nvSpPr>
-          <p:cNvPr id="155" name="PlaceHolder 1"/>
+          <p:cNvPr id="175" name="PlaceHolder 1"/>
           <p:cNvSpPr>
             <a:spLocks noGrp="1"/>
           </p:cNvSpPr>
@@ -1131,7 +1473,7 @@
       </p:sp>
       <p:sp>
         <p:nvSpPr>
-          <p:cNvPr id="156" name="PlaceHolder 2"/>
+          <p:cNvPr id="176" name="PlaceHolder 2"/>
           <p:cNvSpPr>
             <a:spLocks noGrp="1"/>
           </p:cNvSpPr>
@@ -1173,7 +1515,7 @@
                 </a:solidFill>
                 <a:latin typeface="Arial"/>
               </a:rPr>
-              <a:t>Same object: a regularly sampled sequence. Same toolbox: filtering, spectrograms, 1D convolutions, transformers. The ECG is 500 Hz, the audio 44.1 kHz — three orders of magnitude apart, identical methods. Left: Glenlarson (public domain). Right: Em3rgent0rdr (CC BY-SA 4.0).</a:t>
+              <a:t>Zech et al. 2018 (cross-site CNN generalisation); Esteva/ISIC ruler artefact. These come back in Week 7.</a:t>
             </a:r>
             <a:endParaRPr b="0" lang="en-US" sz="2000" spc="-1" strike="noStrike">
               <a:solidFill>
@@ -1186,12 +1528,12 @@
       </p:sp>
       <p:sp>
         <p:nvSpPr>
-          <p:cNvPr id="157" name="PlaceHolder 3"/>
+          <p:cNvPr id="177" name="PlaceHolder 3"/>
           <p:cNvSpPr>
             <a:spLocks noGrp="1"/>
           </p:cNvSpPr>
           <p:nvPr>
-            <p:ph type="sldNum" idx="43"/>
+            <p:ph type="sldNum" idx="45"/>
           </p:nvPr>
         </p:nvSpPr>
         <p:spPr>
@@ -1233,7 +1575,7 @@
               </a:lnSpc>
               <a:buNone/>
             </a:pPr>
-            <a:fld id="{26902B70-AD95-4B96-A4D2-D5E9802E05FD}" type="slidenum">
+            <a:fld id="{272B77B7-2CD0-4311-853A-C5AA578604D8}" type="slidenum">
               <a:rPr b="0" lang="en-US" sz="1200" spc="-1" strike="noStrike">
                 <a:solidFill>
                   <a:schemeClr val="dk1"/>
@@ -1241,7 +1583,7 @@
                 <a:latin typeface="+mn-lt"/>
                 <a:ea typeface="+mn-ea"/>
               </a:rPr>
-              <a:t>&lt;number&gt;</a:t>
+              <a:t>34</a:t>
             </a:fld>
             <a:endParaRPr b="0" lang="en-US" sz="1200" spc="-1" strike="noStrike">
               <a:solidFill>
@@ -1276,7 +1618,7 @@
       </p:grpSpPr>
       <p:sp>
         <p:nvSpPr>
-          <p:cNvPr id="158" name="PlaceHolder 1"/>
+          <p:cNvPr id="178" name="PlaceHolder 1"/>
           <p:cNvSpPr>
             <a:spLocks noGrp="1"/>
           </p:cNvSpPr>
@@ -1299,7 +1641,7 @@
       </p:sp>
       <p:sp>
         <p:nvSpPr>
-          <p:cNvPr id="159" name="PlaceHolder 2"/>
+          <p:cNvPr id="179" name="PlaceHolder 2"/>
           <p:cNvSpPr>
             <a:spLocks noGrp="1"/>
           </p:cNvSpPr>
@@ -1341,25 +1683,7 @@
                 </a:solidFill>
                 <a:latin typeface="Arial"/>
               </a:rPr>
-              <a:t>Both are arrays of numbers on a grid, and a CNN or a ViT does not know the difference. What differs is the </a:t>
-            </a:r>
-            <a:r>
-              <a:rPr b="0" i="1" lang="en-US" sz="2000" spc="-1" strike="noStrike">
-                <a:solidFill>
-                  <a:srgbClr val="000000"/>
-                </a:solidFill>
-                <a:latin typeface="Arial"/>
-              </a:rPr>
-              <a:t>label</a:t>
-            </a:r>
-            <a:r>
-              <a:rPr b="0" lang="en-US" sz="2000" spc="-1" strike="noStrike">
-                <a:solidFill>
-                  <a:srgbClr val="000000"/>
-                </a:solidFill>
-                <a:latin typeface="Arial"/>
-              </a:rPr>
-              <a:t>: “pneumonia” is one radiologist’s opinion, “wheat” is ground truth you can go and check. Left: Mikael Häggström (CC0). Right: NASA/ASTER, Kansas (public domain).</a:t>
+              <a:t>Every “pneumonia” scan in this hospital was shot at the bedside, so the portable unit’s marker is in the corner of every positive. The model finds it in one epoch, scores perfectly, and collapses the moment you deploy it anywhere else. The marker here is drawn on — the phenomenon is Zech et al. 2018.</a:t>
             </a:r>
             <a:endParaRPr b="0" lang="en-US" sz="2000" spc="-1" strike="noStrike">
               <a:solidFill>
@@ -1372,12 +1696,12 @@
       </p:sp>
       <p:sp>
         <p:nvSpPr>
-          <p:cNvPr id="160" name="PlaceHolder 3"/>
+          <p:cNvPr id="180" name="PlaceHolder 3"/>
           <p:cNvSpPr>
             <a:spLocks noGrp="1"/>
           </p:cNvSpPr>
           <p:nvPr>
-            <p:ph type="sldNum" idx="44"/>
+            <p:ph type="sldNum" idx="46"/>
           </p:nvPr>
         </p:nvSpPr>
         <p:spPr>
@@ -1419,7 +1743,7 @@
               </a:lnSpc>
               <a:buNone/>
             </a:pPr>
-            <a:fld id="{17019831-1725-4257-BAD6-37B665EAF882}" type="slidenum">
+            <a:fld id="{5AB255B1-4611-4D0D-BBBB-348380CADAAB}" type="slidenum">
               <a:rPr b="0" lang="en-US" sz="1200" spc="-1" strike="noStrike">
                 <a:solidFill>
                   <a:schemeClr val="dk1"/>
@@ -1427,175 +1751,7 @@
                 <a:latin typeface="+mn-lt"/>
                 <a:ea typeface="+mn-ea"/>
               </a:rPr>
-              <a:t>&lt;number&gt;</a:t>
-            </a:fld>
-            <a:endParaRPr b="0" lang="en-US" sz="1200" spc="-1" strike="noStrike">
-              <a:solidFill>
-                <a:srgbClr val="000000"/>
-              </a:solidFill>
-              <a:latin typeface="Times New Roman"/>
-            </a:endParaRPr>
-          </a:p>
-        </p:txBody>
-      </p:sp>
-    </p:spTree>
-  </p:cSld>
-</p:notes>
-</file>
-
-<file path=ppt/notesSlides/notesSlide24.xml><?xml version="1.0" encoding="utf-8"?>
-<p:notes xmlns:a="http://schemas.openxmlformats.org/drawingml/2006/main" xmlns:p="http://schemas.openxmlformats.org/presentationml/2006/main" xmlns:r="http://schemas.openxmlformats.org/officeDocument/2006/relationships" xmlns:p14="http://schemas.microsoft.com/office/powerpoint/2010/main" xmlns:p15="http://schemas.microsoft.com/office/powerpoint/2012/main" xmlns:mc="http://schemas.openxmlformats.org/markup-compatibility/2006">
-  <p:cSld>
-    <p:spTree>
-      <p:nvGrpSpPr>
-        <p:cNvPr id="1" name=""/>
-        <p:cNvGrpSpPr/>
-        <p:nvPr/>
-      </p:nvGrpSpPr>
-      <p:grpSpPr>
-        <a:xfrm>
-          <a:off x="0" y="0"/>
-          <a:ext cx="0" cy="0"/>
-          <a:chOff x="0" y="0"/>
-          <a:chExt cx="0" cy="0"/>
-        </a:xfrm>
-      </p:grpSpPr>
-      <p:sp>
-        <p:nvSpPr>
-          <p:cNvPr id="161" name="PlaceHolder 1"/>
-          <p:cNvSpPr>
-            <a:spLocks noGrp="1"/>
-          </p:cNvSpPr>
-          <p:nvPr>
-            <p:ph type="sldImg"/>
-          </p:nvPr>
-        </p:nvSpPr>
-        <p:spPr>
-          <a:xfrm>
-            <a:off x="685800" y="1143000"/>
-            <a:ext cx="5486040" cy="3085920"/>
-          </a:xfrm>
-          <a:prstGeom prst="rect">
-            <a:avLst/>
-          </a:prstGeom>
-          <a:ln w="0">
-            <a:noFill/>
-          </a:ln>
-        </p:spPr>
-      </p:sp>
-      <p:sp>
-        <p:nvSpPr>
-          <p:cNvPr id="162" name="PlaceHolder 2"/>
-          <p:cNvSpPr>
-            <a:spLocks noGrp="1"/>
-          </p:cNvSpPr>
-          <p:nvPr>
-            <p:ph type="body"/>
-          </p:nvPr>
-        </p:nvSpPr>
-        <p:spPr>
-          <a:xfrm>
-            <a:off x="685800" y="4400640"/>
-            <a:ext cx="5486040" cy="3600000"/>
-          </a:xfrm>
-          <a:prstGeom prst="rect">
-            <a:avLst/>
-          </a:prstGeom>
-          <a:noFill/>
-          <a:ln w="0">
-            <a:noFill/>
-          </a:ln>
-        </p:spPr>
-        <p:txBody>
-          <a:bodyPr lIns="91440" rIns="91440" tIns="45720" bIns="45720" anchor="t">
-            <a:noAutofit/>
-          </a:bodyPr>
-          <a:p>
-            <a:pPr indent="0">
-              <a:lnSpc>
-                <a:spcPct val="100000"/>
-              </a:lnSpc>
-              <a:buNone/>
-              <a:tabLst>
-                <a:tab algn="l" pos="0"/>
-              </a:tabLst>
-            </a:pPr>
-            <a:r>
-              <a:rPr b="0" lang="en-US" sz="2000" spc="-1" strike="noStrike">
-                <a:solidFill>
-                  <a:srgbClr val="000000"/>
-                </a:solidFill>
-                <a:latin typeface="Arial"/>
-              </a:rPr>
-              <a:t>The third dimension costs you: memory grows cubically, labelled data gets scarcer, and pretrained weights are far rarer than in 2D. Note the two are not the same kind of 3D — the CT is a dense voxel grid, the point cloud is sparse and unordered. Left: Mikael Häggström (CC0). Right: Daniel L. Lu, San Francisco (CC BY 4.0).</a:t>
-            </a:r>
-            <a:endParaRPr b="0" lang="en-US" sz="2000" spc="-1" strike="noStrike">
-              <a:solidFill>
-                <a:srgbClr val="000000"/>
-              </a:solidFill>
-              <a:latin typeface="Arial"/>
-            </a:endParaRPr>
-          </a:p>
-        </p:txBody>
-      </p:sp>
-      <p:sp>
-        <p:nvSpPr>
-          <p:cNvPr id="163" name="PlaceHolder 3"/>
-          <p:cNvSpPr>
-            <a:spLocks noGrp="1"/>
-          </p:cNvSpPr>
-          <p:nvPr>
-            <p:ph type="sldNum" idx="45"/>
-          </p:nvPr>
-        </p:nvSpPr>
-        <p:spPr>
-          <a:xfrm>
-            <a:off x="3884760" y="8685360"/>
-            <a:ext cx="2971440" cy="458280"/>
-          </a:xfrm>
-          <a:prstGeom prst="rect">
-            <a:avLst/>
-          </a:prstGeom>
-          <a:noFill/>
-          <a:ln w="0">
-            <a:noFill/>
-          </a:ln>
-        </p:spPr>
-        <p:txBody>
-          <a:bodyPr lIns="91440" rIns="91440" tIns="45720" bIns="45720" anchor="b">
-            <a:noAutofit/>
-          </a:bodyPr>
-          <a:lstStyle>
-            <a:lvl1pPr indent="0" algn="r" defTabSz="457200">
-              <a:lnSpc>
-                <a:spcPct val="100000"/>
-              </a:lnSpc>
-              <a:buNone/>
-              <a:defRPr b="0" lang="en-US" sz="1200" spc="-1" strike="noStrike">
-                <a:solidFill>
-                  <a:schemeClr val="dk1"/>
-                </a:solidFill>
-                <a:latin typeface="+mn-lt"/>
-                <a:ea typeface="+mn-ea"/>
-              </a:defRPr>
-            </a:lvl1pPr>
-          </a:lstStyle>
-          <a:p>
-            <a:pPr indent="0" algn="r" defTabSz="457200">
-              <a:lnSpc>
-                <a:spcPct val="100000"/>
-              </a:lnSpc>
-              <a:buNone/>
-            </a:pPr>
-            <a:fld id="{D02D4A5B-2D90-4F14-88FB-C9838D2182E9}" type="slidenum">
-              <a:rPr b="0" lang="en-US" sz="1200" spc="-1" strike="noStrike">
-                <a:solidFill>
-                  <a:schemeClr val="dk1"/>
-                </a:solidFill>
-                <a:latin typeface="+mn-lt"/>
-                <a:ea typeface="+mn-ea"/>
-              </a:rPr>
-              <a:t>&lt;number&gt;</a:t>
+              <a:t>34</a:t>
             </a:fld>
             <a:endParaRPr b="0" lang="en-US" sz="1200" spc="-1" strike="noStrike">
               <a:solidFill>
@@ -1630,7 +1786,7 @@
       </p:grpSpPr>
       <p:sp>
         <p:nvSpPr>
-          <p:cNvPr id="164" name="PlaceHolder 1"/>
+          <p:cNvPr id="181" name="PlaceHolder 1"/>
           <p:cNvSpPr>
             <a:spLocks noGrp="1"/>
           </p:cNvSpPr>
@@ -1653,7 +1809,7 @@
       </p:sp>
       <p:sp>
         <p:nvSpPr>
-          <p:cNvPr id="165" name="PlaceHolder 2"/>
+          <p:cNvPr id="182" name="PlaceHolder 2"/>
           <p:cNvSpPr>
             <a:spLocks noGrp="1"/>
           </p:cNvSpPr>
@@ -1695,7 +1851,7 @@
                 </a:solidFill>
                 <a:latin typeface="Arial"/>
               </a:rPr>
-              <a:t>Clinical text is its own dialect: abbreviations, negation (“no evidence of hydrocephalus”), copy-paste, and dictation errors. A model trained on newspapers reads “PT” as a person and not as prothrombin time. Weeks 11–12. Left: Tu et al., MultiMedBench (CC BY 4.0). Right: The Echo, 1920 (public domain).</a:t>
+              <a:t>The first bug leaks the test distribution through the mean and variance. The second leaks the patient. Both look like excellent results, which is exactly why they survive code review. You will write the third version in today’s recitation.</a:t>
             </a:r>
             <a:endParaRPr b="0" lang="en-US" sz="2000" spc="-1" strike="noStrike">
               <a:solidFill>
@@ -1708,12 +1864,12 @@
       </p:sp>
       <p:sp>
         <p:nvSpPr>
-          <p:cNvPr id="166" name="PlaceHolder 3"/>
+          <p:cNvPr id="183" name="PlaceHolder 3"/>
           <p:cNvSpPr>
             <a:spLocks noGrp="1"/>
           </p:cNvSpPr>
           <p:nvPr>
-            <p:ph type="sldNum" idx="46"/>
+            <p:ph type="sldNum" idx="47"/>
           </p:nvPr>
         </p:nvSpPr>
         <p:spPr>
@@ -1755,7 +1911,883 @@
               </a:lnSpc>
               <a:buNone/>
             </a:pPr>
-            <a:fld id="{5B70C025-A014-4042-BC8F-135F0FA82354}" type="slidenum">
+            <a:fld id="{EBCF3AC6-79A3-4A3B-9EF2-19F714E3B384}" type="slidenum">
+              <a:rPr b="0" lang="en-US" sz="1200" spc="-1" strike="noStrike">
+                <a:solidFill>
+                  <a:schemeClr val="dk1"/>
+                </a:solidFill>
+                <a:latin typeface="+mn-lt"/>
+                <a:ea typeface="+mn-ea"/>
+              </a:rPr>
+              <a:t>34</a:t>
+            </a:fld>
+            <a:endParaRPr b="0" lang="en-US" sz="1200" spc="-1" strike="noStrike">
+              <a:solidFill>
+                <a:srgbClr val="000000"/>
+              </a:solidFill>
+              <a:latin typeface="Times New Roman"/>
+            </a:endParaRPr>
+          </a:p>
+        </p:txBody>
+      </p:sp>
+    </p:spTree>
+  </p:cSld>
+</p:notes>
+</file>
+
+<file path=ppt/notesSlides/notesSlide27.xml><?xml version="1.0" encoding="utf-8"?>
+<p:notes xmlns:a="http://schemas.openxmlformats.org/drawingml/2006/main" xmlns:p="http://schemas.openxmlformats.org/presentationml/2006/main" xmlns:r="http://schemas.openxmlformats.org/officeDocument/2006/relationships" xmlns:p14="http://schemas.microsoft.com/office/powerpoint/2010/main" xmlns:p15="http://schemas.microsoft.com/office/powerpoint/2012/main" xmlns:mc="http://schemas.openxmlformats.org/markup-compatibility/2006">
+  <p:cSld>
+    <p:spTree>
+      <p:nvGrpSpPr>
+        <p:cNvPr id="1" name=""/>
+        <p:cNvGrpSpPr/>
+        <p:nvPr/>
+      </p:nvGrpSpPr>
+      <p:grpSpPr>
+        <a:xfrm>
+          <a:off x="0" y="0"/>
+          <a:ext cx="0" cy="0"/>
+          <a:chOff x="0" y="0"/>
+          <a:chExt cx="0" cy="0"/>
+        </a:xfrm>
+      </p:grpSpPr>
+      <p:sp>
+        <p:nvSpPr>
+          <p:cNvPr id="184" name="PlaceHolder 1"/>
+          <p:cNvSpPr>
+            <a:spLocks noGrp="1"/>
+          </p:cNvSpPr>
+          <p:nvPr>
+            <p:ph type="sldImg"/>
+          </p:nvPr>
+        </p:nvSpPr>
+        <p:spPr>
+          <a:xfrm>
+            <a:off x="685800" y="1143000"/>
+            <a:ext cx="5486040" cy="3085920"/>
+          </a:xfrm>
+          <a:prstGeom prst="rect">
+            <a:avLst/>
+          </a:prstGeom>
+          <a:ln w="0">
+            <a:noFill/>
+          </a:ln>
+        </p:spPr>
+      </p:sp>
+      <p:sp>
+        <p:nvSpPr>
+          <p:cNvPr id="185" name="PlaceHolder 2"/>
+          <p:cNvSpPr>
+            <a:spLocks noGrp="1"/>
+          </p:cNvSpPr>
+          <p:nvPr>
+            <p:ph type="body"/>
+          </p:nvPr>
+        </p:nvSpPr>
+        <p:spPr>
+          <a:xfrm>
+            <a:off x="685800" y="4400640"/>
+            <a:ext cx="5486040" cy="3600000"/>
+          </a:xfrm>
+          <a:prstGeom prst="rect">
+            <a:avLst/>
+          </a:prstGeom>
+          <a:noFill/>
+          <a:ln w="0">
+            <a:noFill/>
+          </a:ln>
+        </p:spPr>
+        <p:txBody>
+          <a:bodyPr lIns="91440" rIns="91440" tIns="45720" bIns="45720" anchor="t">
+            <a:noAutofit/>
+          </a:bodyPr>
+          <a:p>
+            <a:pPr indent="0">
+              <a:lnSpc>
+                <a:spcPct val="100000"/>
+              </a:lnSpc>
+              <a:buNone/>
+              <a:tabLst>
+                <a:tab algn="l" pos="0"/>
+              </a:tabLst>
+            </a:pPr>
+            <a:r>
+              <a:rPr b="0" lang="en-US" sz="2000" spc="-1" strike="noStrike">
+                <a:solidFill>
+                  <a:srgbClr val="000000"/>
+                </a:solidFill>
+                <a:latin typeface="Arial"/>
+              </a:rPr>
+              <a:t>The workhorse: gradient boosting still wins here more often than deep learning. The hard part is never the model, it is deciding what one row </a:t>
+            </a:r>
+            <a:r>
+              <a:rPr b="0" i="1" lang="en-US" sz="2000" spc="-1" strike="noStrike">
+                <a:solidFill>
+                  <a:srgbClr val="000000"/>
+                </a:solidFill>
+                <a:latin typeface="Arial"/>
+              </a:rPr>
+              <a:t>is</a:t>
+            </a:r>
+            <a:r>
+              <a:rPr b="0" lang="en-US" sz="2000" spc="-1" strike="noStrike">
+                <a:solidFill>
+                  <a:srgbClr val="000000"/>
+                </a:solidFill>
+                <a:latin typeface="Arial"/>
+              </a:rPr>
+              <a:t>. Left: Cortejoso et al., Clin Interv Aging (CC BY 3.0). Right: US Bureau of Immigration, 1912 (CC0) — the Titanic dataset you have all seen.</a:t>
+            </a:r>
+            <a:endParaRPr b="0" lang="en-US" sz="2000" spc="-1" strike="noStrike">
+              <a:solidFill>
+                <a:srgbClr val="000000"/>
+              </a:solidFill>
+              <a:latin typeface="Arial"/>
+            </a:endParaRPr>
+          </a:p>
+        </p:txBody>
+      </p:sp>
+      <p:sp>
+        <p:nvSpPr>
+          <p:cNvPr id="186" name="PlaceHolder 3"/>
+          <p:cNvSpPr>
+            <a:spLocks noGrp="1"/>
+          </p:cNvSpPr>
+          <p:nvPr>
+            <p:ph type="sldNum" idx="48"/>
+          </p:nvPr>
+        </p:nvSpPr>
+        <p:spPr>
+          <a:xfrm>
+            <a:off x="3884760" y="8685360"/>
+            <a:ext cx="2971440" cy="458280"/>
+          </a:xfrm>
+          <a:prstGeom prst="rect">
+            <a:avLst/>
+          </a:prstGeom>
+          <a:noFill/>
+          <a:ln w="0">
+            <a:noFill/>
+          </a:ln>
+        </p:spPr>
+        <p:txBody>
+          <a:bodyPr lIns="91440" rIns="91440" tIns="45720" bIns="45720" anchor="b">
+            <a:noAutofit/>
+          </a:bodyPr>
+          <a:lstStyle>
+            <a:lvl1pPr indent="0" algn="r" defTabSz="457200">
+              <a:lnSpc>
+                <a:spcPct val="100000"/>
+              </a:lnSpc>
+              <a:buNone/>
+              <a:defRPr b="0" lang="en-US" sz="1200" spc="-1" strike="noStrike">
+                <a:solidFill>
+                  <a:schemeClr val="dk1"/>
+                </a:solidFill>
+                <a:latin typeface="+mn-lt"/>
+                <a:ea typeface="+mn-ea"/>
+              </a:defRPr>
+            </a:lvl1pPr>
+          </a:lstStyle>
+          <a:p>
+            <a:pPr indent="0" algn="r" defTabSz="457200">
+              <a:lnSpc>
+                <a:spcPct val="100000"/>
+              </a:lnSpc>
+              <a:buNone/>
+            </a:pPr>
+            <a:fld id="{3606B28A-8FE9-4BB1-929D-2D09B9E565A8}" type="slidenum">
+              <a:rPr b="0" lang="en-US" sz="1200" spc="-1" strike="noStrike">
+                <a:solidFill>
+                  <a:schemeClr val="dk1"/>
+                </a:solidFill>
+                <a:latin typeface="+mn-lt"/>
+                <a:ea typeface="+mn-ea"/>
+              </a:rPr>
+              <a:t>&lt;number&gt;</a:t>
+            </a:fld>
+            <a:endParaRPr b="0" lang="en-US" sz="1200" spc="-1" strike="noStrike">
+              <a:solidFill>
+                <a:srgbClr val="000000"/>
+              </a:solidFill>
+              <a:latin typeface="Times New Roman"/>
+            </a:endParaRPr>
+          </a:p>
+        </p:txBody>
+      </p:sp>
+    </p:spTree>
+  </p:cSld>
+</p:notes>
+</file>
+
+<file path=ppt/notesSlides/notesSlide28.xml><?xml version="1.0" encoding="utf-8"?>
+<p:notes xmlns:a="http://schemas.openxmlformats.org/drawingml/2006/main" xmlns:p="http://schemas.openxmlformats.org/presentationml/2006/main" xmlns:r="http://schemas.openxmlformats.org/officeDocument/2006/relationships" xmlns:p14="http://schemas.microsoft.com/office/powerpoint/2010/main" xmlns:p15="http://schemas.microsoft.com/office/powerpoint/2012/main" xmlns:mc="http://schemas.openxmlformats.org/markup-compatibility/2006">
+  <p:cSld>
+    <p:spTree>
+      <p:nvGrpSpPr>
+        <p:cNvPr id="1" name=""/>
+        <p:cNvGrpSpPr/>
+        <p:nvPr/>
+      </p:nvGrpSpPr>
+      <p:grpSpPr>
+        <a:xfrm>
+          <a:off x="0" y="0"/>
+          <a:ext cx="0" cy="0"/>
+          <a:chOff x="0" y="0"/>
+          <a:chExt cx="0" cy="0"/>
+        </a:xfrm>
+      </p:grpSpPr>
+      <p:sp>
+        <p:nvSpPr>
+          <p:cNvPr id="187" name="PlaceHolder 1"/>
+          <p:cNvSpPr>
+            <a:spLocks noGrp="1"/>
+          </p:cNvSpPr>
+          <p:nvPr>
+            <p:ph type="sldImg"/>
+          </p:nvPr>
+        </p:nvSpPr>
+        <p:spPr>
+          <a:xfrm>
+            <a:off x="685800" y="1143000"/>
+            <a:ext cx="5486040" cy="3085920"/>
+          </a:xfrm>
+          <a:prstGeom prst="rect">
+            <a:avLst/>
+          </a:prstGeom>
+          <a:ln w="0">
+            <a:noFill/>
+          </a:ln>
+        </p:spPr>
+      </p:sp>
+      <p:sp>
+        <p:nvSpPr>
+          <p:cNvPr id="188" name="PlaceHolder 2"/>
+          <p:cNvSpPr>
+            <a:spLocks noGrp="1"/>
+          </p:cNvSpPr>
+          <p:nvPr>
+            <p:ph type="body"/>
+          </p:nvPr>
+        </p:nvSpPr>
+        <p:spPr>
+          <a:xfrm>
+            <a:off x="685800" y="4400640"/>
+            <a:ext cx="5486040" cy="3600000"/>
+          </a:xfrm>
+          <a:prstGeom prst="rect">
+            <a:avLst/>
+          </a:prstGeom>
+          <a:noFill/>
+          <a:ln w="0">
+            <a:noFill/>
+          </a:ln>
+        </p:spPr>
+        <p:txBody>
+          <a:bodyPr lIns="91440" rIns="91440" tIns="45720" bIns="45720" anchor="t">
+            <a:noAutofit/>
+          </a:bodyPr>
+          <a:p>
+            <a:pPr indent="0">
+              <a:lnSpc>
+                <a:spcPct val="100000"/>
+              </a:lnSpc>
+              <a:buNone/>
+              <a:tabLst>
+                <a:tab algn="l" pos="0"/>
+              </a:tabLst>
+            </a:pPr>
+            <a:r>
+              <a:rPr b="0" lang="en-US" sz="2000" spc="-1" strike="noStrike">
+                <a:solidFill>
+                  <a:srgbClr val="000000"/>
+                </a:solidFill>
+                <a:latin typeface="Arial"/>
+              </a:rPr>
+              <a:t>Same object: a regularly sampled sequence. Same toolbox: filtering, spectrograms, 1D convolutions, transformers. The ECG is 500 Hz, the audio 44.1 kHz — three orders of magnitude apart, identical methods. Left: Glenlarson (public domain). Right: Em3rgent0rdr (CC BY-SA 4.0).</a:t>
+            </a:r>
+            <a:endParaRPr b="0" lang="en-US" sz="2000" spc="-1" strike="noStrike">
+              <a:solidFill>
+                <a:srgbClr val="000000"/>
+              </a:solidFill>
+              <a:latin typeface="Arial"/>
+            </a:endParaRPr>
+          </a:p>
+        </p:txBody>
+      </p:sp>
+      <p:sp>
+        <p:nvSpPr>
+          <p:cNvPr id="189" name="PlaceHolder 3"/>
+          <p:cNvSpPr>
+            <a:spLocks noGrp="1"/>
+          </p:cNvSpPr>
+          <p:nvPr>
+            <p:ph type="sldNum" idx="49"/>
+          </p:nvPr>
+        </p:nvSpPr>
+        <p:spPr>
+          <a:xfrm>
+            <a:off x="3884760" y="8685360"/>
+            <a:ext cx="2971440" cy="458280"/>
+          </a:xfrm>
+          <a:prstGeom prst="rect">
+            <a:avLst/>
+          </a:prstGeom>
+          <a:noFill/>
+          <a:ln w="0">
+            <a:noFill/>
+          </a:ln>
+        </p:spPr>
+        <p:txBody>
+          <a:bodyPr lIns="91440" rIns="91440" tIns="45720" bIns="45720" anchor="b">
+            <a:noAutofit/>
+          </a:bodyPr>
+          <a:lstStyle>
+            <a:lvl1pPr indent="0" algn="r" defTabSz="457200">
+              <a:lnSpc>
+                <a:spcPct val="100000"/>
+              </a:lnSpc>
+              <a:buNone/>
+              <a:defRPr b="0" lang="en-US" sz="1200" spc="-1" strike="noStrike">
+                <a:solidFill>
+                  <a:schemeClr val="dk1"/>
+                </a:solidFill>
+                <a:latin typeface="+mn-lt"/>
+                <a:ea typeface="+mn-ea"/>
+              </a:defRPr>
+            </a:lvl1pPr>
+          </a:lstStyle>
+          <a:p>
+            <a:pPr indent="0" algn="r" defTabSz="457200">
+              <a:lnSpc>
+                <a:spcPct val="100000"/>
+              </a:lnSpc>
+              <a:buNone/>
+            </a:pPr>
+            <a:fld id="{8BF8AA0F-E4BB-42A7-A140-F7780B5DBE97}" type="slidenum">
+              <a:rPr b="0" lang="en-US" sz="1200" spc="-1" strike="noStrike">
+                <a:solidFill>
+                  <a:schemeClr val="dk1"/>
+                </a:solidFill>
+                <a:latin typeface="+mn-lt"/>
+                <a:ea typeface="+mn-ea"/>
+              </a:rPr>
+              <a:t>&lt;number&gt;</a:t>
+            </a:fld>
+            <a:endParaRPr b="0" lang="en-US" sz="1200" spc="-1" strike="noStrike">
+              <a:solidFill>
+                <a:srgbClr val="000000"/>
+              </a:solidFill>
+              <a:latin typeface="Times New Roman"/>
+            </a:endParaRPr>
+          </a:p>
+        </p:txBody>
+      </p:sp>
+    </p:spTree>
+  </p:cSld>
+</p:notes>
+</file>
+
+<file path=ppt/notesSlides/notesSlide29.xml><?xml version="1.0" encoding="utf-8"?>
+<p:notes xmlns:a="http://schemas.openxmlformats.org/drawingml/2006/main" xmlns:p="http://schemas.openxmlformats.org/presentationml/2006/main" xmlns:r="http://schemas.openxmlformats.org/officeDocument/2006/relationships" xmlns:p14="http://schemas.microsoft.com/office/powerpoint/2010/main" xmlns:p15="http://schemas.microsoft.com/office/powerpoint/2012/main" xmlns:mc="http://schemas.openxmlformats.org/markup-compatibility/2006">
+  <p:cSld>
+    <p:spTree>
+      <p:nvGrpSpPr>
+        <p:cNvPr id="1" name=""/>
+        <p:cNvGrpSpPr/>
+        <p:nvPr/>
+      </p:nvGrpSpPr>
+      <p:grpSpPr>
+        <a:xfrm>
+          <a:off x="0" y="0"/>
+          <a:ext cx="0" cy="0"/>
+          <a:chOff x="0" y="0"/>
+          <a:chExt cx="0" cy="0"/>
+        </a:xfrm>
+      </p:grpSpPr>
+      <p:sp>
+        <p:nvSpPr>
+          <p:cNvPr id="190" name="PlaceHolder 1"/>
+          <p:cNvSpPr>
+            <a:spLocks noGrp="1"/>
+          </p:cNvSpPr>
+          <p:nvPr>
+            <p:ph type="sldImg"/>
+          </p:nvPr>
+        </p:nvSpPr>
+        <p:spPr>
+          <a:xfrm>
+            <a:off x="685800" y="1143000"/>
+            <a:ext cx="5486040" cy="3085920"/>
+          </a:xfrm>
+          <a:prstGeom prst="rect">
+            <a:avLst/>
+          </a:prstGeom>
+          <a:ln w="0">
+            <a:noFill/>
+          </a:ln>
+        </p:spPr>
+      </p:sp>
+      <p:sp>
+        <p:nvSpPr>
+          <p:cNvPr id="191" name="PlaceHolder 2"/>
+          <p:cNvSpPr>
+            <a:spLocks noGrp="1"/>
+          </p:cNvSpPr>
+          <p:nvPr>
+            <p:ph type="body"/>
+          </p:nvPr>
+        </p:nvSpPr>
+        <p:spPr>
+          <a:xfrm>
+            <a:off x="685800" y="4400640"/>
+            <a:ext cx="5486040" cy="3600000"/>
+          </a:xfrm>
+          <a:prstGeom prst="rect">
+            <a:avLst/>
+          </a:prstGeom>
+          <a:noFill/>
+          <a:ln w="0">
+            <a:noFill/>
+          </a:ln>
+        </p:spPr>
+        <p:txBody>
+          <a:bodyPr lIns="91440" rIns="91440" tIns="45720" bIns="45720" anchor="t">
+            <a:noAutofit/>
+          </a:bodyPr>
+          <a:p>
+            <a:pPr indent="0">
+              <a:lnSpc>
+                <a:spcPct val="100000"/>
+              </a:lnSpc>
+              <a:buNone/>
+              <a:tabLst>
+                <a:tab algn="l" pos="0"/>
+              </a:tabLst>
+            </a:pPr>
+            <a:r>
+              <a:rPr b="0" lang="en-US" sz="2000" spc="-1" strike="noStrike">
+                <a:solidFill>
+                  <a:srgbClr val="000000"/>
+                </a:solidFill>
+                <a:latin typeface="Arial"/>
+              </a:rPr>
+              <a:t>Both are arrays of numbers on a grid, and a CNN or a ViT does not know the difference. What differs is the </a:t>
+            </a:r>
+            <a:r>
+              <a:rPr b="0" i="1" lang="en-US" sz="2000" spc="-1" strike="noStrike">
+                <a:solidFill>
+                  <a:srgbClr val="000000"/>
+                </a:solidFill>
+                <a:latin typeface="Arial"/>
+              </a:rPr>
+              <a:t>label</a:t>
+            </a:r>
+            <a:r>
+              <a:rPr b="0" lang="en-US" sz="2000" spc="-1" strike="noStrike">
+                <a:solidFill>
+                  <a:srgbClr val="000000"/>
+                </a:solidFill>
+                <a:latin typeface="Arial"/>
+              </a:rPr>
+              <a:t>: “pneumonia” is one radiologist’s opinion, “wheat” is ground truth you can go and check. Left: Mikael Häggström (CC0). Right: NASA/ASTER, Kansas (public domain).</a:t>
+            </a:r>
+            <a:endParaRPr b="0" lang="en-US" sz="2000" spc="-1" strike="noStrike">
+              <a:solidFill>
+                <a:srgbClr val="000000"/>
+              </a:solidFill>
+              <a:latin typeface="Arial"/>
+            </a:endParaRPr>
+          </a:p>
+        </p:txBody>
+      </p:sp>
+      <p:sp>
+        <p:nvSpPr>
+          <p:cNvPr id="192" name="PlaceHolder 3"/>
+          <p:cNvSpPr>
+            <a:spLocks noGrp="1"/>
+          </p:cNvSpPr>
+          <p:nvPr>
+            <p:ph type="sldNum" idx="50"/>
+          </p:nvPr>
+        </p:nvSpPr>
+        <p:spPr>
+          <a:xfrm>
+            <a:off x="3884760" y="8685360"/>
+            <a:ext cx="2971440" cy="458280"/>
+          </a:xfrm>
+          <a:prstGeom prst="rect">
+            <a:avLst/>
+          </a:prstGeom>
+          <a:noFill/>
+          <a:ln w="0">
+            <a:noFill/>
+          </a:ln>
+        </p:spPr>
+        <p:txBody>
+          <a:bodyPr lIns="91440" rIns="91440" tIns="45720" bIns="45720" anchor="b">
+            <a:noAutofit/>
+          </a:bodyPr>
+          <a:lstStyle>
+            <a:lvl1pPr indent="0" algn="r" defTabSz="457200">
+              <a:lnSpc>
+                <a:spcPct val="100000"/>
+              </a:lnSpc>
+              <a:buNone/>
+              <a:defRPr b="0" lang="en-US" sz="1200" spc="-1" strike="noStrike">
+                <a:solidFill>
+                  <a:schemeClr val="dk1"/>
+                </a:solidFill>
+                <a:latin typeface="+mn-lt"/>
+                <a:ea typeface="+mn-ea"/>
+              </a:defRPr>
+            </a:lvl1pPr>
+          </a:lstStyle>
+          <a:p>
+            <a:pPr indent="0" algn="r" defTabSz="457200">
+              <a:lnSpc>
+                <a:spcPct val="100000"/>
+              </a:lnSpc>
+              <a:buNone/>
+            </a:pPr>
+            <a:fld id="{C5842306-AC62-43E0-BCA0-3C0386B10E06}" type="slidenum">
+              <a:rPr b="0" lang="en-US" sz="1200" spc="-1" strike="noStrike">
+                <a:solidFill>
+                  <a:schemeClr val="dk1"/>
+                </a:solidFill>
+                <a:latin typeface="+mn-lt"/>
+                <a:ea typeface="+mn-ea"/>
+              </a:rPr>
+              <a:t>&lt;number&gt;</a:t>
+            </a:fld>
+            <a:endParaRPr b="0" lang="en-US" sz="1200" spc="-1" strike="noStrike">
+              <a:solidFill>
+                <a:srgbClr val="000000"/>
+              </a:solidFill>
+              <a:latin typeface="Times New Roman"/>
+            </a:endParaRPr>
+          </a:p>
+        </p:txBody>
+      </p:sp>
+    </p:spTree>
+  </p:cSld>
+</p:notes>
+</file>
+
+<file path=ppt/notesSlides/notesSlide30.xml><?xml version="1.0" encoding="utf-8"?>
+<p:notes xmlns:a="http://schemas.openxmlformats.org/drawingml/2006/main" xmlns:p="http://schemas.openxmlformats.org/presentationml/2006/main" xmlns:r="http://schemas.openxmlformats.org/officeDocument/2006/relationships" xmlns:p14="http://schemas.microsoft.com/office/powerpoint/2010/main" xmlns:p15="http://schemas.microsoft.com/office/powerpoint/2012/main" xmlns:mc="http://schemas.openxmlformats.org/markup-compatibility/2006">
+  <p:cSld>
+    <p:spTree>
+      <p:nvGrpSpPr>
+        <p:cNvPr id="1" name=""/>
+        <p:cNvGrpSpPr/>
+        <p:nvPr/>
+      </p:nvGrpSpPr>
+      <p:grpSpPr>
+        <a:xfrm>
+          <a:off x="0" y="0"/>
+          <a:ext cx="0" cy="0"/>
+          <a:chOff x="0" y="0"/>
+          <a:chExt cx="0" cy="0"/>
+        </a:xfrm>
+      </p:grpSpPr>
+      <p:sp>
+        <p:nvSpPr>
+          <p:cNvPr id="193" name="PlaceHolder 1"/>
+          <p:cNvSpPr>
+            <a:spLocks noGrp="1"/>
+          </p:cNvSpPr>
+          <p:nvPr>
+            <p:ph type="sldImg"/>
+          </p:nvPr>
+        </p:nvSpPr>
+        <p:spPr>
+          <a:xfrm>
+            <a:off x="685800" y="1143000"/>
+            <a:ext cx="5486040" cy="3085920"/>
+          </a:xfrm>
+          <a:prstGeom prst="rect">
+            <a:avLst/>
+          </a:prstGeom>
+          <a:ln w="0">
+            <a:noFill/>
+          </a:ln>
+        </p:spPr>
+      </p:sp>
+      <p:sp>
+        <p:nvSpPr>
+          <p:cNvPr id="194" name="PlaceHolder 2"/>
+          <p:cNvSpPr>
+            <a:spLocks noGrp="1"/>
+          </p:cNvSpPr>
+          <p:nvPr>
+            <p:ph type="body"/>
+          </p:nvPr>
+        </p:nvSpPr>
+        <p:spPr>
+          <a:xfrm>
+            <a:off x="685800" y="4400640"/>
+            <a:ext cx="5486040" cy="3600000"/>
+          </a:xfrm>
+          <a:prstGeom prst="rect">
+            <a:avLst/>
+          </a:prstGeom>
+          <a:noFill/>
+          <a:ln w="0">
+            <a:noFill/>
+          </a:ln>
+        </p:spPr>
+        <p:txBody>
+          <a:bodyPr lIns="91440" rIns="91440" tIns="45720" bIns="45720" anchor="t">
+            <a:noAutofit/>
+          </a:bodyPr>
+          <a:p>
+            <a:pPr indent="0">
+              <a:lnSpc>
+                <a:spcPct val="100000"/>
+              </a:lnSpc>
+              <a:buNone/>
+              <a:tabLst>
+                <a:tab algn="l" pos="0"/>
+              </a:tabLst>
+            </a:pPr>
+            <a:r>
+              <a:rPr b="0" lang="en-US" sz="2000" spc="-1" strike="noStrike">
+                <a:solidFill>
+                  <a:srgbClr val="000000"/>
+                </a:solidFill>
+                <a:latin typeface="Arial"/>
+              </a:rPr>
+              <a:t>The third dimension costs you: memory grows cubically, labelled data gets scarcer, and pretrained weights are far rarer than in 2D. Note the two are not the same kind of 3D — the CT is a dense voxel grid, the point cloud is sparse and unordered. Left: Mikael Häggström (CC0). Right: Daniel L. Lu, San Francisco (CC BY 4.0).</a:t>
+            </a:r>
+            <a:endParaRPr b="0" lang="en-US" sz="2000" spc="-1" strike="noStrike">
+              <a:solidFill>
+                <a:srgbClr val="000000"/>
+              </a:solidFill>
+              <a:latin typeface="Arial"/>
+            </a:endParaRPr>
+          </a:p>
+        </p:txBody>
+      </p:sp>
+      <p:sp>
+        <p:nvSpPr>
+          <p:cNvPr id="195" name="PlaceHolder 3"/>
+          <p:cNvSpPr>
+            <a:spLocks noGrp="1"/>
+          </p:cNvSpPr>
+          <p:nvPr>
+            <p:ph type="sldNum" idx="51"/>
+          </p:nvPr>
+        </p:nvSpPr>
+        <p:spPr>
+          <a:xfrm>
+            <a:off x="3884760" y="8685360"/>
+            <a:ext cx="2971440" cy="458280"/>
+          </a:xfrm>
+          <a:prstGeom prst="rect">
+            <a:avLst/>
+          </a:prstGeom>
+          <a:noFill/>
+          <a:ln w="0">
+            <a:noFill/>
+          </a:ln>
+        </p:spPr>
+        <p:txBody>
+          <a:bodyPr lIns="91440" rIns="91440" tIns="45720" bIns="45720" anchor="b">
+            <a:noAutofit/>
+          </a:bodyPr>
+          <a:lstStyle>
+            <a:lvl1pPr indent="0" algn="r" defTabSz="457200">
+              <a:lnSpc>
+                <a:spcPct val="100000"/>
+              </a:lnSpc>
+              <a:buNone/>
+              <a:defRPr b="0" lang="en-US" sz="1200" spc="-1" strike="noStrike">
+                <a:solidFill>
+                  <a:schemeClr val="dk1"/>
+                </a:solidFill>
+                <a:latin typeface="+mn-lt"/>
+                <a:ea typeface="+mn-ea"/>
+              </a:defRPr>
+            </a:lvl1pPr>
+          </a:lstStyle>
+          <a:p>
+            <a:pPr indent="0" algn="r" defTabSz="457200">
+              <a:lnSpc>
+                <a:spcPct val="100000"/>
+              </a:lnSpc>
+              <a:buNone/>
+            </a:pPr>
+            <a:fld id="{269310A1-5942-476E-AD31-60AA4D391EF1}" type="slidenum">
+              <a:rPr b="0" lang="en-US" sz="1200" spc="-1" strike="noStrike">
+                <a:solidFill>
+                  <a:schemeClr val="dk1"/>
+                </a:solidFill>
+                <a:latin typeface="+mn-lt"/>
+                <a:ea typeface="+mn-ea"/>
+              </a:rPr>
+              <a:t>&lt;number&gt;</a:t>
+            </a:fld>
+            <a:endParaRPr b="0" lang="en-US" sz="1200" spc="-1" strike="noStrike">
+              <a:solidFill>
+                <a:srgbClr val="000000"/>
+              </a:solidFill>
+              <a:latin typeface="Times New Roman"/>
+            </a:endParaRPr>
+          </a:p>
+        </p:txBody>
+      </p:sp>
+    </p:spTree>
+  </p:cSld>
+</p:notes>
+</file>
+
+<file path=ppt/notesSlides/notesSlide31.xml><?xml version="1.0" encoding="utf-8"?>
+<p:notes xmlns:a="http://schemas.openxmlformats.org/drawingml/2006/main" xmlns:p="http://schemas.openxmlformats.org/presentationml/2006/main" xmlns:r="http://schemas.openxmlformats.org/officeDocument/2006/relationships" xmlns:p14="http://schemas.microsoft.com/office/powerpoint/2010/main" xmlns:p15="http://schemas.microsoft.com/office/powerpoint/2012/main" xmlns:mc="http://schemas.openxmlformats.org/markup-compatibility/2006">
+  <p:cSld>
+    <p:spTree>
+      <p:nvGrpSpPr>
+        <p:cNvPr id="1" name=""/>
+        <p:cNvGrpSpPr/>
+        <p:nvPr/>
+      </p:nvGrpSpPr>
+      <p:grpSpPr>
+        <a:xfrm>
+          <a:off x="0" y="0"/>
+          <a:ext cx="0" cy="0"/>
+          <a:chOff x="0" y="0"/>
+          <a:chExt cx="0" cy="0"/>
+        </a:xfrm>
+      </p:grpSpPr>
+      <p:sp>
+        <p:nvSpPr>
+          <p:cNvPr id="196" name="PlaceHolder 1"/>
+          <p:cNvSpPr>
+            <a:spLocks noGrp="1"/>
+          </p:cNvSpPr>
+          <p:nvPr>
+            <p:ph type="sldImg"/>
+          </p:nvPr>
+        </p:nvSpPr>
+        <p:spPr>
+          <a:xfrm>
+            <a:off x="685800" y="1143000"/>
+            <a:ext cx="5486040" cy="3085920"/>
+          </a:xfrm>
+          <a:prstGeom prst="rect">
+            <a:avLst/>
+          </a:prstGeom>
+          <a:ln w="0">
+            <a:noFill/>
+          </a:ln>
+        </p:spPr>
+      </p:sp>
+      <p:sp>
+        <p:nvSpPr>
+          <p:cNvPr id="197" name="PlaceHolder 2"/>
+          <p:cNvSpPr>
+            <a:spLocks noGrp="1"/>
+          </p:cNvSpPr>
+          <p:nvPr>
+            <p:ph type="body"/>
+          </p:nvPr>
+        </p:nvSpPr>
+        <p:spPr>
+          <a:xfrm>
+            <a:off x="685800" y="4400640"/>
+            <a:ext cx="5486040" cy="3600000"/>
+          </a:xfrm>
+          <a:prstGeom prst="rect">
+            <a:avLst/>
+          </a:prstGeom>
+          <a:noFill/>
+          <a:ln w="0">
+            <a:noFill/>
+          </a:ln>
+        </p:spPr>
+        <p:txBody>
+          <a:bodyPr lIns="91440" rIns="91440" tIns="45720" bIns="45720" anchor="t">
+            <a:noAutofit/>
+          </a:bodyPr>
+          <a:p>
+            <a:pPr indent="0">
+              <a:lnSpc>
+                <a:spcPct val="100000"/>
+              </a:lnSpc>
+              <a:buNone/>
+              <a:tabLst>
+                <a:tab algn="l" pos="0"/>
+              </a:tabLst>
+            </a:pPr>
+            <a:r>
+              <a:rPr b="0" lang="en-US" sz="2000" spc="-1" strike="noStrike">
+                <a:solidFill>
+                  <a:srgbClr val="000000"/>
+                </a:solidFill>
+                <a:latin typeface="Arial"/>
+              </a:rPr>
+              <a:t>Clinical text is its own dialect: abbreviations, negation (“no evidence of hydrocephalus”), copy-paste, and dictation errors. A model trained on newspapers reads “PT” as a person and not as prothrombin time. Weeks 11–12. Left: Tu et al., MultiMedBench (CC BY 4.0). Right: The Echo, 1920 (public domain).</a:t>
+            </a:r>
+            <a:endParaRPr b="0" lang="en-US" sz="2000" spc="-1" strike="noStrike">
+              <a:solidFill>
+                <a:srgbClr val="000000"/>
+              </a:solidFill>
+              <a:latin typeface="Arial"/>
+            </a:endParaRPr>
+          </a:p>
+        </p:txBody>
+      </p:sp>
+      <p:sp>
+        <p:nvSpPr>
+          <p:cNvPr id="198" name="PlaceHolder 3"/>
+          <p:cNvSpPr>
+            <a:spLocks noGrp="1"/>
+          </p:cNvSpPr>
+          <p:nvPr>
+            <p:ph type="sldNum" idx="52"/>
+          </p:nvPr>
+        </p:nvSpPr>
+        <p:spPr>
+          <a:xfrm>
+            <a:off x="3884760" y="8685360"/>
+            <a:ext cx="2971440" cy="458280"/>
+          </a:xfrm>
+          <a:prstGeom prst="rect">
+            <a:avLst/>
+          </a:prstGeom>
+          <a:noFill/>
+          <a:ln w="0">
+            <a:noFill/>
+          </a:ln>
+        </p:spPr>
+        <p:txBody>
+          <a:bodyPr lIns="91440" rIns="91440" tIns="45720" bIns="45720" anchor="b">
+            <a:noAutofit/>
+          </a:bodyPr>
+          <a:lstStyle>
+            <a:lvl1pPr indent="0" algn="r" defTabSz="457200">
+              <a:lnSpc>
+                <a:spcPct val="100000"/>
+              </a:lnSpc>
+              <a:buNone/>
+              <a:defRPr b="0" lang="en-US" sz="1200" spc="-1" strike="noStrike">
+                <a:solidFill>
+                  <a:schemeClr val="dk1"/>
+                </a:solidFill>
+                <a:latin typeface="+mn-lt"/>
+                <a:ea typeface="+mn-ea"/>
+              </a:defRPr>
+            </a:lvl1pPr>
+          </a:lstStyle>
+          <a:p>
+            <a:pPr indent="0" algn="r" defTabSz="457200">
+              <a:lnSpc>
+                <a:spcPct val="100000"/>
+              </a:lnSpc>
+              <a:buNone/>
+            </a:pPr>
+            <a:fld id="{40D143E9-61E7-4588-A441-48D32BAD29F5}" type="slidenum">
               <a:rPr b="0" lang="en-US" sz="1200" spc="-1" strike="noStrike">
                 <a:solidFill>
                   <a:schemeClr val="dk1"/>
@@ -1798,7 +2830,7 @@
       </p:grpSpPr>
       <p:sp>
         <p:nvSpPr>
-          <p:cNvPr id="140" name="PlaceHolder 1"/>
+          <p:cNvPr id="154" name="PlaceHolder 1"/>
           <p:cNvSpPr>
             <a:spLocks noGrp="1"/>
           </p:cNvSpPr>
@@ -1821,7 +2853,7 @@
       </p:sp>
       <p:sp>
         <p:nvSpPr>
-          <p:cNvPr id="141" name="PlaceHolder 2"/>
+          <p:cNvPr id="155" name="PlaceHolder 2"/>
           <p:cNvSpPr>
             <a:spLocks noGrp="1"/>
           </p:cNvSpPr>
@@ -1876,7 +2908,7 @@
       </p:sp>
       <p:sp>
         <p:nvSpPr>
-          <p:cNvPr id="142" name="PlaceHolder 3"/>
+          <p:cNvPr id="156" name="PlaceHolder 3"/>
           <p:cNvSpPr>
             <a:spLocks noGrp="1"/>
           </p:cNvSpPr>
@@ -1923,7 +2955,7 @@
               </a:lnSpc>
               <a:buNone/>
             </a:pPr>
-            <a:fld id="{CBF49525-DB27-4D8A-AC1F-B46DC86DEFD1}" type="slidenum">
+            <a:fld id="{E49B12A3-6BF3-4D77-8C47-6F9A0AE8A983}" type="slidenum">
               <a:rPr b="0" lang="en-US" sz="1200" spc="-1" strike="noStrike">
                 <a:solidFill>
                   <a:schemeClr val="dk1"/>
@@ -1931,7 +2963,7 @@
                 <a:latin typeface="+mn-lt"/>
                 <a:ea typeface="+mn-ea"/>
               </a:rPr>
-              <a:t>28</a:t>
+              <a:t>34</a:t>
             </a:fld>
             <a:endParaRPr b="0" lang="en-US" sz="1200" spc="-1" strike="noStrike">
               <a:solidFill>
@@ -2078,7 +3110,7 @@
         <p:txBody>
           <a:bodyPr/>
           <a:p>
-            <a:fld id="{182891C5-FFC6-48C8-9731-23749D729112}" type="slidenum">
+            <a:fld id="{3B8AC5BF-AEE7-4639-A3C3-23A5B62DD2FB}" type="slidenum">
               <a:t>&lt;#&gt;</a:t>
             </a:fld>
           </a:p>
@@ -2161,7 +3193,7 @@
         <p:txBody>
           <a:bodyPr/>
           <a:p>
-            <a:fld id="{A2400209-3C03-4101-9F8F-EB0BDFFE7D26}" type="slidenum">
+            <a:fld id="{5C5363D2-609D-49B8-943D-916C5BCE3B4D}" type="slidenum">
               <a:t>&lt;#&gt;</a:t>
             </a:fld>
           </a:p>
@@ -2244,7 +3276,7 @@
         <p:txBody>
           <a:bodyPr/>
           <a:p>
-            <a:fld id="{4EFA3ED2-8F22-4BCE-9D2A-7BFAA79739BC}" type="slidenum">
+            <a:fld id="{6CD74291-180E-433C-ACBB-1779CDDE00A0}" type="slidenum">
               <a:t>&lt;#&gt;</a:t>
             </a:fld>
           </a:p>
@@ -2327,7 +3359,7 @@
         <p:txBody>
           <a:bodyPr/>
           <a:p>
-            <a:fld id="{629556CC-DCC0-4DEF-90FC-A7780DBF2FB5}" type="slidenum">
+            <a:fld id="{D883E384-511D-43C9-9EC7-7E9790FAFF47}" type="slidenum">
               <a:t>&lt;#&gt;</a:t>
             </a:fld>
           </a:p>
@@ -2410,7 +3442,7 @@
         <p:txBody>
           <a:bodyPr/>
           <a:p>
-            <a:fld id="{16D373E1-788A-41C0-AE94-4C4991446EAD}" type="slidenum">
+            <a:fld id="{0BFF0496-541E-47E8-86A2-E0C6E612F109}" type="slidenum">
               <a:t>&lt;#&gt;</a:t>
             </a:fld>
           </a:p>
@@ -2576,7 +3608,7 @@
         <p:txBody>
           <a:bodyPr/>
           <a:p>
-            <a:fld id="{4AC46336-0C96-498F-AF01-05276E972CE0}" type="slidenum">
+            <a:fld id="{F6196B5D-8949-46EA-8804-C63C06550C8A}" type="slidenum">
               <a:t>&lt;#&gt;</a:t>
             </a:fld>
           </a:p>
@@ -2659,7 +3691,7 @@
         <p:txBody>
           <a:bodyPr/>
           <a:p>
-            <a:fld id="{BC27C7CB-9350-45BF-8DB9-269464C47148}" type="slidenum">
+            <a:fld id="{8086FA90-AFB0-4CFB-8475-AABC62B30EBA}" type="slidenum">
               <a:t>&lt;#&gt;</a:t>
             </a:fld>
           </a:p>
@@ -2868,7 +3900,7 @@
         <p:txBody>
           <a:bodyPr/>
           <a:p>
-            <a:fld id="{5B8B2468-B86F-40F9-8834-C7EDF875BE33}" type="slidenum">
+            <a:fld id="{14E67605-0DDE-4689-B5DF-45FCD95262D4}" type="slidenum">
               <a:t>&lt;#&gt;</a:t>
             </a:fld>
           </a:p>
@@ -2951,7 +3983,7 @@
         <p:txBody>
           <a:bodyPr/>
           <a:p>
-            <a:fld id="{E538B380-07BD-4B76-9858-A8152A4B03FA}" type="slidenum">
+            <a:fld id="{7FD0040E-4AE3-44B1-91E1-CB99F63DBB5F}" type="slidenum">
               <a:t>&lt;#&gt;</a:t>
             </a:fld>
           </a:p>
@@ -3074,7 +4106,7 @@
         <p:txBody>
           <a:bodyPr/>
           <a:p>
-            <a:fld id="{3A1BB795-0F11-4EC1-89E4-BFCE42CEE1DA}" type="slidenum">
+            <a:fld id="{6BC1168F-0794-49B9-9A6C-835EF5E352FD}" type="slidenum">
               <a:t>&lt;#&gt;</a:t>
             </a:fld>
           </a:p>
@@ -3157,7 +4189,7 @@
         <p:txBody>
           <a:bodyPr/>
           <a:p>
-            <a:fld id="{CD3C5A8E-7269-4709-9677-2B6BFCA7FE0F}" type="slidenum">
+            <a:fld id="{22F9A5FB-C70B-4D1F-9B42-A58EB6D17434}" type="slidenum">
               <a:t>&lt;#&gt;</a:t>
             </a:fld>
           </a:p>
@@ -3324,7 +4356,7 @@
                 </a:solidFill>
                 <a:latin typeface="Calibri"/>
               </a:rPr>
-              <a:t> </a:t>
+              <a:t>&lt;date/time&gt;</a:t>
             </a:r>
             <a:endParaRPr b="0" lang="en-US" sz="900" spc="-1" strike="noStrike">
               <a:solidFill>
@@ -3384,7 +4416,7 @@
                 </a:solidFill>
                 <a:latin typeface="Times New Roman"/>
               </a:rPr>
-              <a:t> </a:t>
+              <a:t>&lt;footer&gt;</a:t>
             </a:r>
             <a:endParaRPr b="0" lang="en-US" sz="1400" spc="-1" strike="noStrike">
               <a:solidFill>
@@ -3445,7 +4477,7 @@
               </a:lnSpc>
               <a:buNone/>
             </a:pPr>
-            <a:fld id="{AA93E0BF-CB50-46BC-845E-6C26F3BE1E29}" type="slidenum">
+            <a:fld id="{4737648F-F6B2-4974-992F-A7F061A001BD}" type="slidenum">
               <a:rPr b="0" lang="en-US" sz="900" spc="-1" strike="noStrike">
                 <a:solidFill>
                   <a:schemeClr val="dk1">
@@ -3454,7 +4486,7 @@
                 </a:solidFill>
                 <a:latin typeface="Calibri"/>
               </a:rPr>
-              <a:t>27</a:t>
+              <a:t>&lt;number&gt;</a:t>
             </a:fld>
             <a:endParaRPr b="0" lang="en-US" sz="900" spc="-1" strike="noStrike">
               <a:solidFill>
@@ -4192,7 +5224,7 @@
               </a:lnSpc>
               <a:buNone/>
             </a:pPr>
-            <a:fld id="{9173E0DC-865C-44C5-AFF6-4F82CF074B41}" type="slidenum">
+            <a:fld id="{868687DD-1B61-4696-9CC3-2F975633B522}" type="slidenum">
               <a:rPr b="0" lang="en-US" sz="900" spc="-1" strike="noStrike">
                 <a:solidFill>
                   <a:schemeClr val="dk1">
@@ -4760,7 +5792,7 @@
               </a:lnSpc>
               <a:buNone/>
             </a:pPr>
-            <a:fld id="{B111A2AF-B435-42BC-A20F-FE838506B3FC}" type="slidenum">
+            <a:fld id="{334D47F0-BBAC-4250-83F6-547D9844862B}" type="slidenum">
               <a:rPr b="0" lang="en-US" sz="900" spc="-1" strike="noStrike">
                 <a:solidFill>
                   <a:schemeClr val="dk1">
@@ -5224,7 +6256,7 @@
               </a:lnSpc>
               <a:buNone/>
             </a:pPr>
-            <a:fld id="{DFF3993D-C3DA-4955-BFC0-107928E0583F}" type="slidenum">
+            <a:fld id="{65E9DE33-964A-445A-AAB1-C6CAB891878D}" type="slidenum">
               <a:rPr b="0" lang="en-US" sz="900" spc="-1" strike="noStrike">
                 <a:solidFill>
                   <a:schemeClr val="dk1">
@@ -5688,7 +6720,7 @@
               </a:lnSpc>
               <a:buNone/>
             </a:pPr>
-            <a:fld id="{52896D93-47E4-4BFE-84DD-1BADB664F538}" type="slidenum">
+            <a:fld id="{BEA9B491-9B25-428B-88D0-17BAD96F31A0}" type="slidenum">
               <a:rPr b="0" lang="en-US" sz="900" spc="-1" strike="noStrike">
                 <a:solidFill>
                   <a:schemeClr val="dk1">
@@ -6152,7 +7184,7 @@
               </a:lnSpc>
               <a:buNone/>
             </a:pPr>
-            <a:fld id="{8071CC4C-EDEC-43EF-9FCA-1C9D7DE20D7F}" type="slidenum">
+            <a:fld id="{6073AD04-FC4D-4B0B-AEEA-6567C56F77E7}" type="slidenum">
               <a:rPr b="0" lang="en-US" sz="900" spc="-1" strike="noStrike">
                 <a:solidFill>
                   <a:schemeClr val="dk1">
@@ -6497,7 +7529,7 @@
               </a:lnSpc>
               <a:buNone/>
             </a:pPr>
-            <a:fld id="{232DF61D-8499-4EF4-8FD0-9C1C37624E65}" type="slidenum">
+            <a:fld id="{5EDA46ED-786C-4ECB-94F4-F47DC4A3AC5F}" type="slidenum">
               <a:rPr b="0" lang="en-US" sz="900" spc="-1" strike="noStrike">
                 <a:solidFill>
                   <a:schemeClr val="dk1">
@@ -7140,7 +8172,7 @@
               </a:lnSpc>
               <a:buNone/>
             </a:pPr>
-            <a:fld id="{7B6A3EA8-56BA-4614-83E2-027D96D8471C}" type="slidenum">
+            <a:fld id="{25EED879-E982-428D-84AE-F933E3064224}" type="slidenum">
               <a:rPr b="0" lang="en-US" sz="900" spc="-1" strike="noStrike">
                 <a:solidFill>
                   <a:schemeClr val="dk1">
@@ -7234,25 +8266,7 @@
                 </a:solidFill>
                 <a:latin typeface="Calibri"/>
               </a:rPr>
-              <a:t>Click to edit </a:t>
-            </a:r>
-            <a:r>
-              <a:rPr b="0" lang="en-US" sz="3300" spc="-1" strike="noStrike">
-                <a:solidFill>
-                  <a:schemeClr val="dk1"/>
-                </a:solidFill>
-                <a:latin typeface="Calibri"/>
-              </a:rPr>
-              <a:t>Master title </a:t>
-            </a:r>
-            <a:r>
-              <a:rPr b="0" lang="en-US" sz="3300" spc="-1" strike="noStrike">
-                <a:solidFill>
-                  <a:schemeClr val="dk1"/>
-                </a:solidFill>
-                <a:latin typeface="Calibri"/>
-              </a:rPr>
-              <a:t>style</a:t>
+              <a:t>Click to edit Master title style</a:t>
             </a:r>
             <a:endParaRPr b="0" lang="en-US" sz="3300" spc="-1" strike="noStrike">
               <a:solidFill>
@@ -7917,7 +8931,7 @@
               </a:lnSpc>
               <a:buNone/>
             </a:pPr>
-            <a:fld id="{FACB7505-3B8C-4A27-80B0-9CBD3D81E6B4}" type="slidenum">
+            <a:fld id="{01EF0C0D-E210-4337-BB4F-800418F26E82}" type="slidenum">
               <a:rPr b="0" lang="en-US" sz="900" spc="-1" strike="noStrike">
                 <a:solidFill>
                   <a:schemeClr val="dk1">
@@ -8011,25 +9025,7 @@
                 </a:solidFill>
                 <a:latin typeface="Calibri"/>
               </a:rPr>
-              <a:t>Click to edit </a:t>
-            </a:r>
-            <a:r>
-              <a:rPr b="0" lang="en-US" sz="3300" spc="-1" strike="noStrike">
-                <a:solidFill>
-                  <a:schemeClr val="dk1"/>
-                </a:solidFill>
-                <a:latin typeface="Calibri"/>
-              </a:rPr>
-              <a:t>Master title </a:t>
-            </a:r>
-            <a:r>
-              <a:rPr b="0" lang="en-US" sz="3300" spc="-1" strike="noStrike">
-                <a:solidFill>
-                  <a:schemeClr val="dk1"/>
-                </a:solidFill>
-                <a:latin typeface="Calibri"/>
-              </a:rPr>
-              <a:t>style</a:t>
+              <a:t>Click to edit Master title style</a:t>
             </a:r>
             <a:endParaRPr b="0" lang="en-US" sz="3300" spc="-1" strike="noStrike">
               <a:solidFill>
@@ -8220,7 +9216,7 @@
               </a:lnSpc>
               <a:buNone/>
             </a:pPr>
-            <a:fld id="{465F9593-1B96-4D85-B1FD-9A0C076410AF}" type="slidenum">
+            <a:fld id="{AE29C971-3EED-4B75-8EA0-2FC0BA626ED3}" type="slidenum">
               <a:rPr b="0" lang="en-US" sz="900" spc="-1" strike="noStrike">
                 <a:solidFill>
                   <a:schemeClr val="dk1">
@@ -8453,7 +9449,7 @@
               </a:lnSpc>
               <a:buNone/>
             </a:pPr>
-            <a:fld id="{66C23493-323F-4359-9109-07104FE8A042}" type="slidenum">
+            <a:fld id="{FEF2E7C5-2A35-40D2-81E4-84B6FFE86618}" type="slidenum">
               <a:rPr b="0" lang="en-US" sz="900" spc="-1" strike="noStrike">
                 <a:solidFill>
                   <a:schemeClr val="dk1">
@@ -9759,7 +10755,7 @@
                 </a:solidFill>
                 <a:latin typeface="Calibri"/>
               </a:rPr>
-              <a:t>Errors in features</a:t>
+              <a:t>Noise</a:t>
             </a:r>
             <a:endParaRPr b="0" lang="en-US" sz="3300" spc="-1" strike="noStrike">
               <a:solidFill>
@@ -9770,218 +10766,29 @@
           </a:p>
         </p:txBody>
       </p:sp>
-      <p:sp>
-        <p:nvSpPr>
-          <p:cNvPr id="96" name="PlaceHolder 2"/>
-          <p:cNvSpPr>
-            <a:spLocks noGrp="1"/>
-          </p:cNvSpPr>
-          <p:nvPr>
-            <p:ph/>
-          </p:nvPr>
-        </p:nvSpPr>
+      <p:pic>
+        <p:nvPicPr>
+          <p:cNvPr id="96" name="Picture 1" descr="img/noise.png"/>
+          <p:cNvPicPr/>
+          <p:nvPr/>
+        </p:nvPicPr>
+        <p:blipFill>
+          <a:blip r:embed="rId1"/>
+          <a:stretch/>
+        </p:blipFill>
         <p:spPr>
           <a:xfrm>
-            <a:off x="457200" y="1200240"/>
-            <a:ext cx="8229240" cy="3394080"/>
+            <a:off x="635040" y="1193760"/>
+            <a:ext cx="7873560" cy="3390480"/>
           </a:xfrm>
           <a:prstGeom prst="rect">
             <a:avLst/>
           </a:prstGeom>
-          <a:noFill/>
-          <a:ln w="0">
+          <a:ln w="9525">
             <a:noFill/>
           </a:ln>
         </p:spPr>
-        <p:txBody>
-          <a:bodyPr lIns="91440" rIns="91440" tIns="45720" bIns="45720" anchor="t">
-            <a:normAutofit/>
-          </a:bodyPr>
-          <a:p>
-            <a:pPr marL="343080" indent="-343080" defTabSz="343080">
-              <a:lnSpc>
-                <a:spcPct val="100000"/>
-              </a:lnSpc>
-              <a:spcBef>
-                <a:spcPts val="479"/>
-              </a:spcBef>
-              <a:buClr>
-                <a:srgbClr val="000000"/>
-              </a:buClr>
-              <a:buFont typeface="Arial"/>
-              <a:buChar char="•"/>
-            </a:pPr>
-            <a:r>
-              <a:rPr b="0" lang="en-US" sz="2400" spc="-1" strike="noStrike">
-                <a:solidFill>
-                  <a:schemeClr val="dk1"/>
-                </a:solidFill>
-                <a:latin typeface="Calibri"/>
-              </a:rPr>
-              <a:t>Sensor artefacts: a heart rate of 300 bpm is a detached lead, not tachycardia</a:t>
-            </a:r>
-            <a:endParaRPr b="0" lang="en-US" sz="2400" spc="-1" strike="noStrike">
-              <a:solidFill>
-                <a:schemeClr val="dk1"/>
-              </a:solidFill>
-              <a:latin typeface="Calibri"/>
-            </a:endParaRPr>
-          </a:p>
-          <a:p>
-            <a:pPr marL="343080" indent="-343080" defTabSz="343080">
-              <a:lnSpc>
-                <a:spcPct val="100000"/>
-              </a:lnSpc>
-              <a:spcBef>
-                <a:spcPts val="479"/>
-              </a:spcBef>
-              <a:buClr>
-                <a:srgbClr val="000000"/>
-              </a:buClr>
-              <a:buFont typeface="Arial"/>
-              <a:buChar char="•"/>
-            </a:pPr>
-            <a:r>
-              <a:rPr b="0" lang="en-US" sz="2400" spc="-1" strike="noStrike">
-                <a:solidFill>
-                  <a:schemeClr val="dk1"/>
-                </a:solidFill>
-                <a:latin typeface="Calibri"/>
-              </a:rPr>
-              <a:t>Unit chaos: weight in kg </a:t>
-            </a:r>
-            <a:r>
-              <a:rPr b="0" i="1" lang="en-US" sz="2400" spc="-1" strike="noStrike">
-                <a:solidFill>
-                  <a:schemeClr val="dk1"/>
-                </a:solidFill>
-                <a:latin typeface="Calibri"/>
-              </a:rPr>
-              <a:t>and</a:t>
-            </a:r>
-            <a:r>
-              <a:rPr b="0" lang="en-US" sz="2400" spc="-1" strike="noStrike">
-                <a:solidFill>
-                  <a:schemeClr val="dk1"/>
-                </a:solidFill>
-                <a:latin typeface="Calibri"/>
-              </a:rPr>
-              <a:t> lb in the same column; glucose in mg/dL </a:t>
-            </a:r>
-            <a:r>
-              <a:rPr b="0" i="1" lang="en-US" sz="2400" spc="-1" strike="noStrike">
-                <a:solidFill>
-                  <a:schemeClr val="dk1"/>
-                </a:solidFill>
-                <a:latin typeface="Calibri"/>
-              </a:rPr>
-              <a:t>and</a:t>
-            </a:r>
-            <a:r>
-              <a:rPr b="0" lang="en-US" sz="2400" spc="-1" strike="noStrike">
-                <a:solidFill>
-                  <a:schemeClr val="dk1"/>
-                </a:solidFill>
-                <a:latin typeface="Calibri"/>
-              </a:rPr>
-              <a:t> mmol/L</a:t>
-            </a:r>
-            <a:endParaRPr b="0" lang="en-US" sz="2400" spc="-1" strike="noStrike">
-              <a:solidFill>
-                <a:schemeClr val="dk1"/>
-              </a:solidFill>
-              <a:latin typeface="Calibri"/>
-            </a:endParaRPr>
-          </a:p>
-          <a:p>
-            <a:pPr marL="343080" indent="-343080" defTabSz="343080">
-              <a:lnSpc>
-                <a:spcPct val="100000"/>
-              </a:lnSpc>
-              <a:spcBef>
-                <a:spcPts val="479"/>
-              </a:spcBef>
-              <a:buClr>
-                <a:srgbClr val="000000"/>
-              </a:buClr>
-              <a:buFont typeface="Arial"/>
-              <a:buChar char="•"/>
-            </a:pPr>
-            <a:r>
-              <a:rPr b="0" lang="en-US" sz="2400" spc="-1" strike="noStrike">
-                <a:solidFill>
-                  <a:schemeClr val="dk1"/>
-                </a:solidFill>
-                <a:latin typeface="Calibri"/>
-              </a:rPr>
-              <a:t>Copy-forward: the same “current” value duplicated across days of notes</a:t>
-            </a:r>
-            <a:endParaRPr b="0" lang="en-US" sz="2400" spc="-1" strike="noStrike">
-              <a:solidFill>
-                <a:schemeClr val="dk1"/>
-              </a:solidFill>
-              <a:latin typeface="Calibri"/>
-            </a:endParaRPr>
-          </a:p>
-          <a:p>
-            <a:pPr marL="343080" indent="-343080" defTabSz="343080">
-              <a:lnSpc>
-                <a:spcPct val="100000"/>
-              </a:lnSpc>
-              <a:spcBef>
-                <a:spcPts val="479"/>
-              </a:spcBef>
-              <a:buClr>
-                <a:srgbClr val="000000"/>
-              </a:buClr>
-              <a:buFont typeface="Arial"/>
-              <a:buChar char="•"/>
-            </a:pPr>
-            <a:r>
-              <a:rPr b="0" lang="en-US" sz="2400" spc="-1" strike="noStrike">
-                <a:solidFill>
-                  <a:schemeClr val="dk1"/>
-                </a:solidFill>
-                <a:latin typeface="Calibri"/>
-              </a:rPr>
-              <a:t>Timestamps: charted at the time of </a:t>
-            </a:r>
-            <a:r>
-              <a:rPr b="0" i="1" lang="en-US" sz="2400" spc="-1" strike="noStrike">
-                <a:solidFill>
-                  <a:schemeClr val="dk1"/>
-                </a:solidFill>
-                <a:latin typeface="Calibri"/>
-              </a:rPr>
-              <a:t>entry</a:t>
-            </a:r>
-            <a:r>
-              <a:rPr b="0" lang="en-US" sz="2400" spc="-1" strike="noStrike">
-                <a:solidFill>
-                  <a:schemeClr val="dk1"/>
-                </a:solidFill>
-                <a:latin typeface="Calibri"/>
-              </a:rPr>
-              <a:t>, not the time of </a:t>
-            </a:r>
-            <a:r>
-              <a:rPr b="0" i="1" lang="en-US" sz="2400" spc="-1" strike="noStrike">
-                <a:solidFill>
-                  <a:schemeClr val="dk1"/>
-                </a:solidFill>
-                <a:latin typeface="Calibri"/>
-              </a:rPr>
-              <a:t>measurement</a:t>
-            </a:r>
-            <a:endParaRPr b="0" lang="en-US" sz="2400" spc="-1" strike="noStrike">
-              <a:solidFill>
-                <a:schemeClr val="dk1"/>
-              </a:solidFill>
-              <a:latin typeface="Calibri"/>
-            </a:endParaRPr>
-          </a:p>
-        </p:txBody>
-      </p:sp>
+      </p:pic>
     </p:spTree>
   </p:cSld>
   <mc:AlternateContent>
@@ -10056,6 +10863,779 @@
                 </a:solidFill>
                 <a:latin typeface="Calibri"/>
               </a:rPr>
+              <a:t>Errors in features</a:t>
+            </a:r>
+            <a:endParaRPr b="0" lang="en-US" sz="3300" spc="-1" strike="noStrike">
+              <a:solidFill>
+                <a:schemeClr val="dk1"/>
+              </a:solidFill>
+              <a:latin typeface="Calibri"/>
+            </a:endParaRPr>
+          </a:p>
+        </p:txBody>
+      </p:sp>
+      <p:sp>
+        <p:nvSpPr>
+          <p:cNvPr id="98" name="PlaceHolder 2"/>
+          <p:cNvSpPr>
+            <a:spLocks noGrp="1"/>
+          </p:cNvSpPr>
+          <p:nvPr>
+            <p:ph/>
+          </p:nvPr>
+        </p:nvSpPr>
+        <p:spPr>
+          <a:xfrm>
+            <a:off x="457200" y="1200240"/>
+            <a:ext cx="8229240" cy="3394080"/>
+          </a:xfrm>
+          <a:prstGeom prst="rect">
+            <a:avLst/>
+          </a:prstGeom>
+          <a:noFill/>
+          <a:ln w="0">
+            <a:noFill/>
+          </a:ln>
+        </p:spPr>
+        <p:txBody>
+          <a:bodyPr lIns="91440" rIns="91440" tIns="45720" bIns="45720" anchor="t">
+            <a:normAutofit/>
+          </a:bodyPr>
+          <a:p>
+            <a:pPr marL="343080" indent="-343080" defTabSz="343080">
+              <a:lnSpc>
+                <a:spcPct val="100000"/>
+              </a:lnSpc>
+              <a:spcBef>
+                <a:spcPts val="479"/>
+              </a:spcBef>
+              <a:buClr>
+                <a:srgbClr val="000000"/>
+              </a:buClr>
+              <a:buFont typeface="Arial"/>
+              <a:buChar char="•"/>
+            </a:pPr>
+            <a:r>
+              <a:rPr b="0" lang="en-US" sz="2400" spc="-1" strike="noStrike">
+                <a:solidFill>
+                  <a:schemeClr val="dk1"/>
+                </a:solidFill>
+                <a:latin typeface="Calibri"/>
+              </a:rPr>
+              <a:t>Sensor artefacts: a heart rate of 300 bpm is a detached lead, not tachycardia</a:t>
+            </a:r>
+            <a:endParaRPr b="0" lang="en-US" sz="2400" spc="-1" strike="noStrike">
+              <a:solidFill>
+                <a:schemeClr val="dk1"/>
+              </a:solidFill>
+              <a:latin typeface="Calibri"/>
+            </a:endParaRPr>
+          </a:p>
+          <a:p>
+            <a:pPr marL="343080" indent="-343080" defTabSz="343080">
+              <a:lnSpc>
+                <a:spcPct val="100000"/>
+              </a:lnSpc>
+              <a:spcBef>
+                <a:spcPts val="479"/>
+              </a:spcBef>
+              <a:buClr>
+                <a:srgbClr val="000000"/>
+              </a:buClr>
+              <a:buFont typeface="Arial"/>
+              <a:buChar char="•"/>
+            </a:pPr>
+            <a:r>
+              <a:rPr b="0" lang="en-US" sz="2400" spc="-1" strike="noStrike">
+                <a:solidFill>
+                  <a:schemeClr val="dk1"/>
+                </a:solidFill>
+                <a:latin typeface="Calibri"/>
+              </a:rPr>
+              <a:t>Unit chaos: weight in kg </a:t>
+            </a:r>
+            <a:r>
+              <a:rPr b="0" i="1" lang="en-US" sz="2400" spc="-1" strike="noStrike">
+                <a:solidFill>
+                  <a:schemeClr val="dk1"/>
+                </a:solidFill>
+                <a:latin typeface="Calibri"/>
+              </a:rPr>
+              <a:t>and</a:t>
+            </a:r>
+            <a:r>
+              <a:rPr b="0" lang="en-US" sz="2400" spc="-1" strike="noStrike">
+                <a:solidFill>
+                  <a:schemeClr val="dk1"/>
+                </a:solidFill>
+                <a:latin typeface="Calibri"/>
+              </a:rPr>
+              <a:t> lb in the same column; glucose in mg/dL </a:t>
+            </a:r>
+            <a:r>
+              <a:rPr b="0" i="1" lang="en-US" sz="2400" spc="-1" strike="noStrike">
+                <a:solidFill>
+                  <a:schemeClr val="dk1"/>
+                </a:solidFill>
+                <a:latin typeface="Calibri"/>
+              </a:rPr>
+              <a:t>and</a:t>
+            </a:r>
+            <a:r>
+              <a:rPr b="0" lang="en-US" sz="2400" spc="-1" strike="noStrike">
+                <a:solidFill>
+                  <a:schemeClr val="dk1"/>
+                </a:solidFill>
+                <a:latin typeface="Calibri"/>
+              </a:rPr>
+              <a:t> mmol/L</a:t>
+            </a:r>
+            <a:endParaRPr b="0" lang="en-US" sz="2400" spc="-1" strike="noStrike">
+              <a:solidFill>
+                <a:schemeClr val="dk1"/>
+              </a:solidFill>
+              <a:latin typeface="Calibri"/>
+            </a:endParaRPr>
+          </a:p>
+          <a:p>
+            <a:pPr marL="343080" indent="-343080" defTabSz="343080">
+              <a:lnSpc>
+                <a:spcPct val="100000"/>
+              </a:lnSpc>
+              <a:spcBef>
+                <a:spcPts val="479"/>
+              </a:spcBef>
+              <a:buClr>
+                <a:srgbClr val="000000"/>
+              </a:buClr>
+              <a:buFont typeface="Arial"/>
+              <a:buChar char="•"/>
+            </a:pPr>
+            <a:r>
+              <a:rPr b="0" lang="en-US" sz="2400" spc="-1" strike="noStrike">
+                <a:solidFill>
+                  <a:schemeClr val="dk1"/>
+                </a:solidFill>
+                <a:latin typeface="Calibri"/>
+              </a:rPr>
+              <a:t>Copy-forward: the same “current” value duplicated across days of notes</a:t>
+            </a:r>
+            <a:endParaRPr b="0" lang="en-US" sz="2400" spc="-1" strike="noStrike">
+              <a:solidFill>
+                <a:schemeClr val="dk1"/>
+              </a:solidFill>
+              <a:latin typeface="Calibri"/>
+            </a:endParaRPr>
+          </a:p>
+          <a:p>
+            <a:pPr marL="343080" indent="-343080" defTabSz="343080">
+              <a:lnSpc>
+                <a:spcPct val="100000"/>
+              </a:lnSpc>
+              <a:spcBef>
+                <a:spcPts val="479"/>
+              </a:spcBef>
+              <a:buClr>
+                <a:srgbClr val="000000"/>
+              </a:buClr>
+              <a:buFont typeface="Arial"/>
+              <a:buChar char="•"/>
+            </a:pPr>
+            <a:r>
+              <a:rPr b="0" lang="en-US" sz="2400" spc="-1" strike="noStrike">
+                <a:solidFill>
+                  <a:schemeClr val="dk1"/>
+                </a:solidFill>
+                <a:latin typeface="Calibri"/>
+              </a:rPr>
+              <a:t>Timestamps: charted at the time of </a:t>
+            </a:r>
+            <a:r>
+              <a:rPr b="0" i="1" lang="en-US" sz="2400" spc="-1" strike="noStrike">
+                <a:solidFill>
+                  <a:schemeClr val="dk1"/>
+                </a:solidFill>
+                <a:latin typeface="Calibri"/>
+              </a:rPr>
+              <a:t>entry</a:t>
+            </a:r>
+            <a:r>
+              <a:rPr b="0" lang="en-US" sz="2400" spc="-1" strike="noStrike">
+                <a:solidFill>
+                  <a:schemeClr val="dk1"/>
+                </a:solidFill>
+                <a:latin typeface="Calibri"/>
+              </a:rPr>
+              <a:t>, not the time of </a:t>
+            </a:r>
+            <a:r>
+              <a:rPr b="0" i="1" lang="en-US" sz="2400" spc="-1" strike="noStrike">
+                <a:solidFill>
+                  <a:schemeClr val="dk1"/>
+                </a:solidFill>
+                <a:latin typeface="Calibri"/>
+              </a:rPr>
+              <a:t>measurement</a:t>
+            </a:r>
+            <a:endParaRPr b="0" lang="en-US" sz="2400" spc="-1" strike="noStrike">
+              <a:solidFill>
+                <a:schemeClr val="dk1"/>
+              </a:solidFill>
+              <a:latin typeface="Calibri"/>
+            </a:endParaRPr>
+          </a:p>
+        </p:txBody>
+      </p:sp>
+    </p:spTree>
+  </p:cSld>
+  <mc:AlternateContent>
+    <mc:Choice Requires="p14">
+      <p:transition spd="slow" p14:dur="2000"/>
+    </mc:Choice>
+    <mc:Fallback>
+      <p:transition spd="slow"/>
+    </mc:Fallback>
+  </mc:AlternateContent>
+</p:sld>
+</file>
+
+<file path=ppt/slides/slide15.xml><?xml version="1.0" encoding="utf-8"?>
+<p:sld xmlns:a="http://schemas.openxmlformats.org/drawingml/2006/main" xmlns:p="http://schemas.openxmlformats.org/presentationml/2006/main" xmlns:r="http://schemas.openxmlformats.org/officeDocument/2006/relationships" xmlns:p14="http://schemas.microsoft.com/office/powerpoint/2010/main" xmlns:p15="http://schemas.microsoft.com/office/powerpoint/2012/main" xmlns:mc="http://schemas.openxmlformats.org/markup-compatibility/2006">
+  <p:cSld>
+    <p:spTree>
+      <p:nvGrpSpPr>
+        <p:cNvPr id="1" name=""/>
+        <p:cNvGrpSpPr/>
+        <p:nvPr/>
+      </p:nvGrpSpPr>
+      <p:grpSpPr>
+        <a:xfrm>
+          <a:off x="0" y="0"/>
+          <a:ext cx="0" cy="0"/>
+          <a:chOff x="0" y="0"/>
+          <a:chExt cx="0" cy="0"/>
+        </a:xfrm>
+      </p:grpSpPr>
+      <p:sp>
+        <p:nvSpPr>
+          <p:cNvPr id="99" name="PlaceHolder 1"/>
+          <p:cNvSpPr>
+            <a:spLocks noGrp="1"/>
+          </p:cNvSpPr>
+          <p:nvPr>
+            <p:ph type="title"/>
+          </p:nvPr>
+        </p:nvSpPr>
+        <p:spPr>
+          <a:xfrm>
+            <a:off x="457200" y="205920"/>
+            <a:ext cx="8229240" cy="856800"/>
+          </a:xfrm>
+          <a:prstGeom prst="rect">
+            <a:avLst/>
+          </a:prstGeom>
+          <a:noFill/>
+          <a:ln w="0">
+            <a:noFill/>
+          </a:ln>
+        </p:spPr>
+        <p:txBody>
+          <a:bodyPr lIns="91440" rIns="91440" tIns="45720" bIns="45720" anchor="ctr">
+            <a:normAutofit/>
+          </a:bodyPr>
+          <a:p>
+            <a:pPr indent="0" algn="ctr" defTabSz="343080">
+              <a:lnSpc>
+                <a:spcPct val="100000"/>
+              </a:lnSpc>
+              <a:buNone/>
+              <a:tabLst>
+                <a:tab algn="l" pos="0"/>
+              </a:tabLst>
+            </a:pPr>
+            <a:r>
+              <a:rPr b="0" lang="en-US" sz="3300" spc="-1" strike="noStrike">
+                <a:solidFill>
+                  <a:schemeClr val="dk1"/>
+                </a:solidFill>
+                <a:latin typeface="Calibri"/>
+              </a:rPr>
+              <a:t>Errors in features: three lines that find them</a:t>
+            </a:r>
+            <a:endParaRPr b="0" lang="en-US" sz="3300" spc="-1" strike="noStrike">
+              <a:solidFill>
+                <a:schemeClr val="dk1"/>
+              </a:solidFill>
+              <a:latin typeface="Calibri"/>
+            </a:endParaRPr>
+          </a:p>
+        </p:txBody>
+      </p:sp>
+      <p:sp>
+        <p:nvSpPr>
+          <p:cNvPr id="100" name="PlaceHolder 2"/>
+          <p:cNvSpPr>
+            <a:spLocks noGrp="1"/>
+          </p:cNvSpPr>
+          <p:nvPr>
+            <p:ph/>
+          </p:nvPr>
+        </p:nvSpPr>
+        <p:spPr>
+          <a:xfrm>
+            <a:off x="457200" y="1200240"/>
+            <a:ext cx="8229240" cy="3394080"/>
+          </a:xfrm>
+          <a:prstGeom prst="rect">
+            <a:avLst/>
+          </a:prstGeom>
+          <a:noFill/>
+          <a:ln w="0">
+            <a:noFill/>
+          </a:ln>
+        </p:spPr>
+        <p:txBody>
+          <a:bodyPr lIns="91440" rIns="91440" tIns="45720" bIns="45720" anchor="t">
+            <a:normAutofit fontScale="87465"/>
+          </a:bodyPr>
+          <a:p>
+            <a:pPr marL="343080" indent="0" defTabSz="343080">
+              <a:lnSpc>
+                <a:spcPct val="100000"/>
+              </a:lnSpc>
+              <a:spcBef>
+                <a:spcPts val="479"/>
+              </a:spcBef>
+              <a:buNone/>
+              <a:tabLst>
+                <a:tab algn="l" pos="0"/>
+              </a:tabLst>
+            </a:pPr>
+            <a:r>
+              <a:rPr b="0" lang="en-US" sz="2400" spc="-1" strike="noStrike">
+                <a:solidFill>
+                  <a:srgbClr val="666666"/>
+                </a:solidFill>
+                <a:latin typeface="Courier New"/>
+              </a:rPr>
+              <a:t>&gt;&gt;&gt;</a:t>
+            </a:r>
+            <a:r>
+              <a:rPr b="0" lang="en-US" sz="2400" spc="-1" strike="noStrike">
+                <a:solidFill>
+                  <a:schemeClr val="dk1"/>
+                </a:solidFill>
+                <a:latin typeface="Courier New"/>
+              </a:rPr>
+              <a:t> vitals.heart_rate.agg([</a:t>
+            </a:r>
+            <a:r>
+              <a:rPr b="0" lang="en-US" sz="2400" spc="-1" strike="noStrike">
+                <a:solidFill>
+                  <a:srgbClr val="4070a0"/>
+                </a:solidFill>
+                <a:latin typeface="Courier New"/>
+              </a:rPr>
+              <a:t>"min"</a:t>
+            </a:r>
+            <a:r>
+              <a:rPr b="0" lang="en-US" sz="2400" spc="-1" strike="noStrike">
+                <a:solidFill>
+                  <a:schemeClr val="dk1"/>
+                </a:solidFill>
+                <a:latin typeface="Courier New"/>
+              </a:rPr>
+              <a:t>, </a:t>
+            </a:r>
+            <a:r>
+              <a:rPr b="0" lang="en-US" sz="2400" spc="-1" strike="noStrike">
+                <a:solidFill>
+                  <a:srgbClr val="4070a0"/>
+                </a:solidFill>
+                <a:latin typeface="Courier New"/>
+              </a:rPr>
+              <a:t>"max"</a:t>
+            </a:r>
+            <a:r>
+              <a:rPr b="0" lang="en-US" sz="2400" spc="-1" strike="noStrike">
+                <a:solidFill>
+                  <a:schemeClr val="dk1"/>
+                </a:solidFill>
+                <a:latin typeface="Courier New"/>
+              </a:rPr>
+              <a:t>])</a:t>
+            </a:r>
+            <a:br>
+              <a:rPr sz="2400"/>
+            </a:br>
+            <a:r>
+              <a:rPr b="0" lang="en-US" sz="2400" spc="-1" strike="noStrike">
+                <a:solidFill>
+                  <a:srgbClr val="008000"/>
+                </a:solidFill>
+                <a:latin typeface="Courier New"/>
+              </a:rPr>
+              <a:t>min</a:t>
+            </a:r>
+            <a:r>
+              <a:rPr b="0" lang="en-US" sz="2400" spc="-1" strike="noStrike">
+                <a:solidFill>
+                  <a:schemeClr val="dk1"/>
+                </a:solidFill>
+                <a:latin typeface="Courier New"/>
+              </a:rPr>
+              <a:t>      </a:t>
+            </a:r>
+            <a:r>
+              <a:rPr b="0" lang="en-US" sz="2400" spc="-1" strike="noStrike">
+                <a:solidFill>
+                  <a:srgbClr val="40a070"/>
+                </a:solidFill>
+                <a:latin typeface="Courier New"/>
+              </a:rPr>
+              <a:t>0.0</a:t>
+            </a:r>
+            <a:br>
+              <a:rPr sz="2400"/>
+            </a:br>
+            <a:r>
+              <a:rPr b="0" lang="en-US" sz="2400" spc="-1" strike="noStrike">
+                <a:solidFill>
+                  <a:srgbClr val="008000"/>
+                </a:solidFill>
+                <a:latin typeface="Courier New"/>
+              </a:rPr>
+              <a:t>max</a:t>
+            </a:r>
+            <a:r>
+              <a:rPr b="0" lang="en-US" sz="2400" spc="-1" strike="noStrike">
+                <a:solidFill>
+                  <a:schemeClr val="dk1"/>
+                </a:solidFill>
+                <a:latin typeface="Courier New"/>
+              </a:rPr>
+              <a:t>    </a:t>
+            </a:r>
+            <a:r>
+              <a:rPr b="0" lang="en-US" sz="2400" spc="-1" strike="noStrike">
+                <a:solidFill>
+                  <a:srgbClr val="40a070"/>
+                </a:solidFill>
+                <a:latin typeface="Courier New"/>
+              </a:rPr>
+              <a:t>300.0</a:t>
+            </a:r>
+            <a:r>
+              <a:rPr b="0" lang="en-US" sz="2400" spc="-1" strike="noStrike">
+                <a:solidFill>
+                  <a:schemeClr val="dk1"/>
+                </a:solidFill>
+                <a:latin typeface="Courier New"/>
+              </a:rPr>
+              <a:t>    </a:t>
+            </a:r>
+            <a:r>
+              <a:rPr b="0" i="1" lang="en-US" sz="2400" spc="-1" strike="noStrike">
+                <a:solidFill>
+                  <a:srgbClr val="60a0b0"/>
+                </a:solidFill>
+                <a:latin typeface="Courier New"/>
+              </a:rPr>
+              <a:t># a detached lead</a:t>
+            </a:r>
+            <a:br>
+              <a:rPr sz="2400"/>
+            </a:br>
+            <a:br>
+              <a:rPr sz="2400"/>
+            </a:br>
+            <a:r>
+              <a:rPr b="0" lang="en-US" sz="2400" spc="-1" strike="noStrike">
+                <a:solidFill>
+                  <a:srgbClr val="666666"/>
+                </a:solidFill>
+                <a:latin typeface="Courier New"/>
+              </a:rPr>
+              <a:t>&gt;&gt;&gt;</a:t>
+            </a:r>
+            <a:r>
+              <a:rPr b="0" lang="en-US" sz="2400" spc="-1" strike="noStrike">
+                <a:solidFill>
+                  <a:schemeClr val="dk1"/>
+                </a:solidFill>
+                <a:latin typeface="Courier New"/>
+              </a:rPr>
+              <a:t> vitals.weight.plot.hist(bins</a:t>
+            </a:r>
+            <a:r>
+              <a:rPr b="0" lang="en-US" sz="2400" spc="-1" strike="noStrike">
+                <a:solidFill>
+                  <a:srgbClr val="666666"/>
+                </a:solidFill>
+                <a:latin typeface="Courier New"/>
+              </a:rPr>
+              <a:t>=</a:t>
+            </a:r>
+            <a:r>
+              <a:rPr b="0" lang="en-US" sz="2400" spc="-1" strike="noStrike">
+                <a:solidFill>
+                  <a:srgbClr val="40a070"/>
+                </a:solidFill>
+                <a:latin typeface="Courier New"/>
+              </a:rPr>
+              <a:t>60</a:t>
+            </a:r>
+            <a:r>
+              <a:rPr b="0" lang="en-US" sz="2400" spc="-1" strike="noStrike">
+                <a:solidFill>
+                  <a:schemeClr val="dk1"/>
+                </a:solidFill>
+                <a:latin typeface="Courier New"/>
+              </a:rPr>
+              <a:t>)</a:t>
+            </a:r>
+            <a:br>
+              <a:rPr sz="2400"/>
+            </a:br>
+            <a:r>
+              <a:rPr b="0" lang="en-US" sz="2400" spc="-1" strike="noStrike">
+                <a:solidFill>
+                  <a:schemeClr val="dk1"/>
+                </a:solidFill>
+                <a:latin typeface="Courier New"/>
+              </a:rPr>
+              <a:t>                </a:t>
+            </a:r>
+            <a:r>
+              <a:rPr b="0" i="1" lang="en-US" sz="2400" spc="-1" strike="noStrike">
+                <a:solidFill>
+                  <a:srgbClr val="60a0b0"/>
+                </a:solidFill>
+                <a:latin typeface="Courier New"/>
+              </a:rPr>
+              <a:t># two humps: kg and lb</a:t>
+            </a:r>
+            <a:br>
+              <a:rPr sz="2400"/>
+            </a:br>
+            <a:br>
+              <a:rPr sz="2400"/>
+            </a:br>
+            <a:r>
+              <a:rPr b="0" lang="en-US" sz="2400" spc="-1" strike="noStrike">
+                <a:solidFill>
+                  <a:srgbClr val="666666"/>
+                </a:solidFill>
+                <a:latin typeface="Courier New"/>
+              </a:rPr>
+              <a:t>&gt;&gt;&gt;</a:t>
+            </a:r>
+            <a:r>
+              <a:rPr b="0" lang="en-US" sz="2400" spc="-1" strike="noStrike">
+                <a:solidFill>
+                  <a:schemeClr val="dk1"/>
+                </a:solidFill>
+                <a:latin typeface="Courier New"/>
+              </a:rPr>
+              <a:t> labs.groupby(</a:t>
+            </a:r>
+            <a:r>
+              <a:rPr b="0" lang="en-US" sz="2400" spc="-1" strike="noStrike">
+                <a:solidFill>
+                  <a:srgbClr val="4070a0"/>
+                </a:solidFill>
+                <a:latin typeface="Courier New"/>
+              </a:rPr>
+              <a:t>"unit"</a:t>
+            </a:r>
+            <a:r>
+              <a:rPr b="0" lang="en-US" sz="2400" spc="-1" strike="noStrike">
+                <a:solidFill>
+                  <a:schemeClr val="dk1"/>
+                </a:solidFill>
+                <a:latin typeface="Courier New"/>
+              </a:rPr>
+              <a:t>).glucose.median()</a:t>
+            </a:r>
+            <a:br>
+              <a:rPr sz="2400"/>
+            </a:br>
+            <a:r>
+              <a:rPr b="0" lang="en-US" sz="2400" spc="-1" strike="noStrike">
+                <a:solidFill>
+                  <a:schemeClr val="dk1"/>
+                </a:solidFill>
+                <a:latin typeface="Courier New"/>
+              </a:rPr>
+              <a:t>mg</a:t>
+            </a:r>
+            <a:r>
+              <a:rPr b="0" lang="en-US" sz="2400" spc="-1" strike="noStrike">
+                <a:solidFill>
+                  <a:srgbClr val="666666"/>
+                </a:solidFill>
+                <a:latin typeface="Courier New"/>
+              </a:rPr>
+              <a:t>/</a:t>
+            </a:r>
+            <a:r>
+              <a:rPr b="0" lang="en-US" sz="2400" spc="-1" strike="noStrike">
+                <a:solidFill>
+                  <a:schemeClr val="dk1"/>
+                </a:solidFill>
+                <a:latin typeface="Courier New"/>
+              </a:rPr>
+              <a:t>dL    </a:t>
+            </a:r>
+            <a:r>
+              <a:rPr b="0" lang="en-US" sz="2400" spc="-1" strike="noStrike">
+                <a:solidFill>
+                  <a:srgbClr val="40a070"/>
+                </a:solidFill>
+                <a:latin typeface="Courier New"/>
+              </a:rPr>
+              <a:t>126.0</a:t>
+            </a:r>
+            <a:br>
+              <a:rPr sz="2400"/>
+            </a:br>
+            <a:r>
+              <a:rPr b="0" lang="en-US" sz="2400" spc="-1" strike="noStrike">
+                <a:solidFill>
+                  <a:schemeClr val="dk1"/>
+                </a:solidFill>
+                <a:latin typeface="Courier New"/>
+              </a:rPr>
+              <a:t>mmol</a:t>
+            </a:r>
+            <a:r>
+              <a:rPr b="0" lang="en-US" sz="2400" spc="-1" strike="noStrike">
+                <a:solidFill>
+                  <a:srgbClr val="666666"/>
+                </a:solidFill>
+                <a:latin typeface="Courier New"/>
+              </a:rPr>
+              <a:t>/</a:t>
+            </a:r>
+            <a:r>
+              <a:rPr b="0" lang="en-US" sz="2400" spc="-1" strike="noStrike">
+                <a:solidFill>
+                  <a:schemeClr val="dk1"/>
+                </a:solidFill>
+                <a:latin typeface="Courier New"/>
+              </a:rPr>
+              <a:t>L     </a:t>
+            </a:r>
+            <a:r>
+              <a:rPr b="0" lang="en-US" sz="2400" spc="-1" strike="noStrike">
+                <a:solidFill>
+                  <a:srgbClr val="40a070"/>
+                </a:solidFill>
+                <a:latin typeface="Courier New"/>
+              </a:rPr>
+              <a:t>7.0</a:t>
+            </a:r>
+            <a:r>
+              <a:rPr b="0" lang="en-US" sz="2400" spc="-1" strike="noStrike">
+                <a:solidFill>
+                  <a:schemeClr val="dk1"/>
+                </a:solidFill>
+                <a:latin typeface="Courier New"/>
+              </a:rPr>
+              <a:t>  </a:t>
+            </a:r>
+            <a:r>
+              <a:rPr b="0" i="1" lang="en-US" sz="2400" spc="-1" strike="noStrike">
+                <a:solidFill>
+                  <a:srgbClr val="60a0b0"/>
+                </a:solidFill>
+                <a:latin typeface="Courier New"/>
+              </a:rPr>
+              <a:t># same test, same patient</a:t>
+            </a:r>
+            <a:endParaRPr b="0" lang="en-US" sz="2400" spc="-1" strike="noStrike">
+              <a:solidFill>
+                <a:schemeClr val="dk1"/>
+              </a:solidFill>
+              <a:latin typeface="Calibri"/>
+            </a:endParaRPr>
+          </a:p>
+        </p:txBody>
+      </p:sp>
+    </p:spTree>
+  </p:cSld>
+  <mc:AlternateContent>
+    <mc:Choice Requires="p14">
+      <p:transition spd="slow" p14:dur="2000"/>
+    </mc:Choice>
+    <mc:Fallback>
+      <p:transition spd="slow"/>
+    </mc:Fallback>
+  </mc:AlternateContent>
+</p:sld>
+</file>
+
+<file path=ppt/slides/slide16.xml><?xml version="1.0" encoding="utf-8"?>
+<p:sld xmlns:a="http://schemas.openxmlformats.org/drawingml/2006/main" xmlns:p="http://schemas.openxmlformats.org/presentationml/2006/main" xmlns:r="http://schemas.openxmlformats.org/officeDocument/2006/relationships" xmlns:p14="http://schemas.microsoft.com/office/powerpoint/2010/main" xmlns:p15="http://schemas.microsoft.com/office/powerpoint/2012/main" xmlns:mc="http://schemas.openxmlformats.org/markup-compatibility/2006">
+  <p:cSld>
+    <p:spTree>
+      <p:nvGrpSpPr>
+        <p:cNvPr id="1" name=""/>
+        <p:cNvGrpSpPr/>
+        <p:nvPr/>
+      </p:nvGrpSpPr>
+      <p:grpSpPr>
+        <a:xfrm>
+          <a:off x="0" y="0"/>
+          <a:ext cx="0" cy="0"/>
+          <a:chOff x="0" y="0"/>
+          <a:chExt cx="0" cy="0"/>
+        </a:xfrm>
+      </p:grpSpPr>
+      <p:sp>
+        <p:nvSpPr>
+          <p:cNvPr id="101" name="PlaceHolder 1"/>
+          <p:cNvSpPr>
+            <a:spLocks noGrp="1"/>
+          </p:cNvSpPr>
+          <p:nvPr>
+            <p:ph type="title"/>
+          </p:nvPr>
+        </p:nvSpPr>
+        <p:spPr>
+          <a:xfrm>
+            <a:off x="457200" y="205920"/>
+            <a:ext cx="8229240" cy="856800"/>
+          </a:xfrm>
+          <a:prstGeom prst="rect">
+            <a:avLst/>
+          </a:prstGeom>
+          <a:noFill/>
+          <a:ln w="0">
+            <a:noFill/>
+          </a:ln>
+        </p:spPr>
+        <p:txBody>
+          <a:bodyPr lIns="91440" rIns="91440" tIns="45720" bIns="45720" anchor="ctr">
+            <a:normAutofit/>
+          </a:bodyPr>
+          <a:p>
+            <a:pPr indent="0" algn="ctr" defTabSz="343080">
+              <a:lnSpc>
+                <a:spcPct val="100000"/>
+              </a:lnSpc>
+              <a:buNone/>
+              <a:tabLst>
+                <a:tab algn="l" pos="0"/>
+              </a:tabLst>
+            </a:pPr>
+            <a:r>
+              <a:rPr b="0" lang="en-US" sz="3300" spc="-1" strike="noStrike">
+                <a:solidFill>
+                  <a:schemeClr val="dk1"/>
+                </a:solidFill>
+                <a:latin typeface="Calibri"/>
+              </a:rPr>
               <a:t>Missingness</a:t>
             </a:r>
             <a:endParaRPr b="0" lang="en-US" sz="3300" spc="-1" strike="noStrike">
@@ -10069,7 +11649,7 @@
       </p:sp>
       <p:graphicFrame>
         <p:nvGraphicFramePr>
-          <p:cNvPr id="98" name="Content Placeholder 5"/>
+          <p:cNvPr id="102" name="Content Placeholder 5"/>
           <p:cNvGraphicFramePr/>
           <p:nvPr/>
         </p:nvGraphicFramePr>
@@ -10866,50 +12446,16 @@
           </a:graphicData>
         </a:graphic>
       </p:graphicFrame>
-    </p:spTree>
-  </p:cSld>
-  <mc:AlternateContent>
-    <mc:Choice Requires="p14">
-      <p:transition spd="slow" p14:dur="2000"/>
-    </mc:Choice>
-    <mc:Fallback>
-      <p:transition spd="slow"/>
-    </mc:Fallback>
-  </mc:AlternateContent>
-</p:sld>
-</file>
-
-<file path=ppt/slides/slide15.xml><?xml version="1.0" encoding="utf-8"?>
-<p:sld xmlns:a="http://schemas.openxmlformats.org/drawingml/2006/main" xmlns:p="http://schemas.openxmlformats.org/presentationml/2006/main" xmlns:r="http://schemas.openxmlformats.org/officeDocument/2006/relationships" xmlns:p14="http://schemas.microsoft.com/office/powerpoint/2010/main" xmlns:p15="http://schemas.microsoft.com/office/powerpoint/2012/main" xmlns:mc="http://schemas.openxmlformats.org/markup-compatibility/2006">
-  <p:cSld>
-    <p:spTree>
-      <p:nvGrpSpPr>
-        <p:cNvPr id="1" name=""/>
-        <p:cNvGrpSpPr/>
-        <p:nvPr/>
-      </p:nvGrpSpPr>
-      <p:grpSpPr>
-        <a:xfrm>
-          <a:off x="0" y="0"/>
-          <a:ext cx="0" cy="0"/>
-          <a:chOff x="0" y="0"/>
-          <a:chExt cx="0" cy="0"/>
-        </a:xfrm>
-      </p:grpSpPr>
       <p:sp>
         <p:nvSpPr>
-          <p:cNvPr id="99" name="PlaceHolder 1"/>
-          <p:cNvSpPr>
-            <a:spLocks noGrp="1"/>
-          </p:cNvSpPr>
-          <p:nvPr>
-            <p:ph/>
-          </p:nvPr>
+          <p:cNvPr id="103" name="Content Placeholder 1"/>
+          <p:cNvSpPr txBox="1"/>
+          <p:nvPr/>
         </p:nvSpPr>
         <p:spPr>
           <a:xfrm>
-            <a:off x="457200" y="1200240"/>
-            <a:ext cx="8229240" cy="3394080"/>
+            <a:off x="457560" y="2743200"/>
+            <a:ext cx="8229240" cy="1851120"/>
           </a:xfrm>
           <a:prstGeom prst="rect">
             <a:avLst/>
@@ -10920,8 +12466,8 @@
           </a:ln>
         </p:spPr>
         <p:txBody>
-          <a:bodyPr lIns="91440" rIns="91440" tIns="45720" bIns="45720" anchor="t">
-            <a:normAutofit/>
+          <a:bodyPr anchor="t">
+            <a:normAutofit fontScale="87465" lnSpcReduction="10000"/>
           </a:bodyPr>
           <a:p>
             <a:pPr marL="343080" indent="-343080" defTabSz="343080">
@@ -11073,270 +12619,6 @@
               <a:t> of a test can predict the outcome better than the test’s value</a:t>
             </a:r>
             <a:endParaRPr b="0" lang="en-US" sz="2400" spc="-1" strike="noStrike">
-              <a:solidFill>
-                <a:schemeClr val="dk1"/>
-              </a:solidFill>
-              <a:latin typeface="Calibri"/>
-            </a:endParaRPr>
-          </a:p>
-        </p:txBody>
-      </p:sp>
-    </p:spTree>
-  </p:cSld>
-  <mc:AlternateContent>
-    <mc:Choice Requires="p14">
-      <p:transition spd="slow" p14:dur="2000"/>
-    </mc:Choice>
-    <mc:Fallback>
-      <p:transition spd="slow"/>
-    </mc:Fallback>
-  </mc:AlternateContent>
-</p:sld>
-</file>
-
-<file path=ppt/slides/slide16.xml><?xml version="1.0" encoding="utf-8"?>
-<p:sld xmlns:a="http://schemas.openxmlformats.org/drawingml/2006/main" xmlns:p="http://schemas.openxmlformats.org/presentationml/2006/main" xmlns:r="http://schemas.openxmlformats.org/officeDocument/2006/relationships" xmlns:p14="http://schemas.microsoft.com/office/powerpoint/2010/main" xmlns:p15="http://schemas.microsoft.com/office/powerpoint/2012/main" xmlns:mc="http://schemas.openxmlformats.org/markup-compatibility/2006">
-  <p:cSld>
-    <p:spTree>
-      <p:nvGrpSpPr>
-        <p:cNvPr id="1" name=""/>
-        <p:cNvGrpSpPr/>
-        <p:nvPr/>
-      </p:nvGrpSpPr>
-      <p:grpSpPr>
-        <a:xfrm>
-          <a:off x="0" y="0"/>
-          <a:ext cx="0" cy="0"/>
-          <a:chOff x="0" y="0"/>
-          <a:chExt cx="0" cy="0"/>
-        </a:xfrm>
-      </p:grpSpPr>
-      <p:sp>
-        <p:nvSpPr>
-          <p:cNvPr id="100" name="PlaceHolder 1"/>
-          <p:cNvSpPr>
-            <a:spLocks noGrp="1"/>
-          </p:cNvSpPr>
-          <p:nvPr>
-            <p:ph type="title"/>
-          </p:nvPr>
-        </p:nvSpPr>
-        <p:spPr>
-          <a:xfrm>
-            <a:off x="457200" y="205920"/>
-            <a:ext cx="8229240" cy="856800"/>
-          </a:xfrm>
-          <a:prstGeom prst="rect">
-            <a:avLst/>
-          </a:prstGeom>
-          <a:noFill/>
-          <a:ln w="0">
-            <a:noFill/>
-          </a:ln>
-        </p:spPr>
-        <p:txBody>
-          <a:bodyPr lIns="91440" rIns="91440" tIns="45720" bIns="45720" anchor="ctr">
-            <a:normAutofit/>
-          </a:bodyPr>
-          <a:p>
-            <a:pPr indent="0" algn="ctr" defTabSz="343080">
-              <a:lnSpc>
-                <a:spcPct val="100000"/>
-              </a:lnSpc>
-              <a:buNone/>
-              <a:tabLst>
-                <a:tab algn="l" pos="0"/>
-              </a:tabLst>
-            </a:pPr>
-            <a:r>
-              <a:rPr b="0" lang="en-US" sz="3300" spc="-1" strike="noStrike">
-                <a:solidFill>
-                  <a:schemeClr val="dk1"/>
-                </a:solidFill>
-                <a:latin typeface="Calibri"/>
-              </a:rPr>
-              <a:t>Class imbalance</a:t>
-            </a:r>
-            <a:endParaRPr b="0" lang="en-US" sz="3300" spc="-1" strike="noStrike">
-              <a:solidFill>
-                <a:schemeClr val="dk1"/>
-              </a:solidFill>
-              <a:latin typeface="Calibri"/>
-            </a:endParaRPr>
-          </a:p>
-        </p:txBody>
-      </p:sp>
-      <p:sp>
-        <p:nvSpPr>
-          <p:cNvPr id="101" name="PlaceHolder 2"/>
-          <p:cNvSpPr>
-            <a:spLocks noGrp="1"/>
-          </p:cNvSpPr>
-          <p:nvPr>
-            <p:ph/>
-          </p:nvPr>
-        </p:nvSpPr>
-        <p:spPr>
-          <a:xfrm>
-            <a:off x="457200" y="1200240"/>
-            <a:ext cx="8229240" cy="3394080"/>
-          </a:xfrm>
-          <a:prstGeom prst="rect">
-            <a:avLst/>
-          </a:prstGeom>
-          <a:noFill/>
-          <a:ln w="0">
-            <a:noFill/>
-          </a:ln>
-        </p:spPr>
-        <p:txBody>
-          <a:bodyPr lIns="91440" rIns="91440" tIns="45720" bIns="45720" anchor="t">
-            <a:normAutofit/>
-          </a:bodyPr>
-          <a:p>
-            <a:pPr marL="343080" indent="-343080" defTabSz="343080">
-              <a:lnSpc>
-                <a:spcPct val="100000"/>
-              </a:lnSpc>
-              <a:spcBef>
-                <a:spcPts val="479"/>
-              </a:spcBef>
-              <a:buClr>
-                <a:srgbClr val="000000"/>
-              </a:buClr>
-              <a:buFont typeface="Arial"/>
-              <a:buChar char="•"/>
-            </a:pPr>
-            <a:r>
-              <a:rPr b="0" lang="en-US" sz="2400" spc="-1" strike="noStrike">
-                <a:solidFill>
-                  <a:schemeClr val="dk1"/>
-                </a:solidFill>
-                <a:latin typeface="Calibri"/>
-              </a:rPr>
-              <a:t>Rare disease screening: 1 in 10 000</a:t>
-            </a:r>
-            <a:endParaRPr b="0" lang="en-US" sz="2400" spc="-1" strike="noStrike">
-              <a:solidFill>
-                <a:schemeClr val="dk1"/>
-              </a:solidFill>
-              <a:latin typeface="Calibri"/>
-            </a:endParaRPr>
-          </a:p>
-          <a:p>
-            <a:pPr marL="343080" indent="0" defTabSz="343080">
-              <a:lnSpc>
-                <a:spcPct val="100000"/>
-              </a:lnSpc>
-              <a:spcBef>
-                <a:spcPts val="420"/>
-              </a:spcBef>
-              <a:buNone/>
-              <a:tabLst>
-                <a:tab algn="l" pos="0"/>
-              </a:tabLst>
-            </a:pPr>
-            <a:r>
-              <a:rPr b="0" lang="en-US" sz="2100" spc="-1" strike="noStrike">
-                <a:solidFill>
-                  <a:schemeClr val="dk1"/>
-                </a:solidFill>
-                <a:latin typeface="Calibri"/>
-              </a:rPr>
-              <a:t>A model that predicts “no” always is 99.99% accurate</a:t>
-            </a:r>
-            <a:endParaRPr b="0" lang="en-US" sz="2100" spc="-1" strike="noStrike">
-              <a:solidFill>
-                <a:schemeClr val="dk1"/>
-              </a:solidFill>
-              <a:latin typeface="Calibri"/>
-            </a:endParaRPr>
-          </a:p>
-          <a:p>
-            <a:pPr marL="343080" indent="-343080" defTabSz="343080">
-              <a:lnSpc>
-                <a:spcPct val="100000"/>
-              </a:lnSpc>
-              <a:spcBef>
-                <a:spcPts val="479"/>
-              </a:spcBef>
-              <a:buClr>
-                <a:srgbClr val="000000"/>
-              </a:buClr>
-              <a:buFont typeface="Arial"/>
-              <a:buChar char="•"/>
-              <a:tabLst>
-                <a:tab algn="l" pos="0"/>
-              </a:tabLst>
-            </a:pPr>
-            <a:r>
-              <a:rPr b="0" lang="en-US" sz="2400" spc="-1" strike="noStrike">
-                <a:solidFill>
-                  <a:schemeClr val="dk1"/>
-                </a:solidFill>
-                <a:latin typeface="Calibri"/>
-              </a:rPr>
-              <a:t>Blood types are not equally spread on the population</a:t>
-            </a:r>
-            <a:endParaRPr b="0" lang="en-US" sz="2400" spc="-1" strike="noStrike">
-              <a:solidFill>
-                <a:schemeClr val="dk1"/>
-              </a:solidFill>
-              <a:latin typeface="Calibri"/>
-            </a:endParaRPr>
-          </a:p>
-          <a:p>
-            <a:pPr marL="343080" indent="0" defTabSz="343080">
-              <a:lnSpc>
-                <a:spcPct val="100000"/>
-              </a:lnSpc>
-              <a:spcBef>
-                <a:spcPts val="420"/>
-              </a:spcBef>
-              <a:buNone/>
-              <a:tabLst>
-                <a:tab algn="l" pos="0"/>
-              </a:tabLst>
-            </a:pPr>
-            <a:r>
-              <a:rPr b="0" lang="en-US" sz="2100" spc="-1" strike="noStrike">
-                <a:solidFill>
-                  <a:schemeClr val="dk1"/>
-                </a:solidFill>
-                <a:latin typeface="Calibri"/>
-              </a:rPr>
-              <a:t>The imbalance is changing according to the world regions</a:t>
-            </a:r>
-            <a:endParaRPr b="0" lang="en-US" sz="2100" spc="-1" strike="noStrike">
-              <a:solidFill>
-                <a:schemeClr val="dk1"/>
-              </a:solidFill>
-              <a:latin typeface="Calibri"/>
-            </a:endParaRPr>
-          </a:p>
-          <a:p>
-            <a:pPr marL="343080" indent="0" defTabSz="343080">
-              <a:lnSpc>
-                <a:spcPct val="100000"/>
-              </a:lnSpc>
-              <a:spcBef>
-                <a:spcPts val="420"/>
-              </a:spcBef>
-              <a:buNone/>
-              <a:tabLst>
-                <a:tab algn="l" pos="0"/>
-              </a:tabLst>
-            </a:pPr>
-            <a:r>
-              <a:rPr b="0" lang="en-US" sz="2100" spc="-1" strike="noStrike">
-                <a:solidFill>
-                  <a:schemeClr val="dk1"/>
-                </a:solidFill>
-                <a:latin typeface="Calibri"/>
-              </a:rPr>
-              <a:t>=&gt; Can lead to distribution shift</a:t>
-            </a:r>
-            <a:endParaRPr b="0" lang="en-US" sz="2100" spc="-1" strike="noStrike">
               <a:solidFill>
                 <a:schemeClr val="dk1"/>
               </a:solidFill>
@@ -11359,275 +12641,6 @@
 </file>
 
 <file path=ppt/slides/slide17.xml><?xml version="1.0" encoding="utf-8"?>
-<p:sld xmlns:a="http://schemas.openxmlformats.org/drawingml/2006/main" xmlns:p="http://schemas.openxmlformats.org/presentationml/2006/main" xmlns:r="http://schemas.openxmlformats.org/officeDocument/2006/relationships" xmlns:p14="http://schemas.microsoft.com/office/powerpoint/2010/main" xmlns:p15="http://schemas.microsoft.com/office/powerpoint/2012/main" xmlns:mc="http://schemas.openxmlformats.org/markup-compatibility/2006">
-  <p:cSld>
-    <p:spTree>
-      <p:nvGrpSpPr>
-        <p:cNvPr id="1" name=""/>
-        <p:cNvGrpSpPr/>
-        <p:nvPr/>
-      </p:nvGrpSpPr>
-      <p:grpSpPr>
-        <a:xfrm>
-          <a:off x="0" y="0"/>
-          <a:ext cx="0" cy="0"/>
-          <a:chOff x="0" y="0"/>
-          <a:chExt cx="0" cy="0"/>
-        </a:xfrm>
-      </p:grpSpPr>
-      <p:sp>
-        <p:nvSpPr>
-          <p:cNvPr id="102" name="PlaceHolder 1"/>
-          <p:cNvSpPr>
-            <a:spLocks noGrp="1"/>
-          </p:cNvSpPr>
-          <p:nvPr>
-            <p:ph type="title"/>
-          </p:nvPr>
-        </p:nvSpPr>
-        <p:spPr>
-          <a:xfrm>
-            <a:off x="457200" y="205920"/>
-            <a:ext cx="8229240" cy="856800"/>
-          </a:xfrm>
-          <a:prstGeom prst="rect">
-            <a:avLst/>
-          </a:prstGeom>
-          <a:noFill/>
-          <a:ln w="0">
-            <a:noFill/>
-          </a:ln>
-        </p:spPr>
-        <p:txBody>
-          <a:bodyPr lIns="91440" rIns="91440" tIns="45720" bIns="45720" anchor="ctr">
-            <a:normAutofit/>
-          </a:bodyPr>
-          <a:p>
-            <a:pPr indent="0" algn="ctr" defTabSz="343080">
-              <a:lnSpc>
-                <a:spcPct val="100000"/>
-              </a:lnSpc>
-              <a:buNone/>
-              <a:tabLst>
-                <a:tab algn="l" pos="0"/>
-              </a:tabLst>
-            </a:pPr>
-            <a:r>
-              <a:rPr b="0" lang="en-US" sz="3300" spc="-1" strike="noStrike">
-                <a:solidFill>
-                  <a:schemeClr val="dk1"/>
-                </a:solidFill>
-                <a:latin typeface="Calibri"/>
-              </a:rPr>
-              <a:t>Distribution shift</a:t>
-            </a:r>
-            <a:endParaRPr b="0" lang="en-US" sz="3300" spc="-1" strike="noStrike">
-              <a:solidFill>
-                <a:schemeClr val="dk1"/>
-              </a:solidFill>
-              <a:latin typeface="Calibri"/>
-            </a:endParaRPr>
-          </a:p>
-        </p:txBody>
-      </p:sp>
-      <p:sp>
-        <p:nvSpPr>
-          <p:cNvPr id="103" name="PlaceHolder 2"/>
-          <p:cNvSpPr>
-            <a:spLocks noGrp="1"/>
-          </p:cNvSpPr>
-          <p:nvPr>
-            <p:ph/>
-          </p:nvPr>
-        </p:nvSpPr>
-        <p:spPr>
-          <a:xfrm>
-            <a:off x="457200" y="1200240"/>
-            <a:ext cx="8229240" cy="3394080"/>
-          </a:xfrm>
-          <a:prstGeom prst="rect">
-            <a:avLst/>
-          </a:prstGeom>
-          <a:noFill/>
-          <a:ln w="0">
-            <a:noFill/>
-          </a:ln>
-        </p:spPr>
-        <p:txBody>
-          <a:bodyPr lIns="91440" rIns="91440" tIns="45720" bIns="45720" anchor="t">
-            <a:normAutofit/>
-          </a:bodyPr>
-          <a:p>
-            <a:pPr indent="0" defTabSz="343080">
-              <a:lnSpc>
-                <a:spcPct val="100000"/>
-              </a:lnSpc>
-              <a:spcBef>
-                <a:spcPts val="479"/>
-              </a:spcBef>
-              <a:buNone/>
-              <a:tabLst>
-                <a:tab algn="l" pos="0"/>
-              </a:tabLst>
-            </a:pPr>
-            <a:r>
-              <a:rPr b="0" lang="en-US" sz="2400" spc="-1" strike="noStrike">
-                <a:solidFill>
-                  <a:schemeClr val="dk1"/>
-                </a:solidFill>
-                <a:latin typeface="Calibri"/>
-              </a:rPr>
-              <a:t>Your model is trained on one slice of the world, then deployed in another:</a:t>
-            </a:r>
-            <a:endParaRPr b="0" lang="en-US" sz="2400" spc="-1" strike="noStrike">
-              <a:solidFill>
-                <a:schemeClr val="dk1"/>
-              </a:solidFill>
-              <a:latin typeface="Calibri"/>
-            </a:endParaRPr>
-          </a:p>
-          <a:p>
-            <a:pPr marL="343080" indent="-343080" defTabSz="343080">
-              <a:lnSpc>
-                <a:spcPct val="100000"/>
-              </a:lnSpc>
-              <a:spcBef>
-                <a:spcPts val="479"/>
-              </a:spcBef>
-              <a:buClr>
-                <a:srgbClr val="000000"/>
-              </a:buClr>
-              <a:buFont typeface="Arial"/>
-              <a:buChar char="•"/>
-              <a:tabLst>
-                <a:tab algn="l" pos="0"/>
-              </a:tabLst>
-            </a:pPr>
-            <a:r>
-              <a:rPr b="1" lang="en-US" sz="2400" spc="-1" strike="noStrike">
-                <a:solidFill>
-                  <a:schemeClr val="dk1"/>
-                </a:solidFill>
-                <a:latin typeface="Calibri"/>
-              </a:rPr>
-              <a:t>Covariate shift:</a:t>
-            </a:r>
-            <a:r>
-              <a:rPr b="0" lang="en-US" sz="2400" spc="-1" strike="noStrike">
-                <a:solidFill>
-                  <a:schemeClr val="dk1"/>
-                </a:solidFill>
-                <a:latin typeface="Calibri"/>
-              </a:rPr>
-              <a:t> P(X) changes: new hospital, new scanner, new population</a:t>
-            </a:r>
-            <a:endParaRPr b="0" lang="en-US" sz="2400" spc="-1" strike="noStrike">
-              <a:solidFill>
-                <a:schemeClr val="dk1"/>
-              </a:solidFill>
-              <a:latin typeface="Calibri"/>
-            </a:endParaRPr>
-          </a:p>
-          <a:p>
-            <a:pPr marL="343080" indent="-343080" defTabSz="343080">
-              <a:lnSpc>
-                <a:spcPct val="100000"/>
-              </a:lnSpc>
-              <a:spcBef>
-                <a:spcPts val="479"/>
-              </a:spcBef>
-              <a:buClr>
-                <a:srgbClr val="000000"/>
-              </a:buClr>
-              <a:buFont typeface="Arial"/>
-              <a:buChar char="•"/>
-              <a:tabLst>
-                <a:tab algn="l" pos="0"/>
-              </a:tabLst>
-            </a:pPr>
-            <a:r>
-              <a:rPr b="1" lang="en-US" sz="2400" spc="-1" strike="noStrike">
-                <a:solidFill>
-                  <a:schemeClr val="dk1"/>
-                </a:solidFill>
-                <a:latin typeface="Calibri"/>
-              </a:rPr>
-              <a:t>Label shift:</a:t>
-            </a:r>
-            <a:r>
-              <a:rPr b="0" lang="en-US" sz="2400" spc="-1" strike="noStrike">
-                <a:solidFill>
-                  <a:schemeClr val="dk1"/>
-                </a:solidFill>
-                <a:latin typeface="Calibri"/>
-              </a:rPr>
-              <a:t> P(Y) changes: a new variant, a new season</a:t>
-            </a:r>
-            <a:endParaRPr b="0" lang="en-US" sz="2400" spc="-1" strike="noStrike">
-              <a:solidFill>
-                <a:schemeClr val="dk1"/>
-              </a:solidFill>
-              <a:latin typeface="Calibri"/>
-            </a:endParaRPr>
-          </a:p>
-          <a:p>
-            <a:pPr marL="343080" indent="-343080" defTabSz="343080">
-              <a:lnSpc>
-                <a:spcPct val="100000"/>
-              </a:lnSpc>
-              <a:spcBef>
-                <a:spcPts val="479"/>
-              </a:spcBef>
-              <a:buClr>
-                <a:srgbClr val="000000"/>
-              </a:buClr>
-              <a:buFont typeface="Arial"/>
-              <a:buChar char="•"/>
-              <a:tabLst>
-                <a:tab algn="l" pos="0"/>
-              </a:tabLst>
-            </a:pPr>
-            <a:r>
-              <a:rPr b="1" lang="en-US" sz="2400" spc="-1" strike="noStrike">
-                <a:solidFill>
-                  <a:schemeClr val="dk1"/>
-                </a:solidFill>
-                <a:latin typeface="Calibri"/>
-              </a:rPr>
-              <a:t>Concept drift:</a:t>
-            </a:r>
-            <a:r>
-              <a:rPr b="0" lang="en-US" sz="2400" spc="-1" strike="noStrike">
-                <a:solidFill>
-                  <a:schemeClr val="dk1"/>
-                </a:solidFill>
-                <a:latin typeface="Calibri"/>
-              </a:rPr>
-              <a:t> P(Y | X) changes: treatment guidelines are updated</a:t>
-            </a:r>
-            <a:endParaRPr b="0" lang="en-US" sz="2400" spc="-1" strike="noStrike">
-              <a:solidFill>
-                <a:schemeClr val="dk1"/>
-              </a:solidFill>
-              <a:latin typeface="Calibri"/>
-            </a:endParaRPr>
-          </a:p>
-        </p:txBody>
-      </p:sp>
-    </p:spTree>
-  </p:cSld>
-  <mc:AlternateContent>
-    <mc:Choice Requires="p14">
-      <p:transition spd="slow" p14:dur="2000"/>
-    </mc:Choice>
-    <mc:Fallback>
-      <p:transition spd="slow"/>
-    </mc:Fallback>
-  </mc:AlternateContent>
-</p:sld>
-</file>
-
-<file path=ppt/slides/slide18.xml><?xml version="1.0" encoding="utf-8"?>
 <p:sld xmlns:a="http://schemas.openxmlformats.org/drawingml/2006/main" xmlns:p="http://schemas.openxmlformats.org/presentationml/2006/main" xmlns:r="http://schemas.openxmlformats.org/officeDocument/2006/relationships" xmlns:p14="http://schemas.microsoft.com/office/powerpoint/2010/main" xmlns:p15="http://schemas.microsoft.com/office/powerpoint/2012/main" xmlns:mc="http://schemas.openxmlformats.org/markup-compatibility/2006">
   <p:cSld>
     <p:spTree>
@@ -11688,7 +12701,7 @@
                 </a:solidFill>
                 <a:latin typeface="Calibri"/>
               </a:rPr>
-              <a:t>Shortcuts</a:t>
+              <a:t>Missingness</a:t>
             </a:r>
             <a:endParaRPr b="0" lang="en-US" sz="3300" spc="-1" strike="noStrike">
               <a:solidFill>
@@ -11699,244 +12712,29 @@
           </a:p>
         </p:txBody>
       </p:sp>
-      <p:sp>
-        <p:nvSpPr>
-          <p:cNvPr id="105" name="PlaceHolder 2"/>
-          <p:cNvSpPr>
-            <a:spLocks noGrp="1"/>
-          </p:cNvSpPr>
-          <p:nvPr>
-            <p:ph/>
-          </p:nvPr>
-        </p:nvSpPr>
+      <p:pic>
+        <p:nvPicPr>
+          <p:cNvPr id="105" name="Picture 1" descr="img/missingness.png"/>
+          <p:cNvPicPr/>
+          <p:nvPr/>
+        </p:nvPicPr>
+        <p:blipFill>
+          <a:blip r:embed="rId1"/>
+          <a:stretch/>
+        </p:blipFill>
         <p:spPr>
           <a:xfrm>
-            <a:off x="457200" y="1200240"/>
-            <a:ext cx="8229240" cy="3394080"/>
+            <a:off x="774720" y="1600200"/>
+            <a:ext cx="7594200" cy="2984040"/>
           </a:xfrm>
           <a:prstGeom prst="rect">
             <a:avLst/>
           </a:prstGeom>
-          <a:noFill/>
-          <a:ln w="0">
+          <a:ln w="9525">
             <a:noFill/>
           </a:ln>
         </p:spPr>
-        <p:txBody>
-          <a:bodyPr lIns="91440" rIns="91440" tIns="45720" bIns="45720" anchor="t">
-            <a:normAutofit/>
-          </a:bodyPr>
-          <a:p>
-            <a:pPr indent="0" defTabSz="343080">
-              <a:lnSpc>
-                <a:spcPct val="100000"/>
-              </a:lnSpc>
-              <a:spcBef>
-                <a:spcPts val="479"/>
-              </a:spcBef>
-              <a:buNone/>
-              <a:tabLst>
-                <a:tab algn="l" pos="0"/>
-              </a:tabLst>
-            </a:pPr>
-            <a:r>
-              <a:rPr b="0" lang="en-US" sz="2400" spc="-1" strike="noStrike">
-                <a:solidFill>
-                  <a:schemeClr val="dk1"/>
-                </a:solidFill>
-                <a:latin typeface="Calibri"/>
-              </a:rPr>
-              <a:t>Models learn whatever correlates with y in </a:t>
-            </a:r>
-            <a:r>
-              <a:rPr b="0" i="1" lang="en-US" sz="2400" spc="-1" strike="noStrike">
-                <a:solidFill>
-                  <a:schemeClr val="dk1"/>
-                </a:solidFill>
-                <a:latin typeface="Calibri"/>
-              </a:rPr>
-              <a:t>the</a:t>
-            </a:r>
-            <a:r>
-              <a:rPr b="0" lang="en-US" sz="2400" spc="-1" strike="noStrike">
-                <a:solidFill>
-                  <a:schemeClr val="dk1"/>
-                </a:solidFill>
-                <a:latin typeface="Calibri"/>
-              </a:rPr>
-              <a:t> data.</a:t>
-            </a:r>
-            <a:endParaRPr b="0" lang="en-US" sz="2400" spc="-1" strike="noStrike">
-              <a:solidFill>
-                <a:schemeClr val="dk1"/>
-              </a:solidFill>
-              <a:latin typeface="Calibri"/>
-            </a:endParaRPr>
-          </a:p>
-          <a:p>
-            <a:pPr marL="343080" indent="-343080" defTabSz="343080">
-              <a:lnSpc>
-                <a:spcPct val="100000"/>
-              </a:lnSpc>
-              <a:spcBef>
-                <a:spcPts val="479"/>
-              </a:spcBef>
-              <a:buClr>
-                <a:srgbClr val="000000"/>
-              </a:buClr>
-              <a:buFont typeface="Arial"/>
-              <a:buChar char="•"/>
-              <a:tabLst>
-                <a:tab algn="l" pos="0"/>
-              </a:tabLst>
-            </a:pPr>
-            <a:r>
-              <a:rPr b="0" lang="en-US" sz="2400" spc="-1" strike="noStrike">
-                <a:solidFill>
-                  <a:schemeClr val="dk1"/>
-                </a:solidFill>
-                <a:latin typeface="Calibri"/>
-              </a:rPr>
-              <a:t>Pneumonia detectors that learned the </a:t>
-            </a:r>
-            <a:r>
-              <a:rPr b="1" lang="en-US" sz="2400" spc="-1" strike="noStrike">
-                <a:solidFill>
-                  <a:schemeClr val="dk1"/>
-                </a:solidFill>
-                <a:latin typeface="Calibri"/>
-              </a:rPr>
-              <a:t>portable X-ray marker</a:t>
-            </a:r>
-            <a:r>
-              <a:rPr b="0" lang="en-US" sz="2400" spc="-1" strike="noStrike">
-                <a:solidFill>
-                  <a:schemeClr val="dk1"/>
-                </a:solidFill>
-                <a:latin typeface="Calibri"/>
-              </a:rPr>
-              <a:t> (sicker patients get bedside imaging)</a:t>
-            </a:r>
-            <a:endParaRPr b="0" lang="en-US" sz="2400" spc="-1" strike="noStrike">
-              <a:solidFill>
-                <a:schemeClr val="dk1"/>
-              </a:solidFill>
-              <a:latin typeface="Calibri"/>
-            </a:endParaRPr>
-          </a:p>
-          <a:p>
-            <a:pPr marL="343080" indent="-343080" defTabSz="343080">
-              <a:lnSpc>
-                <a:spcPct val="100000"/>
-              </a:lnSpc>
-              <a:spcBef>
-                <a:spcPts val="479"/>
-              </a:spcBef>
-              <a:buClr>
-                <a:srgbClr val="000000"/>
-              </a:buClr>
-              <a:buFont typeface="Arial"/>
-              <a:buChar char="•"/>
-              <a:tabLst>
-                <a:tab algn="l" pos="0"/>
-              </a:tabLst>
-            </a:pPr>
-            <a:r>
-              <a:rPr b="0" lang="en-US" sz="2400" spc="-1" strike="noStrike">
-                <a:solidFill>
-                  <a:schemeClr val="dk1"/>
-                </a:solidFill>
-                <a:latin typeface="Calibri"/>
-              </a:rPr>
-              <a:t>Skin lesion classifiers that learned the </a:t>
-            </a:r>
-            <a:r>
-              <a:rPr b="1" lang="en-US" sz="2400" spc="-1" strike="noStrike">
-                <a:solidFill>
-                  <a:schemeClr val="dk1"/>
-                </a:solidFill>
-                <a:latin typeface="Calibri"/>
-              </a:rPr>
-              <a:t>surgical ruler</a:t>
-            </a:r>
-            <a:r>
-              <a:rPr b="0" lang="en-US" sz="2400" spc="-1" strike="noStrike">
-                <a:solidFill>
-                  <a:schemeClr val="dk1"/>
-                </a:solidFill>
-                <a:latin typeface="Calibri"/>
-              </a:rPr>
-              <a:t> placed next to malignant lesions</a:t>
-            </a:r>
-            <a:endParaRPr b="0" lang="en-US" sz="2400" spc="-1" strike="noStrike">
-              <a:solidFill>
-                <a:schemeClr val="dk1"/>
-              </a:solidFill>
-              <a:latin typeface="Calibri"/>
-            </a:endParaRPr>
-          </a:p>
-          <a:p>
-            <a:pPr marL="343080" indent="-343080" defTabSz="343080">
-              <a:lnSpc>
-                <a:spcPct val="100000"/>
-              </a:lnSpc>
-              <a:spcBef>
-                <a:spcPts val="479"/>
-              </a:spcBef>
-              <a:buClr>
-                <a:srgbClr val="000000"/>
-              </a:buClr>
-              <a:buFont typeface="Arial"/>
-              <a:buChar char="•"/>
-              <a:tabLst>
-                <a:tab algn="l" pos="0"/>
-              </a:tabLst>
-            </a:pPr>
-            <a:r>
-              <a:rPr b="0" lang="en-US" sz="2400" spc="-1" strike="noStrike">
-                <a:solidFill>
-                  <a:schemeClr val="dk1"/>
-                </a:solidFill>
-                <a:latin typeface="Calibri"/>
-              </a:rPr>
-              <a:t>Portrait to </a:t>
-            </a:r>
-            <a:r>
-              <a:rPr b="1" lang="en-US" sz="2400" spc="-1" strike="noStrike">
-                <a:solidFill>
-                  <a:schemeClr val="dk1"/>
-                </a:solidFill>
-                <a:latin typeface="Calibri"/>
-              </a:rPr>
-              <a:t>age</a:t>
-            </a:r>
-            <a:r>
-              <a:rPr b="0" lang="en-US" sz="2400" spc="-1" strike="noStrike">
-                <a:solidFill>
-                  <a:schemeClr val="dk1"/>
-                </a:solidFill>
-                <a:latin typeface="Calibri"/>
-              </a:rPr>
-              <a:t> models looking at </a:t>
-            </a:r>
-            <a:r>
-              <a:rPr b="1" lang="en-US" sz="2400" spc="-1" strike="noStrike">
-                <a:solidFill>
-                  <a:schemeClr val="dk1"/>
-                </a:solidFill>
-                <a:latin typeface="Calibri"/>
-              </a:rPr>
-              <a:t>ears size</a:t>
-            </a:r>
-            <a:endParaRPr b="0" lang="en-US" sz="2400" spc="-1" strike="noStrike">
-              <a:solidFill>
-                <a:schemeClr val="dk1"/>
-              </a:solidFill>
-              <a:latin typeface="Calibri"/>
-            </a:endParaRPr>
-          </a:p>
-        </p:txBody>
-      </p:sp>
+      </p:pic>
     </p:spTree>
   </p:cSld>
   <mc:AlternateContent>
@@ -11950,7 +12748,7 @@
 </p:sld>
 </file>
 
-<file path=ppt/slides/slide19.xml><?xml version="1.0" encoding="utf-8"?>
+<file path=ppt/slides/slide18.xml><?xml version="1.0" encoding="utf-8"?>
 <p:sld xmlns:a="http://schemas.openxmlformats.org/drawingml/2006/main" xmlns:p="http://schemas.openxmlformats.org/presentationml/2006/main" xmlns:r="http://schemas.openxmlformats.org/officeDocument/2006/relationships" xmlns:p14="http://schemas.microsoft.com/office/powerpoint/2010/main" xmlns:p15="http://schemas.microsoft.com/office/powerpoint/2012/main" xmlns:mc="http://schemas.openxmlformats.org/markup-compatibility/2006">
   <p:cSld>
     <p:spTree>
@@ -12011,7 +12809,7 @@
                 </a:solidFill>
                 <a:latin typeface="Calibri"/>
               </a:rPr>
-              <a:t>Leakage</a:t>
+              <a:t>Class imbalance</a:t>
             </a:r>
             <a:endParaRPr b="0" lang="en-US" sz="3300" spc="-1" strike="noStrike">
               <a:solidFill>
@@ -12050,12 +12848,42 @@
             <a:normAutofit/>
           </a:bodyPr>
           <a:p>
-            <a:pPr indent="0" defTabSz="343080">
+            <a:pPr marL="343080" indent="-343080" defTabSz="343080">
               <a:lnSpc>
                 <a:spcPct val="100000"/>
               </a:lnSpc>
               <a:spcBef>
                 <a:spcPts val="479"/>
+              </a:spcBef>
+              <a:buClr>
+                <a:srgbClr val="000000"/>
+              </a:buClr>
+              <a:buFont typeface="Arial"/>
+              <a:buChar char="•"/>
+            </a:pPr>
+            <a:r>
+              <a:rPr b="0" lang="en-US" sz="2400" spc="-1" strike="noStrike">
+                <a:solidFill>
+                  <a:schemeClr val="dk1"/>
+                </a:solidFill>
+                <a:latin typeface="Calibri"/>
+              </a:rPr>
+              <a:t>Rare disease screening: 1 in 10 000</a:t>
+            </a:r>
+            <a:endParaRPr b="0" lang="en-US" sz="2400" spc="-1" strike="noStrike">
+              <a:solidFill>
+                <a:schemeClr val="dk1"/>
+              </a:solidFill>
+              <a:latin typeface="Calibri"/>
+            </a:endParaRPr>
+          </a:p>
+          <a:p>
+            <a:pPr marL="343080" indent="0" defTabSz="343080">
+              <a:lnSpc>
+                <a:spcPct val="100000"/>
+              </a:lnSpc>
+              <a:spcBef>
+                <a:spcPts val="420"/>
               </a:spcBef>
               <a:buNone/>
               <a:tabLst>
@@ -12063,44 +12891,15 @@
               </a:tabLst>
             </a:pPr>
             <a:r>
-              <a:rPr b="0" lang="en-US" sz="2400" spc="-1" strike="noStrike">
-                <a:solidFill>
-                  <a:schemeClr val="dk1"/>
-                </a:solidFill>
-                <a:latin typeface="Calibri"/>
-              </a:rPr>
-              <a:t>Information at training time that will not exist at prediction time.</a:t>
-            </a:r>
-            <a:endParaRPr b="0" lang="en-US" sz="2400" spc="-1" strike="noStrike">
-              <a:solidFill>
-                <a:schemeClr val="dk1"/>
-              </a:solidFill>
-              <a:latin typeface="Calibri"/>
-            </a:endParaRPr>
-          </a:p>
-          <a:p>
-            <a:pPr indent="0" defTabSz="343080">
-              <a:lnSpc>
-                <a:spcPct val="100000"/>
-              </a:lnSpc>
-              <a:spcBef>
-                <a:spcPts val="479"/>
-              </a:spcBef>
-              <a:buNone/>
-              <a:tabLst>
-                <a:tab algn="l" pos="0"/>
-              </a:tabLst>
-            </a:pPr>
-            <a:r>
-              <a:rPr b="0" lang="en-US" sz="2400" spc="-1" strike="noStrike">
-                <a:solidFill>
-                  <a:schemeClr val="dk1"/>
-                </a:solidFill>
-                <a:latin typeface="Calibri"/>
-              </a:rPr>
-              <a:t>Typically:</a:t>
-            </a:r>
-            <a:endParaRPr b="0" lang="en-US" sz="2400" spc="-1" strike="noStrike">
+              <a:rPr b="0" lang="en-US" sz="2100" spc="-1" strike="noStrike">
+                <a:solidFill>
+                  <a:schemeClr val="dk1"/>
+                </a:solidFill>
+                <a:latin typeface="Calibri"/>
+              </a:rPr>
+              <a:t>A model that predicts “no” always is 99.99% accurate</a:t>
+            </a:r>
+            <a:endParaRPr b="0" lang="en-US" sz="2100" spc="-1" strike="noStrike">
               <a:solidFill>
                 <a:schemeClr val="dk1"/>
               </a:solidFill>
@@ -12131,7 +12930,7 @@
                 </a:solidFill>
                 <a:latin typeface="Calibri"/>
               </a:rPr>
-              <a:t>The same patient in both train and test (e.g. duplicated)</a:t>
+              <a:t>Blood types are not equally spread on the population</a:t>
             </a:r>
             <a:endParaRPr b="0" lang="en-US" sz="2400" spc="-1" strike="noStrike">
               <a:solidFill>
@@ -12141,50 +12940,28 @@
             </a:endParaRPr>
           </a:p>
           <a:p>
-            <a:pPr marL="343080" indent="-343080" defTabSz="343080">
+            <a:pPr marL="343080" indent="0" defTabSz="343080">
               <a:lnSpc>
                 <a:spcPct val="100000"/>
               </a:lnSpc>
               <a:spcBef>
-                <a:spcPts val="479"/>
+                <a:spcPts val="420"/>
               </a:spcBef>
-              <a:buClr>
-                <a:srgbClr val="000000"/>
-              </a:buClr>
-              <a:buFont typeface="Arial"/>
-              <a:buChar char="•"/>
+              <a:buNone/>
               <a:tabLst>
                 <a:tab algn="l" pos="0"/>
               </a:tabLst>
             </a:pPr>
             <a:r>
-              <a:rPr b="0" lang="en-US" sz="2400" spc="-1" strike="noStrike">
-                <a:solidFill>
-                  <a:schemeClr val="dk1"/>
-                </a:solidFill>
-                <a:latin typeface="Calibri"/>
-              </a:rPr>
-              <a:t>Feature that is a deterministic function of the outcome (e.g. </a:t>
-            </a:r>
-            <a:r>
-              <a:rPr b="0" lang="en-US" sz="2400" spc="-1" strike="noStrike">
-                <a:solidFill>
-                  <a:schemeClr val="dk1"/>
-                </a:solidFill>
-                <a:latin typeface="Courier New"/>
-              </a:rPr>
-              <a:t>discharge_location == 'DIED'</a:t>
-            </a:r>
-            <a:r>
-              <a:rPr b="0" lang="en-US" sz="2400" spc="-1" strike="noStrike">
-                <a:solidFill>
-                  <a:schemeClr val="dk1"/>
-                </a:solidFill>
-                <a:latin typeface="Calibri"/>
-              </a:rPr>
-              <a:t>)</a:t>
-            </a:r>
-            <a:endParaRPr b="0" lang="en-US" sz="2400" spc="-1" strike="noStrike">
+              <a:rPr b="0" lang="en-US" sz="2100" spc="-1" strike="noStrike">
+                <a:solidFill>
+                  <a:schemeClr val="dk1"/>
+                </a:solidFill>
+                <a:latin typeface="Calibri"/>
+              </a:rPr>
+              <a:t>The imbalance is changing according to the world regions</a:t>
+            </a:r>
+            <a:endParaRPr b="0" lang="en-US" sz="2100" spc="-1" strike="noStrike">
               <a:solidFill>
                 <a:schemeClr val="dk1"/>
               </a:solidFill>
@@ -12192,32 +12969,28 @@
             </a:endParaRPr>
           </a:p>
           <a:p>
-            <a:pPr marL="343080" indent="-343080" defTabSz="343080">
+            <a:pPr marL="343080" indent="0" defTabSz="343080">
               <a:lnSpc>
                 <a:spcPct val="100000"/>
               </a:lnSpc>
               <a:spcBef>
-                <a:spcPts val="479"/>
+                <a:spcPts val="420"/>
               </a:spcBef>
-              <a:buClr>
-                <a:srgbClr val="000000"/>
-              </a:buClr>
-              <a:buFont typeface="Arial"/>
-              <a:buChar char="•"/>
+              <a:buNone/>
               <a:tabLst>
                 <a:tab algn="l" pos="0"/>
               </a:tabLst>
             </a:pPr>
             <a:r>
-              <a:rPr b="0" lang="en-US" sz="2400" spc="-1" strike="noStrike">
-                <a:solidFill>
-                  <a:schemeClr val="dk1"/>
-                </a:solidFill>
-                <a:latin typeface="Calibri"/>
-              </a:rPr>
-              <a:t>Bug in the train/test split</a:t>
-            </a:r>
-            <a:endParaRPr b="0" lang="en-US" sz="2400" spc="-1" strike="noStrike">
+              <a:rPr b="0" lang="en-US" sz="2100" spc="-1" strike="noStrike">
+                <a:solidFill>
+                  <a:schemeClr val="dk1"/>
+                </a:solidFill>
+                <a:latin typeface="Calibri"/>
+              </a:rPr>
+              <a:t>=&gt; Can lead to distribution shift</a:t>
+            </a:r>
+            <a:endParaRPr b="0" lang="en-US" sz="2100" spc="-1" strike="noStrike">
               <a:solidFill>
                 <a:schemeClr val="dk1"/>
               </a:solidFill>
@@ -12226,6 +12999,114 @@
           </a:p>
         </p:txBody>
       </p:sp>
+    </p:spTree>
+  </p:cSld>
+  <mc:AlternateContent>
+    <mc:Choice Requires="p14">
+      <p:transition spd="slow" p14:dur="2000"/>
+    </mc:Choice>
+    <mc:Fallback>
+      <p:transition spd="slow"/>
+    </mc:Fallback>
+  </mc:AlternateContent>
+</p:sld>
+</file>
+
+<file path=ppt/slides/slide19.xml><?xml version="1.0" encoding="utf-8"?>
+<p:sld xmlns:a="http://schemas.openxmlformats.org/drawingml/2006/main" xmlns:p="http://schemas.openxmlformats.org/presentationml/2006/main" xmlns:r="http://schemas.openxmlformats.org/officeDocument/2006/relationships" xmlns:p14="http://schemas.microsoft.com/office/powerpoint/2010/main" xmlns:p15="http://schemas.microsoft.com/office/powerpoint/2012/main" xmlns:mc="http://schemas.openxmlformats.org/markup-compatibility/2006">
+  <p:cSld>
+    <p:spTree>
+      <p:nvGrpSpPr>
+        <p:cNvPr id="1" name=""/>
+        <p:cNvGrpSpPr/>
+        <p:nvPr/>
+      </p:nvGrpSpPr>
+      <p:grpSpPr>
+        <a:xfrm>
+          <a:off x="0" y="0"/>
+          <a:ext cx="0" cy="0"/>
+          <a:chOff x="0" y="0"/>
+          <a:chExt cx="0" cy="0"/>
+        </a:xfrm>
+      </p:grpSpPr>
+      <p:sp>
+        <p:nvSpPr>
+          <p:cNvPr id="108" name="PlaceHolder 1"/>
+          <p:cNvSpPr>
+            <a:spLocks noGrp="1"/>
+          </p:cNvSpPr>
+          <p:nvPr>
+            <p:ph type="title"/>
+          </p:nvPr>
+        </p:nvSpPr>
+        <p:spPr>
+          <a:xfrm>
+            <a:off x="457200" y="205920"/>
+            <a:ext cx="8229240" cy="856800"/>
+          </a:xfrm>
+          <a:prstGeom prst="rect">
+            <a:avLst/>
+          </a:prstGeom>
+          <a:noFill/>
+          <a:ln w="0">
+            <a:noFill/>
+          </a:ln>
+        </p:spPr>
+        <p:txBody>
+          <a:bodyPr lIns="91440" rIns="91440" tIns="45720" bIns="45720" anchor="ctr">
+            <a:normAutofit/>
+          </a:bodyPr>
+          <a:p>
+            <a:pPr indent="0" algn="ctr" defTabSz="343080">
+              <a:lnSpc>
+                <a:spcPct val="100000"/>
+              </a:lnSpc>
+              <a:buNone/>
+              <a:tabLst>
+                <a:tab algn="l" pos="0"/>
+              </a:tabLst>
+            </a:pPr>
+            <a:r>
+              <a:rPr b="0" lang="en-US" sz="3300" spc="-1" strike="noStrike">
+                <a:solidFill>
+                  <a:schemeClr val="dk1"/>
+                </a:solidFill>
+                <a:latin typeface="Calibri"/>
+              </a:rPr>
+              <a:t>Class imbalance</a:t>
+            </a:r>
+            <a:endParaRPr b="0" lang="en-US" sz="3300" spc="-1" strike="noStrike">
+              <a:solidFill>
+                <a:schemeClr val="dk1"/>
+              </a:solidFill>
+              <a:latin typeface="Calibri"/>
+            </a:endParaRPr>
+          </a:p>
+        </p:txBody>
+      </p:sp>
+      <p:pic>
+        <p:nvPicPr>
+          <p:cNvPr id="109" name="Picture 1" descr="img/imbalance.png"/>
+          <p:cNvPicPr/>
+          <p:nvPr/>
+        </p:nvPicPr>
+        <p:blipFill>
+          <a:blip r:embed="rId1"/>
+          <a:stretch/>
+        </p:blipFill>
+        <p:spPr>
+          <a:xfrm>
+            <a:off x="520560" y="1193760"/>
+            <a:ext cx="8089560" cy="3390480"/>
+          </a:xfrm>
+          <a:prstGeom prst="rect">
+            <a:avLst/>
+          </a:prstGeom>
+          <a:ln w="9525">
+            <a:noFill/>
+          </a:ln>
+        </p:spPr>
+      </p:pic>
     </p:spTree>
   </p:cSld>
   <mc:AlternateContent>
@@ -12343,7 +13224,7 @@
       </p:grpSpPr>
       <p:sp>
         <p:nvSpPr>
-          <p:cNvPr id="108" name="PlaceHolder 1"/>
+          <p:cNvPr id="110" name="PlaceHolder 1"/>
           <p:cNvSpPr>
             <a:spLocks noGrp="1"/>
           </p:cNvSpPr>
@@ -12353,8 +13234,63 @@
         </p:nvSpPr>
         <p:spPr>
           <a:xfrm>
-            <a:off x="722160" y="3305160"/>
-            <a:ext cx="7772040" cy="1021320"/>
+            <a:off x="457200" y="205920"/>
+            <a:ext cx="8229240" cy="856800"/>
+          </a:xfrm>
+          <a:prstGeom prst="rect">
+            <a:avLst/>
+          </a:prstGeom>
+          <a:noFill/>
+          <a:ln w="0">
+            <a:noFill/>
+          </a:ln>
+        </p:spPr>
+        <p:txBody>
+          <a:bodyPr lIns="91440" rIns="91440" tIns="45720" bIns="45720" anchor="ctr">
+            <a:normAutofit/>
+          </a:bodyPr>
+          <a:p>
+            <a:pPr indent="0" algn="ctr" defTabSz="343080">
+              <a:lnSpc>
+                <a:spcPct val="100000"/>
+              </a:lnSpc>
+              <a:buNone/>
+              <a:tabLst>
+                <a:tab algn="l" pos="0"/>
+              </a:tabLst>
+            </a:pPr>
+            <a:r>
+              <a:rPr b="0" lang="en-US" sz="3300" spc="-1" strike="noStrike">
+                <a:solidFill>
+                  <a:schemeClr val="dk1"/>
+                </a:solidFill>
+                <a:latin typeface="Calibri"/>
+              </a:rPr>
+              <a:t>Distribution shift</a:t>
+            </a:r>
+            <a:endParaRPr b="0" lang="en-US" sz="3300" spc="-1" strike="noStrike">
+              <a:solidFill>
+                <a:schemeClr val="dk1"/>
+              </a:solidFill>
+              <a:latin typeface="Calibri"/>
+            </a:endParaRPr>
+          </a:p>
+        </p:txBody>
+      </p:sp>
+      <p:sp>
+        <p:nvSpPr>
+          <p:cNvPr id="111" name="PlaceHolder 2"/>
+          <p:cNvSpPr>
+            <a:spLocks noGrp="1"/>
+          </p:cNvSpPr>
+          <p:nvPr>
+            <p:ph/>
+          </p:nvPr>
+        </p:nvSpPr>
+        <p:spPr>
+          <a:xfrm>
+            <a:off x="457200" y="1200240"/>
+            <a:ext cx="8229240" cy="3394080"/>
           </a:xfrm>
           <a:prstGeom prst="rect">
             <a:avLst/>
@@ -12373,21 +13309,150 @@
               <a:lnSpc>
                 <a:spcPct val="100000"/>
               </a:lnSpc>
+              <a:spcBef>
+                <a:spcPts val="479"/>
+              </a:spcBef>
               <a:buNone/>
               <a:tabLst>
                 <a:tab algn="l" pos="0"/>
               </a:tabLst>
             </a:pPr>
             <a:r>
-              <a:rPr b="1" lang="en-US" sz="3000" spc="-1" strike="noStrike" cap="all">
-                <a:solidFill>
-                  <a:schemeClr val="dk1"/>
-                </a:solidFill>
-                <a:latin typeface="Calibri"/>
-              </a:rPr>
-              <a:t>2. Data types and example</a:t>
-            </a:r>
-            <a:endParaRPr b="0" lang="en-US" sz="3000" spc="-1" strike="noStrike">
+              <a:rPr b="0" lang="en-US" sz="2400" spc="-1" strike="noStrike">
+                <a:solidFill>
+                  <a:schemeClr val="dk1"/>
+                </a:solidFill>
+                <a:latin typeface="Calibri"/>
+              </a:rPr>
+              <a:t>Your model is trained on one slice of the world, then deployed in another:</a:t>
+            </a:r>
+            <a:endParaRPr b="0" lang="en-US" sz="2400" spc="-1" strike="noStrike">
+              <a:solidFill>
+                <a:schemeClr val="dk1"/>
+              </a:solidFill>
+              <a:latin typeface="Calibri"/>
+            </a:endParaRPr>
+          </a:p>
+          <a:p>
+            <a:pPr marL="343080" indent="-343080" defTabSz="343080">
+              <a:lnSpc>
+                <a:spcPct val="100000"/>
+              </a:lnSpc>
+              <a:spcBef>
+                <a:spcPts val="479"/>
+              </a:spcBef>
+              <a:buClr>
+                <a:srgbClr val="000000"/>
+              </a:buClr>
+              <a:buFont typeface="Arial"/>
+              <a:buChar char="•"/>
+              <a:tabLst>
+                <a:tab algn="l" pos="0"/>
+              </a:tabLst>
+            </a:pPr>
+            <a:r>
+              <a:rPr b="1" lang="en-US" sz="2400" spc="-1" strike="noStrike">
+                <a:solidFill>
+                  <a:schemeClr val="dk1"/>
+                </a:solidFill>
+                <a:latin typeface="Calibri"/>
+              </a:rPr>
+              <a:t>Covariate shift:</a:t>
+            </a:r>
+            <a:r>
+              <a:rPr b="0" lang="en-US" sz="2400" spc="-1" strike="noStrike">
+                <a:solidFill>
+                  <a:schemeClr val="dk1"/>
+                </a:solidFill>
+                <a:latin typeface="Calibri"/>
+              </a:rPr>
+              <a:t> P(X) changes: new hospital, new scanner, new population</a:t>
+            </a:r>
+            <a:endParaRPr b="0" lang="en-US" sz="2400" spc="-1" strike="noStrike">
+              <a:solidFill>
+                <a:schemeClr val="dk1"/>
+              </a:solidFill>
+              <a:latin typeface="Calibri"/>
+            </a:endParaRPr>
+          </a:p>
+          <a:p>
+            <a:pPr marL="343080" indent="-343080" defTabSz="343080">
+              <a:lnSpc>
+                <a:spcPct val="100000"/>
+              </a:lnSpc>
+              <a:spcBef>
+                <a:spcPts val="479"/>
+              </a:spcBef>
+              <a:buClr>
+                <a:srgbClr val="000000"/>
+              </a:buClr>
+              <a:buFont typeface="Arial"/>
+              <a:buChar char="•"/>
+              <a:tabLst>
+                <a:tab algn="l" pos="0"/>
+              </a:tabLst>
+            </a:pPr>
+            <a:r>
+              <a:rPr b="1" lang="en-US" sz="2400" spc="-1" strike="noStrike">
+                <a:solidFill>
+                  <a:schemeClr val="dk1"/>
+                </a:solidFill>
+                <a:latin typeface="Calibri"/>
+              </a:rPr>
+              <a:t>Label shift:</a:t>
+            </a:r>
+            <a:r>
+              <a:rPr b="0" lang="en-US" sz="2400" spc="-1" strike="noStrike">
+                <a:solidFill>
+                  <a:schemeClr val="dk1"/>
+                </a:solidFill>
+                <a:latin typeface="Calibri"/>
+              </a:rPr>
+              <a:t> P(Y) changes: a new variant, a new season</a:t>
+            </a:r>
+            <a:endParaRPr b="0" lang="en-US" sz="2400" spc="-1" strike="noStrike">
+              <a:solidFill>
+                <a:schemeClr val="dk1"/>
+              </a:solidFill>
+              <a:latin typeface="Calibri"/>
+            </a:endParaRPr>
+          </a:p>
+          <a:p>
+            <a:pPr marL="343080" indent="-343080" defTabSz="343080">
+              <a:lnSpc>
+                <a:spcPct val="100000"/>
+              </a:lnSpc>
+              <a:spcBef>
+                <a:spcPts val="479"/>
+              </a:spcBef>
+              <a:buClr>
+                <a:srgbClr val="000000"/>
+              </a:buClr>
+              <a:buFont typeface="Arial"/>
+              <a:buChar char="•"/>
+              <a:tabLst>
+                <a:tab algn="l" pos="0"/>
+              </a:tabLst>
+            </a:pPr>
+            <a:r>
+              <a:rPr b="1" lang="en-US" sz="2400" spc="-1" strike="noStrike">
+                <a:solidFill>
+                  <a:schemeClr val="dk1"/>
+                </a:solidFill>
+                <a:latin typeface="Calibri"/>
+              </a:rPr>
+              <a:t>Concept drift:</a:t>
+            </a:r>
+            <a:r>
+              <a:rPr b="0" lang="en-US" sz="2400" spc="-1" strike="noStrike">
+                <a:solidFill>
+                  <a:schemeClr val="dk1"/>
+                </a:solidFill>
+                <a:latin typeface="Calibri"/>
+              </a:rPr>
+              <a:t> P(Y | X) changes: treatment guidelines are updated</a:t>
+            </a:r>
+            <a:endParaRPr b="0" lang="en-US" sz="2400" spc="-1" strike="noStrike">
               <a:solidFill>
                 <a:schemeClr val="dk1"/>
               </a:solidFill>
@@ -12428,7 +13493,7 @@
       </p:grpSpPr>
       <p:sp>
         <p:nvSpPr>
-          <p:cNvPr id="109" name="PlaceHolder 1"/>
+          <p:cNvPr id="112" name="PlaceHolder 1"/>
           <p:cNvSpPr>
             <a:spLocks noGrp="1"/>
           </p:cNvSpPr>
@@ -12470,76 +13535,9 @@
                 </a:solidFill>
                 <a:latin typeface="Calibri"/>
               </a:rPr>
-              <a:t>Tabular: one row per unit </a:t>
-            </a:r>
-            <a:r>
-              <a:rPr b="0" lang="en-US" sz="3300" spc="-1" strike="noStrike">
-                <a:solidFill>
-                  <a:schemeClr val="dk1"/>
-                </a:solidFill>
-                <a:latin typeface="Courier New"/>
-              </a:rPr>
-              <a:t>n × p</a:t>
+              <a:t>Distribution shift</a:t>
             </a:r>
             <a:endParaRPr b="0" lang="en-US" sz="3300" spc="-1" strike="noStrike">
-              <a:solidFill>
-                <a:schemeClr val="dk1"/>
-              </a:solidFill>
-              <a:latin typeface="Calibri"/>
-            </a:endParaRPr>
-          </a:p>
-        </p:txBody>
-      </p:sp>
-      <p:sp>
-        <p:nvSpPr>
-          <p:cNvPr id="110" name="PlaceHolder 2"/>
-          <p:cNvSpPr>
-            <a:spLocks noGrp="1"/>
-          </p:cNvSpPr>
-          <p:nvPr>
-            <p:ph/>
-          </p:nvPr>
-        </p:nvSpPr>
-        <p:spPr>
-          <a:xfrm>
-            <a:off x="457200" y="1151280"/>
-            <a:ext cx="4039920" cy="479520"/>
-          </a:xfrm>
-          <a:prstGeom prst="rect">
-            <a:avLst/>
-          </a:prstGeom>
-          <a:noFill/>
-          <a:ln w="0">
-            <a:noFill/>
-          </a:ln>
-        </p:spPr>
-        <p:txBody>
-          <a:bodyPr lIns="91440" rIns="91440" tIns="45720" bIns="45720" anchor="b">
-            <a:normAutofit/>
-          </a:bodyPr>
-          <a:p>
-            <a:pPr indent="0" defTabSz="343080">
-              <a:lnSpc>
-                <a:spcPct val="100000"/>
-              </a:lnSpc>
-              <a:spcBef>
-                <a:spcPts val="360"/>
-              </a:spcBef>
-              <a:buNone/>
-              <a:tabLst>
-                <a:tab algn="l" pos="0"/>
-              </a:tabLst>
-            </a:pPr>
-            <a:r>
-              <a:rPr b="1" lang="en-US" sz="1800" spc="-1" strike="noStrike">
-                <a:solidFill>
-                  <a:schemeClr val="dk1"/>
-                </a:solidFill>
-                <a:latin typeface="Calibri"/>
-              </a:rPr>
-              <a:t>Ward interventions</a:t>
-            </a:r>
-            <a:endParaRPr b="0" lang="en-US" sz="1800" spc="-1" strike="noStrike">
               <a:solidFill>
                 <a:schemeClr val="dk1"/>
               </a:solidFill>
@@ -12550,7 +13548,7 @@
       </p:sp>
       <p:pic>
         <p:nvPicPr>
-          <p:cNvPr id="111" name="Picture 1" descr="img/tabular_medical.jpg"/>
+          <p:cNvPr id="113" name="Picture 1" descr="img/shift.png"/>
           <p:cNvPicPr/>
           <p:nvPr/>
         </p:nvPicPr>
@@ -12560,89 +13558,8 @@
         </p:blipFill>
         <p:spPr>
           <a:xfrm>
-            <a:off x="457200" y="2336760"/>
-            <a:ext cx="4038120" cy="1549080"/>
-          </a:xfrm>
-          <a:prstGeom prst="rect">
-            <a:avLst/>
-          </a:prstGeom>
-          <a:ln w="9525">
-            <a:noFill/>
-          </a:ln>
-        </p:spPr>
-      </p:pic>
-      <p:sp>
-        <p:nvSpPr>
-          <p:cNvPr id="112" name="PlaceHolder 3"/>
-          <p:cNvSpPr>
-            <a:spLocks noGrp="1"/>
-          </p:cNvSpPr>
-          <p:nvPr>
-            <p:ph/>
-          </p:nvPr>
-        </p:nvSpPr>
-        <p:spPr>
-          <a:xfrm>
-            <a:off x="4645080" y="1151280"/>
-            <a:ext cx="4041360" cy="479520"/>
-          </a:xfrm>
-          <a:prstGeom prst="rect">
-            <a:avLst/>
-          </a:prstGeom>
-          <a:noFill/>
-          <a:ln w="0">
-            <a:noFill/>
-          </a:ln>
-        </p:spPr>
-        <p:txBody>
-          <a:bodyPr lIns="91440" rIns="91440" tIns="45720" bIns="45720" anchor="b">
-            <a:normAutofit/>
-          </a:bodyPr>
-          <a:p>
-            <a:pPr indent="0" defTabSz="343080">
-              <a:lnSpc>
-                <a:spcPct val="100000"/>
-              </a:lnSpc>
-              <a:spcBef>
-                <a:spcPts val="360"/>
-              </a:spcBef>
-              <a:buNone/>
-              <a:tabLst>
-                <a:tab algn="l" pos="0"/>
-              </a:tabLst>
-            </a:pPr>
-            <a:r>
-              <a:rPr b="1" lang="en-US" sz="1800" spc="-1" strike="noStrike">
-                <a:solidFill>
-                  <a:schemeClr val="dk1"/>
-                </a:solidFill>
-                <a:latin typeface="Calibri"/>
-              </a:rPr>
-              <a:t>A ship’s passenger manifest</a:t>
-            </a:r>
-            <a:endParaRPr b="0" lang="en-US" sz="1800" spc="-1" strike="noStrike">
-              <a:solidFill>
-                <a:schemeClr val="dk1"/>
-              </a:solidFill>
-              <a:latin typeface="Calibri"/>
-            </a:endParaRPr>
-          </a:p>
-        </p:txBody>
-      </p:sp>
-      <p:pic>
-        <p:nvPicPr>
-          <p:cNvPr id="113" name="Picture 1" descr="img/tabular_other.jpg"/>
-          <p:cNvPicPr/>
-          <p:nvPr/>
-        </p:nvPicPr>
-        <p:blipFill>
-          <a:blip r:embed="rId2"/>
-          <a:stretch/>
-        </p:blipFill>
-        <p:spPr>
-          <a:xfrm>
-            <a:off x="5219640" y="1625760"/>
-            <a:ext cx="2857320" cy="2958840"/>
+            <a:off x="711360" y="1193760"/>
+            <a:ext cx="7733880" cy="3390480"/>
           </a:xfrm>
           <a:prstGeom prst="rect">
             <a:avLst/>
@@ -12726,16 +13643,7 @@
                 </a:solidFill>
                 <a:latin typeface="Calibri"/>
               </a:rPr>
-              <a:t>1D signals: a value over time </a:t>
-            </a:r>
-            <a:r>
-              <a:rPr b="0" lang="en-US" sz="3300" spc="-1" strike="noStrike">
-                <a:solidFill>
-                  <a:schemeClr val="dk1"/>
-                </a:solidFill>
-                <a:latin typeface="Courier New"/>
-              </a:rPr>
-              <a:t>n × T</a:t>
+              <a:t>Shortcuts</a:t>
             </a:r>
             <a:endParaRPr b="0" lang="en-US" sz="3300" spc="-1" strike="noStrike">
               <a:solidFill>
@@ -12758,8 +13666,8 @@
         </p:nvSpPr>
         <p:spPr>
           <a:xfrm>
-            <a:off x="457200" y="1151280"/>
-            <a:ext cx="4039920" cy="479520"/>
+            <a:off x="457200" y="1200240"/>
+            <a:ext cx="8229240" cy="3394080"/>
           </a:xfrm>
           <a:prstGeom prst="rect">
             <a:avLst/>
@@ -12770,7 +13678,7 @@
           </a:ln>
         </p:spPr>
         <p:txBody>
-          <a:bodyPr lIns="91440" rIns="91440" tIns="45720" bIns="45720" anchor="b">
+          <a:bodyPr lIns="91440" rIns="91440" tIns="45720" bIns="45720" anchor="t">
             <a:normAutofit/>
           </a:bodyPr>
           <a:p>
@@ -12779,7 +13687,7 @@
                 <a:spcPct val="100000"/>
               </a:lnSpc>
               <a:spcBef>
-                <a:spcPts val="360"/>
+                <a:spcPts val="479"/>
               </a:spcBef>
               <a:buNone/>
               <a:tabLst>
@@ -12787,96 +13695,177 @@
               </a:tabLst>
             </a:pPr>
             <a:r>
-              <a:rPr b="1" lang="en-US" sz="1800" spc="-1" strike="noStrike">
-                <a:solidFill>
-                  <a:schemeClr val="dk1"/>
-                </a:solidFill>
-                <a:latin typeface="Calibri"/>
-              </a:rPr>
-              <a:t>A 12-lead ECG</a:t>
-            </a:r>
-            <a:endParaRPr b="0" lang="en-US" sz="1800" spc="-1" strike="noStrike">
+              <a:rPr b="0" lang="en-US" sz="2400" spc="-1" strike="noStrike">
+                <a:solidFill>
+                  <a:schemeClr val="dk1"/>
+                </a:solidFill>
+                <a:latin typeface="Calibri"/>
+              </a:rPr>
+              <a:t>Models learn whatever correlates with y in </a:t>
+            </a:r>
+            <a:r>
+              <a:rPr b="0" i="1" lang="en-US" sz="2400" spc="-1" strike="noStrike">
+                <a:solidFill>
+                  <a:schemeClr val="dk1"/>
+                </a:solidFill>
+                <a:latin typeface="Calibri"/>
+              </a:rPr>
+              <a:t>the</a:t>
+            </a:r>
+            <a:r>
+              <a:rPr b="0" lang="en-US" sz="2400" spc="-1" strike="noStrike">
+                <a:solidFill>
+                  <a:schemeClr val="dk1"/>
+                </a:solidFill>
+                <a:latin typeface="Calibri"/>
+              </a:rPr>
+              <a:t> data.</a:t>
+            </a:r>
+            <a:endParaRPr b="0" lang="en-US" sz="2400" spc="-1" strike="noStrike">
               <a:solidFill>
                 <a:schemeClr val="dk1"/>
               </a:solidFill>
               <a:latin typeface="Calibri"/>
             </a:endParaRPr>
           </a:p>
-        </p:txBody>
-      </p:sp>
-      <p:pic>
-        <p:nvPicPr>
-          <p:cNvPr id="116" name="Picture 1" descr="img/signal_medical.jpg"/>
-          <p:cNvPicPr/>
-          <p:nvPr/>
-        </p:nvPicPr>
-        <p:blipFill>
-          <a:blip r:embed="rId1"/>
-          <a:stretch/>
-        </p:blipFill>
-        <p:spPr>
-          <a:xfrm>
-            <a:off x="457200" y="2286000"/>
-            <a:ext cx="4038120" cy="1638000"/>
-          </a:xfrm>
-          <a:prstGeom prst="rect">
-            <a:avLst/>
-          </a:prstGeom>
-          <a:ln w="9525">
-            <a:noFill/>
-          </a:ln>
-        </p:spPr>
-      </p:pic>
-      <p:sp>
-        <p:nvSpPr>
-          <p:cNvPr id="117" name="PlaceHolder 3"/>
-          <p:cNvSpPr>
-            <a:spLocks noGrp="1"/>
-          </p:cNvSpPr>
-          <p:nvPr>
-            <p:ph/>
-          </p:nvPr>
-        </p:nvSpPr>
-        <p:spPr>
-          <a:xfrm>
-            <a:off x="4645080" y="1151280"/>
-            <a:ext cx="4041360" cy="479520"/>
-          </a:xfrm>
-          <a:prstGeom prst="rect">
-            <a:avLst/>
-          </a:prstGeom>
-          <a:noFill/>
-          <a:ln w="0">
-            <a:noFill/>
-          </a:ln>
-        </p:spPr>
-        <p:txBody>
-          <a:bodyPr lIns="91440" rIns="91440" tIns="45720" bIns="45720" anchor="b">
-            <a:normAutofit/>
-          </a:bodyPr>
-          <a:p>
-            <a:pPr indent="0" defTabSz="343080">
+          <a:p>
+            <a:pPr marL="343080" indent="-343080" defTabSz="343080">
               <a:lnSpc>
                 <a:spcPct val="100000"/>
               </a:lnSpc>
               <a:spcBef>
-                <a:spcPts val="360"/>
+                <a:spcPts val="479"/>
               </a:spcBef>
-              <a:buNone/>
+              <a:buClr>
+                <a:srgbClr val="000000"/>
+              </a:buClr>
+              <a:buFont typeface="Arial"/>
+              <a:buChar char="•"/>
               <a:tabLst>
                 <a:tab algn="l" pos="0"/>
               </a:tabLst>
             </a:pPr>
             <a:r>
-              <a:rPr b="1" lang="en-US" sz="1800" spc="-1" strike="noStrike">
-                <a:solidFill>
-                  <a:schemeClr val="dk1"/>
-                </a:solidFill>
-                <a:latin typeface="Calibri"/>
-              </a:rPr>
-              <a:t>An audio waveform</a:t>
-            </a:r>
-            <a:endParaRPr b="0" lang="en-US" sz="1800" spc="-1" strike="noStrike">
+              <a:rPr b="0" lang="en-US" sz="2400" spc="-1" strike="noStrike">
+                <a:solidFill>
+                  <a:schemeClr val="dk1"/>
+                </a:solidFill>
+                <a:latin typeface="Calibri"/>
+              </a:rPr>
+              <a:t>Pneumonia detectors that learned the </a:t>
+            </a:r>
+            <a:r>
+              <a:rPr b="1" lang="en-US" sz="2400" spc="-1" strike="noStrike">
+                <a:solidFill>
+                  <a:schemeClr val="dk1"/>
+                </a:solidFill>
+                <a:latin typeface="Calibri"/>
+              </a:rPr>
+              <a:t>portable X-ray marker</a:t>
+            </a:r>
+            <a:r>
+              <a:rPr b="0" lang="en-US" sz="2400" spc="-1" strike="noStrike">
+                <a:solidFill>
+                  <a:schemeClr val="dk1"/>
+                </a:solidFill>
+                <a:latin typeface="Calibri"/>
+              </a:rPr>
+              <a:t> (sicker patients get bedside imaging)</a:t>
+            </a:r>
+            <a:endParaRPr b="0" lang="en-US" sz="2400" spc="-1" strike="noStrike">
+              <a:solidFill>
+                <a:schemeClr val="dk1"/>
+              </a:solidFill>
+              <a:latin typeface="Calibri"/>
+            </a:endParaRPr>
+          </a:p>
+          <a:p>
+            <a:pPr marL="343080" indent="-343080" defTabSz="343080">
+              <a:lnSpc>
+                <a:spcPct val="100000"/>
+              </a:lnSpc>
+              <a:spcBef>
+                <a:spcPts val="479"/>
+              </a:spcBef>
+              <a:buClr>
+                <a:srgbClr val="000000"/>
+              </a:buClr>
+              <a:buFont typeface="Arial"/>
+              <a:buChar char="•"/>
+              <a:tabLst>
+                <a:tab algn="l" pos="0"/>
+              </a:tabLst>
+            </a:pPr>
+            <a:r>
+              <a:rPr b="0" lang="en-US" sz="2400" spc="-1" strike="noStrike">
+                <a:solidFill>
+                  <a:schemeClr val="dk1"/>
+                </a:solidFill>
+                <a:latin typeface="Calibri"/>
+              </a:rPr>
+              <a:t>Skin lesion classifiers that learned the </a:t>
+            </a:r>
+            <a:r>
+              <a:rPr b="1" lang="en-US" sz="2400" spc="-1" strike="noStrike">
+                <a:solidFill>
+                  <a:schemeClr val="dk1"/>
+                </a:solidFill>
+                <a:latin typeface="Calibri"/>
+              </a:rPr>
+              <a:t>surgical ruler</a:t>
+            </a:r>
+            <a:r>
+              <a:rPr b="0" lang="en-US" sz="2400" spc="-1" strike="noStrike">
+                <a:solidFill>
+                  <a:schemeClr val="dk1"/>
+                </a:solidFill>
+                <a:latin typeface="Calibri"/>
+              </a:rPr>
+              <a:t> placed next to malignant lesions</a:t>
+            </a:r>
+            <a:endParaRPr b="0" lang="en-US" sz="2400" spc="-1" strike="noStrike">
+              <a:solidFill>
+                <a:schemeClr val="dk1"/>
+              </a:solidFill>
+              <a:latin typeface="Calibri"/>
+            </a:endParaRPr>
+          </a:p>
+          <a:p>
+            <a:pPr marL="343080" indent="-343080" defTabSz="343080">
+              <a:lnSpc>
+                <a:spcPct val="100000"/>
+              </a:lnSpc>
+              <a:spcBef>
+                <a:spcPts val="479"/>
+              </a:spcBef>
+              <a:buClr>
+                <a:srgbClr val="000000"/>
+              </a:buClr>
+              <a:buFont typeface="Arial"/>
+              <a:buChar char="•"/>
+              <a:tabLst>
+                <a:tab algn="l" pos="0"/>
+              </a:tabLst>
+            </a:pPr>
+            <a:r>
+              <a:rPr b="0" lang="en-US" sz="2400" spc="-1" strike="noStrike">
+                <a:solidFill>
+                  <a:schemeClr val="dk1"/>
+                </a:solidFill>
+                <a:latin typeface="Calibri"/>
+              </a:rPr>
+              <a:t>Portrait to age models looking at </a:t>
+            </a:r>
+            <a:r>
+              <a:rPr b="1" lang="en-US" sz="2400" spc="-1" strike="noStrike">
+                <a:solidFill>
+                  <a:schemeClr val="dk1"/>
+                </a:solidFill>
+                <a:latin typeface="Calibri"/>
+              </a:rPr>
+              <a:t>ears size</a:t>
+            </a:r>
+            <a:endParaRPr b="0" lang="en-US" sz="2400" spc="-1" strike="noStrike">
               <a:solidFill>
                 <a:schemeClr val="dk1"/>
               </a:solidFill>
@@ -12885,29 +13874,6 @@
           </a:p>
         </p:txBody>
       </p:sp>
-      <p:pic>
-        <p:nvPicPr>
-          <p:cNvPr id="118" name="Picture 1" descr="img/signal_other.jpg"/>
-          <p:cNvPicPr/>
-          <p:nvPr/>
-        </p:nvPicPr>
-        <p:blipFill>
-          <a:blip r:embed="rId2"/>
-          <a:stretch/>
-        </p:blipFill>
-        <p:spPr>
-          <a:xfrm>
-            <a:off x="4635360" y="2158920"/>
-            <a:ext cx="4038120" cy="1904760"/>
-          </a:xfrm>
-          <a:prstGeom prst="rect">
-            <a:avLst/>
-          </a:prstGeom>
-          <a:ln w="9525">
-            <a:noFill/>
-          </a:ln>
-        </p:spPr>
-      </p:pic>
     </p:spTree>
   </p:cSld>
   <mc:AlternateContent>
@@ -12940,7 +13906,7 @@
       </p:grpSpPr>
       <p:sp>
         <p:nvSpPr>
-          <p:cNvPr id="119" name="PlaceHolder 1"/>
+          <p:cNvPr id="116" name="PlaceHolder 1"/>
           <p:cNvSpPr>
             <a:spLocks noGrp="1"/>
           </p:cNvSpPr>
@@ -12982,76 +13948,9 @@
                 </a:solidFill>
                 <a:latin typeface="Calibri"/>
               </a:rPr>
-              <a:t>2D images: a grid of pixels </a:t>
-            </a:r>
-            <a:r>
-              <a:rPr b="0" lang="en-US" sz="3300" spc="-1" strike="noStrike">
-                <a:solidFill>
-                  <a:schemeClr val="dk1"/>
-                </a:solidFill>
-                <a:latin typeface="Courier New"/>
-              </a:rPr>
-              <a:t>H × W × C</a:t>
+              <a:t>Shortcuts: what the model actually learned</a:t>
             </a:r>
             <a:endParaRPr b="0" lang="en-US" sz="3300" spc="-1" strike="noStrike">
-              <a:solidFill>
-                <a:schemeClr val="dk1"/>
-              </a:solidFill>
-              <a:latin typeface="Calibri"/>
-            </a:endParaRPr>
-          </a:p>
-        </p:txBody>
-      </p:sp>
-      <p:sp>
-        <p:nvSpPr>
-          <p:cNvPr id="120" name="PlaceHolder 2"/>
-          <p:cNvSpPr>
-            <a:spLocks noGrp="1"/>
-          </p:cNvSpPr>
-          <p:nvPr>
-            <p:ph/>
-          </p:nvPr>
-        </p:nvSpPr>
-        <p:spPr>
-          <a:xfrm>
-            <a:off x="457200" y="1151280"/>
-            <a:ext cx="4039920" cy="479520"/>
-          </a:xfrm>
-          <a:prstGeom prst="rect">
-            <a:avLst/>
-          </a:prstGeom>
-          <a:noFill/>
-          <a:ln w="0">
-            <a:noFill/>
-          </a:ln>
-        </p:spPr>
-        <p:txBody>
-          <a:bodyPr lIns="91440" rIns="91440" tIns="45720" bIns="45720" anchor="b">
-            <a:normAutofit/>
-          </a:bodyPr>
-          <a:p>
-            <a:pPr indent="0" defTabSz="343080">
-              <a:lnSpc>
-                <a:spcPct val="100000"/>
-              </a:lnSpc>
-              <a:spcBef>
-                <a:spcPts val="360"/>
-              </a:spcBef>
-              <a:buNone/>
-              <a:tabLst>
-                <a:tab algn="l" pos="0"/>
-              </a:tabLst>
-            </a:pPr>
-            <a:r>
-              <a:rPr b="1" lang="en-US" sz="1800" spc="-1" strike="noStrike">
-                <a:solidFill>
-                  <a:schemeClr val="dk1"/>
-                </a:solidFill>
-                <a:latin typeface="Calibri"/>
-              </a:rPr>
-              <a:t>A chest radiograph</a:t>
-            </a:r>
-            <a:endParaRPr b="0" lang="en-US" sz="1800" spc="-1" strike="noStrike">
               <a:solidFill>
                 <a:schemeClr val="dk1"/>
               </a:solidFill>
@@ -13062,7 +13961,7 @@
       </p:sp>
       <p:pic>
         <p:nvPicPr>
-          <p:cNvPr id="121" name="Picture 1" descr="img/image2d_medical.jpg"/>
+          <p:cNvPr id="117" name="Picture 1" descr="img/shortcut.png"/>
           <p:cNvPicPr/>
           <p:nvPr/>
         </p:nvPicPr>
@@ -13072,89 +13971,8 @@
         </p:blipFill>
         <p:spPr>
           <a:xfrm>
-            <a:off x="1181160" y="1625760"/>
-            <a:ext cx="2590560" cy="2958840"/>
-          </a:xfrm>
-          <a:prstGeom prst="rect">
-            <a:avLst/>
-          </a:prstGeom>
-          <a:ln w="9525">
-            <a:noFill/>
-          </a:ln>
-        </p:spPr>
-      </p:pic>
-      <p:sp>
-        <p:nvSpPr>
-          <p:cNvPr id="122" name="PlaceHolder 3"/>
-          <p:cNvSpPr>
-            <a:spLocks noGrp="1"/>
-          </p:cNvSpPr>
-          <p:nvPr>
-            <p:ph/>
-          </p:nvPr>
-        </p:nvSpPr>
-        <p:spPr>
-          <a:xfrm>
-            <a:off x="4645080" y="1151280"/>
-            <a:ext cx="4041360" cy="479520"/>
-          </a:xfrm>
-          <a:prstGeom prst="rect">
-            <a:avLst/>
-          </a:prstGeom>
-          <a:noFill/>
-          <a:ln w="0">
-            <a:noFill/>
-          </a:ln>
-        </p:spPr>
-        <p:txBody>
-          <a:bodyPr lIns="91440" rIns="91440" tIns="45720" bIns="45720" anchor="b">
-            <a:normAutofit/>
-          </a:bodyPr>
-          <a:p>
-            <a:pPr indent="0" defTabSz="343080">
-              <a:lnSpc>
-                <a:spcPct val="100000"/>
-              </a:lnSpc>
-              <a:spcBef>
-                <a:spcPts val="360"/>
-              </a:spcBef>
-              <a:buNone/>
-              <a:tabLst>
-                <a:tab algn="l" pos="0"/>
-              </a:tabLst>
-            </a:pPr>
-            <a:r>
-              <a:rPr b="1" lang="en-US" sz="1800" spc="-1" strike="noStrike">
-                <a:solidFill>
-                  <a:schemeClr val="dk1"/>
-                </a:solidFill>
-                <a:latin typeface="Calibri"/>
-              </a:rPr>
-              <a:t>A satellite view of farmland</a:t>
-            </a:r>
-            <a:endParaRPr b="0" lang="en-US" sz="1800" spc="-1" strike="noStrike">
-              <a:solidFill>
-                <a:schemeClr val="dk1"/>
-              </a:solidFill>
-              <a:latin typeface="Calibri"/>
-            </a:endParaRPr>
-          </a:p>
-        </p:txBody>
-      </p:sp>
-      <p:pic>
-        <p:nvPicPr>
-          <p:cNvPr id="123" name="Picture 1" descr="img/image2d_other.jpg"/>
-          <p:cNvPicPr/>
-          <p:nvPr/>
-        </p:nvPicPr>
-        <p:blipFill>
-          <a:blip r:embed="rId2"/>
-          <a:stretch/>
-        </p:blipFill>
-        <p:spPr>
-          <a:xfrm>
-            <a:off x="5105520" y="1625760"/>
-            <a:ext cx="3085920" cy="2958840"/>
+            <a:off x="673200" y="1193760"/>
+            <a:ext cx="7797600" cy="3390480"/>
           </a:xfrm>
           <a:prstGeom prst="rect">
             <a:avLst/>
@@ -13196,7 +14014,7 @@
       </p:grpSpPr>
       <p:sp>
         <p:nvSpPr>
-          <p:cNvPr id="124" name="PlaceHolder 1"/>
+          <p:cNvPr id="118" name="PlaceHolder 1"/>
           <p:cNvSpPr>
             <a:spLocks noGrp="1"/>
           </p:cNvSpPr>
@@ -13238,16 +14056,7 @@
                 </a:solidFill>
                 <a:latin typeface="Calibri"/>
               </a:rPr>
-              <a:t>3D volumes: a stack of slices, </a:t>
-            </a:r>
-            <a:r>
-              <a:rPr b="0" lang="en-US" sz="3300" spc="-1" strike="noStrike">
-                <a:solidFill>
-                  <a:schemeClr val="dk1"/>
-                </a:solidFill>
-                <a:latin typeface="Courier New"/>
-              </a:rPr>
-              <a:t>D × H × W</a:t>
+              <a:t>Leakage</a:t>
             </a:r>
             <a:endParaRPr b="0" lang="en-US" sz="3300" spc="-1" strike="noStrike">
               <a:solidFill>
@@ -13260,7 +14069,7 @@
       </p:sp>
       <p:sp>
         <p:nvSpPr>
-          <p:cNvPr id="125" name="PlaceHolder 2"/>
+          <p:cNvPr id="119" name="PlaceHolder 2"/>
           <p:cNvSpPr>
             <a:spLocks noGrp="1"/>
           </p:cNvSpPr>
@@ -13270,8 +14079,8 @@
         </p:nvSpPr>
         <p:spPr>
           <a:xfrm>
-            <a:off x="457200" y="1151280"/>
-            <a:ext cx="4039920" cy="479520"/>
+            <a:off x="457200" y="1200240"/>
+            <a:ext cx="8229240" cy="3394080"/>
           </a:xfrm>
           <a:prstGeom prst="rect">
             <a:avLst/>
@@ -13282,7 +14091,7 @@
           </a:ln>
         </p:spPr>
         <p:txBody>
-          <a:bodyPr lIns="91440" rIns="91440" tIns="45720" bIns="45720" anchor="b">
+          <a:bodyPr lIns="91440" rIns="91440" tIns="45720" bIns="45720" anchor="t">
             <a:normAutofit/>
           </a:bodyPr>
           <a:p>
@@ -13291,7 +14100,7 @@
                 <a:spcPct val="100000"/>
               </a:lnSpc>
               <a:spcBef>
-                <a:spcPts val="360"/>
+                <a:spcPts val="479"/>
               </a:spcBef>
               <a:buNone/>
               <a:tabLst>
@@ -13299,80 +14108,28 @@
               </a:tabLst>
             </a:pPr>
             <a:r>
-              <a:rPr b="1" lang="en-US" sz="1800" spc="-1" strike="noStrike">
-                <a:solidFill>
-                  <a:schemeClr val="dk1"/>
-                </a:solidFill>
-                <a:latin typeface="Calibri"/>
-              </a:rPr>
-              <a:t>A CT</a:t>
-            </a:r>
-            <a:endParaRPr b="0" lang="en-US" sz="1800" spc="-1" strike="noStrike">
+              <a:rPr b="0" lang="en-US" sz="2400" spc="-1" strike="noStrike">
+                <a:solidFill>
+                  <a:schemeClr val="dk1"/>
+                </a:solidFill>
+                <a:latin typeface="Calibri"/>
+              </a:rPr>
+              <a:t>Information at training time that will not exist at prediction time.</a:t>
+            </a:r>
+            <a:endParaRPr b="0" lang="en-US" sz="2400" spc="-1" strike="noStrike">
               <a:solidFill>
                 <a:schemeClr val="dk1"/>
               </a:solidFill>
               <a:latin typeface="Calibri"/>
             </a:endParaRPr>
           </a:p>
-        </p:txBody>
-      </p:sp>
-      <p:pic>
-        <p:nvPicPr>
-          <p:cNvPr id="126" name="Picture 1" descr="img/volume3d_medical.jpg"/>
-          <p:cNvPicPr/>
-          <p:nvPr/>
-        </p:nvPicPr>
-        <p:blipFill>
-          <a:blip r:embed="rId1"/>
-          <a:stretch/>
-        </p:blipFill>
-        <p:spPr>
-          <a:xfrm>
-            <a:off x="1295280" y="1625760"/>
-            <a:ext cx="2349000" cy="2958840"/>
-          </a:xfrm>
-          <a:prstGeom prst="rect">
-            <a:avLst/>
-          </a:prstGeom>
-          <a:ln w="9525">
-            <a:noFill/>
-          </a:ln>
-        </p:spPr>
-      </p:pic>
-      <p:sp>
-        <p:nvSpPr>
-          <p:cNvPr id="127" name="PlaceHolder 3"/>
-          <p:cNvSpPr>
-            <a:spLocks noGrp="1"/>
-          </p:cNvSpPr>
-          <p:nvPr>
-            <p:ph/>
-          </p:nvPr>
-        </p:nvSpPr>
-        <p:spPr>
-          <a:xfrm>
-            <a:off x="4645080" y="1151280"/>
-            <a:ext cx="4041360" cy="479520"/>
-          </a:xfrm>
-          <a:prstGeom prst="rect">
-            <a:avLst/>
-          </a:prstGeom>
-          <a:noFill/>
-          <a:ln w="0">
-            <a:noFill/>
-          </a:ln>
-        </p:spPr>
-        <p:txBody>
-          <a:bodyPr lIns="91440" rIns="91440" tIns="45720" bIns="45720" anchor="b">
-            <a:normAutofit/>
-          </a:bodyPr>
           <a:p>
             <a:pPr indent="0" defTabSz="343080">
               <a:lnSpc>
                 <a:spcPct val="100000"/>
               </a:lnSpc>
               <a:spcBef>
-                <a:spcPts val="360"/>
+                <a:spcPts val="479"/>
               </a:spcBef>
               <a:buNone/>
               <a:tabLst>
@@ -13380,85 +14137,136 @@
               </a:tabLst>
             </a:pPr>
             <a:r>
-              <a:rPr b="1" lang="en-US" sz="1800" spc="-1" strike="noStrike">
-                <a:solidFill>
-                  <a:schemeClr val="dk1"/>
-                </a:solidFill>
-                <a:latin typeface="Calibri"/>
-              </a:rPr>
-              <a:t>A LiDAR point cloud</a:t>
-            </a:r>
-            <a:endParaRPr b="0" lang="en-US" sz="1800" spc="-1" strike="noStrike">
+              <a:rPr b="0" lang="en-US" sz="2400" spc="-1" strike="noStrike">
+                <a:solidFill>
+                  <a:schemeClr val="dk1"/>
+                </a:solidFill>
+                <a:latin typeface="Calibri"/>
+              </a:rPr>
+              <a:t>Typically:</a:t>
+            </a:r>
+            <a:endParaRPr b="0" lang="en-US" sz="2400" spc="-1" strike="noStrike">
               <a:solidFill>
                 <a:schemeClr val="dk1"/>
               </a:solidFill>
               <a:latin typeface="Calibri"/>
             </a:endParaRPr>
           </a:p>
-        </p:txBody>
-      </p:sp>
-      <p:pic>
-        <p:nvPicPr>
-          <p:cNvPr id="128" name="Picture 1" descr="img/volume3d_other.jpg"/>
-          <p:cNvPicPr/>
-          <p:nvPr/>
-        </p:nvPicPr>
-        <p:blipFill>
-          <a:blip r:embed="rId2"/>
-          <a:stretch/>
-        </p:blipFill>
-        <p:spPr>
-          <a:xfrm>
-            <a:off x="4635360" y="1968480"/>
-            <a:ext cx="4038120" cy="2273040"/>
-          </a:xfrm>
-          <a:prstGeom prst="rect">
-            <a:avLst/>
-          </a:prstGeom>
-          <a:ln w="9525">
-            <a:noFill/>
-          </a:ln>
-        </p:spPr>
-      </p:pic>
-      <p:sp>
-        <p:nvSpPr>
-          <p:cNvPr id="129" name=""/>
-          <p:cNvSpPr txBox="1"/>
-          <p:nvPr/>
-        </p:nvSpPr>
-        <p:spPr>
-          <a:xfrm>
-            <a:off x="1265400" y="4609440"/>
-            <a:ext cx="2392200" cy="419760"/>
-          </a:xfrm>
-          <a:prstGeom prst="rect">
-            <a:avLst/>
-          </a:prstGeom>
-          <a:noFill/>
-          <a:ln w="0">
-            <a:noFill/>
-          </a:ln>
-        </p:spPr>
-        <p:txBody>
-          <a:bodyPr lIns="90000" rIns="90000" tIns="45000" bIns="45000" anchor="t">
-            <a:noAutofit/>
-          </a:bodyPr>
-          <a:p>
-            <a:pPr algn="ctr"/>
-            <a:r>
-              <a:rPr b="0" i="1" lang="en-US" sz="1800" spc="-1" strike="noStrike">
-                <a:solidFill>
-                  <a:schemeClr val="dk1"/>
-                </a:solidFill>
-                <a:latin typeface="Calibri"/>
-              </a:rPr>
-              <a:t>(three planes view)</a:t>
-            </a:r>
-            <a:endParaRPr b="0" i="1" lang="en-US" sz="1800" spc="-1" strike="noStrike">
-              <a:solidFill>
+          <a:p>
+            <a:pPr marL="343080" indent="-343080" defTabSz="343080">
+              <a:lnSpc>
+                <a:spcPct val="100000"/>
+              </a:lnSpc>
+              <a:spcBef>
+                <a:spcPts val="479"/>
+              </a:spcBef>
+              <a:buClr>
                 <a:srgbClr val="000000"/>
-              </a:solidFill>
-              <a:latin typeface="Arial"/>
+              </a:buClr>
+              <a:buFont typeface="Arial"/>
+              <a:buChar char="•"/>
+              <a:tabLst>
+                <a:tab algn="l" pos="0"/>
+              </a:tabLst>
+            </a:pPr>
+            <a:r>
+              <a:rPr b="0" lang="en-US" sz="2400" spc="-1" strike="noStrike">
+                <a:solidFill>
+                  <a:schemeClr val="dk1"/>
+                </a:solidFill>
+                <a:latin typeface="Calibri"/>
+              </a:rPr>
+              <a:t>The same patient in both train and test (e.g. duplicated)</a:t>
+            </a:r>
+            <a:endParaRPr b="0" lang="en-US" sz="2400" spc="-1" strike="noStrike">
+              <a:solidFill>
+                <a:schemeClr val="dk1"/>
+              </a:solidFill>
+              <a:latin typeface="Calibri"/>
+            </a:endParaRPr>
+          </a:p>
+          <a:p>
+            <a:pPr marL="343080" indent="-343080" defTabSz="343080">
+              <a:lnSpc>
+                <a:spcPct val="100000"/>
+              </a:lnSpc>
+              <a:spcBef>
+                <a:spcPts val="479"/>
+              </a:spcBef>
+              <a:buClr>
+                <a:srgbClr val="000000"/>
+              </a:buClr>
+              <a:buFont typeface="Arial"/>
+              <a:buChar char="•"/>
+              <a:tabLst>
+                <a:tab algn="l" pos="0"/>
+              </a:tabLst>
+            </a:pPr>
+            <a:r>
+              <a:rPr b="0" lang="en-US" sz="2400" spc="-1" strike="noStrike">
+                <a:solidFill>
+                  <a:schemeClr val="dk1"/>
+                </a:solidFill>
+                <a:latin typeface="Calibri"/>
+              </a:rPr>
+              <a:t>Feature that is a deterministic function of the outcome (e.g. </a:t>
+            </a:r>
+            <a:r>
+              <a:rPr b="0" lang="en-US" sz="2400" spc="-1" strike="noStrike">
+                <a:solidFill>
+                  <a:schemeClr val="dk1"/>
+                </a:solidFill>
+                <a:latin typeface="Courier New"/>
+              </a:rPr>
+              <a:t>discharge_location == 'DIED'</a:t>
+            </a:r>
+            <a:r>
+              <a:rPr b="0" lang="en-US" sz="2400" spc="-1" strike="noStrike">
+                <a:solidFill>
+                  <a:schemeClr val="dk1"/>
+                </a:solidFill>
+                <a:latin typeface="Calibri"/>
+              </a:rPr>
+              <a:t>)</a:t>
+            </a:r>
+            <a:endParaRPr b="0" lang="en-US" sz="2400" spc="-1" strike="noStrike">
+              <a:solidFill>
+                <a:schemeClr val="dk1"/>
+              </a:solidFill>
+              <a:latin typeface="Calibri"/>
+            </a:endParaRPr>
+          </a:p>
+          <a:p>
+            <a:pPr marL="343080" indent="-343080" defTabSz="343080">
+              <a:lnSpc>
+                <a:spcPct val="100000"/>
+              </a:lnSpc>
+              <a:spcBef>
+                <a:spcPts val="479"/>
+              </a:spcBef>
+              <a:buClr>
+                <a:srgbClr val="000000"/>
+              </a:buClr>
+              <a:buFont typeface="Arial"/>
+              <a:buChar char="•"/>
+              <a:tabLst>
+                <a:tab algn="l" pos="0"/>
+              </a:tabLst>
+            </a:pPr>
+            <a:r>
+              <a:rPr b="0" lang="en-US" sz="2400" spc="-1" strike="noStrike">
+                <a:solidFill>
+                  <a:schemeClr val="dk1"/>
+                </a:solidFill>
+                <a:latin typeface="Calibri"/>
+              </a:rPr>
+              <a:t>Bug in the train/test split</a:t>
+            </a:r>
+            <a:endParaRPr b="0" lang="en-US" sz="2400" spc="-1" strike="noStrike">
+              <a:solidFill>
+                <a:schemeClr val="dk1"/>
+              </a:solidFill>
+              <a:latin typeface="Calibri"/>
             </a:endParaRPr>
           </a:p>
         </p:txBody>
@@ -13495,7 +14303,7 @@
       </p:grpSpPr>
       <p:sp>
         <p:nvSpPr>
-          <p:cNvPr id="130" name="PlaceHolder 1"/>
+          <p:cNvPr id="120" name="PlaceHolder 1"/>
           <p:cNvSpPr>
             <a:spLocks noGrp="1"/>
           </p:cNvSpPr>
@@ -13537,7 +14345,7 @@
                 </a:solidFill>
                 <a:latin typeface="Calibri"/>
               </a:rPr>
-              <a:t>Text: a sequence of tokens</a:t>
+              <a:t>Leakage: the split that lies to you</a:t>
             </a:r>
             <a:endParaRPr b="0" lang="en-US" sz="3300" spc="-1" strike="noStrike">
               <a:solidFill>
@@ -13550,7 +14358,7 @@
       </p:sp>
       <p:sp>
         <p:nvSpPr>
-          <p:cNvPr id="131" name="PlaceHolder 2"/>
+          <p:cNvPr id="121" name="PlaceHolder 2"/>
           <p:cNvSpPr>
             <a:spLocks noGrp="1"/>
           </p:cNvSpPr>
@@ -13560,8 +14368,8 @@
         </p:nvSpPr>
         <p:spPr>
           <a:xfrm>
-            <a:off x="457200" y="1151280"/>
-            <a:ext cx="4039920" cy="479520"/>
+            <a:off x="457200" y="1200240"/>
+            <a:ext cx="8229240" cy="3394080"/>
           </a:xfrm>
           <a:prstGeom prst="rect">
             <a:avLst/>
@@ -13572,16 +14380,16 @@
           </a:ln>
         </p:spPr>
         <p:txBody>
-          <a:bodyPr lIns="91440" rIns="91440" tIns="45720" bIns="45720" anchor="b">
-            <a:normAutofit/>
+          <a:bodyPr lIns="91440" rIns="91440" tIns="45720" bIns="45720" anchor="t">
+            <a:normAutofit fontScale="81218"/>
           </a:bodyPr>
           <a:p>
-            <a:pPr indent="0" defTabSz="343080">
+            <a:pPr marL="343080" indent="0" defTabSz="343080">
               <a:lnSpc>
                 <a:spcPct val="100000"/>
               </a:lnSpc>
               <a:spcBef>
-                <a:spcPts val="360"/>
+                <a:spcPts val="479"/>
               </a:spcBef>
               <a:buNone/>
               <a:tabLst>
@@ -13589,15 +14397,306 @@
               </a:tabLst>
             </a:pPr>
             <a:r>
-              <a:rPr b="1" lang="en-US" sz="1800" spc="-1" strike="noStrike">
-                <a:solidFill>
-                  <a:schemeClr val="dk1"/>
-                </a:solidFill>
-                <a:latin typeface="Calibri"/>
-              </a:rPr>
-              <a:t>A radiology report</a:t>
-            </a:r>
-            <a:endParaRPr b="0" lang="en-US" sz="1800" spc="-1" strike="noStrike">
+              <a:rPr b="0" i="1" lang="en-US" sz="2400" spc="-1" strike="noStrike">
+                <a:solidFill>
+                  <a:srgbClr val="60a0b0"/>
+                </a:solidFill>
+                <a:latin typeface="Courier New"/>
+              </a:rPr>
+              <a:t># WRONG - scaler already saw the test set</a:t>
+            </a:r>
+            <a:br>
+              <a:rPr sz="2400"/>
+            </a:br>
+            <a:r>
+              <a:rPr b="0" lang="en-US" sz="2400" spc="-1" strike="noStrike">
+                <a:solidFill>
+                  <a:schemeClr val="dk1"/>
+                </a:solidFill>
+                <a:latin typeface="Courier New"/>
+              </a:rPr>
+              <a:t>X </a:t>
+            </a:r>
+            <a:r>
+              <a:rPr b="0" lang="en-US" sz="2400" spc="-1" strike="noStrike">
+                <a:solidFill>
+                  <a:srgbClr val="666666"/>
+                </a:solidFill>
+                <a:latin typeface="Courier New"/>
+              </a:rPr>
+              <a:t>=</a:t>
+            </a:r>
+            <a:r>
+              <a:rPr b="0" lang="en-US" sz="2400" spc="-1" strike="noStrike">
+                <a:solidFill>
+                  <a:schemeClr val="dk1"/>
+                </a:solidFill>
+                <a:latin typeface="Courier New"/>
+              </a:rPr>
+              <a:t> StandardScaler().fit_transform(X)</a:t>
+            </a:r>
+            <a:br>
+              <a:rPr sz="2400"/>
+            </a:br>
+            <a:r>
+              <a:rPr b="0" lang="en-US" sz="2400" spc="-1" strike="noStrike">
+                <a:solidFill>
+                  <a:schemeClr val="dk1"/>
+                </a:solidFill>
+                <a:latin typeface="Courier New"/>
+              </a:rPr>
+              <a:t>X_tr, X_te </a:t>
+            </a:r>
+            <a:r>
+              <a:rPr b="0" lang="en-US" sz="2400" spc="-1" strike="noStrike">
+                <a:solidFill>
+                  <a:srgbClr val="666666"/>
+                </a:solidFill>
+                <a:latin typeface="Courier New"/>
+              </a:rPr>
+              <a:t>=</a:t>
+            </a:r>
+            <a:r>
+              <a:rPr b="0" lang="en-US" sz="2400" spc="-1" strike="noStrike">
+                <a:solidFill>
+                  <a:schemeClr val="dk1"/>
+                </a:solidFill>
+                <a:latin typeface="Courier New"/>
+              </a:rPr>
+              <a:t> train_test_split(X, test_size</a:t>
+            </a:r>
+            <a:r>
+              <a:rPr b="0" lang="en-US" sz="2400" spc="-1" strike="noStrike">
+                <a:solidFill>
+                  <a:srgbClr val="666666"/>
+                </a:solidFill>
+                <a:latin typeface="Courier New"/>
+              </a:rPr>
+              <a:t>=</a:t>
+            </a:r>
+            <a:r>
+              <a:rPr b="0" lang="en-US" sz="2400" spc="-1" strike="noStrike">
+                <a:solidFill>
+                  <a:srgbClr val="40a070"/>
+                </a:solidFill>
+                <a:latin typeface="Courier New"/>
+              </a:rPr>
+              <a:t>.2</a:t>
+            </a:r>
+            <a:r>
+              <a:rPr b="0" lang="en-US" sz="2400" spc="-1" strike="noStrike">
+                <a:solidFill>
+                  <a:schemeClr val="dk1"/>
+                </a:solidFill>
+                <a:latin typeface="Courier New"/>
+              </a:rPr>
+              <a:t>)</a:t>
+            </a:r>
+            <a:br>
+              <a:rPr sz="2400"/>
+            </a:br>
+            <a:br>
+              <a:rPr sz="2400"/>
+            </a:br>
+            <a:r>
+              <a:rPr b="0" i="1" lang="en-US" sz="2400" spc="-1" strike="noStrike">
+                <a:solidFill>
+                  <a:srgbClr val="60a0b0"/>
+                </a:solidFill>
+                <a:latin typeface="Courier New"/>
+              </a:rPr>
+              <a:t># WRONG - one patient, rows in both halves</a:t>
+            </a:r>
+            <a:br>
+              <a:rPr sz="2400"/>
+            </a:br>
+            <a:r>
+              <a:rPr b="0" lang="en-US" sz="2400" spc="-1" strike="noStrike">
+                <a:solidFill>
+                  <a:schemeClr val="dk1"/>
+                </a:solidFill>
+                <a:latin typeface="Courier New"/>
+              </a:rPr>
+              <a:t>train_test_split(df, test_size</a:t>
+            </a:r>
+            <a:r>
+              <a:rPr b="0" lang="en-US" sz="2400" spc="-1" strike="noStrike">
+                <a:solidFill>
+                  <a:srgbClr val="666666"/>
+                </a:solidFill>
+                <a:latin typeface="Courier New"/>
+              </a:rPr>
+              <a:t>=</a:t>
+            </a:r>
+            <a:r>
+              <a:rPr b="0" lang="en-US" sz="2400" spc="-1" strike="noStrike">
+                <a:solidFill>
+                  <a:srgbClr val="40a070"/>
+                </a:solidFill>
+                <a:latin typeface="Courier New"/>
+              </a:rPr>
+              <a:t>.2</a:t>
+            </a:r>
+            <a:r>
+              <a:rPr b="0" lang="en-US" sz="2400" spc="-1" strike="noStrike">
+                <a:solidFill>
+                  <a:schemeClr val="dk1"/>
+                </a:solidFill>
+                <a:latin typeface="Courier New"/>
+              </a:rPr>
+              <a:t>)</a:t>
+            </a:r>
+            <a:br>
+              <a:rPr sz="2400"/>
+            </a:br>
+            <a:br>
+              <a:rPr sz="2400"/>
+            </a:br>
+            <a:r>
+              <a:rPr b="0" i="1" lang="en-US" sz="2400" spc="-1" strike="noStrike">
+                <a:solidFill>
+                  <a:srgbClr val="60a0b0"/>
+                </a:solidFill>
+                <a:latin typeface="Courier New"/>
+              </a:rPr>
+              <a:t># RIGHT - split by patient, fit on train</a:t>
+            </a:r>
+            <a:br>
+              <a:rPr sz="2400"/>
+            </a:br>
+            <a:r>
+              <a:rPr b="0" lang="en-US" sz="2400" spc="-1" strike="noStrike">
+                <a:solidFill>
+                  <a:schemeClr val="dk1"/>
+                </a:solidFill>
+                <a:latin typeface="Courier New"/>
+              </a:rPr>
+              <a:t>tr, te </a:t>
+            </a:r>
+            <a:r>
+              <a:rPr b="0" lang="en-US" sz="2400" spc="-1" strike="noStrike">
+                <a:solidFill>
+                  <a:srgbClr val="666666"/>
+                </a:solidFill>
+                <a:latin typeface="Courier New"/>
+              </a:rPr>
+              <a:t>=</a:t>
+            </a:r>
+            <a:r>
+              <a:rPr b="0" lang="en-US" sz="2400" spc="-1" strike="noStrike">
+                <a:solidFill>
+                  <a:schemeClr val="dk1"/>
+                </a:solidFill>
+                <a:latin typeface="Courier New"/>
+              </a:rPr>
+              <a:t> </a:t>
+            </a:r>
+            <a:r>
+              <a:rPr b="0" lang="en-US" sz="2400" spc="-1" strike="noStrike">
+                <a:solidFill>
+                  <a:srgbClr val="008000"/>
+                </a:solidFill>
+                <a:latin typeface="Courier New"/>
+              </a:rPr>
+              <a:t>next</a:t>
+            </a:r>
+            <a:r>
+              <a:rPr b="0" lang="en-US" sz="2400" spc="-1" strike="noStrike">
+                <a:solidFill>
+                  <a:schemeClr val="dk1"/>
+                </a:solidFill>
+                <a:latin typeface="Courier New"/>
+              </a:rPr>
+              <a:t>(GroupShuffleSplit(test_size</a:t>
+            </a:r>
+            <a:r>
+              <a:rPr b="0" lang="en-US" sz="2400" spc="-1" strike="noStrike">
+                <a:solidFill>
+                  <a:srgbClr val="666666"/>
+                </a:solidFill>
+                <a:latin typeface="Courier New"/>
+              </a:rPr>
+              <a:t>=</a:t>
+            </a:r>
+            <a:r>
+              <a:rPr b="0" lang="en-US" sz="2400" spc="-1" strike="noStrike">
+                <a:solidFill>
+                  <a:srgbClr val="40a070"/>
+                </a:solidFill>
+                <a:latin typeface="Courier New"/>
+              </a:rPr>
+              <a:t>.2</a:t>
+            </a:r>
+            <a:r>
+              <a:rPr b="0" lang="en-US" sz="2400" spc="-1" strike="noStrike">
+                <a:solidFill>
+                  <a:schemeClr val="dk1"/>
+                </a:solidFill>
+                <a:latin typeface="Courier New"/>
+              </a:rPr>
+              <a:t>)</a:t>
+            </a:r>
+            <a:br>
+              <a:rPr sz="2400"/>
+            </a:br>
+            <a:r>
+              <a:rPr b="0" lang="en-US" sz="2400" spc="-1" strike="noStrike">
+                <a:solidFill>
+                  <a:schemeClr val="dk1"/>
+                </a:solidFill>
+                <a:latin typeface="Courier New"/>
+              </a:rPr>
+              <a:t>    .split(df, groups</a:t>
+            </a:r>
+            <a:r>
+              <a:rPr b="0" lang="en-US" sz="2400" spc="-1" strike="noStrike">
+                <a:solidFill>
+                  <a:srgbClr val="666666"/>
+                </a:solidFill>
+                <a:latin typeface="Courier New"/>
+              </a:rPr>
+              <a:t>=</a:t>
+            </a:r>
+            <a:r>
+              <a:rPr b="0" lang="en-US" sz="2400" spc="-1" strike="noStrike">
+                <a:solidFill>
+                  <a:schemeClr val="dk1"/>
+                </a:solidFill>
+                <a:latin typeface="Courier New"/>
+              </a:rPr>
+              <a:t>df.subject_id))</a:t>
+            </a:r>
+            <a:br>
+              <a:rPr sz="2400"/>
+            </a:br>
+            <a:r>
+              <a:rPr b="0" lang="en-US" sz="2400" spc="-1" strike="noStrike">
+                <a:solidFill>
+                  <a:schemeClr val="dk1"/>
+                </a:solidFill>
+                <a:latin typeface="Courier New"/>
+              </a:rPr>
+              <a:t>scaler </a:t>
+            </a:r>
+            <a:r>
+              <a:rPr b="0" lang="en-US" sz="2400" spc="-1" strike="noStrike">
+                <a:solidFill>
+                  <a:srgbClr val="666666"/>
+                </a:solidFill>
+                <a:latin typeface="Courier New"/>
+              </a:rPr>
+              <a:t>=</a:t>
+            </a:r>
+            <a:r>
+              <a:rPr b="0" lang="en-US" sz="2400" spc="-1" strike="noStrike">
+                <a:solidFill>
+                  <a:schemeClr val="dk1"/>
+                </a:solidFill>
+                <a:latin typeface="Courier New"/>
+              </a:rPr>
+              <a:t> StandardScaler().fit(X[tr])</a:t>
+            </a:r>
+            <a:endParaRPr b="0" lang="en-US" sz="2400" spc="-1" strike="noStrike">
               <a:solidFill>
                 <a:schemeClr val="dk1"/>
               </a:solidFill>
@@ -13606,110 +14705,6 @@
           </a:p>
         </p:txBody>
       </p:sp>
-      <p:pic>
-        <p:nvPicPr>
-          <p:cNvPr id="132" name="Picture 1" descr="img/text_medical.jpg"/>
-          <p:cNvPicPr/>
-          <p:nvPr/>
-        </p:nvPicPr>
-        <p:blipFill>
-          <a:blip r:embed="rId1"/>
-          <a:stretch/>
-        </p:blipFill>
-        <p:spPr>
-          <a:xfrm>
-            <a:off x="457200" y="2565360"/>
-            <a:ext cx="4038120" cy="1079280"/>
-          </a:xfrm>
-          <a:prstGeom prst="rect">
-            <a:avLst/>
-          </a:prstGeom>
-          <a:ln w="9525">
-            <a:noFill/>
-          </a:ln>
-        </p:spPr>
-      </p:pic>
-      <p:sp>
-        <p:nvSpPr>
-          <p:cNvPr id="133" name="PlaceHolder 3"/>
-          <p:cNvSpPr>
-            <a:spLocks noGrp="1"/>
-          </p:cNvSpPr>
-          <p:nvPr>
-            <p:ph/>
-          </p:nvPr>
-        </p:nvSpPr>
-        <p:spPr>
-          <a:xfrm>
-            <a:off x="4645080" y="1151280"/>
-            <a:ext cx="4041360" cy="479520"/>
-          </a:xfrm>
-          <a:prstGeom prst="rect">
-            <a:avLst/>
-          </a:prstGeom>
-          <a:noFill/>
-          <a:ln w="0">
-            <a:noFill/>
-          </a:ln>
-        </p:spPr>
-        <p:txBody>
-          <a:bodyPr lIns="91440" rIns="91440" tIns="45720" bIns="45720" anchor="b">
-            <a:normAutofit/>
-          </a:bodyPr>
-          <a:p>
-            <a:pPr indent="0" defTabSz="343080">
-              <a:lnSpc>
-                <a:spcPct val="100000"/>
-              </a:lnSpc>
-              <a:spcBef>
-                <a:spcPts val="360"/>
-              </a:spcBef>
-              <a:buNone/>
-              <a:tabLst>
-                <a:tab algn="l" pos="0"/>
-              </a:tabLst>
-            </a:pPr>
-            <a:r>
-              <a:rPr b="1" lang="en-US" sz="1800" spc="-1" strike="noStrike">
-                <a:solidFill>
-                  <a:schemeClr val="dk1"/>
-                </a:solidFill>
-                <a:latin typeface="Calibri"/>
-              </a:rPr>
-              <a:t>A newspaper page</a:t>
-            </a:r>
-            <a:endParaRPr b="0" lang="en-US" sz="1800" spc="-1" strike="noStrike">
-              <a:solidFill>
-                <a:schemeClr val="dk1"/>
-              </a:solidFill>
-              <a:latin typeface="Calibri"/>
-            </a:endParaRPr>
-          </a:p>
-        </p:txBody>
-      </p:sp>
-      <p:pic>
-        <p:nvPicPr>
-          <p:cNvPr id="134" name="Picture 1" descr="img/text_other.jpg"/>
-          <p:cNvPicPr/>
-          <p:nvPr/>
-        </p:nvPicPr>
-        <p:blipFill>
-          <a:blip r:embed="rId2"/>
-          <a:stretch/>
-        </p:blipFill>
-        <p:spPr>
-          <a:xfrm>
-            <a:off x="5372280" y="1625760"/>
-            <a:ext cx="2565000" cy="2958840"/>
-          </a:xfrm>
-          <a:prstGeom prst="rect">
-            <a:avLst/>
-          </a:prstGeom>
-          <a:ln w="9525">
-            <a:noFill/>
-          </a:ln>
-        </p:spPr>
-      </p:pic>
     </p:spTree>
   </p:cSld>
   <mc:AlternateContent>
@@ -13742,7 +14737,7 @@
       </p:grpSpPr>
       <p:sp>
         <p:nvSpPr>
-          <p:cNvPr id="135" name="PlaceHolder 1"/>
+          <p:cNvPr id="122" name="PlaceHolder 1"/>
           <p:cNvSpPr>
             <a:spLocks noGrp="1"/>
           </p:cNvSpPr>
@@ -13784,7 +14779,7 @@
                 </a:solidFill>
                 <a:latin typeface="Calibri"/>
               </a:rPr>
-              <a:t>4. Wrapping up</a:t>
+              <a:t>2. Data types and example</a:t>
             </a:r>
             <a:endParaRPr b="0" lang="en-US" sz="3000" spc="-1" strike="noStrike">
               <a:solidFill>
@@ -13827,7 +14822,7 @@
       </p:grpSpPr>
       <p:sp>
         <p:nvSpPr>
-          <p:cNvPr id="136" name="PlaceHolder 1"/>
+          <p:cNvPr id="123" name="PlaceHolder 1"/>
           <p:cNvSpPr>
             <a:spLocks noGrp="1"/>
           </p:cNvSpPr>
@@ -13869,7 +14864,16 @@
                 </a:solidFill>
                 <a:latin typeface="Calibri"/>
               </a:rPr>
-              <a:t>Recitation today</a:t>
+              <a:t>Tabular: one row per unit </a:t>
+            </a:r>
+            <a:r>
+              <a:rPr b="0" lang="en-US" sz="3300" spc="-1" strike="noStrike">
+                <a:solidFill>
+                  <a:schemeClr val="dk1"/>
+                </a:solidFill>
+                <a:latin typeface="Courier New"/>
+              </a:rPr>
+              <a:t>n × p</a:t>
             </a:r>
             <a:endParaRPr b="0" lang="en-US" sz="3300" spc="-1" strike="noStrike">
               <a:solidFill>
@@ -13882,7 +14886,7 @@
       </p:sp>
       <p:sp>
         <p:nvSpPr>
-          <p:cNvPr id="137" name="PlaceHolder 2"/>
+          <p:cNvPr id="124" name="PlaceHolder 2"/>
           <p:cNvSpPr>
             <a:spLocks noGrp="1"/>
           </p:cNvSpPr>
@@ -13892,8 +14896,8 @@
         </p:nvSpPr>
         <p:spPr>
           <a:xfrm>
-            <a:off x="457200" y="1200240"/>
-            <a:ext cx="8229240" cy="3394080"/>
+            <a:off x="457200" y="1151280"/>
+            <a:ext cx="4039920" cy="479520"/>
           </a:xfrm>
           <a:prstGeom prst="rect">
             <a:avLst/>
@@ -13904,7 +14908,7 @@
           </a:ln>
         </p:spPr>
         <p:txBody>
-          <a:bodyPr lIns="91440" rIns="91440" tIns="45720" bIns="45720" anchor="t">
+          <a:bodyPr lIns="91440" rIns="91440" tIns="45720" bIns="45720" anchor="b">
             <a:normAutofit/>
           </a:bodyPr>
           <a:p>
@@ -13913,7 +14917,7 @@
                 <a:spcPct val="100000"/>
               </a:lnSpc>
               <a:spcBef>
-                <a:spcPts val="479"/>
+                <a:spcPts val="360"/>
               </a:spcBef>
               <a:buNone/>
               <a:tabLst>
@@ -13921,225 +14925,96 @@
               </a:tabLst>
             </a:pPr>
             <a:r>
-              <a:rPr b="1" lang="en-US" sz="2400" spc="-1" strike="noStrike">
-                <a:solidFill>
-                  <a:schemeClr val="dk1"/>
-                </a:solidFill>
-                <a:latin typeface="Calibri"/>
-              </a:rPr>
-              <a:t>MIMIC-IV structure and data exploration</a:t>
-            </a:r>
-            <a:endParaRPr b="0" lang="en-US" sz="2400" spc="-1" strike="noStrike">
+              <a:rPr b="1" lang="en-US" sz="1800" spc="-1" strike="noStrike">
+                <a:solidFill>
+                  <a:schemeClr val="dk1"/>
+                </a:solidFill>
+                <a:latin typeface="Calibri"/>
+              </a:rPr>
+              <a:t>Ward interventions</a:t>
+            </a:r>
+            <a:endParaRPr b="0" lang="en-US" sz="1800" spc="-1" strike="noStrike">
               <a:solidFill>
                 <a:schemeClr val="dk1"/>
               </a:solidFill>
               <a:latin typeface="Calibri"/>
             </a:endParaRPr>
           </a:p>
-          <a:p>
-            <a:pPr marL="343080" indent="-343080" defTabSz="343080">
+        </p:txBody>
+      </p:sp>
+      <p:pic>
+        <p:nvPicPr>
+          <p:cNvPr id="125" name="Picture 1" descr="img/tabular_medical.jpg"/>
+          <p:cNvPicPr/>
+          <p:nvPr/>
+        </p:nvPicPr>
+        <p:blipFill>
+          <a:blip r:embed="rId1"/>
+          <a:stretch/>
+        </p:blipFill>
+        <p:spPr>
+          <a:xfrm>
+            <a:off x="457200" y="2336760"/>
+            <a:ext cx="4038120" cy="1549080"/>
+          </a:xfrm>
+          <a:prstGeom prst="rect">
+            <a:avLst/>
+          </a:prstGeom>
+          <a:ln w="9525">
+            <a:noFill/>
+          </a:ln>
+        </p:spPr>
+      </p:pic>
+      <p:sp>
+        <p:nvSpPr>
+          <p:cNvPr id="126" name="PlaceHolder 3"/>
+          <p:cNvSpPr>
+            <a:spLocks noGrp="1"/>
+          </p:cNvSpPr>
+          <p:nvPr>
+            <p:ph/>
+          </p:nvPr>
+        </p:nvSpPr>
+        <p:spPr>
+          <a:xfrm>
+            <a:off x="4645080" y="1151280"/>
+            <a:ext cx="4041360" cy="479520"/>
+          </a:xfrm>
+          <a:prstGeom prst="rect">
+            <a:avLst/>
+          </a:prstGeom>
+          <a:noFill/>
+          <a:ln w="0">
+            <a:noFill/>
+          </a:ln>
+        </p:spPr>
+        <p:txBody>
+          <a:bodyPr lIns="91440" rIns="91440" tIns="45720" bIns="45720" anchor="b">
+            <a:normAutofit/>
+          </a:bodyPr>
+          <a:p>
+            <a:pPr indent="0" defTabSz="343080">
               <a:lnSpc>
                 <a:spcPct val="100000"/>
               </a:lnSpc>
               <a:spcBef>
-                <a:spcPts val="479"/>
+                <a:spcPts val="360"/>
               </a:spcBef>
-              <a:buClr>
-                <a:srgbClr val="000000"/>
-              </a:buClr>
-              <a:buFont typeface="Arial"/>
-              <a:buChar char="•"/>
+              <a:buNone/>
               <a:tabLst>
                 <a:tab algn="l" pos="0"/>
               </a:tabLst>
             </a:pPr>
             <a:r>
-              <a:rPr b="0" lang="en-US" sz="2400" spc="-1" strike="noStrike">
-                <a:solidFill>
-                  <a:schemeClr val="dk1"/>
-                </a:solidFill>
-                <a:latin typeface="Calibri"/>
-              </a:rPr>
-              <a:t>Download the open-access MIMIC-IV Clinical Database Demo (100 patients)</a:t>
-            </a:r>
-            <a:endParaRPr b="0" lang="en-US" sz="2400" spc="-1" strike="noStrike">
-              <a:solidFill>
-                <a:schemeClr val="dk1"/>
-              </a:solidFill>
-              <a:latin typeface="Calibri"/>
-            </a:endParaRPr>
-          </a:p>
-          <a:p>
-            <a:pPr marL="343080" indent="-343080" defTabSz="343080">
-              <a:lnSpc>
-                <a:spcPct val="100000"/>
-              </a:lnSpc>
-              <a:spcBef>
-                <a:spcPts val="479"/>
-              </a:spcBef>
-              <a:buClr>
-                <a:srgbClr val="000000"/>
-              </a:buClr>
-              <a:buFont typeface="Arial"/>
-              <a:buChar char="•"/>
-              <a:tabLst>
-                <a:tab algn="l" pos="0"/>
-              </a:tabLst>
-            </a:pPr>
-            <a:r>
-              <a:rPr b="0" lang="en-US" sz="2400" spc="-1" strike="noStrike">
-                <a:solidFill>
-                  <a:schemeClr val="dk1"/>
-                </a:solidFill>
-                <a:latin typeface="Calibri"/>
-              </a:rPr>
-              <a:t>Map the </a:t>
-            </a:r>
-            <a:r>
-              <a:rPr b="0" lang="en-US" sz="2400" spc="-1" strike="noStrike">
-                <a:solidFill>
-                  <a:schemeClr val="dk1"/>
-                </a:solidFill>
-                <a:latin typeface="Courier New"/>
-              </a:rPr>
-              <a:t>hosp</a:t>
-            </a:r>
-            <a:r>
-              <a:rPr b="0" lang="en-US" sz="2400" spc="-1" strike="noStrike">
-                <a:solidFill>
-                  <a:schemeClr val="dk1"/>
-                </a:solidFill>
-                <a:latin typeface="Calibri"/>
-              </a:rPr>
-              <a:t> and </a:t>
-            </a:r>
-            <a:r>
-              <a:rPr b="0" lang="en-US" sz="2400" spc="-1" strike="noStrike">
-                <a:solidFill>
-                  <a:schemeClr val="dk1"/>
-                </a:solidFill>
-                <a:latin typeface="Courier New"/>
-              </a:rPr>
-              <a:t>icu</a:t>
-            </a:r>
-            <a:r>
-              <a:rPr b="0" lang="en-US" sz="2400" spc="-1" strike="noStrike">
-                <a:solidFill>
-                  <a:schemeClr val="dk1"/>
-                </a:solidFill>
-                <a:latin typeface="Calibri"/>
-              </a:rPr>
-              <a:t> schemas: what joins to what, on which key</a:t>
-            </a:r>
-            <a:endParaRPr b="0" lang="en-US" sz="2400" spc="-1" strike="noStrike">
-              <a:solidFill>
-                <a:schemeClr val="dk1"/>
-              </a:solidFill>
-              <a:latin typeface="Calibri"/>
-            </a:endParaRPr>
-          </a:p>
-          <a:p>
-            <a:pPr marL="343080" indent="-343080" defTabSz="343080">
-              <a:lnSpc>
-                <a:spcPct val="100000"/>
-              </a:lnSpc>
-              <a:spcBef>
-                <a:spcPts val="479"/>
-              </a:spcBef>
-              <a:buClr>
-                <a:srgbClr val="000000"/>
-              </a:buClr>
-              <a:buFont typeface="Arial"/>
-              <a:buChar char="•"/>
-              <a:tabLst>
-                <a:tab algn="l" pos="0"/>
-              </a:tabLst>
-            </a:pPr>
-            <a:r>
-              <a:rPr b="0" lang="en-US" sz="2400" spc="-1" strike="noStrike">
-                <a:solidFill>
-                  <a:schemeClr val="dk1"/>
-                </a:solidFill>
-                <a:latin typeface="Calibri"/>
-              </a:rPr>
-              <a:t>Quantify missingness, imbalance, and irregular sampling</a:t>
-            </a:r>
-            <a:endParaRPr b="0" lang="en-US" sz="2400" spc="-1" strike="noStrike">
-              <a:solidFill>
-                <a:schemeClr val="dk1"/>
-              </a:solidFill>
-              <a:latin typeface="Calibri"/>
-            </a:endParaRPr>
-          </a:p>
-          <a:p>
-            <a:pPr marL="343080" indent="-343080" defTabSz="343080">
-              <a:lnSpc>
-                <a:spcPct val="100000"/>
-              </a:lnSpc>
-              <a:spcBef>
-                <a:spcPts val="479"/>
-              </a:spcBef>
-              <a:buClr>
-                <a:srgbClr val="000000"/>
-              </a:buClr>
-              <a:buFont typeface="Arial"/>
-              <a:buChar char="•"/>
-              <a:tabLst>
-                <a:tab algn="l" pos="0"/>
-              </a:tabLst>
-            </a:pPr>
-            <a:r>
-              <a:rPr b="0" lang="en-US" sz="2400" spc="-1" strike="noStrike">
-                <a:solidFill>
-                  <a:schemeClr val="dk1"/>
-                </a:solidFill>
-                <a:latin typeface="Calibri"/>
-              </a:rPr>
-              <a:t>Find at least one leakage trap and one ICD-version trap</a:t>
-            </a:r>
-            <a:endParaRPr b="0" lang="en-US" sz="2400" spc="-1" strike="noStrike">
-              <a:solidFill>
-                <a:schemeClr val="dk1"/>
-              </a:solidFill>
-              <a:latin typeface="Calibri"/>
-            </a:endParaRPr>
-          </a:p>
-          <a:p>
-            <a:pPr marL="343080" indent="-343080" defTabSz="343080">
-              <a:lnSpc>
-                <a:spcPct val="100000"/>
-              </a:lnSpc>
-              <a:spcBef>
-                <a:spcPts val="479"/>
-              </a:spcBef>
-              <a:buClr>
-                <a:srgbClr val="000000"/>
-              </a:buClr>
-              <a:buFont typeface="Arial"/>
-              <a:buChar char="•"/>
-              <a:tabLst>
-                <a:tab algn="l" pos="0"/>
-              </a:tabLst>
-            </a:pPr>
-            <a:r>
-              <a:rPr b="0" lang="en-US" sz="2400" spc="-1" strike="noStrike">
-                <a:solidFill>
-                  <a:schemeClr val="dk1"/>
-                </a:solidFill>
-                <a:latin typeface="Calibri"/>
-              </a:rPr>
-              <a:t>Notebook: </a:t>
-            </a:r>
-            <a:r>
-              <a:rPr b="0" lang="en-US" sz="2400" spc="-1" strike="noStrike">
-                <a:solidFill>
-                  <a:schemeClr val="dk1"/>
-                </a:solidFill>
-                <a:latin typeface="Courier New"/>
-              </a:rPr>
-              <a:t>Course01/notebook.ipynb</a:t>
-            </a:r>
-            <a:endParaRPr b="0" lang="en-US" sz="2400" spc="-1" strike="noStrike">
+              <a:rPr b="1" lang="en-US" sz="1800" spc="-1" strike="noStrike">
+                <a:solidFill>
+                  <a:schemeClr val="dk1"/>
+                </a:solidFill>
+                <a:latin typeface="Calibri"/>
+              </a:rPr>
+              <a:t>A ship’s passenger manifest</a:t>
+            </a:r>
+            <a:endParaRPr b="0" lang="en-US" sz="1800" spc="-1" strike="noStrike">
               <a:solidFill>
                 <a:schemeClr val="dk1"/>
               </a:solidFill>
@@ -14148,6 +15023,29 @@
           </a:p>
         </p:txBody>
       </p:sp>
+      <p:pic>
+        <p:nvPicPr>
+          <p:cNvPr id="127" name="Picture 1" descr="img/tabular_other.jpg"/>
+          <p:cNvPicPr/>
+          <p:nvPr/>
+        </p:nvPicPr>
+        <p:blipFill>
+          <a:blip r:embed="rId2"/>
+          <a:stretch/>
+        </p:blipFill>
+        <p:spPr>
+          <a:xfrm>
+            <a:off x="5219640" y="1625760"/>
+            <a:ext cx="2857320" cy="2958840"/>
+          </a:xfrm>
+          <a:prstGeom prst="rect">
+            <a:avLst/>
+          </a:prstGeom>
+          <a:ln w="9525">
+            <a:noFill/>
+          </a:ln>
+        </p:spPr>
+      </p:pic>
     </p:spTree>
   </p:cSld>
   <mc:AlternateContent>
@@ -14180,7 +15078,7 @@
       </p:grpSpPr>
       <p:sp>
         <p:nvSpPr>
-          <p:cNvPr id="138" name="PlaceHolder 1"/>
+          <p:cNvPr id="128" name="PlaceHolder 1"/>
           <p:cNvSpPr>
             <a:spLocks noGrp="1"/>
           </p:cNvSpPr>
@@ -14222,7 +15120,16 @@
                 </a:solidFill>
                 <a:latin typeface="Calibri"/>
               </a:rPr>
-              <a:t>For next week</a:t>
+              <a:t>1D signals: a value over time </a:t>
+            </a:r>
+            <a:r>
+              <a:rPr b="0" lang="en-US" sz="3300" spc="-1" strike="noStrike">
+                <a:solidFill>
+                  <a:schemeClr val="dk1"/>
+                </a:solidFill>
+                <a:latin typeface="Courier New"/>
+              </a:rPr>
+              <a:t>n × T</a:t>
             </a:r>
             <a:endParaRPr b="0" lang="en-US" sz="3300" spc="-1" strike="noStrike">
               <a:solidFill>
@@ -14235,7 +15142,7 @@
       </p:sp>
       <p:sp>
         <p:nvSpPr>
-          <p:cNvPr id="139" name="PlaceHolder 2"/>
+          <p:cNvPr id="129" name="PlaceHolder 2"/>
           <p:cNvSpPr>
             <a:spLocks noGrp="1"/>
           </p:cNvSpPr>
@@ -14245,8 +15152,8 @@
         </p:nvSpPr>
         <p:spPr>
           <a:xfrm>
-            <a:off x="457200" y="1200240"/>
-            <a:ext cx="8229240" cy="3394080"/>
+            <a:off x="457200" y="1151280"/>
+            <a:ext cx="4039920" cy="479520"/>
           </a:xfrm>
           <a:prstGeom prst="rect">
             <a:avLst/>
@@ -14257,81 +15164,32 @@
           </a:ln>
         </p:spPr>
         <p:txBody>
-          <a:bodyPr lIns="91440" rIns="91440" tIns="45720" bIns="45720" anchor="t">
+          <a:bodyPr lIns="91440" rIns="91440" tIns="45720" bIns="45720" anchor="b">
             <a:normAutofit/>
           </a:bodyPr>
           <a:p>
-            <a:pPr marL="343080" indent="-343080" defTabSz="343080">
+            <a:pPr indent="0" defTabSz="343080">
               <a:lnSpc>
                 <a:spcPct val="100000"/>
               </a:lnSpc>
               <a:spcBef>
-                <a:spcPts val="479"/>
+                <a:spcPts val="360"/>
               </a:spcBef>
-              <a:buClr>
-                <a:srgbClr val="000000"/>
-              </a:buClr>
-              <a:buFont typeface="Arial"/>
-              <a:buChar char="•"/>
-            </a:pPr>
-            <a:r>
-              <a:rPr b="1" lang="en-US" sz="2400" spc="-1" strike="noStrike">
-                <a:solidFill>
-                  <a:schemeClr val="dk1"/>
-                </a:solidFill>
-                <a:latin typeface="Calibri"/>
-              </a:rPr>
-              <a:t>TO DO:</a:t>
-            </a:r>
-            <a:r>
-              <a:rPr b="0" lang="en-US" sz="2400" spc="-1" strike="noStrike">
-                <a:solidFill>
-                  <a:schemeClr val="dk1"/>
-                </a:solidFill>
-                <a:latin typeface="Calibri"/>
-              </a:rPr>
-              <a:t> finish the recitation notebook, including the open questions at the end</a:t>
-            </a:r>
-            <a:endParaRPr b="0" lang="en-US" sz="2400" spc="-1" strike="noStrike">
-              <a:solidFill>
-                <a:schemeClr val="dk1"/>
-              </a:solidFill>
-              <a:latin typeface="Calibri"/>
-            </a:endParaRPr>
-          </a:p>
-          <a:p>
-            <a:pPr marL="343080" indent="-343080" defTabSz="343080">
-              <a:lnSpc>
-                <a:spcPct val="100000"/>
-              </a:lnSpc>
-              <a:spcBef>
-                <a:spcPts val="479"/>
-              </a:spcBef>
-              <a:buClr>
-                <a:srgbClr val="000000"/>
-              </a:buClr>
-              <a:buFont typeface="Arial"/>
-              <a:buChar char="•"/>
-            </a:pPr>
-            <a:r>
-              <a:rPr b="1" lang="en-US" sz="2400" spc="-1" strike="noStrike">
-                <a:solidFill>
-                  <a:schemeClr val="dk1"/>
-                </a:solidFill>
-                <a:latin typeface="Calibri"/>
-              </a:rPr>
-              <a:t>Next lecture:</a:t>
-            </a:r>
-            <a:r>
-              <a:rPr b="0" lang="en-US" sz="2400" spc="-1" strike="noStrike">
-                <a:solidFill>
-                  <a:schemeClr val="dk1"/>
-                </a:solidFill>
-                <a:latin typeface="Calibri"/>
-              </a:rPr>
-              <a:t> advanced feature engineering, and missing-ness done properly</a:t>
-            </a:r>
-            <a:endParaRPr b="0" lang="en-US" sz="2400" spc="-1" strike="noStrike">
+              <a:buNone/>
+              <a:tabLst>
+                <a:tab algn="l" pos="0"/>
+              </a:tabLst>
+            </a:pPr>
+            <a:r>
+              <a:rPr b="1" lang="en-US" sz="1800" spc="-1" strike="noStrike">
+                <a:solidFill>
+                  <a:schemeClr val="dk1"/>
+                </a:solidFill>
+                <a:latin typeface="Calibri"/>
+              </a:rPr>
+              <a:t>A 12-lead ECG</a:t>
+            </a:r>
+            <a:endParaRPr b="0" lang="en-US" sz="1800" spc="-1" strike="noStrike">
               <a:solidFill>
                 <a:schemeClr val="dk1"/>
               </a:solidFill>
@@ -14340,6 +15198,366 @@
           </a:p>
         </p:txBody>
       </p:sp>
+      <p:pic>
+        <p:nvPicPr>
+          <p:cNvPr id="130" name="Picture 1" descr="img/signal_medical.jpg"/>
+          <p:cNvPicPr/>
+          <p:nvPr/>
+        </p:nvPicPr>
+        <p:blipFill>
+          <a:blip r:embed="rId1"/>
+          <a:stretch/>
+        </p:blipFill>
+        <p:spPr>
+          <a:xfrm>
+            <a:off x="457200" y="2286000"/>
+            <a:ext cx="4038120" cy="1638000"/>
+          </a:xfrm>
+          <a:prstGeom prst="rect">
+            <a:avLst/>
+          </a:prstGeom>
+          <a:ln w="9525">
+            <a:noFill/>
+          </a:ln>
+        </p:spPr>
+      </p:pic>
+      <p:sp>
+        <p:nvSpPr>
+          <p:cNvPr id="131" name="PlaceHolder 3"/>
+          <p:cNvSpPr>
+            <a:spLocks noGrp="1"/>
+          </p:cNvSpPr>
+          <p:nvPr>
+            <p:ph/>
+          </p:nvPr>
+        </p:nvSpPr>
+        <p:spPr>
+          <a:xfrm>
+            <a:off x="4645080" y="1151280"/>
+            <a:ext cx="4041360" cy="479520"/>
+          </a:xfrm>
+          <a:prstGeom prst="rect">
+            <a:avLst/>
+          </a:prstGeom>
+          <a:noFill/>
+          <a:ln w="0">
+            <a:noFill/>
+          </a:ln>
+        </p:spPr>
+        <p:txBody>
+          <a:bodyPr lIns="91440" rIns="91440" tIns="45720" bIns="45720" anchor="b">
+            <a:normAutofit/>
+          </a:bodyPr>
+          <a:p>
+            <a:pPr indent="0" defTabSz="343080">
+              <a:lnSpc>
+                <a:spcPct val="100000"/>
+              </a:lnSpc>
+              <a:spcBef>
+                <a:spcPts val="360"/>
+              </a:spcBef>
+              <a:buNone/>
+              <a:tabLst>
+                <a:tab algn="l" pos="0"/>
+              </a:tabLst>
+            </a:pPr>
+            <a:r>
+              <a:rPr b="1" lang="en-US" sz="1800" spc="-1" strike="noStrike">
+                <a:solidFill>
+                  <a:schemeClr val="dk1"/>
+                </a:solidFill>
+                <a:latin typeface="Calibri"/>
+              </a:rPr>
+              <a:t>An audio waveform</a:t>
+            </a:r>
+            <a:endParaRPr b="0" lang="en-US" sz="1800" spc="-1" strike="noStrike">
+              <a:solidFill>
+                <a:schemeClr val="dk1"/>
+              </a:solidFill>
+              <a:latin typeface="Calibri"/>
+            </a:endParaRPr>
+          </a:p>
+        </p:txBody>
+      </p:sp>
+      <p:pic>
+        <p:nvPicPr>
+          <p:cNvPr id="132" name="Picture 1" descr="img/signal_other.jpg"/>
+          <p:cNvPicPr/>
+          <p:nvPr/>
+        </p:nvPicPr>
+        <p:blipFill>
+          <a:blip r:embed="rId2"/>
+          <a:stretch/>
+        </p:blipFill>
+        <p:spPr>
+          <a:xfrm>
+            <a:off x="4635360" y="2158920"/>
+            <a:ext cx="4038120" cy="1904760"/>
+          </a:xfrm>
+          <a:prstGeom prst="rect">
+            <a:avLst/>
+          </a:prstGeom>
+          <a:ln w="9525">
+            <a:noFill/>
+          </a:ln>
+        </p:spPr>
+      </p:pic>
+    </p:spTree>
+  </p:cSld>
+  <mc:AlternateContent>
+    <mc:Choice Requires="p14">
+      <p:transition spd="slow" p14:dur="2000"/>
+    </mc:Choice>
+    <mc:Fallback>
+      <p:transition spd="slow"/>
+    </mc:Fallback>
+  </mc:AlternateContent>
+</p:sld>
+</file>
+
+<file path=ppt/slides/slide29.xml><?xml version="1.0" encoding="utf-8"?>
+<p:sld xmlns:a="http://schemas.openxmlformats.org/drawingml/2006/main" xmlns:p="http://schemas.openxmlformats.org/presentationml/2006/main" xmlns:r="http://schemas.openxmlformats.org/officeDocument/2006/relationships" xmlns:p14="http://schemas.microsoft.com/office/powerpoint/2010/main" xmlns:p15="http://schemas.microsoft.com/office/powerpoint/2012/main" xmlns:mc="http://schemas.openxmlformats.org/markup-compatibility/2006">
+  <p:cSld>
+    <p:spTree>
+      <p:nvGrpSpPr>
+        <p:cNvPr id="1" name=""/>
+        <p:cNvGrpSpPr/>
+        <p:nvPr/>
+      </p:nvGrpSpPr>
+      <p:grpSpPr>
+        <a:xfrm>
+          <a:off x="0" y="0"/>
+          <a:ext cx="0" cy="0"/>
+          <a:chOff x="0" y="0"/>
+          <a:chExt cx="0" cy="0"/>
+        </a:xfrm>
+      </p:grpSpPr>
+      <p:sp>
+        <p:nvSpPr>
+          <p:cNvPr id="133" name="PlaceHolder 1"/>
+          <p:cNvSpPr>
+            <a:spLocks noGrp="1"/>
+          </p:cNvSpPr>
+          <p:nvPr>
+            <p:ph type="title"/>
+          </p:nvPr>
+        </p:nvSpPr>
+        <p:spPr>
+          <a:xfrm>
+            <a:off x="457200" y="205920"/>
+            <a:ext cx="8229240" cy="856800"/>
+          </a:xfrm>
+          <a:prstGeom prst="rect">
+            <a:avLst/>
+          </a:prstGeom>
+          <a:noFill/>
+          <a:ln w="0">
+            <a:noFill/>
+          </a:ln>
+        </p:spPr>
+        <p:txBody>
+          <a:bodyPr lIns="91440" rIns="91440" tIns="45720" bIns="45720" anchor="ctr">
+            <a:normAutofit/>
+          </a:bodyPr>
+          <a:p>
+            <a:pPr indent="0" algn="ctr" defTabSz="343080">
+              <a:lnSpc>
+                <a:spcPct val="100000"/>
+              </a:lnSpc>
+              <a:buNone/>
+              <a:tabLst>
+                <a:tab algn="l" pos="0"/>
+              </a:tabLst>
+            </a:pPr>
+            <a:r>
+              <a:rPr b="0" lang="en-US" sz="3300" spc="-1" strike="noStrike">
+                <a:solidFill>
+                  <a:schemeClr val="dk1"/>
+                </a:solidFill>
+                <a:latin typeface="Calibri"/>
+              </a:rPr>
+              <a:t>2D images: a grid of pixels </a:t>
+            </a:r>
+            <a:r>
+              <a:rPr b="0" lang="en-US" sz="3300" spc="-1" strike="noStrike">
+                <a:solidFill>
+                  <a:schemeClr val="dk1"/>
+                </a:solidFill>
+                <a:latin typeface="Courier New"/>
+              </a:rPr>
+              <a:t>H × W × C</a:t>
+            </a:r>
+            <a:endParaRPr b="0" lang="en-US" sz="3300" spc="-1" strike="noStrike">
+              <a:solidFill>
+                <a:schemeClr val="dk1"/>
+              </a:solidFill>
+              <a:latin typeface="Calibri"/>
+            </a:endParaRPr>
+          </a:p>
+        </p:txBody>
+      </p:sp>
+      <p:sp>
+        <p:nvSpPr>
+          <p:cNvPr id="134" name="PlaceHolder 2"/>
+          <p:cNvSpPr>
+            <a:spLocks noGrp="1"/>
+          </p:cNvSpPr>
+          <p:nvPr>
+            <p:ph/>
+          </p:nvPr>
+        </p:nvSpPr>
+        <p:spPr>
+          <a:xfrm>
+            <a:off x="457200" y="1151280"/>
+            <a:ext cx="4039920" cy="479520"/>
+          </a:xfrm>
+          <a:prstGeom prst="rect">
+            <a:avLst/>
+          </a:prstGeom>
+          <a:noFill/>
+          <a:ln w="0">
+            <a:noFill/>
+          </a:ln>
+        </p:spPr>
+        <p:txBody>
+          <a:bodyPr lIns="91440" rIns="91440" tIns="45720" bIns="45720" anchor="b">
+            <a:normAutofit/>
+          </a:bodyPr>
+          <a:p>
+            <a:pPr indent="0" defTabSz="343080">
+              <a:lnSpc>
+                <a:spcPct val="100000"/>
+              </a:lnSpc>
+              <a:spcBef>
+                <a:spcPts val="360"/>
+              </a:spcBef>
+              <a:buNone/>
+              <a:tabLst>
+                <a:tab algn="l" pos="0"/>
+              </a:tabLst>
+            </a:pPr>
+            <a:r>
+              <a:rPr b="1" lang="en-US" sz="1800" spc="-1" strike="noStrike">
+                <a:solidFill>
+                  <a:schemeClr val="dk1"/>
+                </a:solidFill>
+                <a:latin typeface="Calibri"/>
+              </a:rPr>
+              <a:t>A chest radiograph</a:t>
+            </a:r>
+            <a:endParaRPr b="0" lang="en-US" sz="1800" spc="-1" strike="noStrike">
+              <a:solidFill>
+                <a:schemeClr val="dk1"/>
+              </a:solidFill>
+              <a:latin typeface="Calibri"/>
+            </a:endParaRPr>
+          </a:p>
+        </p:txBody>
+      </p:sp>
+      <p:pic>
+        <p:nvPicPr>
+          <p:cNvPr id="135" name="Picture 1" descr="img/image2d_medical.jpg"/>
+          <p:cNvPicPr/>
+          <p:nvPr/>
+        </p:nvPicPr>
+        <p:blipFill>
+          <a:blip r:embed="rId1"/>
+          <a:stretch/>
+        </p:blipFill>
+        <p:spPr>
+          <a:xfrm>
+            <a:off x="1181160" y="1625760"/>
+            <a:ext cx="2590560" cy="2958840"/>
+          </a:xfrm>
+          <a:prstGeom prst="rect">
+            <a:avLst/>
+          </a:prstGeom>
+          <a:ln w="9525">
+            <a:noFill/>
+          </a:ln>
+        </p:spPr>
+      </p:pic>
+      <p:sp>
+        <p:nvSpPr>
+          <p:cNvPr id="136" name="PlaceHolder 3"/>
+          <p:cNvSpPr>
+            <a:spLocks noGrp="1"/>
+          </p:cNvSpPr>
+          <p:nvPr>
+            <p:ph/>
+          </p:nvPr>
+        </p:nvSpPr>
+        <p:spPr>
+          <a:xfrm>
+            <a:off x="4645080" y="1151280"/>
+            <a:ext cx="4041360" cy="479520"/>
+          </a:xfrm>
+          <a:prstGeom prst="rect">
+            <a:avLst/>
+          </a:prstGeom>
+          <a:noFill/>
+          <a:ln w="0">
+            <a:noFill/>
+          </a:ln>
+        </p:spPr>
+        <p:txBody>
+          <a:bodyPr lIns="91440" rIns="91440" tIns="45720" bIns="45720" anchor="b">
+            <a:normAutofit/>
+          </a:bodyPr>
+          <a:p>
+            <a:pPr indent="0" defTabSz="343080">
+              <a:lnSpc>
+                <a:spcPct val="100000"/>
+              </a:lnSpc>
+              <a:spcBef>
+                <a:spcPts val="360"/>
+              </a:spcBef>
+              <a:buNone/>
+              <a:tabLst>
+                <a:tab algn="l" pos="0"/>
+              </a:tabLst>
+            </a:pPr>
+            <a:r>
+              <a:rPr b="1" lang="en-US" sz="1800" spc="-1" strike="noStrike">
+                <a:solidFill>
+                  <a:schemeClr val="dk1"/>
+                </a:solidFill>
+                <a:latin typeface="Calibri"/>
+              </a:rPr>
+              <a:t>A satellite view of farmland</a:t>
+            </a:r>
+            <a:endParaRPr b="0" lang="en-US" sz="1800" spc="-1" strike="noStrike">
+              <a:solidFill>
+                <a:schemeClr val="dk1"/>
+              </a:solidFill>
+              <a:latin typeface="Calibri"/>
+            </a:endParaRPr>
+          </a:p>
+        </p:txBody>
+      </p:sp>
+      <p:pic>
+        <p:nvPicPr>
+          <p:cNvPr id="137" name="Picture 1" descr="img/image2d_other.jpg"/>
+          <p:cNvPicPr/>
+          <p:nvPr/>
+        </p:nvPicPr>
+        <p:blipFill>
+          <a:blip r:embed="rId2"/>
+          <a:stretch/>
+        </p:blipFill>
+        <p:spPr>
+          <a:xfrm>
+            <a:off x="5105520" y="1625760"/>
+            <a:ext cx="3085920" cy="2958840"/>
+          </a:xfrm>
+          <a:prstGeom prst="rect">
+            <a:avLst/>
+          </a:prstGeom>
+          <a:ln w="9525">
+            <a:noFill/>
+          </a:ln>
+        </p:spPr>
+      </p:pic>
     </p:spTree>
   </p:cSld>
   <mc:AlternateContent>
@@ -14642,6 +15860,1197 @@
                 <a:latin typeface="Calibri"/>
               </a:rPr>
               <a:t>Around the room: name, major, one dataset you have already worked with</a:t>
+            </a:r>
+            <a:endParaRPr b="0" lang="en-US" sz="2400" spc="-1" strike="noStrike">
+              <a:solidFill>
+                <a:schemeClr val="dk1"/>
+              </a:solidFill>
+              <a:latin typeface="Calibri"/>
+            </a:endParaRPr>
+          </a:p>
+        </p:txBody>
+      </p:sp>
+    </p:spTree>
+  </p:cSld>
+  <mc:AlternateContent>
+    <mc:Choice Requires="p14">
+      <p:transition spd="slow" p14:dur="2000"/>
+    </mc:Choice>
+    <mc:Fallback>
+      <p:transition spd="slow"/>
+    </mc:Fallback>
+  </mc:AlternateContent>
+</p:sld>
+</file>
+
+<file path=ppt/slides/slide30.xml><?xml version="1.0" encoding="utf-8"?>
+<p:sld xmlns:a="http://schemas.openxmlformats.org/drawingml/2006/main" xmlns:p="http://schemas.openxmlformats.org/presentationml/2006/main" xmlns:r="http://schemas.openxmlformats.org/officeDocument/2006/relationships" xmlns:p14="http://schemas.microsoft.com/office/powerpoint/2010/main" xmlns:p15="http://schemas.microsoft.com/office/powerpoint/2012/main" xmlns:mc="http://schemas.openxmlformats.org/markup-compatibility/2006">
+  <p:cSld>
+    <p:spTree>
+      <p:nvGrpSpPr>
+        <p:cNvPr id="1" name=""/>
+        <p:cNvGrpSpPr/>
+        <p:nvPr/>
+      </p:nvGrpSpPr>
+      <p:grpSpPr>
+        <a:xfrm>
+          <a:off x="0" y="0"/>
+          <a:ext cx="0" cy="0"/>
+          <a:chOff x="0" y="0"/>
+          <a:chExt cx="0" cy="0"/>
+        </a:xfrm>
+      </p:grpSpPr>
+      <p:sp>
+        <p:nvSpPr>
+          <p:cNvPr id="138" name="PlaceHolder 1"/>
+          <p:cNvSpPr>
+            <a:spLocks noGrp="1"/>
+          </p:cNvSpPr>
+          <p:nvPr>
+            <p:ph type="title"/>
+          </p:nvPr>
+        </p:nvSpPr>
+        <p:spPr>
+          <a:xfrm>
+            <a:off x="457200" y="205920"/>
+            <a:ext cx="8229240" cy="856800"/>
+          </a:xfrm>
+          <a:prstGeom prst="rect">
+            <a:avLst/>
+          </a:prstGeom>
+          <a:noFill/>
+          <a:ln w="0">
+            <a:noFill/>
+          </a:ln>
+        </p:spPr>
+        <p:txBody>
+          <a:bodyPr lIns="91440" rIns="91440" tIns="45720" bIns="45720" anchor="ctr">
+            <a:normAutofit/>
+          </a:bodyPr>
+          <a:p>
+            <a:pPr indent="0" algn="ctr" defTabSz="343080">
+              <a:lnSpc>
+                <a:spcPct val="100000"/>
+              </a:lnSpc>
+              <a:buNone/>
+              <a:tabLst>
+                <a:tab algn="l" pos="0"/>
+              </a:tabLst>
+            </a:pPr>
+            <a:r>
+              <a:rPr b="0" lang="en-US" sz="3300" spc="-1" strike="noStrike">
+                <a:solidFill>
+                  <a:schemeClr val="dk1"/>
+                </a:solidFill>
+                <a:latin typeface="Calibri"/>
+              </a:rPr>
+              <a:t>3D volumes: a stack of slices, </a:t>
+            </a:r>
+            <a:r>
+              <a:rPr b="0" lang="en-US" sz="3300" spc="-1" strike="noStrike">
+                <a:solidFill>
+                  <a:schemeClr val="dk1"/>
+                </a:solidFill>
+                <a:latin typeface="Courier New"/>
+              </a:rPr>
+              <a:t>D × H × W</a:t>
+            </a:r>
+            <a:endParaRPr b="0" lang="en-US" sz="3300" spc="-1" strike="noStrike">
+              <a:solidFill>
+                <a:schemeClr val="dk1"/>
+              </a:solidFill>
+              <a:latin typeface="Calibri"/>
+            </a:endParaRPr>
+          </a:p>
+        </p:txBody>
+      </p:sp>
+      <p:sp>
+        <p:nvSpPr>
+          <p:cNvPr id="139" name="PlaceHolder 2"/>
+          <p:cNvSpPr>
+            <a:spLocks noGrp="1"/>
+          </p:cNvSpPr>
+          <p:nvPr>
+            <p:ph/>
+          </p:nvPr>
+        </p:nvSpPr>
+        <p:spPr>
+          <a:xfrm>
+            <a:off x="457200" y="1151280"/>
+            <a:ext cx="4039920" cy="479520"/>
+          </a:xfrm>
+          <a:prstGeom prst="rect">
+            <a:avLst/>
+          </a:prstGeom>
+          <a:noFill/>
+          <a:ln w="0">
+            <a:noFill/>
+          </a:ln>
+        </p:spPr>
+        <p:txBody>
+          <a:bodyPr lIns="91440" rIns="91440" tIns="45720" bIns="45720" anchor="b">
+            <a:normAutofit/>
+          </a:bodyPr>
+          <a:p>
+            <a:pPr indent="0" defTabSz="343080">
+              <a:lnSpc>
+                <a:spcPct val="100000"/>
+              </a:lnSpc>
+              <a:spcBef>
+                <a:spcPts val="360"/>
+              </a:spcBef>
+              <a:buNone/>
+              <a:tabLst>
+                <a:tab algn="l" pos="0"/>
+              </a:tabLst>
+            </a:pPr>
+            <a:r>
+              <a:rPr b="1" lang="en-US" sz="1800" spc="-1" strike="noStrike">
+                <a:solidFill>
+                  <a:schemeClr val="dk1"/>
+                </a:solidFill>
+                <a:latin typeface="Calibri"/>
+              </a:rPr>
+              <a:t>A CT</a:t>
+            </a:r>
+            <a:endParaRPr b="0" lang="en-US" sz="1800" spc="-1" strike="noStrike">
+              <a:solidFill>
+                <a:schemeClr val="dk1"/>
+              </a:solidFill>
+              <a:latin typeface="Calibri"/>
+            </a:endParaRPr>
+          </a:p>
+        </p:txBody>
+      </p:sp>
+      <p:pic>
+        <p:nvPicPr>
+          <p:cNvPr id="140" name="Picture 1" descr="img/volume3d_medical.jpg"/>
+          <p:cNvPicPr/>
+          <p:nvPr/>
+        </p:nvPicPr>
+        <p:blipFill>
+          <a:blip r:embed="rId1"/>
+          <a:stretch/>
+        </p:blipFill>
+        <p:spPr>
+          <a:xfrm>
+            <a:off x="1295280" y="1625760"/>
+            <a:ext cx="2349000" cy="2958840"/>
+          </a:xfrm>
+          <a:prstGeom prst="rect">
+            <a:avLst/>
+          </a:prstGeom>
+          <a:ln w="9525">
+            <a:noFill/>
+          </a:ln>
+        </p:spPr>
+      </p:pic>
+      <p:sp>
+        <p:nvSpPr>
+          <p:cNvPr id="141" name="PlaceHolder 3"/>
+          <p:cNvSpPr>
+            <a:spLocks noGrp="1"/>
+          </p:cNvSpPr>
+          <p:nvPr>
+            <p:ph/>
+          </p:nvPr>
+        </p:nvSpPr>
+        <p:spPr>
+          <a:xfrm>
+            <a:off x="457200" y="1631160"/>
+            <a:ext cx="4039920" cy="2963160"/>
+          </a:xfrm>
+          <a:prstGeom prst="rect">
+            <a:avLst/>
+          </a:prstGeom>
+          <a:noFill/>
+          <a:ln w="0">
+            <a:noFill/>
+          </a:ln>
+        </p:spPr>
+        <p:txBody>
+          <a:bodyPr lIns="91440" rIns="91440" tIns="45720" bIns="45720" anchor="t">
+            <a:normAutofit/>
+          </a:bodyPr>
+          <a:p>
+            <a:pPr indent="0" defTabSz="343080">
+              <a:lnSpc>
+                <a:spcPct val="100000"/>
+              </a:lnSpc>
+              <a:spcBef>
+                <a:spcPts val="360"/>
+              </a:spcBef>
+              <a:buNone/>
+              <a:tabLst>
+                <a:tab algn="l" pos="0"/>
+              </a:tabLst>
+            </a:pPr>
+            <a:r>
+              <a:rPr b="0" i="1" lang="en-US" sz="1800" spc="-1" strike="noStrike">
+                <a:solidFill>
+                  <a:schemeClr val="dk1"/>
+                </a:solidFill>
+                <a:latin typeface="Calibri"/>
+              </a:rPr>
+              <a:t>(three planes view)</a:t>
+            </a:r>
+            <a:endParaRPr b="0" lang="en-US" sz="1800" spc="-1" strike="noStrike">
+              <a:solidFill>
+                <a:schemeClr val="dk1"/>
+              </a:solidFill>
+              <a:latin typeface="Calibri"/>
+            </a:endParaRPr>
+          </a:p>
+        </p:txBody>
+      </p:sp>
+      <p:sp>
+        <p:nvSpPr>
+          <p:cNvPr id="142" name="PlaceHolder 4"/>
+          <p:cNvSpPr>
+            <a:spLocks noGrp="1"/>
+          </p:cNvSpPr>
+          <p:nvPr>
+            <p:ph/>
+          </p:nvPr>
+        </p:nvSpPr>
+        <p:spPr>
+          <a:xfrm>
+            <a:off x="4645080" y="1151280"/>
+            <a:ext cx="4041360" cy="479520"/>
+          </a:xfrm>
+          <a:prstGeom prst="rect">
+            <a:avLst/>
+          </a:prstGeom>
+          <a:noFill/>
+          <a:ln w="0">
+            <a:noFill/>
+          </a:ln>
+        </p:spPr>
+        <p:txBody>
+          <a:bodyPr lIns="91440" rIns="91440" tIns="45720" bIns="45720" anchor="b">
+            <a:normAutofit/>
+          </a:bodyPr>
+          <a:p>
+            <a:pPr indent="0" defTabSz="343080">
+              <a:lnSpc>
+                <a:spcPct val="100000"/>
+              </a:lnSpc>
+              <a:spcBef>
+                <a:spcPts val="360"/>
+              </a:spcBef>
+              <a:buNone/>
+              <a:tabLst>
+                <a:tab algn="l" pos="0"/>
+              </a:tabLst>
+            </a:pPr>
+            <a:r>
+              <a:rPr b="1" lang="en-US" sz="1800" spc="-1" strike="noStrike">
+                <a:solidFill>
+                  <a:schemeClr val="dk1"/>
+                </a:solidFill>
+                <a:latin typeface="Calibri"/>
+              </a:rPr>
+              <a:t>A LiDAR point cloud</a:t>
+            </a:r>
+            <a:endParaRPr b="0" lang="en-US" sz="1800" spc="-1" strike="noStrike">
+              <a:solidFill>
+                <a:schemeClr val="dk1"/>
+              </a:solidFill>
+              <a:latin typeface="Calibri"/>
+            </a:endParaRPr>
+          </a:p>
+        </p:txBody>
+      </p:sp>
+      <p:pic>
+        <p:nvPicPr>
+          <p:cNvPr id="143" name="Picture 1" descr="img/volume3d_other.jpg"/>
+          <p:cNvPicPr/>
+          <p:nvPr/>
+        </p:nvPicPr>
+        <p:blipFill>
+          <a:blip r:embed="rId2"/>
+          <a:stretch/>
+        </p:blipFill>
+        <p:spPr>
+          <a:xfrm>
+            <a:off x="4635360" y="1968480"/>
+            <a:ext cx="4038120" cy="2273040"/>
+          </a:xfrm>
+          <a:prstGeom prst="rect">
+            <a:avLst/>
+          </a:prstGeom>
+          <a:ln w="9525">
+            <a:noFill/>
+          </a:ln>
+        </p:spPr>
+      </p:pic>
+    </p:spTree>
+  </p:cSld>
+  <mc:AlternateContent>
+    <mc:Choice Requires="p14">
+      <p:transition spd="slow" p14:dur="2000"/>
+    </mc:Choice>
+    <mc:Fallback>
+      <p:transition spd="slow"/>
+    </mc:Fallback>
+  </mc:AlternateContent>
+</p:sld>
+</file>
+
+<file path=ppt/slides/slide31.xml><?xml version="1.0" encoding="utf-8"?>
+<p:sld xmlns:a="http://schemas.openxmlformats.org/drawingml/2006/main" xmlns:p="http://schemas.openxmlformats.org/presentationml/2006/main" xmlns:r="http://schemas.openxmlformats.org/officeDocument/2006/relationships" xmlns:p14="http://schemas.microsoft.com/office/powerpoint/2010/main" xmlns:p15="http://schemas.microsoft.com/office/powerpoint/2012/main" xmlns:mc="http://schemas.openxmlformats.org/markup-compatibility/2006">
+  <p:cSld>
+    <p:spTree>
+      <p:nvGrpSpPr>
+        <p:cNvPr id="1" name=""/>
+        <p:cNvGrpSpPr/>
+        <p:nvPr/>
+      </p:nvGrpSpPr>
+      <p:grpSpPr>
+        <a:xfrm>
+          <a:off x="0" y="0"/>
+          <a:ext cx="0" cy="0"/>
+          <a:chOff x="0" y="0"/>
+          <a:chExt cx="0" cy="0"/>
+        </a:xfrm>
+      </p:grpSpPr>
+      <p:sp>
+        <p:nvSpPr>
+          <p:cNvPr id="144" name="PlaceHolder 1"/>
+          <p:cNvSpPr>
+            <a:spLocks noGrp="1"/>
+          </p:cNvSpPr>
+          <p:nvPr>
+            <p:ph type="title"/>
+          </p:nvPr>
+        </p:nvSpPr>
+        <p:spPr>
+          <a:xfrm>
+            <a:off x="457200" y="205920"/>
+            <a:ext cx="8229240" cy="856800"/>
+          </a:xfrm>
+          <a:prstGeom prst="rect">
+            <a:avLst/>
+          </a:prstGeom>
+          <a:noFill/>
+          <a:ln w="0">
+            <a:noFill/>
+          </a:ln>
+        </p:spPr>
+        <p:txBody>
+          <a:bodyPr lIns="91440" rIns="91440" tIns="45720" bIns="45720" anchor="ctr">
+            <a:normAutofit/>
+          </a:bodyPr>
+          <a:p>
+            <a:pPr indent="0" algn="ctr" defTabSz="343080">
+              <a:lnSpc>
+                <a:spcPct val="100000"/>
+              </a:lnSpc>
+              <a:buNone/>
+              <a:tabLst>
+                <a:tab algn="l" pos="0"/>
+              </a:tabLst>
+            </a:pPr>
+            <a:r>
+              <a:rPr b="0" lang="en-US" sz="3300" spc="-1" strike="noStrike">
+                <a:solidFill>
+                  <a:schemeClr val="dk1"/>
+                </a:solidFill>
+                <a:latin typeface="Calibri"/>
+              </a:rPr>
+              <a:t>Text: a sequence of tokens</a:t>
+            </a:r>
+            <a:endParaRPr b="0" lang="en-US" sz="3300" spc="-1" strike="noStrike">
+              <a:solidFill>
+                <a:schemeClr val="dk1"/>
+              </a:solidFill>
+              <a:latin typeface="Calibri"/>
+            </a:endParaRPr>
+          </a:p>
+        </p:txBody>
+      </p:sp>
+      <p:sp>
+        <p:nvSpPr>
+          <p:cNvPr id="145" name="PlaceHolder 2"/>
+          <p:cNvSpPr>
+            <a:spLocks noGrp="1"/>
+          </p:cNvSpPr>
+          <p:nvPr>
+            <p:ph/>
+          </p:nvPr>
+        </p:nvSpPr>
+        <p:spPr>
+          <a:xfrm>
+            <a:off x="457200" y="1151280"/>
+            <a:ext cx="4039920" cy="479520"/>
+          </a:xfrm>
+          <a:prstGeom prst="rect">
+            <a:avLst/>
+          </a:prstGeom>
+          <a:noFill/>
+          <a:ln w="0">
+            <a:noFill/>
+          </a:ln>
+        </p:spPr>
+        <p:txBody>
+          <a:bodyPr lIns="91440" rIns="91440" tIns="45720" bIns="45720" anchor="b">
+            <a:normAutofit/>
+          </a:bodyPr>
+          <a:p>
+            <a:pPr indent="0" defTabSz="343080">
+              <a:lnSpc>
+                <a:spcPct val="100000"/>
+              </a:lnSpc>
+              <a:spcBef>
+                <a:spcPts val="360"/>
+              </a:spcBef>
+              <a:buNone/>
+              <a:tabLst>
+                <a:tab algn="l" pos="0"/>
+              </a:tabLst>
+            </a:pPr>
+            <a:r>
+              <a:rPr b="1" lang="en-US" sz="1800" spc="-1" strike="noStrike">
+                <a:solidFill>
+                  <a:schemeClr val="dk1"/>
+                </a:solidFill>
+                <a:latin typeface="Calibri"/>
+              </a:rPr>
+              <a:t>A radiology report</a:t>
+            </a:r>
+            <a:endParaRPr b="0" lang="en-US" sz="1800" spc="-1" strike="noStrike">
+              <a:solidFill>
+                <a:schemeClr val="dk1"/>
+              </a:solidFill>
+              <a:latin typeface="Calibri"/>
+            </a:endParaRPr>
+          </a:p>
+        </p:txBody>
+      </p:sp>
+      <p:pic>
+        <p:nvPicPr>
+          <p:cNvPr id="146" name="Picture 1" descr="img/text_medical.jpg"/>
+          <p:cNvPicPr/>
+          <p:nvPr/>
+        </p:nvPicPr>
+        <p:blipFill>
+          <a:blip r:embed="rId1"/>
+          <a:stretch/>
+        </p:blipFill>
+        <p:spPr>
+          <a:xfrm>
+            <a:off x="457200" y="2565360"/>
+            <a:ext cx="4038120" cy="1079280"/>
+          </a:xfrm>
+          <a:prstGeom prst="rect">
+            <a:avLst/>
+          </a:prstGeom>
+          <a:ln w="9525">
+            <a:noFill/>
+          </a:ln>
+        </p:spPr>
+      </p:pic>
+      <p:sp>
+        <p:nvSpPr>
+          <p:cNvPr id="147" name="PlaceHolder 3"/>
+          <p:cNvSpPr>
+            <a:spLocks noGrp="1"/>
+          </p:cNvSpPr>
+          <p:nvPr>
+            <p:ph/>
+          </p:nvPr>
+        </p:nvSpPr>
+        <p:spPr>
+          <a:xfrm>
+            <a:off x="4645080" y="1151280"/>
+            <a:ext cx="4041360" cy="479520"/>
+          </a:xfrm>
+          <a:prstGeom prst="rect">
+            <a:avLst/>
+          </a:prstGeom>
+          <a:noFill/>
+          <a:ln w="0">
+            <a:noFill/>
+          </a:ln>
+        </p:spPr>
+        <p:txBody>
+          <a:bodyPr lIns="91440" rIns="91440" tIns="45720" bIns="45720" anchor="b">
+            <a:normAutofit/>
+          </a:bodyPr>
+          <a:p>
+            <a:pPr indent="0" defTabSz="343080">
+              <a:lnSpc>
+                <a:spcPct val="100000"/>
+              </a:lnSpc>
+              <a:spcBef>
+                <a:spcPts val="360"/>
+              </a:spcBef>
+              <a:buNone/>
+              <a:tabLst>
+                <a:tab algn="l" pos="0"/>
+              </a:tabLst>
+            </a:pPr>
+            <a:r>
+              <a:rPr b="1" lang="en-US" sz="1800" spc="-1" strike="noStrike">
+                <a:solidFill>
+                  <a:schemeClr val="dk1"/>
+                </a:solidFill>
+                <a:latin typeface="Calibri"/>
+              </a:rPr>
+              <a:t>A newspaper page</a:t>
+            </a:r>
+            <a:endParaRPr b="0" lang="en-US" sz="1800" spc="-1" strike="noStrike">
+              <a:solidFill>
+                <a:schemeClr val="dk1"/>
+              </a:solidFill>
+              <a:latin typeface="Calibri"/>
+            </a:endParaRPr>
+          </a:p>
+        </p:txBody>
+      </p:sp>
+      <p:pic>
+        <p:nvPicPr>
+          <p:cNvPr id="148" name="Picture 1" descr="img/text_other.jpg"/>
+          <p:cNvPicPr/>
+          <p:nvPr/>
+        </p:nvPicPr>
+        <p:blipFill>
+          <a:blip r:embed="rId2"/>
+          <a:stretch/>
+        </p:blipFill>
+        <p:spPr>
+          <a:xfrm>
+            <a:off x="5372280" y="1625760"/>
+            <a:ext cx="2565000" cy="2958840"/>
+          </a:xfrm>
+          <a:prstGeom prst="rect">
+            <a:avLst/>
+          </a:prstGeom>
+          <a:ln w="9525">
+            <a:noFill/>
+          </a:ln>
+        </p:spPr>
+      </p:pic>
+    </p:spTree>
+  </p:cSld>
+  <mc:AlternateContent>
+    <mc:Choice Requires="p14">
+      <p:transition spd="slow" p14:dur="2000"/>
+    </mc:Choice>
+    <mc:Fallback>
+      <p:transition spd="slow"/>
+    </mc:Fallback>
+  </mc:AlternateContent>
+</p:sld>
+</file>
+
+<file path=ppt/slides/slide32.xml><?xml version="1.0" encoding="utf-8"?>
+<p:sld xmlns:a="http://schemas.openxmlformats.org/drawingml/2006/main" xmlns:p="http://schemas.openxmlformats.org/presentationml/2006/main" xmlns:r="http://schemas.openxmlformats.org/officeDocument/2006/relationships" xmlns:p14="http://schemas.microsoft.com/office/powerpoint/2010/main" xmlns:p15="http://schemas.microsoft.com/office/powerpoint/2012/main" xmlns:mc="http://schemas.openxmlformats.org/markup-compatibility/2006">
+  <p:cSld>
+    <p:spTree>
+      <p:nvGrpSpPr>
+        <p:cNvPr id="1" name=""/>
+        <p:cNvGrpSpPr/>
+        <p:nvPr/>
+      </p:nvGrpSpPr>
+      <p:grpSpPr>
+        <a:xfrm>
+          <a:off x="0" y="0"/>
+          <a:ext cx="0" cy="0"/>
+          <a:chOff x="0" y="0"/>
+          <a:chExt cx="0" cy="0"/>
+        </a:xfrm>
+      </p:grpSpPr>
+      <p:sp>
+        <p:nvSpPr>
+          <p:cNvPr id="149" name="PlaceHolder 1"/>
+          <p:cNvSpPr>
+            <a:spLocks noGrp="1"/>
+          </p:cNvSpPr>
+          <p:nvPr>
+            <p:ph type="title"/>
+          </p:nvPr>
+        </p:nvSpPr>
+        <p:spPr>
+          <a:xfrm>
+            <a:off x="722160" y="3305160"/>
+            <a:ext cx="7772040" cy="1021320"/>
+          </a:xfrm>
+          <a:prstGeom prst="rect">
+            <a:avLst/>
+          </a:prstGeom>
+          <a:noFill/>
+          <a:ln w="0">
+            <a:noFill/>
+          </a:ln>
+        </p:spPr>
+        <p:txBody>
+          <a:bodyPr lIns="91440" rIns="91440" tIns="45720" bIns="45720" anchor="t">
+            <a:normAutofit/>
+          </a:bodyPr>
+          <a:p>
+            <a:pPr indent="0" defTabSz="343080">
+              <a:lnSpc>
+                <a:spcPct val="100000"/>
+              </a:lnSpc>
+              <a:buNone/>
+              <a:tabLst>
+                <a:tab algn="l" pos="0"/>
+              </a:tabLst>
+            </a:pPr>
+            <a:r>
+              <a:rPr b="1" lang="en-US" sz="3000" spc="-1" strike="noStrike" cap="all">
+                <a:solidFill>
+                  <a:schemeClr val="dk1"/>
+                </a:solidFill>
+                <a:latin typeface="Calibri"/>
+              </a:rPr>
+              <a:t>4. Wrapping up</a:t>
+            </a:r>
+            <a:endParaRPr b="0" lang="en-US" sz="3000" spc="-1" strike="noStrike">
+              <a:solidFill>
+                <a:schemeClr val="dk1"/>
+              </a:solidFill>
+              <a:latin typeface="Calibri"/>
+            </a:endParaRPr>
+          </a:p>
+        </p:txBody>
+      </p:sp>
+    </p:spTree>
+  </p:cSld>
+  <mc:AlternateContent>
+    <mc:Choice Requires="p14">
+      <p:transition spd="slow" p14:dur="2000"/>
+    </mc:Choice>
+    <mc:Fallback>
+      <p:transition spd="slow"/>
+    </mc:Fallback>
+  </mc:AlternateContent>
+</p:sld>
+</file>
+
+<file path=ppt/slides/slide33.xml><?xml version="1.0" encoding="utf-8"?>
+<p:sld xmlns:a="http://schemas.openxmlformats.org/drawingml/2006/main" xmlns:p="http://schemas.openxmlformats.org/presentationml/2006/main" xmlns:r="http://schemas.openxmlformats.org/officeDocument/2006/relationships" xmlns:p14="http://schemas.microsoft.com/office/powerpoint/2010/main" xmlns:p15="http://schemas.microsoft.com/office/powerpoint/2012/main" xmlns:mc="http://schemas.openxmlformats.org/markup-compatibility/2006">
+  <p:cSld>
+    <p:spTree>
+      <p:nvGrpSpPr>
+        <p:cNvPr id="1" name=""/>
+        <p:cNvGrpSpPr/>
+        <p:nvPr/>
+      </p:nvGrpSpPr>
+      <p:grpSpPr>
+        <a:xfrm>
+          <a:off x="0" y="0"/>
+          <a:ext cx="0" cy="0"/>
+          <a:chOff x="0" y="0"/>
+          <a:chExt cx="0" cy="0"/>
+        </a:xfrm>
+      </p:grpSpPr>
+      <p:sp>
+        <p:nvSpPr>
+          <p:cNvPr id="150" name="PlaceHolder 1"/>
+          <p:cNvSpPr>
+            <a:spLocks noGrp="1"/>
+          </p:cNvSpPr>
+          <p:nvPr>
+            <p:ph type="title"/>
+          </p:nvPr>
+        </p:nvSpPr>
+        <p:spPr>
+          <a:xfrm>
+            <a:off x="457200" y="205920"/>
+            <a:ext cx="8229240" cy="856800"/>
+          </a:xfrm>
+          <a:prstGeom prst="rect">
+            <a:avLst/>
+          </a:prstGeom>
+          <a:noFill/>
+          <a:ln w="0">
+            <a:noFill/>
+          </a:ln>
+        </p:spPr>
+        <p:txBody>
+          <a:bodyPr lIns="91440" rIns="91440" tIns="45720" bIns="45720" anchor="ctr">
+            <a:normAutofit/>
+          </a:bodyPr>
+          <a:p>
+            <a:pPr indent="0" algn="ctr" defTabSz="343080">
+              <a:lnSpc>
+                <a:spcPct val="100000"/>
+              </a:lnSpc>
+              <a:buNone/>
+              <a:tabLst>
+                <a:tab algn="l" pos="0"/>
+              </a:tabLst>
+            </a:pPr>
+            <a:r>
+              <a:rPr b="0" lang="en-US" sz="3300" spc="-1" strike="noStrike">
+                <a:solidFill>
+                  <a:schemeClr val="dk1"/>
+                </a:solidFill>
+                <a:latin typeface="Calibri"/>
+              </a:rPr>
+              <a:t>Recitation today</a:t>
+            </a:r>
+            <a:endParaRPr b="0" lang="en-US" sz="3300" spc="-1" strike="noStrike">
+              <a:solidFill>
+                <a:schemeClr val="dk1"/>
+              </a:solidFill>
+              <a:latin typeface="Calibri"/>
+            </a:endParaRPr>
+          </a:p>
+        </p:txBody>
+      </p:sp>
+      <p:sp>
+        <p:nvSpPr>
+          <p:cNvPr id="151" name="PlaceHolder 2"/>
+          <p:cNvSpPr>
+            <a:spLocks noGrp="1"/>
+          </p:cNvSpPr>
+          <p:nvPr>
+            <p:ph/>
+          </p:nvPr>
+        </p:nvSpPr>
+        <p:spPr>
+          <a:xfrm>
+            <a:off x="457200" y="1200240"/>
+            <a:ext cx="8229240" cy="3394080"/>
+          </a:xfrm>
+          <a:prstGeom prst="rect">
+            <a:avLst/>
+          </a:prstGeom>
+          <a:noFill/>
+          <a:ln w="0">
+            <a:noFill/>
+          </a:ln>
+        </p:spPr>
+        <p:txBody>
+          <a:bodyPr lIns="91440" rIns="91440" tIns="45720" bIns="45720" anchor="t">
+            <a:normAutofit/>
+          </a:bodyPr>
+          <a:p>
+            <a:pPr indent="0" defTabSz="343080">
+              <a:lnSpc>
+                <a:spcPct val="100000"/>
+              </a:lnSpc>
+              <a:spcBef>
+                <a:spcPts val="479"/>
+              </a:spcBef>
+              <a:buNone/>
+              <a:tabLst>
+                <a:tab algn="l" pos="0"/>
+              </a:tabLst>
+            </a:pPr>
+            <a:r>
+              <a:rPr b="1" lang="en-US" sz="2400" spc="-1" strike="noStrike">
+                <a:solidFill>
+                  <a:schemeClr val="dk1"/>
+                </a:solidFill>
+                <a:latin typeface="Calibri"/>
+              </a:rPr>
+              <a:t>MIMIC-IV structure and data exploration</a:t>
+            </a:r>
+            <a:endParaRPr b="0" lang="en-US" sz="2400" spc="-1" strike="noStrike">
+              <a:solidFill>
+                <a:schemeClr val="dk1"/>
+              </a:solidFill>
+              <a:latin typeface="Calibri"/>
+            </a:endParaRPr>
+          </a:p>
+          <a:p>
+            <a:pPr marL="343080" indent="-343080" defTabSz="343080">
+              <a:lnSpc>
+                <a:spcPct val="100000"/>
+              </a:lnSpc>
+              <a:spcBef>
+                <a:spcPts val="479"/>
+              </a:spcBef>
+              <a:buClr>
+                <a:srgbClr val="000000"/>
+              </a:buClr>
+              <a:buFont typeface="Arial"/>
+              <a:buChar char="•"/>
+              <a:tabLst>
+                <a:tab algn="l" pos="0"/>
+              </a:tabLst>
+            </a:pPr>
+            <a:r>
+              <a:rPr b="0" lang="en-US" sz="2400" spc="-1" strike="noStrike">
+                <a:solidFill>
+                  <a:schemeClr val="dk1"/>
+                </a:solidFill>
+                <a:latin typeface="Calibri"/>
+              </a:rPr>
+              <a:t>Download the open-access MIMIC-IV Clinical Database Demo (100 patients)</a:t>
+            </a:r>
+            <a:endParaRPr b="0" lang="en-US" sz="2400" spc="-1" strike="noStrike">
+              <a:solidFill>
+                <a:schemeClr val="dk1"/>
+              </a:solidFill>
+              <a:latin typeface="Calibri"/>
+            </a:endParaRPr>
+          </a:p>
+          <a:p>
+            <a:pPr marL="343080" indent="-343080" defTabSz="343080">
+              <a:lnSpc>
+                <a:spcPct val="100000"/>
+              </a:lnSpc>
+              <a:spcBef>
+                <a:spcPts val="479"/>
+              </a:spcBef>
+              <a:buClr>
+                <a:srgbClr val="000000"/>
+              </a:buClr>
+              <a:buFont typeface="Arial"/>
+              <a:buChar char="•"/>
+              <a:tabLst>
+                <a:tab algn="l" pos="0"/>
+              </a:tabLst>
+            </a:pPr>
+            <a:r>
+              <a:rPr b="0" lang="en-US" sz="2400" spc="-1" strike="noStrike">
+                <a:solidFill>
+                  <a:schemeClr val="dk1"/>
+                </a:solidFill>
+                <a:latin typeface="Calibri"/>
+              </a:rPr>
+              <a:t>Map the </a:t>
+            </a:r>
+            <a:r>
+              <a:rPr b="0" lang="en-US" sz="2400" spc="-1" strike="noStrike">
+                <a:solidFill>
+                  <a:schemeClr val="dk1"/>
+                </a:solidFill>
+                <a:latin typeface="Courier New"/>
+              </a:rPr>
+              <a:t>hosp</a:t>
+            </a:r>
+            <a:r>
+              <a:rPr b="0" lang="en-US" sz="2400" spc="-1" strike="noStrike">
+                <a:solidFill>
+                  <a:schemeClr val="dk1"/>
+                </a:solidFill>
+                <a:latin typeface="Calibri"/>
+              </a:rPr>
+              <a:t> and </a:t>
+            </a:r>
+            <a:r>
+              <a:rPr b="0" lang="en-US" sz="2400" spc="-1" strike="noStrike">
+                <a:solidFill>
+                  <a:schemeClr val="dk1"/>
+                </a:solidFill>
+                <a:latin typeface="Courier New"/>
+              </a:rPr>
+              <a:t>icu</a:t>
+            </a:r>
+            <a:r>
+              <a:rPr b="0" lang="en-US" sz="2400" spc="-1" strike="noStrike">
+                <a:solidFill>
+                  <a:schemeClr val="dk1"/>
+                </a:solidFill>
+                <a:latin typeface="Calibri"/>
+              </a:rPr>
+              <a:t> schemas: what joins to what, on which key</a:t>
+            </a:r>
+            <a:endParaRPr b="0" lang="en-US" sz="2400" spc="-1" strike="noStrike">
+              <a:solidFill>
+                <a:schemeClr val="dk1"/>
+              </a:solidFill>
+              <a:latin typeface="Calibri"/>
+            </a:endParaRPr>
+          </a:p>
+          <a:p>
+            <a:pPr marL="343080" indent="-343080" defTabSz="343080">
+              <a:lnSpc>
+                <a:spcPct val="100000"/>
+              </a:lnSpc>
+              <a:spcBef>
+                <a:spcPts val="479"/>
+              </a:spcBef>
+              <a:buClr>
+                <a:srgbClr val="000000"/>
+              </a:buClr>
+              <a:buFont typeface="Arial"/>
+              <a:buChar char="•"/>
+              <a:tabLst>
+                <a:tab algn="l" pos="0"/>
+              </a:tabLst>
+            </a:pPr>
+            <a:r>
+              <a:rPr b="0" lang="en-US" sz="2400" spc="-1" strike="noStrike">
+                <a:solidFill>
+                  <a:schemeClr val="dk1"/>
+                </a:solidFill>
+                <a:latin typeface="Calibri"/>
+              </a:rPr>
+              <a:t>Quantify missingness, imbalance, and irregular sampling</a:t>
+            </a:r>
+            <a:endParaRPr b="0" lang="en-US" sz="2400" spc="-1" strike="noStrike">
+              <a:solidFill>
+                <a:schemeClr val="dk1"/>
+              </a:solidFill>
+              <a:latin typeface="Calibri"/>
+            </a:endParaRPr>
+          </a:p>
+          <a:p>
+            <a:pPr marL="343080" indent="-343080" defTabSz="343080">
+              <a:lnSpc>
+                <a:spcPct val="100000"/>
+              </a:lnSpc>
+              <a:spcBef>
+                <a:spcPts val="479"/>
+              </a:spcBef>
+              <a:buClr>
+                <a:srgbClr val="000000"/>
+              </a:buClr>
+              <a:buFont typeface="Arial"/>
+              <a:buChar char="•"/>
+              <a:tabLst>
+                <a:tab algn="l" pos="0"/>
+              </a:tabLst>
+            </a:pPr>
+            <a:r>
+              <a:rPr b="0" lang="en-US" sz="2400" spc="-1" strike="noStrike">
+                <a:solidFill>
+                  <a:schemeClr val="dk1"/>
+                </a:solidFill>
+                <a:latin typeface="Calibri"/>
+              </a:rPr>
+              <a:t>Find at least one leakage trap and one ICD-version trap</a:t>
+            </a:r>
+            <a:endParaRPr b="0" lang="en-US" sz="2400" spc="-1" strike="noStrike">
+              <a:solidFill>
+                <a:schemeClr val="dk1"/>
+              </a:solidFill>
+              <a:latin typeface="Calibri"/>
+            </a:endParaRPr>
+          </a:p>
+          <a:p>
+            <a:pPr marL="343080" indent="-343080" defTabSz="343080">
+              <a:lnSpc>
+                <a:spcPct val="100000"/>
+              </a:lnSpc>
+              <a:spcBef>
+                <a:spcPts val="479"/>
+              </a:spcBef>
+              <a:buClr>
+                <a:srgbClr val="000000"/>
+              </a:buClr>
+              <a:buFont typeface="Arial"/>
+              <a:buChar char="•"/>
+              <a:tabLst>
+                <a:tab algn="l" pos="0"/>
+              </a:tabLst>
+            </a:pPr>
+            <a:r>
+              <a:rPr b="0" lang="en-US" sz="2400" spc="-1" strike="noStrike">
+                <a:solidFill>
+                  <a:schemeClr val="dk1"/>
+                </a:solidFill>
+                <a:latin typeface="Calibri"/>
+              </a:rPr>
+              <a:t>Notebook: </a:t>
+            </a:r>
+            <a:r>
+              <a:rPr b="0" lang="en-US" sz="2400" spc="-1" strike="noStrike">
+                <a:solidFill>
+                  <a:schemeClr val="dk1"/>
+                </a:solidFill>
+                <a:latin typeface="Courier New"/>
+              </a:rPr>
+              <a:t>Course01/notebook.ipynb</a:t>
+            </a:r>
+            <a:endParaRPr b="0" lang="en-US" sz="2400" spc="-1" strike="noStrike">
+              <a:solidFill>
+                <a:schemeClr val="dk1"/>
+              </a:solidFill>
+              <a:latin typeface="Calibri"/>
+            </a:endParaRPr>
+          </a:p>
+        </p:txBody>
+      </p:sp>
+    </p:spTree>
+  </p:cSld>
+  <mc:AlternateContent>
+    <mc:Choice Requires="p14">
+      <p:transition spd="slow" p14:dur="2000"/>
+    </mc:Choice>
+    <mc:Fallback>
+      <p:transition spd="slow"/>
+    </mc:Fallback>
+  </mc:AlternateContent>
+</p:sld>
+</file>
+
+<file path=ppt/slides/slide34.xml><?xml version="1.0" encoding="utf-8"?>
+<p:sld xmlns:a="http://schemas.openxmlformats.org/drawingml/2006/main" xmlns:p="http://schemas.openxmlformats.org/presentationml/2006/main" xmlns:r="http://schemas.openxmlformats.org/officeDocument/2006/relationships" xmlns:p14="http://schemas.microsoft.com/office/powerpoint/2010/main" xmlns:p15="http://schemas.microsoft.com/office/powerpoint/2012/main" xmlns:mc="http://schemas.openxmlformats.org/markup-compatibility/2006">
+  <p:cSld>
+    <p:spTree>
+      <p:nvGrpSpPr>
+        <p:cNvPr id="1" name=""/>
+        <p:cNvGrpSpPr/>
+        <p:nvPr/>
+      </p:nvGrpSpPr>
+      <p:grpSpPr>
+        <a:xfrm>
+          <a:off x="0" y="0"/>
+          <a:ext cx="0" cy="0"/>
+          <a:chOff x="0" y="0"/>
+          <a:chExt cx="0" cy="0"/>
+        </a:xfrm>
+      </p:grpSpPr>
+      <p:sp>
+        <p:nvSpPr>
+          <p:cNvPr id="152" name="PlaceHolder 1"/>
+          <p:cNvSpPr>
+            <a:spLocks noGrp="1"/>
+          </p:cNvSpPr>
+          <p:nvPr>
+            <p:ph type="title"/>
+          </p:nvPr>
+        </p:nvSpPr>
+        <p:spPr>
+          <a:xfrm>
+            <a:off x="457200" y="205920"/>
+            <a:ext cx="8229240" cy="856800"/>
+          </a:xfrm>
+          <a:prstGeom prst="rect">
+            <a:avLst/>
+          </a:prstGeom>
+          <a:noFill/>
+          <a:ln w="0">
+            <a:noFill/>
+          </a:ln>
+        </p:spPr>
+        <p:txBody>
+          <a:bodyPr lIns="91440" rIns="91440" tIns="45720" bIns="45720" anchor="ctr">
+            <a:normAutofit/>
+          </a:bodyPr>
+          <a:p>
+            <a:pPr indent="0" algn="ctr" defTabSz="343080">
+              <a:lnSpc>
+                <a:spcPct val="100000"/>
+              </a:lnSpc>
+              <a:buNone/>
+              <a:tabLst>
+                <a:tab algn="l" pos="0"/>
+              </a:tabLst>
+            </a:pPr>
+            <a:r>
+              <a:rPr b="0" lang="en-US" sz="3300" spc="-1" strike="noStrike">
+                <a:solidFill>
+                  <a:schemeClr val="dk1"/>
+                </a:solidFill>
+                <a:latin typeface="Calibri"/>
+              </a:rPr>
+              <a:t>For next week</a:t>
+            </a:r>
+            <a:endParaRPr b="0" lang="en-US" sz="3300" spc="-1" strike="noStrike">
+              <a:solidFill>
+                <a:schemeClr val="dk1"/>
+              </a:solidFill>
+              <a:latin typeface="Calibri"/>
+            </a:endParaRPr>
+          </a:p>
+        </p:txBody>
+      </p:sp>
+      <p:sp>
+        <p:nvSpPr>
+          <p:cNvPr id="153" name="PlaceHolder 2"/>
+          <p:cNvSpPr>
+            <a:spLocks noGrp="1"/>
+          </p:cNvSpPr>
+          <p:nvPr>
+            <p:ph/>
+          </p:nvPr>
+        </p:nvSpPr>
+        <p:spPr>
+          <a:xfrm>
+            <a:off x="457200" y="1200240"/>
+            <a:ext cx="8229240" cy="3394080"/>
+          </a:xfrm>
+          <a:prstGeom prst="rect">
+            <a:avLst/>
+          </a:prstGeom>
+          <a:noFill/>
+          <a:ln w="0">
+            <a:noFill/>
+          </a:ln>
+        </p:spPr>
+        <p:txBody>
+          <a:bodyPr lIns="91440" rIns="91440" tIns="45720" bIns="45720" anchor="t">
+            <a:normAutofit/>
+          </a:bodyPr>
+          <a:p>
+            <a:pPr marL="343080" indent="-343080" defTabSz="343080">
+              <a:lnSpc>
+                <a:spcPct val="100000"/>
+              </a:lnSpc>
+              <a:spcBef>
+                <a:spcPts val="479"/>
+              </a:spcBef>
+              <a:buClr>
+                <a:srgbClr val="000000"/>
+              </a:buClr>
+              <a:buFont typeface="Arial"/>
+              <a:buChar char="•"/>
+            </a:pPr>
+            <a:r>
+              <a:rPr b="1" lang="en-US" sz="2400" spc="-1" strike="noStrike">
+                <a:solidFill>
+                  <a:schemeClr val="dk1"/>
+                </a:solidFill>
+                <a:latin typeface="Calibri"/>
+              </a:rPr>
+              <a:t>TO DO:</a:t>
+            </a:r>
+            <a:r>
+              <a:rPr b="0" lang="en-US" sz="2400" spc="-1" strike="noStrike">
+                <a:solidFill>
+                  <a:schemeClr val="dk1"/>
+                </a:solidFill>
+                <a:latin typeface="Calibri"/>
+              </a:rPr>
+              <a:t> finish the recitation notebook, including the open questions at the end</a:t>
+            </a:r>
+            <a:endParaRPr b="0" lang="en-US" sz="2400" spc="-1" strike="noStrike">
+              <a:solidFill>
+                <a:schemeClr val="dk1"/>
+              </a:solidFill>
+              <a:latin typeface="Calibri"/>
+            </a:endParaRPr>
+          </a:p>
+          <a:p>
+            <a:pPr marL="343080" indent="-343080" defTabSz="343080">
+              <a:lnSpc>
+                <a:spcPct val="100000"/>
+              </a:lnSpc>
+              <a:spcBef>
+                <a:spcPts val="479"/>
+              </a:spcBef>
+              <a:buClr>
+                <a:srgbClr val="000000"/>
+              </a:buClr>
+              <a:buFont typeface="Arial"/>
+              <a:buChar char="•"/>
+            </a:pPr>
+            <a:r>
+              <a:rPr b="1" lang="en-US" sz="2400" spc="-1" strike="noStrike">
+                <a:solidFill>
+                  <a:schemeClr val="dk1"/>
+                </a:solidFill>
+                <a:latin typeface="Calibri"/>
+              </a:rPr>
+              <a:t>Next lecture:</a:t>
+            </a:r>
+            <a:r>
+              <a:rPr b="0" lang="en-US" sz="2400" spc="-1" strike="noStrike">
+                <a:solidFill>
+                  <a:schemeClr val="dk1"/>
+                </a:solidFill>
+                <a:latin typeface="Calibri"/>
+              </a:rPr>
+              <a:t> advanced feature engineering, and missing-ness done properly</a:t>
             </a:r>
             <a:endParaRPr b="0" lang="en-US" sz="2400" spc="-1" strike="noStrike">
               <a:solidFill>
